--- a/Day3_MixedModels_ModelSelection/FW536_Day3_Morning_mixed effects_accessible.pptx
+++ b/Day3_MixedModels_ModelSelection/FW536_Day3_Morning_mixed effects_accessible.pptx
@@ -13,11 +13,11 @@
     <p:sldId id="259" r:id="rId4"/>
     <p:sldId id="260" r:id="rId5"/>
     <p:sldId id="261" r:id="rId6"/>
-    <p:sldId id="262" r:id="rId7"/>
-    <p:sldId id="263" r:id="rId8"/>
-    <p:sldId id="264" r:id="rId9"/>
+    <p:sldId id="333" r:id="rId7"/>
+    <p:sldId id="334" r:id="rId8"/>
+    <p:sldId id="335" r:id="rId9"/>
     <p:sldId id="265" r:id="rId10"/>
-    <p:sldId id="266" r:id="rId11"/>
+    <p:sldId id="336" r:id="rId11"/>
     <p:sldId id="268" r:id="rId12"/>
     <p:sldId id="323" r:id="rId13"/>
     <p:sldId id="269" r:id="rId14"/>
@@ -49,12 +49,12 @@
     <p:sldId id="313" r:id="rId40"/>
     <p:sldId id="314" r:id="rId41"/>
     <p:sldId id="316" r:id="rId42"/>
-    <p:sldId id="315" r:id="rId43"/>
-    <p:sldId id="317" r:id="rId44"/>
-    <p:sldId id="318" r:id="rId45"/>
-    <p:sldId id="319" r:id="rId46"/>
-    <p:sldId id="320" r:id="rId47"/>
-    <p:sldId id="321" r:id="rId48"/>
+    <p:sldId id="327" r:id="rId43"/>
+    <p:sldId id="328" r:id="rId44"/>
+    <p:sldId id="329" r:id="rId45"/>
+    <p:sldId id="330" r:id="rId46"/>
+    <p:sldId id="331" r:id="rId47"/>
+    <p:sldId id="332" r:id="rId48"/>
     <p:sldId id="322" r:id="rId49"/>
     <p:sldId id="293" r:id="rId50"/>
     <p:sldId id="294" r:id="rId51"/>
@@ -259,7 +259,7 @@
           <a:p>
             <a:fld id="{D2867A0E-DA56-0A4B-83A5-F520947CDB62}" type="datetimeFigureOut">
               <a:rPr lang="en-US" smtClean="0"/>
-              <a:t>9/21/25</a:t>
+              <a:t>7/14/26</a:t>
             </a:fld>
             <a:endParaRPr lang="en-US"/>
           </a:p>
@@ -677,7 +677,7 @@
               </a14:hiddenLine>
             </a:ext>
             <a:ext uri="{FAA26D3D-D897-4be2-8F04-BA451C77F1D7}">
-              <ma14:placeholderFlag xmlns:ma14="http://schemas.microsoft.com/office/mac/drawingml/2011/main" xmlns="" val="1"/>
+              <ma14:placeholderFlag xmlns="" xmlns:ma14="http://schemas.microsoft.com/office/mac/drawingml/2011/main" val="1"/>
             </a:ext>
           </a:extLst>
         </p:spPr>
@@ -766,7 +766,7 @@
               </a14:hiddenLine>
             </a:ext>
             <a:ext uri="{FAA26D3D-D897-4be2-8F04-BA451C77F1D7}">
-              <ma14:placeholderFlag xmlns:ma14="http://schemas.microsoft.com/office/mac/drawingml/2011/main" xmlns="" val="1"/>
+              <ma14:placeholderFlag xmlns="" xmlns:ma14="http://schemas.microsoft.com/office/mac/drawingml/2011/main" val="1"/>
             </a:ext>
           </a:extLst>
         </p:spPr>
@@ -855,7 +855,7 @@
               </a14:hiddenLine>
             </a:ext>
             <a:ext uri="{FAA26D3D-D897-4be2-8F04-BA451C77F1D7}">
-              <ma14:placeholderFlag xmlns:ma14="http://schemas.microsoft.com/office/mac/drawingml/2011/main" xmlns="" val="1"/>
+              <ma14:placeholderFlag xmlns="" xmlns:ma14="http://schemas.microsoft.com/office/mac/drawingml/2011/main" val="1"/>
             </a:ext>
           </a:extLst>
         </p:spPr>
@@ -944,7 +944,7 @@
               </a14:hiddenLine>
             </a:ext>
             <a:ext uri="{FAA26D3D-D897-4be2-8F04-BA451C77F1D7}">
-              <ma14:placeholderFlag xmlns:ma14="http://schemas.microsoft.com/office/mac/drawingml/2011/main" xmlns="" val="1"/>
+              <ma14:placeholderFlag xmlns="" xmlns:ma14="http://schemas.microsoft.com/office/mac/drawingml/2011/main" val="1"/>
             </a:ext>
           </a:extLst>
         </p:spPr>
@@ -1033,7 +1033,7 @@
               </a14:hiddenLine>
             </a:ext>
             <a:ext uri="{FAA26D3D-D897-4be2-8F04-BA451C77F1D7}">
-              <ma14:placeholderFlag xmlns:ma14="http://schemas.microsoft.com/office/mac/drawingml/2011/main" xmlns="" val="1"/>
+              <ma14:placeholderFlag xmlns="" xmlns:ma14="http://schemas.microsoft.com/office/mac/drawingml/2011/main" val="1"/>
             </a:ext>
           </a:extLst>
         </p:spPr>
@@ -1161,7 +1161,7 @@
               </a14:hiddenLine>
             </a:ext>
             <a:ext uri="{FAA26D3D-D897-4be2-8F04-BA451C77F1D7}">
-              <ma14:placeholderFlag xmlns:ma14="http://schemas.microsoft.com/office/mac/drawingml/2011/main" xmlns="" val="1"/>
+              <ma14:placeholderFlag xmlns="" xmlns:ma14="http://schemas.microsoft.com/office/mac/drawingml/2011/main" val="1"/>
             </a:ext>
           </a:extLst>
         </p:spPr>
@@ -1250,7 +1250,7 @@
               </a14:hiddenLine>
             </a:ext>
             <a:ext uri="{FAA26D3D-D897-4be2-8F04-BA451C77F1D7}">
-              <ma14:placeholderFlag xmlns:ma14="http://schemas.microsoft.com/office/mac/drawingml/2011/main" xmlns="" val="1"/>
+              <ma14:placeholderFlag xmlns="" xmlns:ma14="http://schemas.microsoft.com/office/mac/drawingml/2011/main" val="1"/>
             </a:ext>
           </a:extLst>
         </p:spPr>
@@ -1339,7 +1339,7 @@
               </a14:hiddenLine>
             </a:ext>
             <a:ext uri="{FAA26D3D-D897-4be2-8F04-BA451C77F1D7}">
-              <ma14:placeholderFlag xmlns:ma14="http://schemas.microsoft.com/office/mac/drawingml/2011/main" xmlns="" val="1"/>
+              <ma14:placeholderFlag xmlns="" xmlns:ma14="http://schemas.microsoft.com/office/mac/drawingml/2011/main" val="1"/>
             </a:ext>
           </a:extLst>
         </p:spPr>
@@ -1428,7 +1428,7 @@
               </a14:hiddenLine>
             </a:ext>
             <a:ext uri="{FAA26D3D-D897-4be2-8F04-BA451C77F1D7}">
-              <ma14:placeholderFlag xmlns:ma14="http://schemas.microsoft.com/office/mac/drawingml/2011/main" xmlns="" val="1"/>
+              <ma14:placeholderFlag xmlns="" xmlns:ma14="http://schemas.microsoft.com/office/mac/drawingml/2011/main" val="1"/>
             </a:ext>
           </a:extLst>
         </p:spPr>
@@ -1517,7 +1517,7 @@
               </a14:hiddenLine>
             </a:ext>
             <a:ext uri="{FAA26D3D-D897-4be2-8F04-BA451C77F1D7}">
-              <ma14:placeholderFlag xmlns:ma14="http://schemas.microsoft.com/office/mac/drawingml/2011/main" xmlns="" val="1"/>
+              <ma14:placeholderFlag xmlns="" xmlns:ma14="http://schemas.microsoft.com/office/mac/drawingml/2011/main" val="1"/>
             </a:ext>
           </a:extLst>
         </p:spPr>
@@ -1606,7 +1606,7 @@
               </a14:hiddenLine>
             </a:ext>
             <a:ext uri="{FAA26D3D-D897-4be2-8F04-BA451C77F1D7}">
-              <ma14:placeholderFlag xmlns:ma14="http://schemas.microsoft.com/office/mac/drawingml/2011/main" xmlns="" val="1"/>
+              <ma14:placeholderFlag xmlns="" xmlns:ma14="http://schemas.microsoft.com/office/mac/drawingml/2011/main" val="1"/>
             </a:ext>
           </a:extLst>
         </p:spPr>
@@ -1695,7 +1695,7 @@
               </a14:hiddenLine>
             </a:ext>
             <a:ext uri="{FAA26D3D-D897-4be2-8F04-BA451C77F1D7}">
-              <ma14:placeholderFlag xmlns:ma14="http://schemas.microsoft.com/office/mac/drawingml/2011/main" xmlns="" val="1"/>
+              <ma14:placeholderFlag xmlns="" xmlns:ma14="http://schemas.microsoft.com/office/mac/drawingml/2011/main" val="1"/>
             </a:ext>
           </a:extLst>
         </p:spPr>
@@ -1784,7 +1784,7 @@
               </a14:hiddenLine>
             </a:ext>
             <a:ext uri="{FAA26D3D-D897-4be2-8F04-BA451C77F1D7}">
-              <ma14:placeholderFlag xmlns:ma14="http://schemas.microsoft.com/office/mac/drawingml/2011/main" xmlns="" val="1"/>
+              <ma14:placeholderFlag xmlns="" xmlns:ma14="http://schemas.microsoft.com/office/mac/drawingml/2011/main" val="1"/>
             </a:ext>
           </a:extLst>
         </p:spPr>
@@ -1873,7 +1873,7 @@
               </a14:hiddenLine>
             </a:ext>
             <a:ext uri="{FAA26D3D-D897-4be2-8F04-BA451C77F1D7}">
-              <ma14:placeholderFlag xmlns:ma14="http://schemas.microsoft.com/office/mac/drawingml/2011/main" xmlns="" val="1"/>
+              <ma14:placeholderFlag xmlns="" xmlns:ma14="http://schemas.microsoft.com/office/mac/drawingml/2011/main" val="1"/>
             </a:ext>
           </a:extLst>
         </p:spPr>
@@ -2141,7 +2141,7 @@
               </a14:hiddenLine>
             </a:ext>
             <a:ext uri="{FAA26D3D-D897-4be2-8F04-BA451C77F1D7}">
-              <ma14:placeholderFlag xmlns:ma14="http://schemas.microsoft.com/office/mac/drawingml/2011/main" xmlns="" val="1"/>
+              <ma14:placeholderFlag xmlns="" xmlns:ma14="http://schemas.microsoft.com/office/mac/drawingml/2011/main" val="1"/>
             </a:ext>
           </a:extLst>
         </p:spPr>
@@ -2230,7 +2230,7 @@
               </a14:hiddenLine>
             </a:ext>
             <a:ext uri="{FAA26D3D-D897-4be2-8F04-BA451C77F1D7}">
-              <ma14:placeholderFlag xmlns:ma14="http://schemas.microsoft.com/office/mac/drawingml/2011/main" xmlns="" val="1"/>
+              <ma14:placeholderFlag xmlns="" xmlns:ma14="http://schemas.microsoft.com/office/mac/drawingml/2011/main" val="1"/>
             </a:ext>
           </a:extLst>
         </p:spPr>
@@ -2319,7 +2319,7 @@
               </a14:hiddenLine>
             </a:ext>
             <a:ext uri="{FAA26D3D-D897-4be2-8F04-BA451C77F1D7}">
-              <ma14:placeholderFlag xmlns:ma14="http://schemas.microsoft.com/office/mac/drawingml/2011/main" xmlns="" val="1"/>
+              <ma14:placeholderFlag xmlns="" xmlns:ma14="http://schemas.microsoft.com/office/mac/drawingml/2011/main" val="1"/>
             </a:ext>
           </a:extLst>
         </p:spPr>
@@ -2408,7 +2408,7 @@
               </a14:hiddenLine>
             </a:ext>
             <a:ext uri="{FAA26D3D-D897-4be2-8F04-BA451C77F1D7}">
-              <ma14:placeholderFlag xmlns:ma14="http://schemas.microsoft.com/office/mac/drawingml/2011/main" xmlns="" val="1"/>
+              <ma14:placeholderFlag xmlns="" xmlns:ma14="http://schemas.microsoft.com/office/mac/drawingml/2011/main" val="1"/>
             </a:ext>
           </a:extLst>
         </p:spPr>
@@ -2497,7 +2497,7 @@
               </a14:hiddenLine>
             </a:ext>
             <a:ext uri="{FAA26D3D-D897-4be2-8F04-BA451C77F1D7}">
-              <ma14:placeholderFlag xmlns:ma14="http://schemas.microsoft.com/office/mac/drawingml/2011/main" xmlns="" val="1"/>
+              <ma14:placeholderFlag xmlns="" xmlns:ma14="http://schemas.microsoft.com/office/mac/drawingml/2011/main" val="1"/>
             </a:ext>
           </a:extLst>
         </p:spPr>
@@ -2586,7 +2586,7 @@
               </a14:hiddenLine>
             </a:ext>
             <a:ext uri="{FAA26D3D-D897-4be2-8F04-BA451C77F1D7}">
-              <ma14:placeholderFlag xmlns:ma14="http://schemas.microsoft.com/office/mac/drawingml/2011/main" xmlns="" val="1"/>
+              <ma14:placeholderFlag xmlns="" xmlns:ma14="http://schemas.microsoft.com/office/mac/drawingml/2011/main" val="1"/>
             </a:ext>
           </a:extLst>
         </p:spPr>
@@ -2675,7 +2675,7 @@
               </a14:hiddenLine>
             </a:ext>
             <a:ext uri="{FAA26D3D-D897-4be2-8F04-BA451C77F1D7}">
-              <ma14:placeholderFlag xmlns:ma14="http://schemas.microsoft.com/office/mac/drawingml/2011/main" xmlns="" val="1"/>
+              <ma14:placeholderFlag xmlns="" xmlns:ma14="http://schemas.microsoft.com/office/mac/drawingml/2011/main" val="1"/>
             </a:ext>
           </a:extLst>
         </p:spPr>
@@ -2764,7 +2764,7 @@
               </a14:hiddenLine>
             </a:ext>
             <a:ext uri="{FAA26D3D-D897-4be2-8F04-BA451C77F1D7}">
-              <ma14:placeholderFlag xmlns:ma14="http://schemas.microsoft.com/office/mac/drawingml/2011/main" xmlns="" val="1"/>
+              <ma14:placeholderFlag xmlns="" xmlns:ma14="http://schemas.microsoft.com/office/mac/drawingml/2011/main" val="1"/>
             </a:ext>
           </a:extLst>
         </p:spPr>
@@ -2853,7 +2853,7 @@
               </a14:hiddenLine>
             </a:ext>
             <a:ext uri="{FAA26D3D-D897-4be2-8F04-BA451C77F1D7}">
-              <ma14:placeholderFlag xmlns:ma14="http://schemas.microsoft.com/office/mac/drawingml/2011/main" xmlns="" val="1"/>
+              <ma14:placeholderFlag xmlns="" xmlns:ma14="http://schemas.microsoft.com/office/mac/drawingml/2011/main" val="1"/>
             </a:ext>
           </a:extLst>
         </p:spPr>
@@ -2942,7 +2942,7 @@
               </a14:hiddenLine>
             </a:ext>
             <a:ext uri="{FAA26D3D-D897-4be2-8F04-BA451C77F1D7}">
-              <ma14:placeholderFlag xmlns:ma14="http://schemas.microsoft.com/office/mac/drawingml/2011/main" xmlns="" val="1"/>
+              <ma14:placeholderFlag xmlns="" xmlns:ma14="http://schemas.microsoft.com/office/mac/drawingml/2011/main" val="1"/>
             </a:ext>
           </a:extLst>
         </p:spPr>
@@ -3031,7 +3031,7 @@
               </a14:hiddenLine>
             </a:ext>
             <a:ext uri="{FAA26D3D-D897-4be2-8F04-BA451C77F1D7}">
-              <ma14:placeholderFlag xmlns:ma14="http://schemas.microsoft.com/office/mac/drawingml/2011/main" xmlns="" val="1"/>
+              <ma14:placeholderFlag xmlns="" xmlns:ma14="http://schemas.microsoft.com/office/mac/drawingml/2011/main" val="1"/>
             </a:ext>
           </a:extLst>
         </p:spPr>
@@ -3120,7 +3120,7 @@
               </a14:hiddenLine>
             </a:ext>
             <a:ext uri="{FAA26D3D-D897-4be2-8F04-BA451C77F1D7}">
-              <ma14:placeholderFlag xmlns:ma14="http://schemas.microsoft.com/office/mac/drawingml/2011/main" xmlns="" val="1"/>
+              <ma14:placeholderFlag xmlns="" xmlns:ma14="http://schemas.microsoft.com/office/mac/drawingml/2011/main" val="1"/>
             </a:ext>
           </a:extLst>
         </p:spPr>
@@ -3209,7 +3209,7 @@
               </a14:hiddenLine>
             </a:ext>
             <a:ext uri="{FAA26D3D-D897-4be2-8F04-BA451C77F1D7}">
-              <ma14:placeholderFlag xmlns:ma14="http://schemas.microsoft.com/office/mac/drawingml/2011/main" xmlns="" val="1"/>
+              <ma14:placeholderFlag xmlns="" xmlns:ma14="http://schemas.microsoft.com/office/mac/drawingml/2011/main" val="1"/>
             </a:ext>
           </a:extLst>
         </p:spPr>
@@ -3298,7 +3298,7 @@
               </a14:hiddenLine>
             </a:ext>
             <a:ext uri="{FAA26D3D-D897-4be2-8F04-BA451C77F1D7}">
-              <ma14:placeholderFlag xmlns:ma14="http://schemas.microsoft.com/office/mac/drawingml/2011/main" xmlns="" val="1"/>
+              <ma14:placeholderFlag xmlns="" xmlns:ma14="http://schemas.microsoft.com/office/mac/drawingml/2011/main" val="1"/>
             </a:ext>
           </a:extLst>
         </p:spPr>
@@ -3387,7 +3387,7 @@
               </a14:hiddenLine>
             </a:ext>
             <a:ext uri="{FAA26D3D-D897-4be2-8F04-BA451C77F1D7}">
-              <ma14:placeholderFlag xmlns:ma14="http://schemas.microsoft.com/office/mac/drawingml/2011/main" xmlns="" val="1"/>
+              <ma14:placeholderFlag xmlns="" xmlns:ma14="http://schemas.microsoft.com/office/mac/drawingml/2011/main" val="1"/>
             </a:ext>
           </a:extLst>
         </p:spPr>
@@ -3476,7 +3476,7 @@
               </a14:hiddenLine>
             </a:ext>
             <a:ext uri="{FAA26D3D-D897-4be2-8F04-BA451C77F1D7}">
-              <ma14:placeholderFlag xmlns:ma14="http://schemas.microsoft.com/office/mac/drawingml/2011/main" xmlns="" val="1"/>
+              <ma14:placeholderFlag xmlns="" xmlns:ma14="http://schemas.microsoft.com/office/mac/drawingml/2011/main" val="1"/>
             </a:ext>
           </a:extLst>
         </p:spPr>
@@ -3565,7 +3565,7 @@
               </a14:hiddenLine>
             </a:ext>
             <a:ext uri="{FAA26D3D-D897-4be2-8F04-BA451C77F1D7}">
-              <ma14:placeholderFlag xmlns:ma14="http://schemas.microsoft.com/office/mac/drawingml/2011/main" xmlns="" val="1"/>
+              <ma14:placeholderFlag xmlns="" xmlns:ma14="http://schemas.microsoft.com/office/mac/drawingml/2011/main" val="1"/>
             </a:ext>
           </a:extLst>
         </p:spPr>
@@ -3654,7 +3654,7 @@
               </a14:hiddenLine>
             </a:ext>
             <a:ext uri="{FAA26D3D-D897-4be2-8F04-BA451C77F1D7}">
-              <ma14:placeholderFlag xmlns:ma14="http://schemas.microsoft.com/office/mac/drawingml/2011/main" xmlns="" val="1"/>
+              <ma14:placeholderFlag xmlns="" xmlns:ma14="http://schemas.microsoft.com/office/mac/drawingml/2011/main" val="1"/>
             </a:ext>
           </a:extLst>
         </p:spPr>
@@ -3743,7 +3743,7 @@
               </a14:hiddenLine>
             </a:ext>
             <a:ext uri="{FAA26D3D-D897-4be2-8F04-BA451C77F1D7}">
-              <ma14:placeholderFlag xmlns:ma14="http://schemas.microsoft.com/office/mac/drawingml/2011/main" xmlns="" val="1"/>
+              <ma14:placeholderFlag xmlns="" xmlns:ma14="http://schemas.microsoft.com/office/mac/drawingml/2011/main" val="1"/>
             </a:ext>
           </a:extLst>
         </p:spPr>
@@ -3832,7 +3832,7 @@
               </a14:hiddenLine>
             </a:ext>
             <a:ext uri="{FAA26D3D-D897-4be2-8F04-BA451C77F1D7}">
-              <ma14:placeholderFlag xmlns:ma14="http://schemas.microsoft.com/office/mac/drawingml/2011/main" xmlns="" val="1"/>
+              <ma14:placeholderFlag xmlns="" xmlns:ma14="http://schemas.microsoft.com/office/mac/drawingml/2011/main" val="1"/>
             </a:ext>
           </a:extLst>
         </p:spPr>
@@ -3921,7 +3921,7 @@
               </a14:hiddenLine>
             </a:ext>
             <a:ext uri="{FAA26D3D-D897-4be2-8F04-BA451C77F1D7}">
-              <ma14:placeholderFlag xmlns:ma14="http://schemas.microsoft.com/office/mac/drawingml/2011/main" xmlns="" val="1"/>
+              <ma14:placeholderFlag xmlns="" xmlns:ma14="http://schemas.microsoft.com/office/mac/drawingml/2011/main" val="1"/>
             </a:ext>
           </a:extLst>
         </p:spPr>
@@ -4010,7 +4010,7 @@
               </a14:hiddenLine>
             </a:ext>
             <a:ext uri="{FAA26D3D-D897-4be2-8F04-BA451C77F1D7}">
-              <ma14:placeholderFlag xmlns:ma14="http://schemas.microsoft.com/office/mac/drawingml/2011/main" xmlns="" val="1"/>
+              <ma14:placeholderFlag xmlns="" xmlns:ma14="http://schemas.microsoft.com/office/mac/drawingml/2011/main" val="1"/>
             </a:ext>
           </a:extLst>
         </p:spPr>
@@ -4099,7 +4099,7 @@
               </a14:hiddenLine>
             </a:ext>
             <a:ext uri="{FAA26D3D-D897-4be2-8F04-BA451C77F1D7}">
-              <ma14:placeholderFlag xmlns:ma14="http://schemas.microsoft.com/office/mac/drawingml/2011/main" xmlns="" val="1"/>
+              <ma14:placeholderFlag xmlns="" xmlns:ma14="http://schemas.microsoft.com/office/mac/drawingml/2011/main" val="1"/>
             </a:ext>
           </a:extLst>
         </p:spPr>
@@ -4255,7 +4255,7 @@
           <a:p>
             <a:fld id="{6A7D9F0D-27CC-AF49-BE27-075EF3FD3399}" type="datetimeFigureOut">
               <a:rPr lang="en-US" smtClean="0"/>
-              <a:t>9/21/25</a:t>
+              <a:t>7/14/26</a:t>
             </a:fld>
             <a:endParaRPr lang="en-US"/>
           </a:p>
@@ -4423,7 +4423,7 @@
           <a:p>
             <a:fld id="{6A7D9F0D-27CC-AF49-BE27-075EF3FD3399}" type="datetimeFigureOut">
               <a:rPr lang="en-US" smtClean="0"/>
-              <a:t>9/21/25</a:t>
+              <a:t>7/14/26</a:t>
             </a:fld>
             <a:endParaRPr lang="en-US"/>
           </a:p>
@@ -4601,7 +4601,7 @@
           <a:p>
             <a:fld id="{6A7D9F0D-27CC-AF49-BE27-075EF3FD3399}" type="datetimeFigureOut">
               <a:rPr lang="en-US" smtClean="0"/>
-              <a:t>9/21/25</a:t>
+              <a:t>7/14/26</a:t>
             </a:fld>
             <a:endParaRPr lang="en-US"/>
           </a:p>
@@ -5672,7 +5672,7 @@
           <a:p>
             <a:fld id="{6A7D9F0D-27CC-AF49-BE27-075EF3FD3399}" type="datetimeFigureOut">
               <a:rPr lang="en-US" smtClean="0"/>
-              <a:t>9/21/25</a:t>
+              <a:t>7/14/26</a:t>
             </a:fld>
             <a:endParaRPr lang="en-US"/>
           </a:p>
@@ -5917,7 +5917,7 @@
           <a:p>
             <a:fld id="{6A7D9F0D-27CC-AF49-BE27-075EF3FD3399}" type="datetimeFigureOut">
               <a:rPr lang="en-US" smtClean="0"/>
-              <a:t>9/21/25</a:t>
+              <a:t>7/14/26</a:t>
             </a:fld>
             <a:endParaRPr lang="en-US"/>
           </a:p>
@@ -6146,7 +6146,7 @@
           <a:p>
             <a:fld id="{6A7D9F0D-27CC-AF49-BE27-075EF3FD3399}" type="datetimeFigureOut">
               <a:rPr lang="en-US" smtClean="0"/>
-              <a:t>9/21/25</a:t>
+              <a:t>7/14/26</a:t>
             </a:fld>
             <a:endParaRPr lang="en-US"/>
           </a:p>
@@ -6510,7 +6510,7 @@
           <a:p>
             <a:fld id="{6A7D9F0D-27CC-AF49-BE27-075EF3FD3399}" type="datetimeFigureOut">
               <a:rPr lang="en-US" smtClean="0"/>
-              <a:t>9/21/25</a:t>
+              <a:t>7/14/26</a:t>
             </a:fld>
             <a:endParaRPr lang="en-US"/>
           </a:p>
@@ -6627,7 +6627,7 @@
           <a:p>
             <a:fld id="{6A7D9F0D-27CC-AF49-BE27-075EF3FD3399}" type="datetimeFigureOut">
               <a:rPr lang="en-US" smtClean="0"/>
-              <a:t>9/21/25</a:t>
+              <a:t>7/14/26</a:t>
             </a:fld>
             <a:endParaRPr lang="en-US"/>
           </a:p>
@@ -6722,7 +6722,7 @@
           <a:p>
             <a:fld id="{6A7D9F0D-27CC-AF49-BE27-075EF3FD3399}" type="datetimeFigureOut">
               <a:rPr lang="en-US" smtClean="0"/>
-              <a:t>9/21/25</a:t>
+              <a:t>7/14/26</a:t>
             </a:fld>
             <a:endParaRPr lang="en-US"/>
           </a:p>
@@ -6997,7 +6997,7 @@
           <a:p>
             <a:fld id="{6A7D9F0D-27CC-AF49-BE27-075EF3FD3399}" type="datetimeFigureOut">
               <a:rPr lang="en-US" smtClean="0"/>
-              <a:t>9/21/25</a:t>
+              <a:t>7/14/26</a:t>
             </a:fld>
             <a:endParaRPr lang="en-US"/>
           </a:p>
@@ -7249,7 +7249,7 @@
           <a:p>
             <a:fld id="{6A7D9F0D-27CC-AF49-BE27-075EF3FD3399}" type="datetimeFigureOut">
               <a:rPr lang="en-US" smtClean="0"/>
-              <a:t>9/21/25</a:t>
+              <a:t>7/14/26</a:t>
             </a:fld>
             <a:endParaRPr lang="en-US"/>
           </a:p>
@@ -7460,7 +7460,7 @@
           <a:p>
             <a:fld id="{6A7D9F0D-27CC-AF49-BE27-075EF3FD3399}" type="datetimeFigureOut">
               <a:rPr lang="en-US" smtClean="0"/>
-              <a:t>9/21/25</a:t>
+              <a:t>7/14/26</a:t>
             </a:fld>
             <a:endParaRPr lang="en-US"/>
           </a:p>
@@ -8452,101 +8452,6 @@
           </a:p>
         </p:txBody>
       </p:sp>
-      <p:graphicFrame>
-        <p:nvGraphicFramePr>
-          <p:cNvPr id="2" name="Object 4"/>
-          <p:cNvGraphicFramePr>
-            <a:graphicFrameLocks noGrp="1" noChangeAspect="1"/>
-          </p:cNvGraphicFramePr>
-          <p:nvPr>
-            <p:ph sz="half" idx="2"/>
-          </p:nvPr>
-        </p:nvGraphicFramePr>
-        <p:xfrm>
-          <a:off x="4267200" y="2971801"/>
-          <a:ext cx="3810000" cy="468313"/>
-        </p:xfrm>
-        <a:graphic>
-          <a:graphicData uri="http://schemas.openxmlformats.org/presentationml/2006/ole">
-            <mc:AlternateContent xmlns:mc="http://schemas.openxmlformats.org/markup-compatibility/2006">
-              <mc:Choice xmlns:v="urn:schemas-microsoft-com:vml" Requires="v">
-                <p:oleObj name="Equation" r:id="rId3" imgW="1548728" imgH="190417" progId="Equation.DSMT4">
-                  <p:embed/>
-                </p:oleObj>
-              </mc:Choice>
-              <mc:Fallback>
-                <p:oleObj name="Equation" r:id="rId3" imgW="1548728" imgH="190417" progId="Equation.DSMT4">
-                  <p:embed/>
-                  <p:pic>
-                    <p:nvPicPr>
-                      <p:cNvPr id="0" name=""/>
-                      <p:cNvPicPr>
-                        <a:picLocks noChangeAspect="1" noChangeArrowheads="1"/>
-                      </p:cNvPicPr>
-                      <p:nvPr/>
-                    </p:nvPicPr>
-                    <p:blipFill>
-                      <a:blip r:embed="rId4">
-                        <a:extLst>
-                          <a:ext uri="{28A0092B-C50C-407E-A947-70E740481C1C}">
-                            <a14:useLocalDpi xmlns:a14="http://schemas.microsoft.com/office/drawing/2010/main" val="0"/>
-                          </a:ext>
-                        </a:extLst>
-                      </a:blip>
-                      <a:srcRect/>
-                      <a:stretch>
-                        <a:fillRect/>
-                      </a:stretch>
-                    </p:blipFill>
-                    <p:spPr bwMode="auto">
-                      <a:xfrm>
-                        <a:off x="4267200" y="2971801"/>
-                        <a:ext cx="3810000" cy="468313"/>
-                      </a:xfrm>
-                      <a:prstGeom prst="rect">
-                        <a:avLst/>
-                      </a:prstGeom>
-                      <a:noFill/>
-                      <a:ln>
-                        <a:noFill/>
-                      </a:ln>
-                      <a:effectLst/>
-                      <a:extLst>
-                        <a:ext uri="{909E8E84-426E-40DD-AFC4-6F175D3DCCD1}">
-                          <a14:hiddenFill xmlns:a14="http://schemas.microsoft.com/office/drawing/2010/main">
-                            <a:solidFill>
-                              <a:srgbClr val="FFFFFF"/>
-                            </a:solidFill>
-                          </a14:hiddenFill>
-                        </a:ext>
-                        <a:ext uri="{91240B29-F687-4F45-9708-019B960494DF}">
-                          <a14:hiddenLine xmlns:a14="http://schemas.microsoft.com/office/drawing/2010/main" w="9525">
-                            <a:solidFill>
-                              <a:srgbClr val="000000"/>
-                            </a:solidFill>
-                            <a:miter lim="800000"/>
-                            <a:headEnd/>
-                            <a:tailEnd/>
-                          </a14:hiddenLine>
-                        </a:ext>
-                        <a:ext uri="{AF507438-7753-43E0-B8FC-AC1667EBCBE1}">
-                          <a14:hiddenEffects xmlns:a14="http://schemas.microsoft.com/office/drawing/2010/main">
-                            <a:effectLst>
-                              <a:outerShdw dist="35921" dir="2700000" algn="ctr" rotWithShape="0">
-                                <a:srgbClr val="808080"/>
-                              </a:outerShdw>
-                            </a:effectLst>
-                          </a14:hiddenEffects>
-                        </a:ext>
-                      </a:extLst>
-                    </p:spPr>
-                  </p:pic>
-                </p:oleObj>
-              </mc:Fallback>
-            </mc:AlternateContent>
-          </a:graphicData>
-        </a:graphic>
-      </p:graphicFrame>
       <p:sp>
         <p:nvSpPr>
           <p:cNvPr id="3" name="TextBox 2">
@@ -8586,10 +8491,85 @@
           </a:p>
         </p:txBody>
       </p:sp>
+      <p:sp>
+        <p:nvSpPr>
+          <p:cNvPr id="9101" name="EqText10"/>
+          <p:cNvSpPr/>
+          <p:nvPr/>
+        </p:nvSpPr>
+        <p:spPr>
+          <a:xfrm>
+            <a:off x="3810000" y="2946400"/>
+            <a:ext cx="4699000" cy="508000"/>
+          </a:xfrm>
+          <a:prstGeom prst="rect">
+            <a:avLst/>
+          </a:prstGeom>
+          <a:noFill/>
+        </p:spPr>
+        <p:txBody>
+          <a:bodyPr wrap="square" lIns="0" tIns="0" rIns="0" bIns="0" anchor="ctr">
+            <a:normAutofit/>
+          </a:bodyPr>
+          <a:lstStyle/>
+          <a:p>
+            <a:pPr algn="ctr"/>
+            <a:r>
+              <a:rPr lang="en-US" sz="2000" i="1" dirty="0">
+                <a:latin typeface="Cambria"/>
+                <a:cs typeface="Cambria"/>
+              </a:rPr>
+              <a:t>β</a:t>
+            </a:r>
+            <a:r>
+              <a:rPr lang="en-US" sz="2000" dirty="0">
+                <a:latin typeface="Cambria"/>
+                <a:cs typeface="Cambria"/>
+              </a:rPr>
+              <a:t> = 78.63;  </a:t>
+            </a:r>
+            <a:r>
+              <a:rPr lang="en-US" sz="2000" i="1" dirty="0">
+                <a:latin typeface="Cambria"/>
+                <a:cs typeface="Cambria"/>
+              </a:rPr>
+              <a:t>σ</a:t>
+            </a:r>
+            <a:r>
+              <a:rPr lang="en-US" sz="1560" i="1" baseline="-25000" dirty="0">
+                <a:latin typeface="Cambria"/>
+                <a:cs typeface="Cambria"/>
+              </a:rPr>
+              <a:t>b</a:t>
+            </a:r>
+            <a:r>
+              <a:rPr lang="en-US" sz="2000" dirty="0">
+                <a:latin typeface="Cambria"/>
+                <a:cs typeface="Cambria"/>
+              </a:rPr>
+              <a:t> = 15.79;  </a:t>
+            </a:r>
+            <a:r>
+              <a:rPr lang="en-US" sz="2000" i="1" dirty="0">
+                <a:latin typeface="Cambria"/>
+                <a:cs typeface="Cambria"/>
+              </a:rPr>
+              <a:t>σ</a:t>
+            </a:r>
+            <a:r>
+              <a:rPr lang="en-US" sz="2000" dirty="0">
+                <a:latin typeface="Cambria"/>
+                <a:cs typeface="Cambria"/>
+              </a:rPr>
+              <a:t> = 6.1</a:t>
+            </a:r>
+          </a:p>
+        </p:txBody>
+      </p:sp>
     </p:spTree>
     <p:extLst>
       <p:ext uri="{BB962C8B-B14F-4D97-AF65-F5344CB8AC3E}">
-        <p14:creationId xmlns:p14="http://schemas.microsoft.com/office/powerpoint/2010/main" val="1982038091"/>
+        <p14:creationId xmlns:p14="http://schemas.microsoft.com/office/powerpoint/2010/main" val="1457092411"/>
       </p:ext>
     </p:extLst>
   </p:cSld>
@@ -12740,7 +12720,7 @@
       </p:sp>
       <p:pic>
         <p:nvPicPr>
-          <p:cNvPr id="5" name="Picture 4" descr="Two scatterplots of Weight (y, about 2 to 9) versus Length (x, 0.7 to 3.0). Left: open circles; right: same points coded by individual fish. Weight rises steadily with length." title="Two scatterplots of Weight (y, about 2 to 9) versus Length (x, 0.7 to 3.0). Left"/>
+          <p:cNvPr id="5" name="Picture 4" descr="Two scatterplots of Weight (y, about 2 to 9) versus Length (x, 0.7 to 3.0). Left: open circles; right: same points coded by individual fish. Weight rises steadily with length."/>
           <p:cNvPicPr>
             <a:picLocks noChangeAspect="1"/>
           </p:cNvPicPr>
@@ -12831,7 +12811,7 @@
       </p:sp>
       <p:pic>
         <p:nvPicPr>
-          <p:cNvPr id="2" name="Picture 8" descr="Scatterplot of Weight versus Length for 10 fish with the fitted mixed-effects regression line; individual subjects share a common slope but have random intercepts around the mean line." title="Scatterplot of Weight versus Length for 10 fish with the fitted mixed-effects re"/>
+          <p:cNvPr id="2" name="Picture 8" descr="Scatterplot of Weight versus Length for 10 fish with the fitted mixed-effects regression line; individual subjects share a common slope but have random intercepts around the mean line."/>
           <p:cNvPicPr>
             <a:picLocks noChangeAspect="1" noChangeArrowheads="1"/>
           </p:cNvPicPr>
@@ -13958,7 +13938,7 @@
       </p:sp>
       <p:pic>
         <p:nvPicPr>
-          <p:cNvPr id="65539" name="Picture 2" descr="Diagram of the sampling design: three fish species (drawn as fish) measured for Length and Trophic Position, nested within Lake 1 through Lake 6, ten individuals per species per lake." title="Diagram of the sampling design: three fish species (drawn as fish) measured for "/>
+          <p:cNvPr id="65539" name="Picture 2" descr="Diagram of the sampling design: three fish species (drawn as fish) measured for Length and Trophic Position, nested within Lake 1 through Lake 6, ten individuals per species per lake."/>
           <p:cNvPicPr>
             <a:picLocks noChangeAspect="1" noChangeArrowheads="1"/>
           </p:cNvPicPr>
@@ -14180,7 +14160,7 @@
       </p:sp>
       <p:pic>
         <p:nvPicPr>
-          <p:cNvPr id="66563" name="Picture 2" descr="Scatterplot titled 'Species 1 in Lake 1': Trophic Position (y, 3.4 to 4.0) versus Length in mm (x, 100 to 400). Ten points, weak positive trend, much scatter." title="Scatterplot titled 'Species 1 in Lake 1': Trophic Position (y, 3.4 to 4.0) versu"/>
+          <p:cNvPr id="66563" name="Picture 2" descr="Scatterplot titled 'Species 1 in Lake 1': Trophic Position (y, 3.4 to 4.0) versus Length in mm (x, 100 to 400). Ten points, weak positive trend, much scatter."/>
           <p:cNvPicPr>
             <a:picLocks noChangeAspect="1" noChangeArrowheads="1"/>
           </p:cNvPicPr>
@@ -14234,7 +14214,7 @@
       </p:pic>
       <p:pic>
         <p:nvPicPr>
-          <p:cNvPr id="66564" name="Picture 4" descr="Scatterplot titled 'All Data': Trophic Position (y, 3.3 to 5.0) versus Length in mm (x, 100 to 400). Points rise with length but cluster vertically." title="Scatterplot titled 'All Data': Trophic Position (y, 3.3 to 5.0) versus Length in"/>
+          <p:cNvPr id="66564" name="Picture 4" descr="Scatterplot titled 'All Data': Trophic Position (y, 3.3 to 5.0) versus Length in mm (x, 100 to 400). Points rise with length but cluster vertically."/>
           <p:cNvPicPr>
             <a:picLocks noChangeAspect="1" noChangeArrowheads="1"/>
           </p:cNvPicPr>
@@ -14348,7 +14328,7 @@
       </p:sp>
       <p:pic>
         <p:nvPicPr>
-          <p:cNvPr id="67586" name="Picture 4" descr="Faceted scatterplots 'By Species' (S1, S2, S3) of Trophic Position versus Length in mm. All three species show positive trends; S1 sits lower overall than S2 and S3." title="Faceted scatterplots 'By Species' (S1, S2, S3) of Trophic Position versus Length"/>
+          <p:cNvPr id="67586" name="Picture 4" descr="Faceted scatterplots 'By Species' (S1, S2, S3) of Trophic Position versus Length in mm. All three species show positive trends; S1 sits lower overall than S2 and S3."/>
           <p:cNvPicPr>
             <a:picLocks noChangeAspect="1"/>
           </p:cNvPicPr>
@@ -14462,7 +14442,7 @@
       </p:sp>
       <p:pic>
         <p:nvPicPr>
-          <p:cNvPr id="68610" name="Picture 5" descr="Faceted scatterplots 'By Lake' (L1 to L6) of Trophic Position versus Length in mm. Each lake shows a positive length trend with broadly similar intercepts across lakes." title="Faceted scatterplots 'By Lake' (L1 to L6) of Trophic Position versus Length in m"/>
+          <p:cNvPr id="68610" name="Picture 5" descr="Faceted scatterplots 'By Lake' (L1 to L6) of Trophic Position versus Length in mm. Each lake shows a positive length trend with broadly similar intercepts across lakes."/>
           <p:cNvPicPr>
             <a:picLocks noChangeAspect="1"/>
           </p:cNvPicPr>
@@ -14740,7 +14720,7 @@
       </p:sp>
       <p:pic>
         <p:nvPicPr>
-          <p:cNvPr id="69635" name="Picture 3" descr="Two boxplots of standardized residuals from the complete-pooling model. Left, by species: S1 residuals sit well below zero, S2 and S3 above. Right, by lake: residuals roughly centered on zero." title="Two boxplots of standardized residuals from the complete-pooling model. Left, by"/>
+          <p:cNvPr id="69635" name="Picture 3" descr="Two boxplots of standardized residuals from the complete-pooling model. Left, by species: S1 residuals sit well below zero, S2 and S3 above. Right, by lake: residuals roughly centered on zero."/>
           <p:cNvPicPr>
             <a:picLocks noChangeAspect="1"/>
           </p:cNvPicPr>
@@ -15421,7 +15401,7 @@
       </p:sp>
       <p:pic>
         <p:nvPicPr>
-          <p:cNvPr id="70659" name="Picture 2" descr="Schematic: three parallel Trophic-Position-versus-Length lines, species 1 (blue, low), 2 (red), 3 (green, high), around a black species-level line; a normal curve shows intercepts varying about the mean." title="Schematic: three parallel Trophic-Position-versus-Length lines, species 1 (blue,"/>
+          <p:cNvPr id="70659" name="Picture 2" descr="Schematic: three parallel Trophic-Position-versus-Length lines, species 1 (blue, low), 2 (red), 3 (green, high), around a black species-level line; a normal curve shows intercepts varying about the mean."/>
           <p:cNvPicPr>
             <a:picLocks noChangeAspect="1" noChangeArrowheads="1"/>
           </p:cNvPicPr>
@@ -15680,7 +15660,7 @@
       </p:sp>
       <p:pic>
         <p:nvPicPr>
-          <p:cNvPr id="71683" name="Picture 2" descr="Random-intercept schematic: three parallel colored lines (species 1 blue lowest, 2 red, 3 green highest) around the black species-level mean line, with a normal curve showing intercept spread." title="Random-intercept schematic: three parallel colored lines (species 1 blue lowest,"/>
+          <p:cNvPr id="71683" name="Picture 2" descr="Schematic: three parallel Trophic-Position-versus-Length lines, species 1 (blue, low), 2 (red), 3 (green, high), around a black species-level line; a normal curve shows intercepts varying about the mean."/>
           <p:cNvPicPr>
             <a:picLocks noChangeAspect="1" noChangeArrowheads="1"/>
           </p:cNvPicPr>
@@ -16010,7 +15990,7 @@
       </p:sp>
       <p:pic>
         <p:nvPicPr>
-          <p:cNvPr id="72707" name="Picture 2" descr="Random-intercept-by-lake schematic: six parallel colored lines (Lake 1 lowest to Lake 6 highest) offset around the black lake-level mean line; a normal curve shows intercept spread." title="Random-intercept-by-lake schematic: six parallel colored lines (Lake 1 lowest to"/>
+          <p:cNvPr id="72707" name="Picture 2" descr="Random-intercept-by-lake schematic: six parallel colored lines (Lake 1 lowest to Lake 6 highest) offset around the black lake-level mean line; a normal curve shows intercept spread."/>
           <p:cNvPicPr>
             <a:picLocks noChangeAspect="1" noChangeArrowheads="1"/>
           </p:cNvPicPr>
@@ -16194,7 +16174,7 @@
       </p:sp>
       <p:pic>
         <p:nvPicPr>
-          <p:cNvPr id="73731" name="Picture 4" descr="Random-slope schematic: three lines fanning from a shared intercept (species 3 blue shallow, 2 green, 1 red steepest) around the black mean line; inset normal curve labeled 'Distribution of slopes'." title="Random-slope schematic: three lines fanning from a shared intercept (species 3 b"/>
+          <p:cNvPr id="73731" name="Picture 4" descr="Random-slope schematic: three lines fanning from a shared intercept (species 3 blue shallow, 2 green, 1 red steepest) around the black mean line; inset normal curve labeled 'Distribution of slopes'."/>
           <p:cNvPicPr>
             <a:picLocks noChangeAspect="1" noChangeArrowheads="1"/>
           </p:cNvPicPr>
@@ -16365,7 +16345,7 @@
       </p:sp>
       <p:pic>
         <p:nvPicPr>
-          <p:cNvPr id="74756" name="Picture 4" descr="Schematic of shrinkage: the fitted line for species 1 (blue, three data points) is pulled toward the black species-level mean line rather than fitting its own points, illustrating borrowing strength." title="Schematic of shrinkage: the fitted line for species 1 (blue, three data points) "/>
+          <p:cNvPr id="74756" name="Picture 4" descr="Schematic of shrinkage: the fitted line for species 1 (blue, three data points) is pulled toward the black species-level mean line rather than fitting its own points, illustrating borrowing strength."/>
           <p:cNvPicPr>
             <a:picLocks noChangeAspect="1" noChangeArrowheads="1"/>
           </p:cNvPicPr>
@@ -16481,7 +16461,7 @@
       </p:sp>
       <p:pic>
         <p:nvPicPr>
-          <p:cNvPr id="76802" name="Picture 4" descr="R code screenshot listing candidate models M0 to M8 for Z_TP on Z_Length: an lm plus lmer random-intercept and random-slope combinations of Fish_Species and Lake." title="R code screenshot listing candidate models M0 to M8 for Z_TP on Z_Length: an lm "/>
+          <p:cNvPr id="76802" name="Picture 4" descr="R code screenshot listing candidate models M0 to M8 for Z_TP on Z_Length: an lm plus lmer random-intercept and random-slope combinations of Fish_Species and Lake."/>
           <p:cNvPicPr>
             <a:picLocks noChangeAspect="1"/>
           </p:cNvPicPr>
@@ -16995,7 +16975,7 @@
       </p:grpSpPr>
       <p:pic>
         <p:nvPicPr>
-          <p:cNvPr id="1028" name="Picture 4" descr="Diagram of crossed random effects: three School ovals each send arrows to all three Class boxes, so the same classes appear across every school." title="Diagram of crossed random effects: three School ovals each send arrows to all th"/>
+          <p:cNvPr id="1028" name="Picture 4" descr="nter image description here"/>
           <p:cNvPicPr>
             <a:picLocks noChangeAspect="1" noChangeArrowheads="1"/>
           </p:cNvPicPr>
@@ -17109,7 +17089,7 @@
       </p:sp>
       <p:pic>
         <p:nvPicPr>
-          <p:cNvPr id="1026" name="Picture 2" descr="Diagram of nested random effects: each of School1, School2, School3 has its own separate Class1, Class2, Class3 boxes; classes belong to a single school only." title="Diagram of nested random effects: each of School1, School2, School3 has its own "/>
+          <p:cNvPr id="1026" name="Picture 2" descr="nter image description here"/>
           <p:cNvPicPr>
             <a:picLocks noChangeAspect="1" noChangeArrowheads="1"/>
           </p:cNvPicPr>
@@ -17699,7 +17679,7 @@
       </p:sp>
       <p:pic>
         <p:nvPicPr>
-          <p:cNvPr id="8" name="Picture 7" descr="Journal article opening: Warton and Hui (2011), Ecology, 'The arcsine is asinine: the analysis of proportions in ecology', abstract arguing for logistic regression over the arcsine transform." title="Journal article opening: Warton and Hui (2011), Ecology, 'The arcsine is asinine">
+          <p:cNvPr id="8" name="Picture 7" descr="Journal article opening: Warton and Hui (2011), Ecology, 'The arcsine is asinine: the analysis of proportions in ecology', abstract arguing for logistic regression over the arcsine transform.">
             <a:extLst>
               <a:ext uri="{FF2B5EF4-FFF2-40B4-BE49-F238E27FC236}">
                 <a16:creationId xmlns:a16="http://schemas.microsoft.com/office/drawing/2014/main" id="{ABB93DB3-783B-16F5-F173-032A366CB24A}"/>
@@ -18038,7 +18018,7 @@
       </p:grpSpPr>
       <p:pic>
         <p:nvPicPr>
-          <p:cNvPr id="6" name="Picture 5" descr="Photo of a white stork with red bill and legs standing on a rock over water, head lowered; overlaid caption reads 'This is not a GLMM'." title="Photo of a white stork with red bill and legs standing on a rock over water, hea">
+          <p:cNvPr id="6" name="Picture 5" descr="Photo of a white stork with red bill and legs standing on a rock over water, head lowered; overlaid caption reads 'This is not a GLMM'.">
             <a:extLst>
               <a:ext uri="{FF2B5EF4-FFF2-40B4-BE49-F238E27FC236}">
                 <a16:creationId xmlns:a16="http://schemas.microsoft.com/office/drawing/2014/main" id="{B6605868-CF45-6831-851E-320D81DFC094}"/>
@@ -18167,40 +18147,2294 @@
           <a:chExt cx="0" cy="0"/>
         </a:xfrm>
       </p:grpSpPr>
-      <p:pic>
-        <p:nvPicPr>
-          <p:cNvPr id="11" name="Picture 10" descr="White Stork GLMM example figure (Oliver Gimenez); vector graphic could not be rendered on this system for a precise description." title="White Stork GLMM example figure (Oliver Gimenez); vector graphic could not be re">
-            <a:extLst>
-              <a:ext uri="{FF2B5EF4-FFF2-40B4-BE49-F238E27FC236}">
-                <a16:creationId xmlns:a16="http://schemas.microsoft.com/office/drawing/2014/main" id="{C765EE5D-1503-EB1C-CF0B-401B4B9B8CB4}"/>
-              </a:ext>
-            </a:extLst>
-          </p:cNvPr>
-          <p:cNvPicPr>
-            <a:picLocks noChangeAspect="1"/>
-          </p:cNvPicPr>
+      <p:sp>
+        <p:nvSpPr>
+          <p:cNvPr id="901" name="CodeBg"/>
+          <p:cNvSpPr/>
           <p:nvPr/>
-        </p:nvPicPr>
-        <p:blipFill>
-          <a:blip r:embed="rId2"/>
-          <a:stretch>
-            <a:fillRect/>
-          </a:stretch>
-        </p:blipFill>
+        </p:nvSpPr>
         <p:spPr>
           <a:xfrm>
-            <a:off x="-8965" y="0"/>
-            <a:ext cx="12209930" cy="6858000"/>
+            <a:off x="533400" y="1905000"/>
+            <a:ext cx="9652000" cy="3429000"/>
           </a:xfrm>
           <a:prstGeom prst="rect">
             <a:avLst/>
           </a:prstGeom>
+          <a:solidFill>
+            <a:srgbClr val="F4F4F4"/>
+          </a:solidFill>
+          <a:ln>
+            <a:noFill/>
+          </a:ln>
         </p:spPr>
-      </p:pic>
+        <p:txBody>
+          <a:bodyPr/>
+          <a:lstStyle/>
+          <a:p>
+            <a:endParaRPr/>
+          </a:p>
+        </p:txBody>
+      </p:sp>
+      <p:sp>
+        <p:nvSpPr>
+          <p:cNvPr id="900" name="HeaderBar"/>
+          <p:cNvSpPr/>
+          <p:nvPr/>
+        </p:nvSpPr>
+        <p:spPr>
+          <a:xfrm>
+            <a:off x="0" y="0"/>
+            <a:ext cx="12192000" cy="787400"/>
+          </a:xfrm>
+          <a:prstGeom prst="rect">
+            <a:avLst/>
+          </a:prstGeom>
+          <a:solidFill>
+            <a:srgbClr val="23373B"/>
+          </a:solidFill>
+          <a:ln>
+            <a:noFill/>
+          </a:ln>
+        </p:spPr>
+        <p:txBody>
+          <a:bodyPr/>
+          <a:lstStyle/>
+          <a:p>
+            <a:endParaRPr/>
+          </a:p>
+        </p:txBody>
+      </p:sp>
+      <p:sp>
+        <p:nvSpPr>
+          <p:cNvPr id="903" name="TitleTxt"/>
+          <p:cNvSpPr/>
+          <p:nvPr/>
+        </p:nvSpPr>
+        <p:spPr>
+          <a:xfrm>
+            <a:off x="381000" y="0"/>
+            <a:ext cx="11557000" cy="787400"/>
+          </a:xfrm>
+          <a:prstGeom prst="rect">
+            <a:avLst/>
+          </a:prstGeom>
+          <a:noFill/>
+        </p:spPr>
+        <p:txBody>
+          <a:bodyPr wrap="square" lIns="0" tIns="0" rIns="0" bIns="0" anchor="ctr"/>
+          <a:lstStyle/>
+          <a:p>
+            <a:pPr algn="l"/>
+            <a:r>
+              <a:rPr lang="en-US" sz="2000" b="1" dirty="0">
+                <a:solidFill>
+                  <a:srgbClr val="FFFFFF"/>
+                </a:solidFill>
+              </a:rPr>
+              <a:t>White stork: Is breeding success affected by weather conditions?</a:t>
+            </a:r>
+          </a:p>
+        </p:txBody>
+      </p:sp>
+      <p:sp>
+        <p:nvSpPr>
+          <p:cNvPr id="902" name="CodeTxt"/>
+          <p:cNvSpPr/>
+          <p:nvPr/>
+        </p:nvSpPr>
+        <p:spPr>
+          <a:xfrm>
+            <a:off x="736600" y="2057400"/>
+            <a:ext cx="11176000" cy="3175000"/>
+          </a:xfrm>
+          <a:prstGeom prst="rect">
+            <a:avLst/>
+          </a:prstGeom>
+          <a:noFill/>
+        </p:spPr>
+        <p:txBody>
+          <a:bodyPr wrap="none" lIns="0" tIns="0" rIns="0" bIns="0" anchor="t"/>
+          <a:lstStyle/>
+          <a:p>
+            <a:pPr algn="l">
+              <a:lnSpc>
+                <a:spcPts val="2250"/>
+              </a:lnSpc>
+            </a:pPr>
+            <a:r>
+              <a:rPr lang="en-US" sz="1800" dirty="0">
+                <a:solidFill>
+                  <a:srgbClr val="25373C"/>
+                </a:solidFill>
+                <a:latin typeface="Consolas"/>
+                <a:cs typeface="Consolas"/>
+              </a:rPr>
+              <a:t>nbchicks = </a:t>
+            </a:r>
+            <a:r>
+              <a:rPr lang="en-US" sz="1800" dirty="0">
+                <a:solidFill>
+                  <a:srgbClr val="2B4C9E"/>
+                </a:solidFill>
+                <a:latin typeface="Consolas"/>
+                <a:cs typeface="Consolas"/>
+              </a:rPr>
+              <a:t>c</a:t>
+            </a:r>
+            <a:r>
+              <a:rPr lang="en-US" sz="1800" dirty="0">
+                <a:solidFill>
+                  <a:srgbClr val="25373C"/>
+                </a:solidFill>
+                <a:latin typeface="Consolas"/>
+                <a:cs typeface="Consolas"/>
+              </a:rPr>
+              <a:t>(</a:t>
+            </a:r>
+            <a:r>
+              <a:rPr lang="en-US" sz="1800" dirty="0">
+                <a:solidFill>
+                  <a:srgbClr val="2B4C9E"/>
+                </a:solidFill>
+                <a:latin typeface="Consolas"/>
+                <a:cs typeface="Consolas"/>
+              </a:rPr>
+              <a:t>151</a:t>
+            </a:r>
+            <a:r>
+              <a:rPr lang="en-US" sz="1800" dirty="0">
+                <a:solidFill>
+                  <a:srgbClr val="25373C"/>
+                </a:solidFill>
+                <a:latin typeface="Consolas"/>
+                <a:cs typeface="Consolas"/>
+              </a:rPr>
+              <a:t>,</a:t>
+            </a:r>
+            <a:r>
+              <a:rPr lang="en-US" sz="1800" dirty="0">
+                <a:solidFill>
+                  <a:srgbClr val="2B4C9E"/>
+                </a:solidFill>
+                <a:latin typeface="Consolas"/>
+                <a:cs typeface="Consolas"/>
+              </a:rPr>
+              <a:t>105</a:t>
+            </a:r>
+            <a:r>
+              <a:rPr lang="en-US" sz="1800" dirty="0">
+                <a:solidFill>
+                  <a:srgbClr val="25373C"/>
+                </a:solidFill>
+                <a:latin typeface="Consolas"/>
+                <a:cs typeface="Consolas"/>
+              </a:rPr>
+              <a:t>,</a:t>
+            </a:r>
+            <a:r>
+              <a:rPr lang="en-US" sz="1800" dirty="0">
+                <a:solidFill>
+                  <a:srgbClr val="2B4C9E"/>
+                </a:solidFill>
+                <a:latin typeface="Consolas"/>
+                <a:cs typeface="Consolas"/>
+              </a:rPr>
+              <a:t>73</a:t>
+            </a:r>
+            <a:r>
+              <a:rPr lang="en-US" sz="1800" dirty="0">
+                <a:solidFill>
+                  <a:srgbClr val="25373C"/>
+                </a:solidFill>
+                <a:latin typeface="Consolas"/>
+                <a:cs typeface="Consolas"/>
+              </a:rPr>
+              <a:t>,</a:t>
+            </a:r>
+            <a:r>
+              <a:rPr lang="en-US" sz="1800" dirty="0">
+                <a:solidFill>
+                  <a:srgbClr val="2B4C9E"/>
+                </a:solidFill>
+                <a:latin typeface="Consolas"/>
+                <a:cs typeface="Consolas"/>
+              </a:rPr>
+              <a:t>107</a:t>
+            </a:r>
+            <a:r>
+              <a:rPr lang="en-US" sz="1800" dirty="0">
+                <a:solidFill>
+                  <a:srgbClr val="25373C"/>
+                </a:solidFill>
+                <a:latin typeface="Consolas"/>
+                <a:cs typeface="Consolas"/>
+              </a:rPr>
+              <a:t>,</a:t>
+            </a:r>
+            <a:r>
+              <a:rPr lang="en-US" sz="1800" dirty="0">
+                <a:solidFill>
+                  <a:srgbClr val="2B4C9E"/>
+                </a:solidFill>
+                <a:latin typeface="Consolas"/>
+                <a:cs typeface="Consolas"/>
+              </a:rPr>
+              <a:t>113</a:t>
+            </a:r>
+            <a:r>
+              <a:rPr lang="en-US" sz="1800" dirty="0">
+                <a:solidFill>
+                  <a:srgbClr val="25373C"/>
+                </a:solidFill>
+                <a:latin typeface="Consolas"/>
+                <a:cs typeface="Consolas"/>
+              </a:rPr>
+              <a:t>,</a:t>
+            </a:r>
+            <a:r>
+              <a:rPr lang="en-US" sz="1800" dirty="0">
+                <a:solidFill>
+                  <a:srgbClr val="2B4C9E"/>
+                </a:solidFill>
+                <a:latin typeface="Consolas"/>
+                <a:cs typeface="Consolas"/>
+              </a:rPr>
+              <a:t>87</a:t>
+            </a:r>
+            <a:r>
+              <a:rPr lang="en-US" sz="1800" dirty="0">
+                <a:solidFill>
+                  <a:srgbClr val="25373C"/>
+                </a:solidFill>
+                <a:latin typeface="Consolas"/>
+                <a:cs typeface="Consolas"/>
+              </a:rPr>
+              <a:t>,</a:t>
+            </a:r>
+            <a:r>
+              <a:rPr lang="en-US" sz="1800" dirty="0">
+                <a:solidFill>
+                  <a:srgbClr val="2B4C9E"/>
+                </a:solidFill>
+                <a:latin typeface="Consolas"/>
+                <a:cs typeface="Consolas"/>
+              </a:rPr>
+              <a:t>77</a:t>
+            </a:r>
+            <a:r>
+              <a:rPr lang="en-US" sz="1800" dirty="0">
+                <a:solidFill>
+                  <a:srgbClr val="25373C"/>
+                </a:solidFill>
+                <a:latin typeface="Consolas"/>
+                <a:cs typeface="Consolas"/>
+              </a:rPr>
+              <a:t>,</a:t>
+            </a:r>
+            <a:r>
+              <a:rPr lang="en-US" sz="1800" dirty="0">
+                <a:solidFill>
+                  <a:srgbClr val="2B4C9E"/>
+                </a:solidFill>
+                <a:latin typeface="Consolas"/>
+                <a:cs typeface="Consolas"/>
+              </a:rPr>
+              <a:t>108</a:t>
+            </a:r>
+            <a:r>
+              <a:rPr lang="en-US" sz="1800" dirty="0">
+                <a:solidFill>
+                  <a:srgbClr val="25373C"/>
+                </a:solidFill>
+                <a:latin typeface="Consolas"/>
+                <a:cs typeface="Consolas"/>
+              </a:rPr>
+              <a:t>,</a:t>
+            </a:r>
+            <a:r>
+              <a:rPr lang="en-US" sz="1800" dirty="0">
+                <a:solidFill>
+                  <a:srgbClr val="2B4C9E"/>
+                </a:solidFill>
+                <a:latin typeface="Consolas"/>
+                <a:cs typeface="Consolas"/>
+              </a:rPr>
+              <a:t>118</a:t>
+            </a:r>
+            <a:r>
+              <a:rPr lang="en-US" sz="1800" dirty="0">
+                <a:solidFill>
+                  <a:srgbClr val="25373C"/>
+                </a:solidFill>
+                <a:latin typeface="Consolas"/>
+                <a:cs typeface="Consolas"/>
+              </a:rPr>
+              <a:t>,</a:t>
+            </a:r>
+            <a:r>
+              <a:rPr lang="en-US" sz="1800" dirty="0">
+                <a:solidFill>
+                  <a:srgbClr val="2B4C9E"/>
+                </a:solidFill>
+                <a:latin typeface="Consolas"/>
+                <a:cs typeface="Consolas"/>
+              </a:rPr>
+              <a:t>122</a:t>
+            </a:r>
+            <a:r>
+              <a:rPr lang="en-US" sz="1800" dirty="0">
+                <a:solidFill>
+                  <a:srgbClr val="25373C"/>
+                </a:solidFill>
+                <a:latin typeface="Consolas"/>
+                <a:cs typeface="Consolas"/>
+              </a:rPr>
+              <a:t>,</a:t>
+            </a:r>
+            <a:r>
+              <a:rPr lang="en-US" sz="1800" dirty="0">
+                <a:solidFill>
+                  <a:srgbClr val="2B4C9E"/>
+                </a:solidFill>
+                <a:latin typeface="Consolas"/>
+                <a:cs typeface="Consolas"/>
+              </a:rPr>
+              <a:t>112</a:t>
+            </a:r>
+            <a:r>
+              <a:rPr lang="en-US" sz="1800" dirty="0">
+                <a:solidFill>
+                  <a:srgbClr val="25373C"/>
+                </a:solidFill>
+                <a:latin typeface="Consolas"/>
+                <a:cs typeface="Consolas"/>
+              </a:rPr>
+              <a:t>,</a:t>
+            </a:r>
+            <a:r>
+              <a:rPr lang="en-US" sz="1800" dirty="0">
+                <a:solidFill>
+                  <a:srgbClr val="2B4C9E"/>
+                </a:solidFill>
+                <a:latin typeface="Consolas"/>
+                <a:cs typeface="Consolas"/>
+              </a:rPr>
+              <a:t>120</a:t>
+            </a:r>
+            <a:r>
+              <a:rPr lang="en-US" sz="1800" dirty="0">
+                <a:solidFill>
+                  <a:srgbClr val="25373C"/>
+                </a:solidFill>
+                <a:latin typeface="Consolas"/>
+                <a:cs typeface="Consolas"/>
+              </a:rPr>
+              <a:t>,</a:t>
+            </a:r>
+            <a:r>
+              <a:rPr lang="en-US" sz="1800" dirty="0">
+                <a:solidFill>
+                  <a:srgbClr val="2B4C9E"/>
+                </a:solidFill>
+                <a:latin typeface="Consolas"/>
+                <a:cs typeface="Consolas"/>
+              </a:rPr>
+              <a:t>122</a:t>
+            </a:r>
+            <a:r>
+              <a:rPr lang="en-US" sz="1800" dirty="0">
+                <a:solidFill>
+                  <a:srgbClr val="25373C"/>
+                </a:solidFill>
+                <a:latin typeface="Consolas"/>
+                <a:cs typeface="Consolas"/>
+              </a:rPr>
+              <a:t>,</a:t>
+            </a:r>
+            <a:r>
+              <a:rPr lang="en-US" sz="1800" dirty="0">
+                <a:solidFill>
+                  <a:srgbClr val="2B4C9E"/>
+                </a:solidFill>
+                <a:latin typeface="Consolas"/>
+                <a:cs typeface="Consolas"/>
+              </a:rPr>
+              <a:t>89</a:t>
+            </a:r>
+            <a:r>
+              <a:rPr lang="en-US" sz="1800" dirty="0">
+                <a:solidFill>
+                  <a:srgbClr val="25373C"/>
+                </a:solidFill>
+                <a:latin typeface="Consolas"/>
+                <a:cs typeface="Consolas"/>
+              </a:rPr>
+              <a:t>,</a:t>
+            </a:r>
+            <a:r>
+              <a:rPr lang="en-US" sz="1800" dirty="0">
+                <a:solidFill>
+                  <a:srgbClr val="2B4C9E"/>
+                </a:solidFill>
+                <a:latin typeface="Consolas"/>
+                <a:cs typeface="Consolas"/>
+              </a:rPr>
+              <a:t>69</a:t>
+            </a:r>
+            <a:r>
+              <a:rPr lang="en-US" sz="1800" dirty="0">
+                <a:solidFill>
+                  <a:srgbClr val="25373C"/>
+                </a:solidFill>
+                <a:latin typeface="Consolas"/>
+                <a:cs typeface="Consolas"/>
+              </a:rPr>
+              <a:t>,</a:t>
+            </a:r>
+            <a:r>
+              <a:rPr lang="en-US" sz="1800" dirty="0">
+                <a:solidFill>
+                  <a:srgbClr val="2B4C9E"/>
+                </a:solidFill>
+                <a:latin typeface="Consolas"/>
+                <a:cs typeface="Consolas"/>
+              </a:rPr>
+              <a:t>71</a:t>
+            </a:r>
+            <a:r>
+              <a:rPr lang="en-US" sz="1800" dirty="0">
+                <a:solidFill>
+                  <a:srgbClr val="25373C"/>
+                </a:solidFill>
+                <a:latin typeface="Consolas"/>
+                <a:cs typeface="Consolas"/>
+              </a:rPr>
+              <a:t>,</a:t>
+            </a:r>
+          </a:p>
+          <a:p>
+            <a:pPr algn="l">
+              <a:lnSpc>
+                <a:spcPts val="2250"/>
+              </a:lnSpc>
+            </a:pPr>
+            <a:r>
+              <a:rPr lang="en-US" sz="1800" dirty="0">
+                <a:solidFill>
+                  <a:srgbClr val="25373C"/>
+                </a:solidFill>
+                <a:latin typeface="Consolas"/>
+                <a:cs typeface="Consolas"/>
+              </a:rPr>
+              <a:t>                                                  </a:t>
+            </a:r>
+            <a:r>
+              <a:rPr lang="en-US" sz="1800" dirty="0">
+                <a:solidFill>
+                  <a:srgbClr val="2B4C9E"/>
+                </a:solidFill>
+                <a:latin typeface="Consolas"/>
+                <a:cs typeface="Consolas"/>
+              </a:rPr>
+              <a:t>53</a:t>
+            </a:r>
+            <a:r>
+              <a:rPr lang="en-US" sz="1800" dirty="0">
+                <a:solidFill>
+                  <a:srgbClr val="25373C"/>
+                </a:solidFill>
+                <a:latin typeface="Consolas"/>
+                <a:cs typeface="Consolas"/>
+              </a:rPr>
+              <a:t>,</a:t>
+            </a:r>
+            <a:r>
+              <a:rPr lang="en-US" sz="1800" dirty="0">
+                <a:solidFill>
+                  <a:srgbClr val="2B4C9E"/>
+                </a:solidFill>
+                <a:latin typeface="Consolas"/>
+                <a:cs typeface="Consolas"/>
+              </a:rPr>
+              <a:t>41</a:t>
+            </a:r>
+            <a:r>
+              <a:rPr lang="en-US" sz="1800" dirty="0">
+                <a:solidFill>
+                  <a:srgbClr val="25373C"/>
+                </a:solidFill>
+                <a:latin typeface="Consolas"/>
+                <a:cs typeface="Consolas"/>
+              </a:rPr>
+              <a:t>,</a:t>
+            </a:r>
+            <a:r>
+              <a:rPr lang="en-US" sz="1800" dirty="0">
+                <a:solidFill>
+                  <a:srgbClr val="2B4C9E"/>
+                </a:solidFill>
+                <a:latin typeface="Consolas"/>
+                <a:cs typeface="Consolas"/>
+              </a:rPr>
+              <a:t>53</a:t>
+            </a:r>
+            <a:r>
+              <a:rPr lang="en-US" sz="1800" dirty="0">
+                <a:solidFill>
+                  <a:srgbClr val="25373C"/>
+                </a:solidFill>
+                <a:latin typeface="Consolas"/>
+                <a:cs typeface="Consolas"/>
+              </a:rPr>
+              <a:t>,</a:t>
+            </a:r>
+            <a:r>
+              <a:rPr lang="en-US" sz="1800" dirty="0">
+                <a:solidFill>
+                  <a:srgbClr val="2B4C9E"/>
+                </a:solidFill>
+                <a:latin typeface="Consolas"/>
+                <a:cs typeface="Consolas"/>
+              </a:rPr>
+              <a:t>31</a:t>
+            </a:r>
+            <a:r>
+              <a:rPr lang="en-US" sz="1800" dirty="0">
+                <a:solidFill>
+                  <a:srgbClr val="25373C"/>
+                </a:solidFill>
+                <a:latin typeface="Consolas"/>
+                <a:cs typeface="Consolas"/>
+              </a:rPr>
+              <a:t>,</a:t>
+            </a:r>
+            <a:r>
+              <a:rPr lang="en-US" sz="1800" dirty="0">
+                <a:solidFill>
+                  <a:srgbClr val="2B4C9E"/>
+                </a:solidFill>
+                <a:latin typeface="Consolas"/>
+                <a:cs typeface="Consolas"/>
+              </a:rPr>
+              <a:t>35</a:t>
+            </a:r>
+            <a:r>
+              <a:rPr lang="en-US" sz="1800" dirty="0">
+                <a:solidFill>
+                  <a:srgbClr val="25373C"/>
+                </a:solidFill>
+                <a:latin typeface="Consolas"/>
+                <a:cs typeface="Consolas"/>
+              </a:rPr>
+              <a:t>,</a:t>
+            </a:r>
+            <a:r>
+              <a:rPr lang="en-US" sz="1800" dirty="0">
+                <a:solidFill>
+                  <a:srgbClr val="2B4C9E"/>
+                </a:solidFill>
+                <a:latin typeface="Consolas"/>
+                <a:cs typeface="Consolas"/>
+              </a:rPr>
+              <a:t>14</a:t>
+            </a:r>
+            <a:r>
+              <a:rPr lang="en-US" sz="1800" dirty="0">
+                <a:solidFill>
+                  <a:srgbClr val="25373C"/>
+                </a:solidFill>
+                <a:latin typeface="Consolas"/>
+                <a:cs typeface="Consolas"/>
+              </a:rPr>
+              <a:t>,</a:t>
+            </a:r>
+            <a:r>
+              <a:rPr lang="en-US" sz="1800" dirty="0">
+                <a:solidFill>
+                  <a:srgbClr val="2B4C9E"/>
+                </a:solidFill>
+                <a:latin typeface="Consolas"/>
+                <a:cs typeface="Consolas"/>
+              </a:rPr>
+              <a:t>18</a:t>
+            </a:r>
+            <a:r>
+              <a:rPr lang="en-US" sz="1800" dirty="0">
+                <a:solidFill>
+                  <a:srgbClr val="25373C"/>
+                </a:solidFill>
+                <a:latin typeface="Consolas"/>
+                <a:cs typeface="Consolas"/>
+              </a:rPr>
+              <a:t>)</a:t>
+            </a:r>
+          </a:p>
+          <a:p>
+            <a:pPr algn="l">
+              <a:lnSpc>
+                <a:spcPts val="2250"/>
+              </a:lnSpc>
+            </a:pPr>
+            <a:r>
+              <a:rPr lang="en-US" sz="1800" dirty="0">
+                <a:solidFill>
+                  <a:srgbClr val="25373C"/>
+                </a:solidFill>
+                <a:latin typeface="Consolas"/>
+                <a:cs typeface="Consolas"/>
+              </a:rPr>
+              <a:t>nbpairs = </a:t>
+            </a:r>
+            <a:r>
+              <a:rPr lang="en-US" sz="1800" dirty="0">
+                <a:solidFill>
+                  <a:srgbClr val="2B4C9E"/>
+                </a:solidFill>
+                <a:latin typeface="Consolas"/>
+                <a:cs typeface="Consolas"/>
+              </a:rPr>
+              <a:t>c</a:t>
+            </a:r>
+            <a:r>
+              <a:rPr lang="en-US" sz="1800" dirty="0">
+                <a:solidFill>
+                  <a:srgbClr val="25373C"/>
+                </a:solidFill>
+                <a:latin typeface="Consolas"/>
+                <a:cs typeface="Consolas"/>
+              </a:rPr>
+              <a:t>(</a:t>
+            </a:r>
+            <a:r>
+              <a:rPr lang="en-US" sz="1800" dirty="0">
+                <a:solidFill>
+                  <a:srgbClr val="2B4C9E"/>
+                </a:solidFill>
+                <a:latin typeface="Consolas"/>
+                <a:cs typeface="Consolas"/>
+              </a:rPr>
+              <a:t>173</a:t>
+            </a:r>
+            <a:r>
+              <a:rPr lang="en-US" sz="1800" dirty="0">
+                <a:solidFill>
+                  <a:srgbClr val="25373C"/>
+                </a:solidFill>
+                <a:latin typeface="Consolas"/>
+                <a:cs typeface="Consolas"/>
+              </a:rPr>
+              <a:t>,</a:t>
+            </a:r>
+            <a:r>
+              <a:rPr lang="en-US" sz="1800" dirty="0">
+                <a:solidFill>
+                  <a:srgbClr val="2B4C9E"/>
+                </a:solidFill>
+                <a:latin typeface="Consolas"/>
+                <a:cs typeface="Consolas"/>
+              </a:rPr>
+              <a:t>164</a:t>
+            </a:r>
+            <a:r>
+              <a:rPr lang="en-US" sz="1800" dirty="0">
+                <a:solidFill>
+                  <a:srgbClr val="25373C"/>
+                </a:solidFill>
+                <a:latin typeface="Consolas"/>
+                <a:cs typeface="Consolas"/>
+              </a:rPr>
+              <a:t>,</a:t>
+            </a:r>
+            <a:r>
+              <a:rPr lang="en-US" sz="1800" dirty="0">
+                <a:solidFill>
+                  <a:srgbClr val="2B4C9E"/>
+                </a:solidFill>
+                <a:latin typeface="Consolas"/>
+                <a:cs typeface="Consolas"/>
+              </a:rPr>
+              <a:t>103</a:t>
+            </a:r>
+            <a:r>
+              <a:rPr lang="en-US" sz="1800" dirty="0">
+                <a:solidFill>
+                  <a:srgbClr val="25373C"/>
+                </a:solidFill>
+                <a:latin typeface="Consolas"/>
+                <a:cs typeface="Consolas"/>
+              </a:rPr>
+              <a:t>,</a:t>
+            </a:r>
+            <a:r>
+              <a:rPr lang="en-US" sz="1800" dirty="0">
+                <a:solidFill>
+                  <a:srgbClr val="2B4C9E"/>
+                </a:solidFill>
+                <a:latin typeface="Consolas"/>
+                <a:cs typeface="Consolas"/>
+              </a:rPr>
+              <a:t>113</a:t>
+            </a:r>
+            <a:r>
+              <a:rPr lang="en-US" sz="1800" dirty="0">
+                <a:solidFill>
+                  <a:srgbClr val="25373C"/>
+                </a:solidFill>
+                <a:latin typeface="Consolas"/>
+                <a:cs typeface="Consolas"/>
+              </a:rPr>
+              <a:t>,</a:t>
+            </a:r>
+            <a:r>
+              <a:rPr lang="en-US" sz="1800" dirty="0">
+                <a:solidFill>
+                  <a:srgbClr val="2B4C9E"/>
+                </a:solidFill>
+                <a:latin typeface="Consolas"/>
+                <a:cs typeface="Consolas"/>
+              </a:rPr>
+              <a:t>122</a:t>
+            </a:r>
+            <a:r>
+              <a:rPr lang="en-US" sz="1800" dirty="0">
+                <a:solidFill>
+                  <a:srgbClr val="25373C"/>
+                </a:solidFill>
+                <a:latin typeface="Consolas"/>
+                <a:cs typeface="Consolas"/>
+              </a:rPr>
+              <a:t>,</a:t>
+            </a:r>
+            <a:r>
+              <a:rPr lang="en-US" sz="1800" dirty="0">
+                <a:solidFill>
+                  <a:srgbClr val="2B4C9E"/>
+                </a:solidFill>
+                <a:latin typeface="Consolas"/>
+                <a:cs typeface="Consolas"/>
+              </a:rPr>
+              <a:t>112</a:t>
+            </a:r>
+            <a:r>
+              <a:rPr lang="en-US" sz="1800" dirty="0">
+                <a:solidFill>
+                  <a:srgbClr val="25373C"/>
+                </a:solidFill>
+                <a:latin typeface="Consolas"/>
+                <a:cs typeface="Consolas"/>
+              </a:rPr>
+              <a:t>,</a:t>
+            </a:r>
+            <a:r>
+              <a:rPr lang="en-US" sz="1800" dirty="0">
+                <a:solidFill>
+                  <a:srgbClr val="2B4C9E"/>
+                </a:solidFill>
+                <a:latin typeface="Consolas"/>
+                <a:cs typeface="Consolas"/>
+              </a:rPr>
+              <a:t>98</a:t>
+            </a:r>
+            <a:r>
+              <a:rPr lang="en-US" sz="1800" dirty="0">
+                <a:solidFill>
+                  <a:srgbClr val="25373C"/>
+                </a:solidFill>
+                <a:latin typeface="Consolas"/>
+                <a:cs typeface="Consolas"/>
+              </a:rPr>
+              <a:t>,</a:t>
+            </a:r>
+            <a:r>
+              <a:rPr lang="en-US" sz="1800" dirty="0">
+                <a:solidFill>
+                  <a:srgbClr val="2B4C9E"/>
+                </a:solidFill>
+                <a:latin typeface="Consolas"/>
+                <a:cs typeface="Consolas"/>
+              </a:rPr>
+              <a:t>121</a:t>
+            </a:r>
+            <a:r>
+              <a:rPr lang="en-US" sz="1800" dirty="0">
+                <a:solidFill>
+                  <a:srgbClr val="25373C"/>
+                </a:solidFill>
+                <a:latin typeface="Consolas"/>
+                <a:cs typeface="Consolas"/>
+              </a:rPr>
+              <a:t>,</a:t>
+            </a:r>
+            <a:r>
+              <a:rPr lang="en-US" sz="1800" dirty="0">
+                <a:solidFill>
+                  <a:srgbClr val="2B4C9E"/>
+                </a:solidFill>
+                <a:latin typeface="Consolas"/>
+                <a:cs typeface="Consolas"/>
+              </a:rPr>
+              <a:t>132</a:t>
+            </a:r>
+            <a:r>
+              <a:rPr lang="en-US" sz="1800" dirty="0">
+                <a:solidFill>
+                  <a:srgbClr val="25373C"/>
+                </a:solidFill>
+                <a:latin typeface="Consolas"/>
+                <a:cs typeface="Consolas"/>
+              </a:rPr>
+              <a:t>,</a:t>
+            </a:r>
+            <a:r>
+              <a:rPr lang="en-US" sz="1800" dirty="0">
+                <a:solidFill>
+                  <a:srgbClr val="2B4C9E"/>
+                </a:solidFill>
+                <a:latin typeface="Consolas"/>
+                <a:cs typeface="Consolas"/>
+              </a:rPr>
+              <a:t>136</a:t>
+            </a:r>
+            <a:r>
+              <a:rPr lang="en-US" sz="1800" dirty="0">
+                <a:solidFill>
+                  <a:srgbClr val="25373C"/>
+                </a:solidFill>
+                <a:latin typeface="Consolas"/>
+                <a:cs typeface="Consolas"/>
+              </a:rPr>
+              <a:t>,</a:t>
+            </a:r>
+            <a:r>
+              <a:rPr lang="en-US" sz="1800" dirty="0">
+                <a:solidFill>
+                  <a:srgbClr val="2B4C9E"/>
+                </a:solidFill>
+                <a:latin typeface="Consolas"/>
+                <a:cs typeface="Consolas"/>
+              </a:rPr>
+              <a:t>133</a:t>
+            </a:r>
+            <a:r>
+              <a:rPr lang="en-US" sz="1800" dirty="0">
+                <a:solidFill>
+                  <a:srgbClr val="25373C"/>
+                </a:solidFill>
+                <a:latin typeface="Consolas"/>
+                <a:cs typeface="Consolas"/>
+              </a:rPr>
+              <a:t>,</a:t>
+            </a:r>
+            <a:r>
+              <a:rPr lang="en-US" sz="1800" dirty="0">
+                <a:solidFill>
+                  <a:srgbClr val="2B4C9E"/>
+                </a:solidFill>
+                <a:latin typeface="Consolas"/>
+                <a:cs typeface="Consolas"/>
+              </a:rPr>
+              <a:t>137</a:t>
+            </a:r>
+            <a:r>
+              <a:rPr lang="en-US" sz="1800" dirty="0">
+                <a:solidFill>
+                  <a:srgbClr val="25373C"/>
+                </a:solidFill>
+                <a:latin typeface="Consolas"/>
+                <a:cs typeface="Consolas"/>
+              </a:rPr>
+              <a:t>,</a:t>
+            </a:r>
+            <a:r>
+              <a:rPr lang="en-US" sz="1800" dirty="0">
+                <a:solidFill>
+                  <a:srgbClr val="2B4C9E"/>
+                </a:solidFill>
+                <a:latin typeface="Consolas"/>
+                <a:cs typeface="Consolas"/>
+              </a:rPr>
+              <a:t>145</a:t>
+            </a:r>
+            <a:r>
+              <a:rPr lang="en-US" sz="1800" dirty="0">
+                <a:solidFill>
+                  <a:srgbClr val="25373C"/>
+                </a:solidFill>
+                <a:latin typeface="Consolas"/>
+                <a:cs typeface="Consolas"/>
+              </a:rPr>
+              <a:t>,</a:t>
+            </a:r>
+            <a:r>
+              <a:rPr lang="en-US" sz="1800" dirty="0">
+                <a:solidFill>
+                  <a:srgbClr val="2B4C9E"/>
+                </a:solidFill>
+                <a:latin typeface="Consolas"/>
+                <a:cs typeface="Consolas"/>
+              </a:rPr>
+              <a:t>117</a:t>
+            </a:r>
+            <a:r>
+              <a:rPr lang="en-US" sz="1800" dirty="0">
+                <a:solidFill>
+                  <a:srgbClr val="25373C"/>
+                </a:solidFill>
+                <a:latin typeface="Consolas"/>
+                <a:cs typeface="Consolas"/>
+              </a:rPr>
+              <a:t>,</a:t>
+            </a:r>
+            <a:r>
+              <a:rPr lang="en-US" sz="1800" dirty="0">
+                <a:solidFill>
+                  <a:srgbClr val="2B4C9E"/>
+                </a:solidFill>
+                <a:latin typeface="Consolas"/>
+                <a:cs typeface="Consolas"/>
+              </a:rPr>
+              <a:t>90</a:t>
+            </a:r>
+            <a:r>
+              <a:rPr lang="en-US" sz="1800" dirty="0">
+                <a:solidFill>
+                  <a:srgbClr val="25373C"/>
+                </a:solidFill>
+                <a:latin typeface="Consolas"/>
+                <a:cs typeface="Consolas"/>
+              </a:rPr>
+              <a:t>,</a:t>
+            </a:r>
+          </a:p>
+          <a:p>
+            <a:pPr algn="l">
+              <a:lnSpc>
+                <a:spcPts val="2250"/>
+              </a:lnSpc>
+            </a:pPr>
+            <a:r>
+              <a:rPr lang="en-US" sz="1800" dirty="0">
+                <a:solidFill>
+                  <a:srgbClr val="25373C"/>
+                </a:solidFill>
+                <a:latin typeface="Consolas"/>
+                <a:cs typeface="Consolas"/>
+              </a:rPr>
+              <a:t>                                              </a:t>
+            </a:r>
+            <a:r>
+              <a:rPr lang="en-US" sz="1800" dirty="0">
+                <a:solidFill>
+                  <a:srgbClr val="2B4C9E"/>
+                </a:solidFill>
+                <a:latin typeface="Consolas"/>
+                <a:cs typeface="Consolas"/>
+              </a:rPr>
+              <a:t>80</a:t>
+            </a:r>
+            <a:r>
+              <a:rPr lang="en-US" sz="1800" dirty="0">
+                <a:solidFill>
+                  <a:srgbClr val="25373C"/>
+                </a:solidFill>
+                <a:latin typeface="Consolas"/>
+                <a:cs typeface="Consolas"/>
+              </a:rPr>
+              <a:t>,</a:t>
+            </a:r>
+            <a:r>
+              <a:rPr lang="en-US" sz="1800" dirty="0">
+                <a:solidFill>
+                  <a:srgbClr val="2B4C9E"/>
+                </a:solidFill>
+                <a:latin typeface="Consolas"/>
+                <a:cs typeface="Consolas"/>
+              </a:rPr>
+              <a:t>67</a:t>
+            </a:r>
+            <a:r>
+              <a:rPr lang="en-US" sz="1800" dirty="0">
+                <a:solidFill>
+                  <a:srgbClr val="25373C"/>
+                </a:solidFill>
+                <a:latin typeface="Consolas"/>
+                <a:cs typeface="Consolas"/>
+              </a:rPr>
+              <a:t>,</a:t>
+            </a:r>
+            <a:r>
+              <a:rPr lang="en-US" sz="1800" dirty="0">
+                <a:solidFill>
+                  <a:srgbClr val="2B4C9E"/>
+                </a:solidFill>
+                <a:latin typeface="Consolas"/>
+                <a:cs typeface="Consolas"/>
+              </a:rPr>
+              <a:t>54</a:t>
+            </a:r>
+            <a:r>
+              <a:rPr lang="en-US" sz="1800" dirty="0">
+                <a:solidFill>
+                  <a:srgbClr val="25373C"/>
+                </a:solidFill>
+                <a:latin typeface="Consolas"/>
+                <a:cs typeface="Consolas"/>
+              </a:rPr>
+              <a:t>,</a:t>
+            </a:r>
+            <a:r>
+              <a:rPr lang="en-US" sz="1800" dirty="0">
+                <a:solidFill>
+                  <a:srgbClr val="2B4C9E"/>
+                </a:solidFill>
+                <a:latin typeface="Consolas"/>
+                <a:cs typeface="Consolas"/>
+              </a:rPr>
+              <a:t>58</a:t>
+            </a:r>
+            <a:r>
+              <a:rPr lang="en-US" sz="1800" dirty="0">
+                <a:solidFill>
+                  <a:srgbClr val="25373C"/>
+                </a:solidFill>
+                <a:latin typeface="Consolas"/>
+                <a:cs typeface="Consolas"/>
+              </a:rPr>
+              <a:t>,</a:t>
+            </a:r>
+            <a:r>
+              <a:rPr lang="en-US" sz="1800" dirty="0">
+                <a:solidFill>
+                  <a:srgbClr val="2B4C9E"/>
+                </a:solidFill>
+                <a:latin typeface="Consolas"/>
+                <a:cs typeface="Consolas"/>
+              </a:rPr>
+              <a:t>39</a:t>
+            </a:r>
+            <a:r>
+              <a:rPr lang="en-US" sz="1800" dirty="0">
+                <a:solidFill>
+                  <a:srgbClr val="25373C"/>
+                </a:solidFill>
+                <a:latin typeface="Consolas"/>
+                <a:cs typeface="Consolas"/>
+              </a:rPr>
+              <a:t>,</a:t>
+            </a:r>
+            <a:r>
+              <a:rPr lang="en-US" sz="1800" dirty="0">
+                <a:solidFill>
+                  <a:srgbClr val="2B4C9E"/>
+                </a:solidFill>
+                <a:latin typeface="Consolas"/>
+                <a:cs typeface="Consolas"/>
+              </a:rPr>
+              <a:t>42</a:t>
+            </a:r>
+            <a:r>
+              <a:rPr lang="en-US" sz="1800" dirty="0">
+                <a:solidFill>
+                  <a:srgbClr val="25373C"/>
+                </a:solidFill>
+                <a:latin typeface="Consolas"/>
+                <a:cs typeface="Consolas"/>
+              </a:rPr>
+              <a:t>,</a:t>
+            </a:r>
+            <a:r>
+              <a:rPr lang="en-US" sz="1800" dirty="0">
+                <a:solidFill>
+                  <a:srgbClr val="2B4C9E"/>
+                </a:solidFill>
+                <a:latin typeface="Consolas"/>
+                <a:cs typeface="Consolas"/>
+              </a:rPr>
+              <a:t>23</a:t>
+            </a:r>
+            <a:r>
+              <a:rPr lang="en-US" sz="1800" dirty="0">
+                <a:solidFill>
+                  <a:srgbClr val="25373C"/>
+                </a:solidFill>
+                <a:latin typeface="Consolas"/>
+                <a:cs typeface="Consolas"/>
+              </a:rPr>
+              <a:t>,</a:t>
+            </a:r>
+            <a:r>
+              <a:rPr lang="en-US" sz="1800" dirty="0">
+                <a:solidFill>
+                  <a:srgbClr val="2B4C9E"/>
+                </a:solidFill>
+                <a:latin typeface="Consolas"/>
+                <a:cs typeface="Consolas"/>
+              </a:rPr>
+              <a:t>23</a:t>
+            </a:r>
+            <a:r>
+              <a:rPr lang="en-US" sz="1800" dirty="0">
+                <a:solidFill>
+                  <a:srgbClr val="25373C"/>
+                </a:solidFill>
+                <a:latin typeface="Consolas"/>
+                <a:cs typeface="Consolas"/>
+              </a:rPr>
+              <a:t>)</a:t>
+            </a:r>
+          </a:p>
+          <a:p>
+            <a:pPr algn="l">
+              <a:lnSpc>
+                <a:spcPts val="2250"/>
+              </a:lnSpc>
+            </a:pPr>
+            <a:r>
+              <a:rPr lang="en-US" sz="1800" dirty="0">
+                <a:solidFill>
+                  <a:srgbClr val="25373C"/>
+                </a:solidFill>
+                <a:latin typeface="Consolas"/>
+                <a:cs typeface="Consolas"/>
+              </a:rPr>
+              <a:t>temp = </a:t>
+            </a:r>
+            <a:r>
+              <a:rPr lang="en-US" sz="1800" dirty="0">
+                <a:solidFill>
+                  <a:srgbClr val="2B4C9E"/>
+                </a:solidFill>
+                <a:latin typeface="Consolas"/>
+                <a:cs typeface="Consolas"/>
+              </a:rPr>
+              <a:t>c</a:t>
+            </a:r>
+            <a:r>
+              <a:rPr lang="en-US" sz="1800" dirty="0">
+                <a:solidFill>
+                  <a:srgbClr val="25373C"/>
+                </a:solidFill>
+                <a:latin typeface="Consolas"/>
+                <a:cs typeface="Consolas"/>
+              </a:rPr>
+              <a:t>(</a:t>
+            </a:r>
+            <a:r>
+              <a:rPr lang="en-US" sz="1800" dirty="0">
+                <a:solidFill>
+                  <a:srgbClr val="2B4C9E"/>
+                </a:solidFill>
+                <a:latin typeface="Consolas"/>
+                <a:cs typeface="Consolas"/>
+              </a:rPr>
+              <a:t>15.1</a:t>
+            </a:r>
+            <a:r>
+              <a:rPr lang="en-US" sz="1800" dirty="0">
+                <a:solidFill>
+                  <a:srgbClr val="25373C"/>
+                </a:solidFill>
+                <a:latin typeface="Consolas"/>
+                <a:cs typeface="Consolas"/>
+              </a:rPr>
+              <a:t>,</a:t>
+            </a:r>
+            <a:r>
+              <a:rPr lang="en-US" sz="1800" dirty="0">
+                <a:solidFill>
+                  <a:srgbClr val="2B4C9E"/>
+                </a:solidFill>
+                <a:latin typeface="Consolas"/>
+                <a:cs typeface="Consolas"/>
+              </a:rPr>
+              <a:t>13.3</a:t>
+            </a:r>
+            <a:r>
+              <a:rPr lang="en-US" sz="1800" dirty="0">
+                <a:solidFill>
+                  <a:srgbClr val="25373C"/>
+                </a:solidFill>
+                <a:latin typeface="Consolas"/>
+                <a:cs typeface="Consolas"/>
+              </a:rPr>
+              <a:t>,</a:t>
+            </a:r>
+            <a:r>
+              <a:rPr lang="en-US" sz="1800" dirty="0">
+                <a:solidFill>
+                  <a:srgbClr val="2B4C9E"/>
+                </a:solidFill>
+                <a:latin typeface="Consolas"/>
+                <a:cs typeface="Consolas"/>
+              </a:rPr>
+              <a:t>15.3</a:t>
+            </a:r>
+            <a:r>
+              <a:rPr lang="en-US" sz="1800" dirty="0">
+                <a:solidFill>
+                  <a:srgbClr val="25373C"/>
+                </a:solidFill>
+                <a:latin typeface="Consolas"/>
+                <a:cs typeface="Consolas"/>
+              </a:rPr>
+              <a:t>,</a:t>
+            </a:r>
+            <a:r>
+              <a:rPr lang="en-US" sz="1800" dirty="0">
+                <a:solidFill>
+                  <a:srgbClr val="2B4C9E"/>
+                </a:solidFill>
+                <a:latin typeface="Consolas"/>
+                <a:cs typeface="Consolas"/>
+              </a:rPr>
+              <a:t>13.3</a:t>
+            </a:r>
+            <a:r>
+              <a:rPr lang="en-US" sz="1800" dirty="0">
+                <a:solidFill>
+                  <a:srgbClr val="25373C"/>
+                </a:solidFill>
+                <a:latin typeface="Consolas"/>
+                <a:cs typeface="Consolas"/>
+              </a:rPr>
+              <a:t>,</a:t>
+            </a:r>
+            <a:r>
+              <a:rPr lang="en-US" sz="1800" dirty="0">
+                <a:solidFill>
+                  <a:srgbClr val="2B4C9E"/>
+                </a:solidFill>
+                <a:latin typeface="Consolas"/>
+                <a:cs typeface="Consolas"/>
+              </a:rPr>
+              <a:t>14.6</a:t>
+            </a:r>
+            <a:r>
+              <a:rPr lang="en-US" sz="1800" dirty="0">
+                <a:solidFill>
+                  <a:srgbClr val="25373C"/>
+                </a:solidFill>
+                <a:latin typeface="Consolas"/>
+                <a:cs typeface="Consolas"/>
+              </a:rPr>
+              <a:t>,</a:t>
+            </a:r>
+            <a:r>
+              <a:rPr lang="en-US" sz="1800" dirty="0">
+                <a:solidFill>
+                  <a:srgbClr val="2B4C9E"/>
+                </a:solidFill>
+                <a:latin typeface="Consolas"/>
+                <a:cs typeface="Consolas"/>
+              </a:rPr>
+              <a:t>15.6</a:t>
+            </a:r>
+            <a:r>
+              <a:rPr lang="en-US" sz="1800" dirty="0">
+                <a:solidFill>
+                  <a:srgbClr val="25373C"/>
+                </a:solidFill>
+                <a:latin typeface="Consolas"/>
+                <a:cs typeface="Consolas"/>
+              </a:rPr>
+              <a:t>,</a:t>
+            </a:r>
+            <a:r>
+              <a:rPr lang="en-US" sz="1800" dirty="0">
+                <a:solidFill>
+                  <a:srgbClr val="2B4C9E"/>
+                </a:solidFill>
+                <a:latin typeface="Consolas"/>
+                <a:cs typeface="Consolas"/>
+              </a:rPr>
+              <a:t>13.1</a:t>
+            </a:r>
+            <a:r>
+              <a:rPr lang="en-US" sz="1800" dirty="0">
+                <a:solidFill>
+                  <a:srgbClr val="25373C"/>
+                </a:solidFill>
+                <a:latin typeface="Consolas"/>
+                <a:cs typeface="Consolas"/>
+              </a:rPr>
+              <a:t>,</a:t>
+            </a:r>
+            <a:r>
+              <a:rPr lang="en-US" sz="1800" dirty="0">
+                <a:solidFill>
+                  <a:srgbClr val="2B4C9E"/>
+                </a:solidFill>
+                <a:latin typeface="Consolas"/>
+                <a:cs typeface="Consolas"/>
+              </a:rPr>
+              <a:t>13.1</a:t>
+            </a:r>
+            <a:r>
+              <a:rPr lang="en-US" sz="1800" dirty="0">
+                <a:solidFill>
+                  <a:srgbClr val="25373C"/>
+                </a:solidFill>
+                <a:latin typeface="Consolas"/>
+                <a:cs typeface="Consolas"/>
+              </a:rPr>
+              <a:t>,</a:t>
+            </a:r>
+            <a:r>
+              <a:rPr lang="en-US" sz="1800" dirty="0">
+                <a:solidFill>
+                  <a:srgbClr val="2B4C9E"/>
+                </a:solidFill>
+                <a:latin typeface="Consolas"/>
+                <a:cs typeface="Consolas"/>
+              </a:rPr>
+              <a:t>15.0</a:t>
+            </a:r>
+            <a:r>
+              <a:rPr lang="en-US" sz="1800" dirty="0">
+                <a:solidFill>
+                  <a:srgbClr val="25373C"/>
+                </a:solidFill>
+                <a:latin typeface="Consolas"/>
+                <a:cs typeface="Consolas"/>
+              </a:rPr>
+              <a:t>,</a:t>
+            </a:r>
+            <a:r>
+              <a:rPr lang="en-US" sz="1800" dirty="0">
+                <a:solidFill>
+                  <a:srgbClr val="2B4C9E"/>
+                </a:solidFill>
+                <a:latin typeface="Consolas"/>
+                <a:cs typeface="Consolas"/>
+              </a:rPr>
+              <a:t>11.7</a:t>
+            </a:r>
+            <a:r>
+              <a:rPr lang="en-US" sz="1800" dirty="0">
+                <a:solidFill>
+                  <a:srgbClr val="25373C"/>
+                </a:solidFill>
+                <a:latin typeface="Consolas"/>
+                <a:cs typeface="Consolas"/>
+              </a:rPr>
+              <a:t>,</a:t>
+            </a:r>
+            <a:r>
+              <a:rPr lang="en-US" sz="1800" dirty="0">
+                <a:solidFill>
+                  <a:srgbClr val="2B4C9E"/>
+                </a:solidFill>
+                <a:latin typeface="Consolas"/>
+                <a:cs typeface="Consolas"/>
+              </a:rPr>
+              <a:t>15.3</a:t>
+            </a:r>
+            <a:r>
+              <a:rPr lang="en-US" sz="1800" dirty="0">
+                <a:solidFill>
+                  <a:srgbClr val="25373C"/>
+                </a:solidFill>
+                <a:latin typeface="Consolas"/>
+                <a:cs typeface="Consolas"/>
+              </a:rPr>
+              <a:t>,</a:t>
+            </a:r>
+            <a:r>
+              <a:rPr lang="en-US" sz="1800" dirty="0">
+                <a:solidFill>
+                  <a:srgbClr val="2B4C9E"/>
+                </a:solidFill>
+                <a:latin typeface="Consolas"/>
+                <a:cs typeface="Consolas"/>
+              </a:rPr>
+              <a:t>14.4</a:t>
+            </a:r>
+            <a:r>
+              <a:rPr lang="en-US" sz="1800" dirty="0">
+                <a:solidFill>
+                  <a:srgbClr val="25373C"/>
+                </a:solidFill>
+                <a:latin typeface="Consolas"/>
+                <a:cs typeface="Consolas"/>
+              </a:rPr>
+              <a:t>,</a:t>
+            </a:r>
+          </a:p>
+          <a:p>
+            <a:pPr algn="l">
+              <a:lnSpc>
+                <a:spcPts val="2250"/>
+              </a:lnSpc>
+            </a:pPr>
+            <a:r>
+              <a:rPr lang="en-US" sz="1800" dirty="0">
+                <a:solidFill>
+                  <a:srgbClr val="25373C"/>
+                </a:solidFill>
+                <a:latin typeface="Consolas"/>
+                <a:cs typeface="Consolas"/>
+              </a:rPr>
+              <a:t>              </a:t>
+            </a:r>
+            <a:r>
+              <a:rPr lang="en-US" sz="1800" dirty="0">
+                <a:solidFill>
+                  <a:srgbClr val="2B4C9E"/>
+                </a:solidFill>
+                <a:latin typeface="Consolas"/>
+                <a:cs typeface="Consolas"/>
+              </a:rPr>
+              <a:t>14.4</a:t>
+            </a:r>
+            <a:r>
+              <a:rPr lang="en-US" sz="1800" dirty="0">
+                <a:solidFill>
+                  <a:srgbClr val="25373C"/>
+                </a:solidFill>
+                <a:latin typeface="Consolas"/>
+                <a:cs typeface="Consolas"/>
+              </a:rPr>
+              <a:t>,</a:t>
+            </a:r>
+            <a:r>
+              <a:rPr lang="en-US" sz="1800" dirty="0">
+                <a:solidFill>
+                  <a:srgbClr val="2B4C9E"/>
+                </a:solidFill>
+                <a:latin typeface="Consolas"/>
+                <a:cs typeface="Consolas"/>
+              </a:rPr>
+              <a:t>12.7</a:t>
+            </a:r>
+            <a:r>
+              <a:rPr lang="en-US" sz="1800" dirty="0">
+                <a:solidFill>
+                  <a:srgbClr val="25373C"/>
+                </a:solidFill>
+                <a:latin typeface="Consolas"/>
+                <a:cs typeface="Consolas"/>
+              </a:rPr>
+              <a:t>,</a:t>
+            </a:r>
+            <a:r>
+              <a:rPr lang="en-US" sz="1800" dirty="0">
+                <a:solidFill>
+                  <a:srgbClr val="2B4C9E"/>
+                </a:solidFill>
+                <a:latin typeface="Consolas"/>
+                <a:cs typeface="Consolas"/>
+              </a:rPr>
+              <a:t>11.7</a:t>
+            </a:r>
+            <a:r>
+              <a:rPr lang="en-US" sz="1800" dirty="0">
+                <a:solidFill>
+                  <a:srgbClr val="25373C"/>
+                </a:solidFill>
+                <a:latin typeface="Consolas"/>
+                <a:cs typeface="Consolas"/>
+              </a:rPr>
+              <a:t>,</a:t>
+            </a:r>
+            <a:r>
+              <a:rPr lang="en-US" sz="1800" dirty="0">
+                <a:solidFill>
+                  <a:srgbClr val="2B4C9E"/>
+                </a:solidFill>
+                <a:latin typeface="Consolas"/>
+                <a:cs typeface="Consolas"/>
+              </a:rPr>
+              <a:t>11.9</a:t>
+            </a:r>
+            <a:r>
+              <a:rPr lang="en-US" sz="1800" dirty="0">
+                <a:solidFill>
+                  <a:srgbClr val="25373C"/>
+                </a:solidFill>
+                <a:latin typeface="Consolas"/>
+                <a:cs typeface="Consolas"/>
+              </a:rPr>
+              <a:t>,</a:t>
+            </a:r>
+            <a:r>
+              <a:rPr lang="en-US" sz="1800" dirty="0">
+                <a:solidFill>
+                  <a:srgbClr val="2B4C9E"/>
+                </a:solidFill>
+                <a:latin typeface="Consolas"/>
+                <a:cs typeface="Consolas"/>
+              </a:rPr>
+              <a:t>15.9</a:t>
+            </a:r>
+            <a:r>
+              <a:rPr lang="en-US" sz="1800" dirty="0">
+                <a:solidFill>
+                  <a:srgbClr val="25373C"/>
+                </a:solidFill>
+                <a:latin typeface="Consolas"/>
+                <a:cs typeface="Consolas"/>
+              </a:rPr>
+              <a:t>,</a:t>
+            </a:r>
+            <a:r>
+              <a:rPr lang="en-US" sz="1800" dirty="0">
+                <a:solidFill>
+                  <a:srgbClr val="2B4C9E"/>
+                </a:solidFill>
+                <a:latin typeface="Consolas"/>
+                <a:cs typeface="Consolas"/>
+              </a:rPr>
+              <a:t>13.4</a:t>
+            </a:r>
+            <a:r>
+              <a:rPr lang="en-US" sz="1800" dirty="0">
+                <a:solidFill>
+                  <a:srgbClr val="25373C"/>
+                </a:solidFill>
+                <a:latin typeface="Consolas"/>
+                <a:cs typeface="Consolas"/>
+              </a:rPr>
+              <a:t>,</a:t>
+            </a:r>
+            <a:r>
+              <a:rPr lang="en-US" sz="1800" dirty="0">
+                <a:solidFill>
+                  <a:srgbClr val="2B4C9E"/>
+                </a:solidFill>
+                <a:latin typeface="Consolas"/>
+                <a:cs typeface="Consolas"/>
+              </a:rPr>
+              <a:t>14.0</a:t>
+            </a:r>
+            <a:r>
+              <a:rPr lang="en-US" sz="1800" dirty="0">
+                <a:solidFill>
+                  <a:srgbClr val="25373C"/>
+                </a:solidFill>
+                <a:latin typeface="Consolas"/>
+                <a:cs typeface="Consolas"/>
+              </a:rPr>
+              <a:t>,</a:t>
+            </a:r>
+            <a:r>
+              <a:rPr lang="en-US" sz="1800" dirty="0">
+                <a:solidFill>
+                  <a:srgbClr val="2B4C9E"/>
+                </a:solidFill>
+                <a:latin typeface="Consolas"/>
+                <a:cs typeface="Consolas"/>
+              </a:rPr>
+              <a:t>13.9</a:t>
+            </a:r>
+            <a:r>
+              <a:rPr lang="en-US" sz="1800" dirty="0">
+                <a:solidFill>
+                  <a:srgbClr val="25373C"/>
+                </a:solidFill>
+                <a:latin typeface="Consolas"/>
+                <a:cs typeface="Consolas"/>
+              </a:rPr>
+              <a:t>,</a:t>
+            </a:r>
+            <a:r>
+              <a:rPr lang="en-US" sz="1800" dirty="0">
+                <a:solidFill>
+                  <a:srgbClr val="2B4C9E"/>
+                </a:solidFill>
+                <a:latin typeface="Consolas"/>
+                <a:cs typeface="Consolas"/>
+              </a:rPr>
+              <a:t>12.9</a:t>
+            </a:r>
+            <a:r>
+              <a:rPr lang="en-US" sz="1800" dirty="0">
+                <a:solidFill>
+                  <a:srgbClr val="25373C"/>
+                </a:solidFill>
+                <a:latin typeface="Consolas"/>
+                <a:cs typeface="Consolas"/>
+              </a:rPr>
+              <a:t>,</a:t>
+            </a:r>
+            <a:r>
+              <a:rPr lang="en-US" sz="1800" dirty="0">
+                <a:solidFill>
+                  <a:srgbClr val="2B4C9E"/>
+                </a:solidFill>
+                <a:latin typeface="Consolas"/>
+                <a:cs typeface="Consolas"/>
+              </a:rPr>
+              <a:t>15.1</a:t>
+            </a:r>
+            <a:r>
+              <a:rPr lang="en-US" sz="1800" dirty="0">
+                <a:solidFill>
+                  <a:srgbClr val="25373C"/>
+                </a:solidFill>
+                <a:latin typeface="Consolas"/>
+                <a:cs typeface="Consolas"/>
+              </a:rPr>
+              <a:t>,</a:t>
+            </a:r>
+            <a:r>
+              <a:rPr lang="en-US" sz="1800" dirty="0">
+                <a:solidFill>
+                  <a:srgbClr val="2B4C9E"/>
+                </a:solidFill>
+                <a:latin typeface="Consolas"/>
+                <a:cs typeface="Consolas"/>
+              </a:rPr>
+              <a:t>13.0</a:t>
+            </a:r>
+            <a:r>
+              <a:rPr lang="en-US" sz="1800" dirty="0">
+                <a:solidFill>
+                  <a:srgbClr val="25373C"/>
+                </a:solidFill>
+                <a:latin typeface="Consolas"/>
+                <a:cs typeface="Consolas"/>
+              </a:rPr>
+              <a:t>)</a:t>
+            </a:r>
+          </a:p>
+          <a:p>
+            <a:pPr algn="l">
+              <a:lnSpc>
+                <a:spcPts val="2250"/>
+              </a:lnSpc>
+            </a:pPr>
+            <a:r>
+              <a:rPr lang="en-US" sz="1800" dirty="0">
+                <a:solidFill>
+                  <a:srgbClr val="25373C"/>
+                </a:solidFill>
+                <a:latin typeface="Consolas"/>
+                <a:cs typeface="Consolas"/>
+              </a:rPr>
+              <a:t>rainfall = </a:t>
+            </a:r>
+            <a:r>
+              <a:rPr lang="en-US" sz="1800" dirty="0">
+                <a:solidFill>
+                  <a:srgbClr val="2B4C9E"/>
+                </a:solidFill>
+                <a:latin typeface="Consolas"/>
+                <a:cs typeface="Consolas"/>
+              </a:rPr>
+              <a:t>c</a:t>
+            </a:r>
+            <a:r>
+              <a:rPr lang="en-US" sz="1800" dirty="0">
+                <a:solidFill>
+                  <a:srgbClr val="25373C"/>
+                </a:solidFill>
+                <a:latin typeface="Consolas"/>
+                <a:cs typeface="Consolas"/>
+              </a:rPr>
+              <a:t>(</a:t>
+            </a:r>
+            <a:r>
+              <a:rPr lang="en-US" sz="1800" dirty="0">
+                <a:solidFill>
+                  <a:srgbClr val="2B4C9E"/>
+                </a:solidFill>
+                <a:latin typeface="Consolas"/>
+                <a:cs typeface="Consolas"/>
+              </a:rPr>
+              <a:t>67</a:t>
+            </a:r>
+            <a:r>
+              <a:rPr lang="en-US" sz="1800" dirty="0">
+                <a:solidFill>
+                  <a:srgbClr val="25373C"/>
+                </a:solidFill>
+                <a:latin typeface="Consolas"/>
+                <a:cs typeface="Consolas"/>
+              </a:rPr>
+              <a:t>,</a:t>
+            </a:r>
+            <a:r>
+              <a:rPr lang="en-US" sz="1800" dirty="0">
+                <a:solidFill>
+                  <a:srgbClr val="2B4C9E"/>
+                </a:solidFill>
+                <a:latin typeface="Consolas"/>
+                <a:cs typeface="Consolas"/>
+              </a:rPr>
+              <a:t>52</a:t>
+            </a:r>
+            <a:r>
+              <a:rPr lang="en-US" sz="1800" dirty="0">
+                <a:solidFill>
+                  <a:srgbClr val="25373C"/>
+                </a:solidFill>
+                <a:latin typeface="Consolas"/>
+                <a:cs typeface="Consolas"/>
+              </a:rPr>
+              <a:t>,</a:t>
+            </a:r>
+            <a:r>
+              <a:rPr lang="en-US" sz="1800" dirty="0">
+                <a:solidFill>
+                  <a:srgbClr val="2B4C9E"/>
+                </a:solidFill>
+                <a:latin typeface="Consolas"/>
+                <a:cs typeface="Consolas"/>
+              </a:rPr>
+              <a:t>88</a:t>
+            </a:r>
+            <a:r>
+              <a:rPr lang="en-US" sz="1800" dirty="0">
+                <a:solidFill>
+                  <a:srgbClr val="25373C"/>
+                </a:solidFill>
+                <a:latin typeface="Consolas"/>
+                <a:cs typeface="Consolas"/>
+              </a:rPr>
+              <a:t>,</a:t>
+            </a:r>
+            <a:r>
+              <a:rPr lang="en-US" sz="1800" dirty="0">
+                <a:solidFill>
+                  <a:srgbClr val="2B4C9E"/>
+                </a:solidFill>
+                <a:latin typeface="Consolas"/>
+                <a:cs typeface="Consolas"/>
+              </a:rPr>
+              <a:t>61</a:t>
+            </a:r>
+            <a:r>
+              <a:rPr lang="en-US" sz="1800" dirty="0">
+                <a:solidFill>
+                  <a:srgbClr val="25373C"/>
+                </a:solidFill>
+                <a:latin typeface="Consolas"/>
+                <a:cs typeface="Consolas"/>
+              </a:rPr>
+              <a:t>,</a:t>
+            </a:r>
+            <a:r>
+              <a:rPr lang="en-US" sz="1800" dirty="0">
+                <a:solidFill>
+                  <a:srgbClr val="2B4C9E"/>
+                </a:solidFill>
+                <a:latin typeface="Consolas"/>
+                <a:cs typeface="Consolas"/>
+              </a:rPr>
+              <a:t>32</a:t>
+            </a:r>
+            <a:r>
+              <a:rPr lang="en-US" sz="1800" dirty="0">
+                <a:solidFill>
+                  <a:srgbClr val="25373C"/>
+                </a:solidFill>
+                <a:latin typeface="Consolas"/>
+                <a:cs typeface="Consolas"/>
+              </a:rPr>
+              <a:t>,</a:t>
+            </a:r>
+            <a:r>
+              <a:rPr lang="en-US" sz="1800" dirty="0">
+                <a:solidFill>
+                  <a:srgbClr val="2B4C9E"/>
+                </a:solidFill>
+                <a:latin typeface="Consolas"/>
+                <a:cs typeface="Consolas"/>
+              </a:rPr>
+              <a:t>36</a:t>
+            </a:r>
+            <a:r>
+              <a:rPr lang="en-US" sz="1800" dirty="0">
+                <a:solidFill>
+                  <a:srgbClr val="25373C"/>
+                </a:solidFill>
+                <a:latin typeface="Consolas"/>
+                <a:cs typeface="Consolas"/>
+              </a:rPr>
+              <a:t>,</a:t>
+            </a:r>
+            <a:r>
+              <a:rPr lang="en-US" sz="1800" dirty="0">
+                <a:solidFill>
+                  <a:srgbClr val="2B4C9E"/>
+                </a:solidFill>
+                <a:latin typeface="Consolas"/>
+                <a:cs typeface="Consolas"/>
+              </a:rPr>
+              <a:t>72</a:t>
+            </a:r>
+            <a:r>
+              <a:rPr lang="en-US" sz="1800" dirty="0">
+                <a:solidFill>
+                  <a:srgbClr val="25373C"/>
+                </a:solidFill>
+                <a:latin typeface="Consolas"/>
+                <a:cs typeface="Consolas"/>
+              </a:rPr>
+              <a:t>,</a:t>
+            </a:r>
+            <a:r>
+              <a:rPr lang="en-US" sz="1800" dirty="0">
+                <a:solidFill>
+                  <a:srgbClr val="2B4C9E"/>
+                </a:solidFill>
+                <a:latin typeface="Consolas"/>
+                <a:cs typeface="Consolas"/>
+              </a:rPr>
+              <a:t>43</a:t>
+            </a:r>
+            <a:r>
+              <a:rPr lang="en-US" sz="1800" dirty="0">
+                <a:solidFill>
+                  <a:srgbClr val="25373C"/>
+                </a:solidFill>
+                <a:latin typeface="Consolas"/>
+                <a:cs typeface="Consolas"/>
+              </a:rPr>
+              <a:t>,</a:t>
+            </a:r>
+            <a:r>
+              <a:rPr lang="en-US" sz="1800" dirty="0">
+                <a:solidFill>
+                  <a:srgbClr val="2B4C9E"/>
+                </a:solidFill>
+                <a:latin typeface="Consolas"/>
+                <a:cs typeface="Consolas"/>
+              </a:rPr>
+              <a:t>92</a:t>
+            </a:r>
+            <a:r>
+              <a:rPr lang="en-US" sz="1800" dirty="0">
+                <a:solidFill>
+                  <a:srgbClr val="25373C"/>
+                </a:solidFill>
+                <a:latin typeface="Consolas"/>
+                <a:cs typeface="Consolas"/>
+              </a:rPr>
+              <a:t>,</a:t>
+            </a:r>
+            <a:r>
+              <a:rPr lang="en-US" sz="1800" dirty="0">
+                <a:solidFill>
+                  <a:srgbClr val="2B4C9E"/>
+                </a:solidFill>
+                <a:latin typeface="Consolas"/>
+                <a:cs typeface="Consolas"/>
+              </a:rPr>
+              <a:t>32</a:t>
+            </a:r>
+            <a:r>
+              <a:rPr lang="en-US" sz="1800" dirty="0">
+                <a:solidFill>
+                  <a:srgbClr val="25373C"/>
+                </a:solidFill>
+                <a:latin typeface="Consolas"/>
+                <a:cs typeface="Consolas"/>
+              </a:rPr>
+              <a:t>,</a:t>
+            </a:r>
+            <a:r>
+              <a:rPr lang="en-US" sz="1800" dirty="0">
+                <a:solidFill>
+                  <a:srgbClr val="2B4C9E"/>
+                </a:solidFill>
+                <a:latin typeface="Consolas"/>
+                <a:cs typeface="Consolas"/>
+              </a:rPr>
+              <a:t>86</a:t>
+            </a:r>
+            <a:r>
+              <a:rPr lang="en-US" sz="1800" dirty="0">
+                <a:solidFill>
+                  <a:srgbClr val="25373C"/>
+                </a:solidFill>
+                <a:latin typeface="Consolas"/>
+                <a:cs typeface="Consolas"/>
+              </a:rPr>
+              <a:t>,</a:t>
+            </a:r>
+            <a:r>
+              <a:rPr lang="en-US" sz="1800" dirty="0">
+                <a:solidFill>
+                  <a:srgbClr val="2B4C9E"/>
+                </a:solidFill>
+                <a:latin typeface="Consolas"/>
+                <a:cs typeface="Consolas"/>
+              </a:rPr>
+              <a:t>28</a:t>
+            </a:r>
+            <a:r>
+              <a:rPr lang="en-US" sz="1800" dirty="0">
+                <a:solidFill>
+                  <a:srgbClr val="25373C"/>
+                </a:solidFill>
+                <a:latin typeface="Consolas"/>
+                <a:cs typeface="Consolas"/>
+              </a:rPr>
+              <a:t>,</a:t>
+            </a:r>
+            <a:r>
+              <a:rPr lang="en-US" sz="1800" dirty="0">
+                <a:solidFill>
+                  <a:srgbClr val="2B4C9E"/>
+                </a:solidFill>
+                <a:latin typeface="Consolas"/>
+                <a:cs typeface="Consolas"/>
+              </a:rPr>
+              <a:t>57</a:t>
+            </a:r>
+            <a:r>
+              <a:rPr lang="en-US" sz="1800" dirty="0">
+                <a:solidFill>
+                  <a:srgbClr val="25373C"/>
+                </a:solidFill>
+                <a:latin typeface="Consolas"/>
+                <a:cs typeface="Consolas"/>
+              </a:rPr>
+              <a:t>,</a:t>
+            </a:r>
+            <a:r>
+              <a:rPr lang="en-US" sz="1800" dirty="0">
+                <a:solidFill>
+                  <a:srgbClr val="2B4C9E"/>
+                </a:solidFill>
+                <a:latin typeface="Consolas"/>
+                <a:cs typeface="Consolas"/>
+              </a:rPr>
+              <a:t>55</a:t>
+            </a:r>
+            <a:r>
+              <a:rPr lang="en-US" sz="1800" dirty="0">
+                <a:solidFill>
+                  <a:srgbClr val="25373C"/>
+                </a:solidFill>
+                <a:latin typeface="Consolas"/>
+                <a:cs typeface="Consolas"/>
+              </a:rPr>
+              <a:t>,</a:t>
+            </a:r>
+            <a:r>
+              <a:rPr lang="en-US" sz="1800" dirty="0">
+                <a:solidFill>
+                  <a:srgbClr val="2B4C9E"/>
+                </a:solidFill>
+                <a:latin typeface="Consolas"/>
+                <a:cs typeface="Consolas"/>
+              </a:rPr>
+              <a:t>66</a:t>
+            </a:r>
+            <a:r>
+              <a:rPr lang="en-US" sz="1800" dirty="0">
+                <a:solidFill>
+                  <a:srgbClr val="25373C"/>
+                </a:solidFill>
+                <a:latin typeface="Consolas"/>
+                <a:cs typeface="Consolas"/>
+              </a:rPr>
+              <a:t>,</a:t>
+            </a:r>
+            <a:r>
+              <a:rPr lang="en-US" sz="1800" dirty="0">
+                <a:solidFill>
+                  <a:srgbClr val="2B4C9E"/>
+                </a:solidFill>
+                <a:latin typeface="Consolas"/>
+                <a:cs typeface="Consolas"/>
+              </a:rPr>
+              <a:t>26</a:t>
+            </a:r>
+            <a:r>
+              <a:rPr lang="en-US" sz="1800" dirty="0">
+                <a:solidFill>
+                  <a:srgbClr val="25373C"/>
+                </a:solidFill>
+                <a:latin typeface="Consolas"/>
+                <a:cs typeface="Consolas"/>
+              </a:rPr>
+              <a:t>,</a:t>
+            </a:r>
+            <a:r>
+              <a:rPr lang="en-US" sz="1800" dirty="0">
+                <a:solidFill>
+                  <a:srgbClr val="2B4C9E"/>
+                </a:solidFill>
+                <a:latin typeface="Consolas"/>
+                <a:cs typeface="Consolas"/>
+              </a:rPr>
+              <a:t>28</a:t>
+            </a:r>
+            <a:r>
+              <a:rPr lang="en-US" sz="1800" dirty="0">
+                <a:solidFill>
+                  <a:srgbClr val="25373C"/>
+                </a:solidFill>
+                <a:latin typeface="Consolas"/>
+                <a:cs typeface="Consolas"/>
+              </a:rPr>
+              <a:t>,</a:t>
+            </a:r>
+            <a:r>
+              <a:rPr lang="en-US" sz="1800" dirty="0">
+                <a:solidFill>
+                  <a:srgbClr val="2B4C9E"/>
+                </a:solidFill>
+                <a:latin typeface="Consolas"/>
+                <a:cs typeface="Consolas"/>
+              </a:rPr>
+              <a:t>96</a:t>
+            </a:r>
+            <a:r>
+              <a:rPr lang="en-US" sz="1800" dirty="0">
+                <a:solidFill>
+                  <a:srgbClr val="25373C"/>
+                </a:solidFill>
+                <a:latin typeface="Consolas"/>
+                <a:cs typeface="Consolas"/>
+              </a:rPr>
+              <a:t>,</a:t>
+            </a:r>
+            <a:r>
+              <a:rPr lang="en-US" sz="1800" dirty="0">
+                <a:solidFill>
+                  <a:srgbClr val="2B4C9E"/>
+                </a:solidFill>
+                <a:latin typeface="Consolas"/>
+                <a:cs typeface="Consolas"/>
+              </a:rPr>
+              <a:t>48</a:t>
+            </a:r>
+            <a:r>
+              <a:rPr lang="en-US" sz="1800" dirty="0">
+                <a:solidFill>
+                  <a:srgbClr val="25373C"/>
+                </a:solidFill>
+                <a:latin typeface="Consolas"/>
+                <a:cs typeface="Consolas"/>
+              </a:rPr>
+              <a:t>,</a:t>
+            </a:r>
+          </a:p>
+          <a:p>
+            <a:pPr algn="l">
+              <a:lnSpc>
+                <a:spcPts val="2250"/>
+              </a:lnSpc>
+            </a:pPr>
+            <a:r>
+              <a:rPr lang="en-US" sz="1800" dirty="0">
+                <a:solidFill>
+                  <a:srgbClr val="25373C"/>
+                </a:solidFill>
+                <a:latin typeface="Consolas"/>
+                <a:cs typeface="Consolas"/>
+              </a:rPr>
+              <a:t>                                                          </a:t>
+            </a:r>
+            <a:r>
+              <a:rPr lang="en-US" sz="1800" dirty="0">
+                <a:solidFill>
+                  <a:srgbClr val="2B4C9E"/>
+                </a:solidFill>
+                <a:latin typeface="Consolas"/>
+                <a:cs typeface="Consolas"/>
+              </a:rPr>
+              <a:t>90</a:t>
+            </a:r>
+            <a:r>
+              <a:rPr lang="en-US" sz="1800" dirty="0">
+                <a:solidFill>
+                  <a:srgbClr val="25373C"/>
+                </a:solidFill>
+                <a:latin typeface="Consolas"/>
+                <a:cs typeface="Consolas"/>
+              </a:rPr>
+              <a:t>,</a:t>
+            </a:r>
+            <a:r>
+              <a:rPr lang="en-US" sz="1800" dirty="0">
+                <a:solidFill>
+                  <a:srgbClr val="2B4C9E"/>
+                </a:solidFill>
+                <a:latin typeface="Consolas"/>
+                <a:cs typeface="Consolas"/>
+              </a:rPr>
+              <a:t>86</a:t>
+            </a:r>
+            <a:r>
+              <a:rPr lang="en-US" sz="1800" dirty="0">
+                <a:solidFill>
+                  <a:srgbClr val="25373C"/>
+                </a:solidFill>
+                <a:latin typeface="Consolas"/>
+                <a:cs typeface="Consolas"/>
+              </a:rPr>
+              <a:t>,</a:t>
+            </a:r>
+            <a:r>
+              <a:rPr lang="en-US" sz="1800" dirty="0">
+                <a:solidFill>
+                  <a:srgbClr val="2B4C9E"/>
+                </a:solidFill>
+                <a:latin typeface="Consolas"/>
+                <a:cs typeface="Consolas"/>
+              </a:rPr>
+              <a:t>78</a:t>
+            </a:r>
+            <a:r>
+              <a:rPr lang="en-US" sz="1800" dirty="0">
+                <a:solidFill>
+                  <a:srgbClr val="25373C"/>
+                </a:solidFill>
+                <a:latin typeface="Consolas"/>
+                <a:cs typeface="Consolas"/>
+              </a:rPr>
+              <a:t>,</a:t>
+            </a:r>
+            <a:r>
+              <a:rPr lang="en-US" sz="1800" dirty="0">
+                <a:solidFill>
+                  <a:srgbClr val="2B4C9E"/>
+                </a:solidFill>
+                <a:latin typeface="Consolas"/>
+                <a:cs typeface="Consolas"/>
+              </a:rPr>
+              <a:t>87</a:t>
+            </a:r>
+            <a:r>
+              <a:rPr lang="en-US" sz="1800" dirty="0">
+                <a:solidFill>
+                  <a:srgbClr val="25373C"/>
+                </a:solidFill>
+                <a:latin typeface="Consolas"/>
+                <a:cs typeface="Consolas"/>
+              </a:rPr>
+              <a:t>)</a:t>
+            </a:r>
+          </a:p>
+          <a:p>
+            <a:pPr algn="l">
+              <a:lnSpc>
+                <a:spcPts val="2250"/>
+              </a:lnSpc>
+            </a:pPr>
+            <a:endParaRPr sz="1800" dirty="0"/>
+          </a:p>
+          <a:p>
+            <a:pPr algn="l">
+              <a:lnSpc>
+                <a:spcPts val="2250"/>
+              </a:lnSpc>
+            </a:pPr>
+            <a:r>
+              <a:rPr lang="en-US" sz="1800" dirty="0">
+                <a:solidFill>
+                  <a:srgbClr val="25373C"/>
+                </a:solidFill>
+                <a:latin typeface="Consolas"/>
+                <a:cs typeface="Consolas"/>
+              </a:rPr>
+              <a:t>year = </a:t>
+            </a:r>
+            <a:r>
+              <a:rPr lang="en-US" sz="1800" dirty="0">
+                <a:solidFill>
+                  <a:srgbClr val="2B4C9E"/>
+                </a:solidFill>
+                <a:latin typeface="Consolas"/>
+                <a:cs typeface="Consolas"/>
+              </a:rPr>
+              <a:t>seq</a:t>
+            </a:r>
+            <a:r>
+              <a:rPr lang="en-US" sz="1800" dirty="0">
+                <a:solidFill>
+                  <a:srgbClr val="25373C"/>
+                </a:solidFill>
+                <a:latin typeface="Consolas"/>
+                <a:cs typeface="Consolas"/>
+              </a:rPr>
+              <a:t>(</a:t>
+            </a:r>
+            <a:r>
+              <a:rPr lang="en-US" sz="1800" dirty="0">
+                <a:solidFill>
+                  <a:srgbClr val="2B4C9E"/>
+                </a:solidFill>
+                <a:latin typeface="Consolas"/>
+                <a:cs typeface="Consolas"/>
+              </a:rPr>
+              <a:t>1</a:t>
+            </a:r>
+            <a:r>
+              <a:rPr lang="en-US" sz="1800" dirty="0">
+                <a:solidFill>
+                  <a:srgbClr val="25373C"/>
+                </a:solidFill>
+                <a:latin typeface="Consolas"/>
+                <a:cs typeface="Consolas"/>
+              </a:rPr>
+              <a:t>,</a:t>
+            </a:r>
+            <a:r>
+              <a:rPr lang="en-US" sz="1800" dirty="0">
+                <a:solidFill>
+                  <a:srgbClr val="2B4C9E"/>
+                </a:solidFill>
+                <a:latin typeface="Consolas"/>
+                <a:cs typeface="Consolas"/>
+              </a:rPr>
+              <a:t>length</a:t>
+            </a:r>
+            <a:r>
+              <a:rPr lang="en-US" sz="1800" dirty="0">
+                <a:solidFill>
+                  <a:srgbClr val="25373C"/>
+                </a:solidFill>
+                <a:latin typeface="Consolas"/>
+                <a:cs typeface="Consolas"/>
+              </a:rPr>
+              <a:t>(nbchicks))</a:t>
+            </a:r>
+          </a:p>
+        </p:txBody>
+      </p:sp>
+      <p:sp>
+        <p:nvSpPr>
+          <p:cNvPr id="904" name="PageNum"/>
+          <p:cNvSpPr/>
+          <p:nvPr/>
+        </p:nvSpPr>
+        <p:spPr>
+          <a:xfrm>
+            <a:off x="10604500" y="6324600"/>
+            <a:ext cx="1206500" cy="304800"/>
+          </a:xfrm>
+          <a:prstGeom prst="rect">
+            <a:avLst/>
+          </a:prstGeom>
+          <a:noFill/>
+        </p:spPr>
+        <p:txBody>
+          <a:bodyPr wrap="none" lIns="0" tIns="0" rIns="0" bIns="0" anchor="ctr"/>
+          <a:lstStyle/>
+          <a:p>
+            <a:pPr algn="r"/>
+            <a:r>
+              <a:rPr lang="en-US" sz="1400" dirty="0">
+                <a:solidFill>
+                  <a:srgbClr val="808080"/>
+                </a:solidFill>
+              </a:rPr>
+              <a:t>286</a:t>
+            </a:r>
+          </a:p>
+        </p:txBody>
+      </p:sp>
     </p:spTree>
     <p:extLst>
       <p:ext uri="{BB962C8B-B14F-4D97-AF65-F5344CB8AC3E}">
-        <p14:creationId xmlns:p14="http://schemas.microsoft.com/office/powerpoint/2010/main" val="2471159629"/>
+        <p14:creationId xmlns:p14="http://schemas.microsoft.com/office/powerpoint/2010/main" val="3553683423"/>
       </p:ext>
     </p:extLst>
   </p:cSld>
@@ -18227,40 +20461,336 @@
           <a:chExt cx="0" cy="0"/>
         </a:xfrm>
       </p:grpSpPr>
-      <p:pic>
-        <p:nvPicPr>
-          <p:cNvPr id="3" name="Picture 2" descr="White Stork GLMM example figure; vector graphic could not be rendered on this system for a precise description." title="White Stork GLMM example figure; vector graphic could not be rendered on this sy">
-            <a:extLst>
-              <a:ext uri="{FF2B5EF4-FFF2-40B4-BE49-F238E27FC236}">
-                <a16:creationId xmlns:a16="http://schemas.microsoft.com/office/drawing/2014/main" id="{D5E6E01A-E578-1AF0-0616-5EF95A7FCE6B}"/>
-              </a:ext>
-            </a:extLst>
-          </p:cNvPr>
-          <p:cNvPicPr>
-            <a:picLocks noChangeAspect="1"/>
-          </p:cNvPicPr>
+      <p:sp>
+        <p:nvSpPr>
+          <p:cNvPr id="900" name="HeaderBar"/>
+          <p:cNvSpPr/>
           <p:nvPr/>
-        </p:nvPicPr>
-        <p:blipFill>
-          <a:blip r:embed="rId2"/>
-          <a:stretch>
-            <a:fillRect/>
-          </a:stretch>
-        </p:blipFill>
+        </p:nvSpPr>
         <p:spPr>
           <a:xfrm>
-            <a:off x="-8965" y="0"/>
-            <a:ext cx="12209930" cy="6858000"/>
+            <a:off x="0" y="0"/>
+            <a:ext cx="12192000" cy="787400"/>
           </a:xfrm>
           <a:prstGeom prst="rect">
             <a:avLst/>
           </a:prstGeom>
+          <a:solidFill>
+            <a:srgbClr val="23373B"/>
+          </a:solidFill>
+          <a:ln>
+            <a:noFill/>
+          </a:ln>
         </p:spPr>
-      </p:pic>
+        <p:txBody>
+          <a:bodyPr/>
+          <a:lstStyle/>
+          <a:p>
+            <a:endParaRPr/>
+          </a:p>
+        </p:txBody>
+      </p:sp>
+      <p:sp>
+        <p:nvSpPr>
+          <p:cNvPr id="903" name="TitleTxt"/>
+          <p:cNvSpPr/>
+          <p:nvPr/>
+        </p:nvSpPr>
+        <p:spPr>
+          <a:xfrm>
+            <a:off x="381000" y="0"/>
+            <a:ext cx="11557000" cy="787400"/>
+          </a:xfrm>
+          <a:prstGeom prst="rect">
+            <a:avLst/>
+          </a:prstGeom>
+          <a:noFill/>
+        </p:spPr>
+        <p:txBody>
+          <a:bodyPr wrap="square" lIns="0" tIns="0" rIns="0" bIns="0" anchor="ctr"/>
+          <a:lstStyle/>
+          <a:p>
+            <a:pPr algn="l"/>
+            <a:r>
+              <a:rPr lang="en-US" sz="2000" b="1" dirty="0">
+                <a:solidFill>
+                  <a:srgbClr val="FFFFFF"/>
+                </a:solidFill>
+              </a:rPr>
+              <a:t>Standard GLM on proportions</a:t>
+            </a:r>
+          </a:p>
+        </p:txBody>
+      </p:sp>
+      <p:sp>
+        <p:nvSpPr>
+          <p:cNvPr id="902" name="MathTxt"/>
+          <p:cNvSpPr/>
+          <p:nvPr/>
+        </p:nvSpPr>
+        <p:spPr>
+          <a:xfrm>
+            <a:off x="1016000" y="889000"/>
+            <a:ext cx="10160000" cy="5334000"/>
+          </a:xfrm>
+          <a:prstGeom prst="rect">
+            <a:avLst/>
+          </a:prstGeom>
+          <a:noFill/>
+        </p:spPr>
+        <p:txBody>
+          <a:bodyPr wrap="square" lIns="0" tIns="0" rIns="0" bIns="0" anchor="ctr"/>
+          <a:lstStyle/>
+          <a:p>
+            <a:pPr algn="ctr">
+              <a:lnSpc>
+                <a:spcPts val="4200"/>
+              </a:lnSpc>
+              <a:spcAft>
+                <a:spcPts val="600"/>
+              </a:spcAft>
+            </a:pPr>
+            <a:r>
+              <a:rPr lang="en-US" sz="2600" dirty="0">
+                <a:solidFill>
+                  <a:srgbClr val="25373C"/>
+                </a:solidFill>
+              </a:rPr>
+              <a:t>nbchicks</a:t>
+            </a:r>
+            <a:r>
+              <a:rPr lang="en-US" sz="1800" i="1" baseline="-25000" dirty="0">
+                <a:solidFill>
+                  <a:srgbClr val="25373C"/>
+                </a:solidFill>
+              </a:rPr>
+              <a:t>i</a:t>
+            </a:r>
+            <a:r>
+              <a:rPr lang="en-US" sz="2600" dirty="0">
+                <a:solidFill>
+                  <a:srgbClr val="25373C"/>
+                </a:solidFill>
+              </a:rPr>
+              <a:t> ∼ Binomial(nbpairs</a:t>
+            </a:r>
+            <a:r>
+              <a:rPr lang="en-US" sz="1800" i="1" baseline="-25000" dirty="0">
+                <a:solidFill>
+                  <a:srgbClr val="25373C"/>
+                </a:solidFill>
+              </a:rPr>
+              <a:t>i</a:t>
+            </a:r>
+            <a:r>
+              <a:rPr lang="en-US" sz="2600" dirty="0">
+                <a:solidFill>
+                  <a:srgbClr val="25373C"/>
+                </a:solidFill>
+              </a:rPr>
+              <a:t>, </a:t>
+            </a:r>
+            <a:r>
+              <a:rPr lang="en-US" sz="2600" i="1" dirty="0">
+                <a:solidFill>
+                  <a:srgbClr val="25373C"/>
+                </a:solidFill>
+              </a:rPr>
+              <a:t>p</a:t>
+            </a:r>
+            <a:r>
+              <a:rPr lang="en-US" sz="1800" i="1" baseline="-25000" dirty="0">
+                <a:solidFill>
+                  <a:srgbClr val="25373C"/>
+                </a:solidFill>
+              </a:rPr>
+              <a:t>i</a:t>
+            </a:r>
+            <a:r>
+              <a:rPr lang="en-US" sz="2600" dirty="0">
+                <a:solidFill>
+                  <a:srgbClr val="25373C"/>
+                </a:solidFill>
+              </a:rPr>
+              <a:t>)</a:t>
+            </a:r>
+          </a:p>
+          <a:p>
+            <a:pPr algn="ctr">
+              <a:lnSpc>
+                <a:spcPts val="4200"/>
+              </a:lnSpc>
+              <a:spcAft>
+                <a:spcPts val="600"/>
+              </a:spcAft>
+            </a:pPr>
+            <a:r>
+              <a:rPr lang="en-US" sz="2600" dirty="0">
+                <a:solidFill>
+                  <a:srgbClr val="25373C"/>
+                </a:solidFill>
+              </a:rPr>
+              <a:t>logit(</a:t>
+            </a:r>
+            <a:r>
+              <a:rPr lang="en-US" sz="2600" i="1" dirty="0">
+                <a:solidFill>
+                  <a:srgbClr val="25373C"/>
+                </a:solidFill>
+              </a:rPr>
+              <a:t>p</a:t>
+            </a:r>
+            <a:r>
+              <a:rPr lang="en-US" sz="1800" i="1" baseline="-25000" dirty="0">
+                <a:solidFill>
+                  <a:srgbClr val="25373C"/>
+                </a:solidFill>
+              </a:rPr>
+              <a:t>i</a:t>
+            </a:r>
+            <a:r>
+              <a:rPr lang="en-US" sz="2600" dirty="0">
+                <a:solidFill>
+                  <a:srgbClr val="25373C"/>
+                </a:solidFill>
+              </a:rPr>
+              <a:t>) = </a:t>
+            </a:r>
+            <a:r>
+              <a:rPr lang="en-US" sz="2600" i="1" dirty="0">
+                <a:solidFill>
+                  <a:srgbClr val="25373C"/>
+                </a:solidFill>
+              </a:rPr>
+              <a:t>β</a:t>
+            </a:r>
+            <a:r>
+              <a:rPr lang="en-US" sz="1800" baseline="-25000" dirty="0">
+                <a:solidFill>
+                  <a:srgbClr val="25373C"/>
+                </a:solidFill>
+              </a:rPr>
+              <a:t>0</a:t>
+            </a:r>
+            <a:r>
+              <a:rPr lang="en-US" sz="2600" dirty="0">
+                <a:solidFill>
+                  <a:srgbClr val="25373C"/>
+                </a:solidFill>
+              </a:rPr>
+              <a:t> + </a:t>
+            </a:r>
+            <a:r>
+              <a:rPr lang="en-US" sz="2600" i="1" dirty="0">
+                <a:solidFill>
+                  <a:srgbClr val="25373C"/>
+                </a:solidFill>
+              </a:rPr>
+              <a:t>β</a:t>
+            </a:r>
+            <a:r>
+              <a:rPr lang="en-US" sz="1800" baseline="-25000" dirty="0">
+                <a:solidFill>
+                  <a:srgbClr val="25373C"/>
+                </a:solidFill>
+              </a:rPr>
+              <a:t>1</a:t>
+            </a:r>
+            <a:r>
+              <a:rPr lang="en-US" sz="2600" dirty="0">
+                <a:solidFill>
+                  <a:srgbClr val="25373C"/>
+                </a:solidFill>
+              </a:rPr>
+              <a:t> temp</a:t>
+            </a:r>
+            <a:r>
+              <a:rPr lang="en-US" sz="1800" i="1" baseline="-25000" dirty="0">
+                <a:solidFill>
+                  <a:srgbClr val="25373C"/>
+                </a:solidFill>
+              </a:rPr>
+              <a:t>i</a:t>
+            </a:r>
+            <a:r>
+              <a:rPr lang="en-US" sz="2600" dirty="0">
+                <a:solidFill>
+                  <a:srgbClr val="25373C"/>
+                </a:solidFill>
+              </a:rPr>
+              <a:t> + </a:t>
+            </a:r>
+            <a:r>
+              <a:rPr lang="en-US" sz="2600" i="1" dirty="0">
+                <a:solidFill>
+                  <a:srgbClr val="25373C"/>
+                </a:solidFill>
+              </a:rPr>
+              <a:t>β</a:t>
+            </a:r>
+            <a:r>
+              <a:rPr lang="en-US" sz="1800" baseline="-25000" dirty="0">
+                <a:solidFill>
+                  <a:srgbClr val="25373C"/>
+                </a:solidFill>
+              </a:rPr>
+              <a:t>2</a:t>
+            </a:r>
+            <a:r>
+              <a:rPr lang="en-US" sz="2600" dirty="0">
+                <a:solidFill>
+                  <a:srgbClr val="25373C"/>
+                </a:solidFill>
+              </a:rPr>
+              <a:t> rainfall</a:t>
+            </a:r>
+            <a:r>
+              <a:rPr lang="en-US" sz="1800" i="1" baseline="-25000" dirty="0">
+                <a:solidFill>
+                  <a:srgbClr val="25373C"/>
+                </a:solidFill>
+              </a:rPr>
+              <a:t>i</a:t>
+            </a:r>
+          </a:p>
+        </p:txBody>
+      </p:sp>
+      <p:sp>
+        <p:nvSpPr>
+          <p:cNvPr id="904" name="PageNum"/>
+          <p:cNvSpPr/>
+          <p:nvPr/>
+        </p:nvSpPr>
+        <p:spPr>
+          <a:xfrm>
+            <a:off x="10604500" y="6324600"/>
+            <a:ext cx="1206500" cy="304800"/>
+          </a:xfrm>
+          <a:prstGeom prst="rect">
+            <a:avLst/>
+          </a:prstGeom>
+          <a:noFill/>
+        </p:spPr>
+        <p:txBody>
+          <a:bodyPr wrap="none" lIns="0" tIns="0" rIns="0" bIns="0" anchor="ctr"/>
+          <a:lstStyle/>
+          <a:p>
+            <a:pPr algn="r"/>
+            <a:r>
+              <a:rPr lang="en-US" sz="1400" dirty="0">
+                <a:solidFill>
+                  <a:srgbClr val="808080"/>
+                </a:solidFill>
+              </a:rPr>
+              <a:t>287</a:t>
+            </a:r>
+          </a:p>
+        </p:txBody>
+      </p:sp>
     </p:spTree>
     <p:extLst>
       <p:ext uri="{BB962C8B-B14F-4D97-AF65-F5344CB8AC3E}">
-        <p14:creationId xmlns:p14="http://schemas.microsoft.com/office/powerpoint/2010/main" val="1222028193"/>
+        <p14:creationId xmlns:p14="http://schemas.microsoft.com/office/powerpoint/2010/main" val="2997635599"/>
       </p:ext>
     </p:extLst>
   </p:cSld>
@@ -18287,36 +20817,6 @@
           <a:chExt cx="0" cy="0"/>
         </a:xfrm>
       </p:grpSpPr>
-      <p:pic>
-        <p:nvPicPr>
-          <p:cNvPr id="3" name="Picture 2" descr="Figure for the White Stork example on additional interannual variation not explained by weather; vector graphic could not be rendered on this system for a precise description." title="Figure for the White Stork example on additional interannual variation not expla">
-            <a:extLst>
-              <a:ext uri="{FF2B5EF4-FFF2-40B4-BE49-F238E27FC236}">
-                <a16:creationId xmlns:a16="http://schemas.microsoft.com/office/drawing/2014/main" id="{ADBA12D2-881E-793A-4646-841461288A9C}"/>
-              </a:ext>
-            </a:extLst>
-          </p:cNvPr>
-          <p:cNvPicPr>
-            <a:picLocks noChangeAspect="1"/>
-          </p:cNvPicPr>
-          <p:nvPr/>
-        </p:nvPicPr>
-        <p:blipFill>
-          <a:blip r:embed="rId2"/>
-          <a:stretch>
-            <a:fillRect/>
-          </a:stretch>
-        </p:blipFill>
-        <p:spPr>
-          <a:xfrm>
-            <a:off x="0" y="0"/>
-            <a:ext cx="12192000" cy="6847930"/>
-          </a:xfrm>
-          <a:prstGeom prst="rect">
-            <a:avLst/>
-          </a:prstGeom>
-        </p:spPr>
-      </p:pic>
       <p:sp>
         <p:nvSpPr>
           <p:cNvPr id="4" name="Rectangle 2">
@@ -18355,10 +20855,436 @@
           </a:p>
         </p:txBody>
       </p:sp>
+      <p:sp>
+        <p:nvSpPr>
+          <p:cNvPr id="901" name="CodeBg"/>
+          <p:cNvSpPr/>
+          <p:nvPr/>
+        </p:nvSpPr>
+        <p:spPr>
+          <a:xfrm>
+            <a:off x="533400" y="1752600"/>
+            <a:ext cx="9271000" cy="2921000"/>
+          </a:xfrm>
+          <a:prstGeom prst="rect">
+            <a:avLst/>
+          </a:prstGeom>
+          <a:solidFill>
+            <a:srgbClr val="F4F4F4"/>
+          </a:solidFill>
+          <a:ln>
+            <a:noFill/>
+          </a:ln>
+        </p:spPr>
+        <p:txBody>
+          <a:bodyPr/>
+          <a:lstStyle/>
+          <a:p>
+            <a:endParaRPr/>
+          </a:p>
+        </p:txBody>
+      </p:sp>
+      <p:sp>
+        <p:nvSpPr>
+          <p:cNvPr id="900" name="HeaderBar"/>
+          <p:cNvSpPr/>
+          <p:nvPr/>
+        </p:nvSpPr>
+        <p:spPr>
+          <a:xfrm>
+            <a:off x="0" y="0"/>
+            <a:ext cx="12192000" cy="787400"/>
+          </a:xfrm>
+          <a:prstGeom prst="rect">
+            <a:avLst/>
+          </a:prstGeom>
+          <a:solidFill>
+            <a:srgbClr val="23373B"/>
+          </a:solidFill>
+          <a:ln>
+            <a:noFill/>
+          </a:ln>
+        </p:spPr>
+        <p:txBody>
+          <a:bodyPr/>
+          <a:lstStyle/>
+          <a:p>
+            <a:endParaRPr/>
+          </a:p>
+        </p:txBody>
+      </p:sp>
+      <p:sp>
+        <p:nvSpPr>
+          <p:cNvPr id="903" name="TitleTxt"/>
+          <p:cNvSpPr/>
+          <p:nvPr/>
+        </p:nvSpPr>
+        <p:spPr>
+          <a:xfrm>
+            <a:off x="381000" y="0"/>
+            <a:ext cx="11557000" cy="787400"/>
+          </a:xfrm>
+          <a:prstGeom prst="rect">
+            <a:avLst/>
+          </a:prstGeom>
+          <a:noFill/>
+        </p:spPr>
+        <p:txBody>
+          <a:bodyPr wrap="square" lIns="0" tIns="0" rIns="0" bIns="0" anchor="ctr"/>
+          <a:lstStyle/>
+          <a:p>
+            <a:pPr algn="l"/>
+            <a:r>
+              <a:rPr lang="en-US" sz="2000" b="1" dirty="0">
+                <a:solidFill>
+                  <a:srgbClr val="FFFFFF"/>
+                </a:solidFill>
+              </a:rPr>
+              <a:t>Standard GLM on proportions in R</a:t>
+            </a:r>
+          </a:p>
+        </p:txBody>
+      </p:sp>
+      <p:sp>
+        <p:nvSpPr>
+          <p:cNvPr id="902" name="CodeTxt"/>
+          <p:cNvSpPr/>
+          <p:nvPr/>
+        </p:nvSpPr>
+        <p:spPr>
+          <a:xfrm>
+            <a:off x="736600" y="1905000"/>
+            <a:ext cx="10922000" cy="2667000"/>
+          </a:xfrm>
+          <a:prstGeom prst="rect">
+            <a:avLst/>
+          </a:prstGeom>
+          <a:noFill/>
+        </p:spPr>
+        <p:txBody>
+          <a:bodyPr wrap="none" lIns="0" tIns="0" rIns="0" bIns="0" anchor="t"/>
+          <a:lstStyle/>
+          <a:p>
+            <a:pPr algn="l">
+              <a:lnSpc>
+                <a:spcPts val="2050"/>
+              </a:lnSpc>
+            </a:pPr>
+            <a:r>
+              <a:rPr lang="en-US" sz="1600" dirty="0">
+                <a:solidFill>
+                  <a:srgbClr val="25373C"/>
+                </a:solidFill>
+                <a:latin typeface="Consolas"/>
+                <a:cs typeface="Consolas"/>
+              </a:rPr>
+              <a:t>stork_glm &lt;- </a:t>
+            </a:r>
+            <a:r>
+              <a:rPr lang="en-US" sz="1600" dirty="0">
+                <a:solidFill>
+                  <a:srgbClr val="2B4C9E"/>
+                </a:solidFill>
+                <a:latin typeface="Consolas"/>
+                <a:cs typeface="Consolas"/>
+              </a:rPr>
+              <a:t>glm</a:t>
+            </a:r>
+            <a:r>
+              <a:rPr lang="en-US" sz="1600" dirty="0">
+                <a:solidFill>
+                  <a:srgbClr val="25373C"/>
+                </a:solidFill>
+                <a:latin typeface="Consolas"/>
+                <a:cs typeface="Consolas"/>
+              </a:rPr>
+              <a:t>(</a:t>
+            </a:r>
+            <a:r>
+              <a:rPr lang="en-US" sz="1600" dirty="0">
+                <a:solidFill>
+                  <a:srgbClr val="2B4C9E"/>
+                </a:solidFill>
+                <a:latin typeface="Consolas"/>
+                <a:cs typeface="Consolas"/>
+              </a:rPr>
+              <a:t>cbind</a:t>
+            </a:r>
+            <a:r>
+              <a:rPr lang="en-US" sz="1600" dirty="0">
+                <a:solidFill>
+                  <a:srgbClr val="25373C"/>
+                </a:solidFill>
+                <a:latin typeface="Consolas"/>
+                <a:cs typeface="Consolas"/>
+              </a:rPr>
+              <a:t>(nbchicks,nbpairs</a:t>
+            </a:r>
+            <a:r>
+              <a:rPr lang="en-US" sz="1600" dirty="0">
+                <a:solidFill>
+                  <a:srgbClr val="C1671E"/>
+                </a:solidFill>
+                <a:latin typeface="Consolas"/>
+                <a:cs typeface="Consolas"/>
+              </a:rPr>
+              <a:t>-</a:t>
+            </a:r>
+            <a:r>
+              <a:rPr lang="en-US" sz="1600" dirty="0">
+                <a:solidFill>
+                  <a:srgbClr val="25373C"/>
+                </a:solidFill>
+                <a:latin typeface="Consolas"/>
+                <a:cs typeface="Consolas"/>
+              </a:rPr>
+              <a:t>nbchicks) </a:t>
+            </a:r>
+            <a:r>
+              <a:rPr lang="en-US" sz="1600" dirty="0">
+                <a:solidFill>
+                  <a:srgbClr val="C1671E"/>
+                </a:solidFill>
+                <a:latin typeface="Consolas"/>
+                <a:cs typeface="Consolas"/>
+              </a:rPr>
+              <a:t>~</a:t>
+            </a:r>
+            <a:r>
+              <a:rPr lang="en-US" sz="1600" dirty="0">
+                <a:solidFill>
+                  <a:srgbClr val="25373C"/>
+                </a:solidFill>
+                <a:latin typeface="Consolas"/>
+                <a:cs typeface="Consolas"/>
+              </a:rPr>
+              <a:t> temp </a:t>
+            </a:r>
+            <a:r>
+              <a:rPr lang="en-US" sz="1600" dirty="0">
+                <a:solidFill>
+                  <a:srgbClr val="C1671E"/>
+                </a:solidFill>
+                <a:latin typeface="Consolas"/>
+                <a:cs typeface="Consolas"/>
+              </a:rPr>
+              <a:t>+</a:t>
+            </a:r>
+            <a:r>
+              <a:rPr lang="en-US" sz="1600" dirty="0">
+                <a:solidFill>
+                  <a:srgbClr val="25373C"/>
+                </a:solidFill>
+                <a:latin typeface="Consolas"/>
+                <a:cs typeface="Consolas"/>
+              </a:rPr>
+              <a:t> rainfall,</a:t>
+            </a:r>
+          </a:p>
+          <a:p>
+            <a:pPr algn="l">
+              <a:lnSpc>
+                <a:spcPts val="2050"/>
+              </a:lnSpc>
+            </a:pPr>
+            <a:r>
+              <a:rPr lang="en-US" sz="1600" dirty="0">
+                <a:solidFill>
+                  <a:srgbClr val="25373C"/>
+                </a:solidFill>
+                <a:latin typeface="Consolas"/>
+                <a:cs typeface="Consolas"/>
+              </a:rPr>
+              <a:t>                                                   </a:t>
+            </a:r>
+            <a:r>
+              <a:rPr lang="en-US" sz="1600" dirty="0">
+                <a:solidFill>
+                  <a:srgbClr val="2B4C9E"/>
+                </a:solidFill>
+                <a:latin typeface="Consolas"/>
+                <a:cs typeface="Consolas"/>
+              </a:rPr>
+              <a:t>family</a:t>
+            </a:r>
+            <a:r>
+              <a:rPr lang="en-US" sz="1600" dirty="0">
+                <a:solidFill>
+                  <a:srgbClr val="25373C"/>
+                </a:solidFill>
+                <a:latin typeface="Consolas"/>
+                <a:cs typeface="Consolas"/>
+              </a:rPr>
+              <a:t> = binomial)</a:t>
+            </a:r>
+          </a:p>
+          <a:p>
+            <a:pPr algn="l">
+              <a:lnSpc>
+                <a:spcPts val="2050"/>
+              </a:lnSpc>
+            </a:pPr>
+            <a:r>
+              <a:rPr lang="en-US" sz="1600" dirty="0">
+                <a:solidFill>
+                  <a:srgbClr val="2B4C9E"/>
+                </a:solidFill>
+                <a:latin typeface="Consolas"/>
+                <a:cs typeface="Consolas"/>
+              </a:rPr>
+              <a:t>tidy</a:t>
+            </a:r>
+            <a:r>
+              <a:rPr lang="en-US" sz="1600" dirty="0">
+                <a:solidFill>
+                  <a:srgbClr val="25373C"/>
+                </a:solidFill>
+                <a:latin typeface="Consolas"/>
+                <a:cs typeface="Consolas"/>
+              </a:rPr>
+              <a:t>(stork_glm)</a:t>
+            </a:r>
+          </a:p>
+          <a:p>
+            <a:pPr algn="l">
+              <a:lnSpc>
+                <a:spcPts val="2050"/>
+              </a:lnSpc>
+            </a:pPr>
+            <a:r>
+              <a:rPr lang="en-US" sz="1600" i="1" dirty="0">
+                <a:solidFill>
+                  <a:srgbClr val="9E6A28"/>
+                </a:solidFill>
+                <a:latin typeface="Consolas"/>
+                <a:cs typeface="Consolas"/>
+              </a:rPr>
+              <a:t>#&gt; # A tibble: 3 x 5</a:t>
+            </a:r>
+          </a:p>
+          <a:p>
+            <a:pPr algn="l">
+              <a:lnSpc>
+                <a:spcPts val="2050"/>
+              </a:lnSpc>
+            </a:pPr>
+            <a:r>
+              <a:rPr lang="en-US" sz="1600" i="1" dirty="0">
+                <a:solidFill>
+                  <a:srgbClr val="9E6A28"/>
+                </a:solidFill>
+                <a:latin typeface="Consolas"/>
+                <a:cs typeface="Consolas"/>
+              </a:rPr>
+              <a:t>#&gt;   term        estimate std.error statistic p.value</a:t>
+            </a:r>
+          </a:p>
+          <a:p>
+            <a:pPr algn="l">
+              <a:lnSpc>
+                <a:spcPts val="2050"/>
+              </a:lnSpc>
+            </a:pPr>
+            <a:r>
+              <a:rPr lang="en-US" sz="1600" i="1" dirty="0">
+                <a:solidFill>
+                  <a:srgbClr val="9E6A28"/>
+                </a:solidFill>
+                <a:latin typeface="Consolas"/>
+                <a:cs typeface="Consolas"/>
+              </a:rPr>
+              <a:t>#&gt;   &lt;chr&gt;          &lt;dbl&gt;     &lt;dbl&gt;     &lt;dbl&gt;   &lt;dbl&gt;</a:t>
+            </a:r>
+          </a:p>
+          <a:p>
+            <a:pPr algn="l">
+              <a:lnSpc>
+                <a:spcPts val="2050"/>
+              </a:lnSpc>
+            </a:pPr>
+            <a:r>
+              <a:rPr lang="en-US" sz="1600" i="1" dirty="0">
+                <a:solidFill>
+                  <a:srgbClr val="9E6A28"/>
+                </a:solidFill>
+                <a:latin typeface="Consolas"/>
+                <a:cs typeface="Consolas"/>
+              </a:rPr>
+              <a:t>#&gt; 1 (Intercept)   1.62      0.629     2.58   0.00999</a:t>
+            </a:r>
+          </a:p>
+          <a:p>
+            <a:pPr algn="l">
+              <a:lnSpc>
+                <a:spcPts val="2050"/>
+              </a:lnSpc>
+            </a:pPr>
+            <a:r>
+              <a:rPr lang="en-US" sz="1600" i="1" dirty="0">
+                <a:solidFill>
+                  <a:srgbClr val="9E6A28"/>
+                </a:solidFill>
+                <a:latin typeface="Consolas"/>
+                <a:cs typeface="Consolas"/>
+              </a:rPr>
+              <a:t>#&gt; 2 temp          0.0239    0.0465    0.515  0.607</a:t>
+            </a:r>
+          </a:p>
+          <a:p>
+            <a:pPr algn="l">
+              <a:lnSpc>
+                <a:spcPts val="2050"/>
+              </a:lnSpc>
+            </a:pPr>
+            <a:r>
+              <a:rPr lang="en-US" sz="1600" i="1" dirty="0">
+                <a:solidFill>
+                  <a:srgbClr val="9E6A28"/>
+                </a:solidFill>
+                <a:latin typeface="Consolas"/>
+                <a:cs typeface="Consolas"/>
+              </a:rPr>
+              <a:t>#&gt; 3 rainfall     -0.00656   0.00260  -2.52   0.0116</a:t>
+            </a:r>
+          </a:p>
+        </p:txBody>
+      </p:sp>
+      <p:sp>
+        <p:nvSpPr>
+          <p:cNvPr id="904" name="PageNum"/>
+          <p:cNvSpPr/>
+          <p:nvPr/>
+        </p:nvSpPr>
+        <p:spPr>
+          <a:xfrm>
+            <a:off x="10604500" y="6324600"/>
+            <a:ext cx="1206500" cy="304800"/>
+          </a:xfrm>
+          <a:prstGeom prst="rect">
+            <a:avLst/>
+          </a:prstGeom>
+          <a:noFill/>
+        </p:spPr>
+        <p:txBody>
+          <a:bodyPr wrap="none" lIns="0" tIns="0" rIns="0" bIns="0" anchor="ctr"/>
+          <a:lstStyle/>
+          <a:p>
+            <a:pPr algn="r"/>
+            <a:r>
+              <a:rPr lang="en-US" sz="1400" dirty="0">
+                <a:solidFill>
+                  <a:srgbClr val="808080"/>
+                </a:solidFill>
+              </a:rPr>
+              <a:t>288</a:t>
+            </a:r>
+          </a:p>
+        </p:txBody>
+      </p:sp>
     </p:spTree>
     <p:extLst>
       <p:ext uri="{BB962C8B-B14F-4D97-AF65-F5344CB8AC3E}">
-        <p14:creationId xmlns:p14="http://schemas.microsoft.com/office/powerpoint/2010/main" val="1152425893"/>
+        <p14:creationId xmlns:p14="http://schemas.microsoft.com/office/powerpoint/2010/main" val="1208293351"/>
       </p:ext>
     </p:extLst>
   </p:cSld>
@@ -18385,40 +21311,426 @@
           <a:chExt cx="0" cy="0"/>
         </a:xfrm>
       </p:grpSpPr>
-      <p:pic>
-        <p:nvPicPr>
-          <p:cNvPr id="3" name="Picture 2" descr="White Stork GLMM example figure; vector graphic could not be rendered on this system for a precise description." title="White Stork GLMM example figure; vector graphic could not be rendered on this sy">
-            <a:extLst>
-              <a:ext uri="{FF2B5EF4-FFF2-40B4-BE49-F238E27FC236}">
-                <a16:creationId xmlns:a16="http://schemas.microsoft.com/office/drawing/2014/main" id="{D95AAA1F-CE75-B67C-F3D7-A8FD39380037}"/>
-              </a:ext>
-            </a:extLst>
-          </p:cNvPr>
-          <p:cNvPicPr>
-            <a:picLocks noChangeAspect="1"/>
-          </p:cNvPicPr>
+      <p:sp>
+        <p:nvSpPr>
+          <p:cNvPr id="900" name="HeaderBar"/>
+          <p:cNvSpPr/>
           <p:nvPr/>
-        </p:nvPicPr>
-        <p:blipFill>
-          <a:blip r:embed="rId2"/>
-          <a:stretch>
-            <a:fillRect/>
-          </a:stretch>
-        </p:blipFill>
+        </p:nvSpPr>
         <p:spPr>
           <a:xfrm>
             <a:off x="0" y="0"/>
-            <a:ext cx="12192000" cy="6847930"/>
+            <a:ext cx="12192000" cy="787400"/>
           </a:xfrm>
           <a:prstGeom prst="rect">
             <a:avLst/>
           </a:prstGeom>
+          <a:solidFill>
+            <a:srgbClr val="23373B"/>
+          </a:solidFill>
+          <a:ln>
+            <a:noFill/>
+          </a:ln>
         </p:spPr>
-      </p:pic>
+        <p:txBody>
+          <a:bodyPr/>
+          <a:lstStyle/>
+          <a:p>
+            <a:endParaRPr/>
+          </a:p>
+        </p:txBody>
+      </p:sp>
+      <p:sp>
+        <p:nvSpPr>
+          <p:cNvPr id="903" name="TitleTxt"/>
+          <p:cNvSpPr/>
+          <p:nvPr/>
+        </p:nvSpPr>
+        <p:spPr>
+          <a:xfrm>
+            <a:off x="381000" y="0"/>
+            <a:ext cx="11557000" cy="787400"/>
+          </a:xfrm>
+          <a:prstGeom prst="rect">
+            <a:avLst/>
+          </a:prstGeom>
+          <a:noFill/>
+        </p:spPr>
+        <p:txBody>
+          <a:bodyPr wrap="square" lIns="0" tIns="0" rIns="0" bIns="0" anchor="ctr"/>
+          <a:lstStyle/>
+          <a:p>
+            <a:pPr algn="l"/>
+            <a:r>
+              <a:rPr lang="en-US" sz="2000" b="1" dirty="0">
+                <a:solidFill>
+                  <a:srgbClr val="FFFFFF"/>
+                </a:solidFill>
+              </a:rPr>
+              <a:t>GLMM on proportions with year as a random effect</a:t>
+            </a:r>
+          </a:p>
+        </p:txBody>
+      </p:sp>
+      <p:sp>
+        <p:nvSpPr>
+          <p:cNvPr id="902" name="MathTxt"/>
+          <p:cNvSpPr/>
+          <p:nvPr/>
+        </p:nvSpPr>
+        <p:spPr>
+          <a:xfrm>
+            <a:off x="1016000" y="889000"/>
+            <a:ext cx="10160000" cy="5334000"/>
+          </a:xfrm>
+          <a:prstGeom prst="rect">
+            <a:avLst/>
+          </a:prstGeom>
+          <a:noFill/>
+        </p:spPr>
+        <p:txBody>
+          <a:bodyPr wrap="square" lIns="0" tIns="0" rIns="0" bIns="0" anchor="ctr"/>
+          <a:lstStyle/>
+          <a:p>
+            <a:pPr algn="ctr">
+              <a:lnSpc>
+                <a:spcPts val="4200"/>
+              </a:lnSpc>
+              <a:spcAft>
+                <a:spcPts val="600"/>
+              </a:spcAft>
+            </a:pPr>
+            <a:r>
+              <a:rPr lang="en-US" sz="2600" dirty="0">
+                <a:solidFill>
+                  <a:srgbClr val="25373C"/>
+                </a:solidFill>
+              </a:rPr>
+              <a:t>nbchicks</a:t>
+            </a:r>
+            <a:r>
+              <a:rPr lang="en-US" sz="1800" i="1" baseline="-25000" dirty="0">
+                <a:solidFill>
+                  <a:srgbClr val="25373C"/>
+                </a:solidFill>
+              </a:rPr>
+              <a:t>i</a:t>
+            </a:r>
+            <a:r>
+              <a:rPr lang="en-US" sz="2600" dirty="0">
+                <a:solidFill>
+                  <a:srgbClr val="25373C"/>
+                </a:solidFill>
+              </a:rPr>
+              <a:t> ∼ Binomial(nbpairs</a:t>
+            </a:r>
+            <a:r>
+              <a:rPr lang="en-US" sz="1800" i="1" baseline="-25000" dirty="0">
+                <a:solidFill>
+                  <a:srgbClr val="25373C"/>
+                </a:solidFill>
+              </a:rPr>
+              <a:t>i</a:t>
+            </a:r>
+            <a:r>
+              <a:rPr lang="en-US" sz="2600" dirty="0">
+                <a:solidFill>
+                  <a:srgbClr val="25373C"/>
+                </a:solidFill>
+              </a:rPr>
+              <a:t>, </a:t>
+            </a:r>
+            <a:r>
+              <a:rPr lang="en-US" sz="2600" i="1" dirty="0">
+                <a:solidFill>
+                  <a:srgbClr val="25373C"/>
+                </a:solidFill>
+              </a:rPr>
+              <a:t>p</a:t>
+            </a:r>
+            <a:r>
+              <a:rPr lang="en-US" sz="1800" i="1" baseline="-25000" dirty="0">
+                <a:solidFill>
+                  <a:srgbClr val="25373C"/>
+                </a:solidFill>
+              </a:rPr>
+              <a:t>i</a:t>
+            </a:r>
+            <a:r>
+              <a:rPr lang="en-US" sz="2600" dirty="0">
+                <a:solidFill>
+                  <a:srgbClr val="25373C"/>
+                </a:solidFill>
+              </a:rPr>
+              <a:t>)</a:t>
+            </a:r>
+          </a:p>
+          <a:p>
+            <a:pPr algn="ctr">
+              <a:lnSpc>
+                <a:spcPts val="4200"/>
+              </a:lnSpc>
+              <a:spcAft>
+                <a:spcPts val="600"/>
+              </a:spcAft>
+            </a:pPr>
+            <a:r>
+              <a:rPr lang="en-US" sz="2600" dirty="0">
+                <a:solidFill>
+                  <a:srgbClr val="25373C"/>
+                </a:solidFill>
+              </a:rPr>
+              <a:t>logit(</a:t>
+            </a:r>
+            <a:r>
+              <a:rPr lang="en-US" sz="2600" i="1" dirty="0">
+                <a:solidFill>
+                  <a:srgbClr val="25373C"/>
+                </a:solidFill>
+              </a:rPr>
+              <a:t>p</a:t>
+            </a:r>
+            <a:r>
+              <a:rPr lang="en-US" sz="1800" i="1" baseline="-25000" dirty="0">
+                <a:solidFill>
+                  <a:srgbClr val="25373C"/>
+                </a:solidFill>
+              </a:rPr>
+              <a:t>i</a:t>
+            </a:r>
+            <a:r>
+              <a:rPr lang="en-US" sz="2600" dirty="0">
+                <a:solidFill>
+                  <a:srgbClr val="25373C"/>
+                </a:solidFill>
+              </a:rPr>
+              <a:t>) = </a:t>
+            </a:r>
+            <a:r>
+              <a:rPr lang="en-US" sz="2600" i="1" dirty="0">
+                <a:solidFill>
+                  <a:srgbClr val="25373C"/>
+                </a:solidFill>
+              </a:rPr>
+              <a:t>β</a:t>
+            </a:r>
+            <a:r>
+              <a:rPr lang="en-US" sz="1800" i="1" baseline="-25000" dirty="0">
+                <a:solidFill>
+                  <a:srgbClr val="25373C"/>
+                </a:solidFill>
+              </a:rPr>
+              <a:t>0i</a:t>
+            </a:r>
+            <a:r>
+              <a:rPr lang="en-US" sz="2600" dirty="0">
+                <a:solidFill>
+                  <a:srgbClr val="25373C"/>
+                </a:solidFill>
+              </a:rPr>
+              <a:t> + </a:t>
+            </a:r>
+            <a:r>
+              <a:rPr lang="en-US" sz="2600" i="1" dirty="0">
+                <a:solidFill>
+                  <a:srgbClr val="25373C"/>
+                </a:solidFill>
+              </a:rPr>
+              <a:t>β</a:t>
+            </a:r>
+            <a:r>
+              <a:rPr lang="en-US" sz="1800" baseline="-25000" dirty="0">
+                <a:solidFill>
+                  <a:srgbClr val="25373C"/>
+                </a:solidFill>
+              </a:rPr>
+              <a:t>1</a:t>
+            </a:r>
+            <a:r>
+              <a:rPr lang="en-US" sz="2600" dirty="0">
+                <a:solidFill>
+                  <a:srgbClr val="25373C"/>
+                </a:solidFill>
+              </a:rPr>
+              <a:t> temp</a:t>
+            </a:r>
+            <a:r>
+              <a:rPr lang="en-US" sz="1800" i="1" baseline="-25000" dirty="0">
+                <a:solidFill>
+                  <a:srgbClr val="25373C"/>
+                </a:solidFill>
+              </a:rPr>
+              <a:t>i</a:t>
+            </a:r>
+            <a:r>
+              <a:rPr lang="en-US" sz="2600" dirty="0">
+                <a:solidFill>
+                  <a:srgbClr val="25373C"/>
+                </a:solidFill>
+              </a:rPr>
+              <a:t> + </a:t>
+            </a:r>
+            <a:r>
+              <a:rPr lang="en-US" sz="2600" i="1" dirty="0">
+                <a:solidFill>
+                  <a:srgbClr val="25373C"/>
+                </a:solidFill>
+              </a:rPr>
+              <a:t>β</a:t>
+            </a:r>
+            <a:r>
+              <a:rPr lang="en-US" sz="1800" baseline="-25000" dirty="0">
+                <a:solidFill>
+                  <a:srgbClr val="25373C"/>
+                </a:solidFill>
+              </a:rPr>
+              <a:t>2</a:t>
+            </a:r>
+            <a:r>
+              <a:rPr lang="en-US" sz="2600" dirty="0">
+                <a:solidFill>
+                  <a:srgbClr val="25373C"/>
+                </a:solidFill>
+              </a:rPr>
+              <a:t> rainfall</a:t>
+            </a:r>
+            <a:r>
+              <a:rPr lang="en-US" sz="1800" i="1" baseline="-25000" dirty="0">
+                <a:solidFill>
+                  <a:srgbClr val="25373C"/>
+                </a:solidFill>
+              </a:rPr>
+              <a:t>i</a:t>
+            </a:r>
+          </a:p>
+          <a:p>
+            <a:pPr algn="ctr">
+              <a:lnSpc>
+                <a:spcPts val="4200"/>
+              </a:lnSpc>
+              <a:spcAft>
+                <a:spcPts val="600"/>
+              </a:spcAft>
+            </a:pPr>
+            <a:r>
+              <a:rPr lang="en-US" sz="2600" i="1" dirty="0">
+                <a:solidFill>
+                  <a:srgbClr val="25373C"/>
+                </a:solidFill>
+              </a:rPr>
+              <a:t>β</a:t>
+            </a:r>
+            <a:r>
+              <a:rPr lang="en-US" sz="1800" i="1" baseline="-25000" dirty="0">
+                <a:solidFill>
+                  <a:srgbClr val="25373C"/>
+                </a:solidFill>
+              </a:rPr>
+              <a:t>0i</a:t>
+            </a:r>
+            <a:r>
+              <a:rPr lang="en-US" sz="2600" dirty="0">
+                <a:solidFill>
+                  <a:srgbClr val="25373C"/>
+                </a:solidFill>
+              </a:rPr>
+              <a:t> ∼ Normal(</a:t>
+            </a:r>
+            <a:r>
+              <a:rPr lang="en-US" sz="2600" i="1" dirty="0">
+                <a:solidFill>
+                  <a:srgbClr val="25373C"/>
+                </a:solidFill>
+              </a:rPr>
+              <a:t>μ</a:t>
+            </a:r>
+            <a:r>
+              <a:rPr lang="en-US" sz="1800" i="1" baseline="-25000" dirty="0">
+                <a:solidFill>
+                  <a:srgbClr val="25373C"/>
+                </a:solidFill>
+              </a:rPr>
+              <a:t>y</a:t>
+            </a:r>
+            <a:r>
+              <a:rPr lang="en-US" sz="2600" dirty="0">
+                <a:solidFill>
+                  <a:srgbClr val="25373C"/>
+                </a:solidFill>
+              </a:rPr>
+              <a:t>, </a:t>
+            </a:r>
+            <a:r>
+              <a:rPr lang="en-US" sz="2600" i="1" dirty="0">
+                <a:solidFill>
+                  <a:srgbClr val="25373C"/>
+                </a:solidFill>
+              </a:rPr>
+              <a:t>σ</a:t>
+            </a:r>
+            <a:r>
+              <a:rPr lang="en-US" sz="1800" baseline="30000" dirty="0">
+                <a:solidFill>
+                  <a:srgbClr val="25373C"/>
+                </a:solidFill>
+              </a:rPr>
+              <a:t>2</a:t>
+            </a:r>
+            <a:r>
+              <a:rPr lang="en-US" sz="1800" i="1" baseline="-25000" dirty="0">
+                <a:solidFill>
+                  <a:srgbClr val="25373C"/>
+                </a:solidFill>
+              </a:rPr>
+              <a:t>y</a:t>
+            </a:r>
+            <a:r>
+              <a:rPr lang="en-US" sz="2600" dirty="0">
+                <a:solidFill>
+                  <a:srgbClr val="25373C"/>
+                </a:solidFill>
+              </a:rPr>
+              <a:t>)</a:t>
+            </a:r>
+          </a:p>
+        </p:txBody>
+      </p:sp>
+      <p:sp>
+        <p:nvSpPr>
+          <p:cNvPr id="904" name="PageNum"/>
+          <p:cNvSpPr/>
+          <p:nvPr/>
+        </p:nvSpPr>
+        <p:spPr>
+          <a:xfrm>
+            <a:off x="10604500" y="6324600"/>
+            <a:ext cx="1206500" cy="304800"/>
+          </a:xfrm>
+          <a:prstGeom prst="rect">
+            <a:avLst/>
+          </a:prstGeom>
+          <a:noFill/>
+        </p:spPr>
+        <p:txBody>
+          <a:bodyPr wrap="none" lIns="0" tIns="0" rIns="0" bIns="0" anchor="ctr"/>
+          <a:lstStyle/>
+          <a:p>
+            <a:pPr algn="r"/>
+            <a:r>
+              <a:rPr lang="en-US" sz="1400" dirty="0">
+                <a:solidFill>
+                  <a:srgbClr val="808080"/>
+                </a:solidFill>
+              </a:rPr>
+              <a:t>289</a:t>
+            </a:r>
+          </a:p>
+        </p:txBody>
+      </p:sp>
     </p:spTree>
     <p:extLst>
       <p:ext uri="{BB962C8B-B14F-4D97-AF65-F5344CB8AC3E}">
-        <p14:creationId xmlns:p14="http://schemas.microsoft.com/office/powerpoint/2010/main" val="210490503"/>
+        <p14:creationId xmlns:p14="http://schemas.microsoft.com/office/powerpoint/2010/main" val="1395093956"/>
       </p:ext>
     </p:extLst>
   </p:cSld>
@@ -18445,40 +21757,347 @@
           <a:chExt cx="0" cy="0"/>
         </a:xfrm>
       </p:grpSpPr>
-      <p:pic>
-        <p:nvPicPr>
-          <p:cNvPr id="3" name="Picture 2" descr="White Stork GLMM example figure; vector graphic could not be rendered on this system for a precise description." title="White Stork GLMM example figure; vector graphic could not be rendered on this sy">
-            <a:extLst>
-              <a:ext uri="{FF2B5EF4-FFF2-40B4-BE49-F238E27FC236}">
-                <a16:creationId xmlns:a16="http://schemas.microsoft.com/office/drawing/2014/main" id="{D62C4992-A528-813E-984A-32B9CA16D101}"/>
-              </a:ext>
-            </a:extLst>
-          </p:cNvPr>
-          <p:cNvPicPr>
-            <a:picLocks noChangeAspect="1"/>
-          </p:cNvPicPr>
+      <p:sp>
+        <p:nvSpPr>
+          <p:cNvPr id="901" name="CodeBg"/>
+          <p:cNvSpPr/>
           <p:nvPr/>
-        </p:nvPicPr>
-        <p:blipFill>
-          <a:blip r:embed="rId2"/>
-          <a:stretch>
-            <a:fillRect/>
-          </a:stretch>
-        </p:blipFill>
+        </p:nvSpPr>
         <p:spPr>
           <a:xfrm>
-            <a:off x="-8963" y="1"/>
-            <a:ext cx="12200963" cy="6852964"/>
+            <a:off x="533400" y="3708400"/>
+            <a:ext cx="10541000" cy="990600"/>
           </a:xfrm>
           <a:prstGeom prst="rect">
             <a:avLst/>
           </a:prstGeom>
+          <a:solidFill>
+            <a:srgbClr val="F4F4F4"/>
+          </a:solidFill>
+          <a:ln>
+            <a:noFill/>
+          </a:ln>
         </p:spPr>
-      </p:pic>
+        <p:txBody>
+          <a:bodyPr/>
+          <a:lstStyle/>
+          <a:p>
+            <a:endParaRPr/>
+          </a:p>
+        </p:txBody>
+      </p:sp>
+      <p:sp>
+        <p:nvSpPr>
+          <p:cNvPr id="900" name="HeaderBar"/>
+          <p:cNvSpPr/>
+          <p:nvPr/>
+        </p:nvSpPr>
+        <p:spPr>
+          <a:xfrm>
+            <a:off x="0" y="0"/>
+            <a:ext cx="12192000" cy="787400"/>
+          </a:xfrm>
+          <a:prstGeom prst="rect">
+            <a:avLst/>
+          </a:prstGeom>
+          <a:solidFill>
+            <a:srgbClr val="23373B"/>
+          </a:solidFill>
+          <a:ln>
+            <a:noFill/>
+          </a:ln>
+        </p:spPr>
+        <p:txBody>
+          <a:bodyPr/>
+          <a:lstStyle/>
+          <a:p>
+            <a:endParaRPr/>
+          </a:p>
+        </p:txBody>
+      </p:sp>
+      <p:sp>
+        <p:nvSpPr>
+          <p:cNvPr id="903" name="TitleTxt"/>
+          <p:cNvSpPr/>
+          <p:nvPr/>
+        </p:nvSpPr>
+        <p:spPr>
+          <a:xfrm>
+            <a:off x="381000" y="0"/>
+            <a:ext cx="11557000" cy="787400"/>
+          </a:xfrm>
+          <a:prstGeom prst="rect">
+            <a:avLst/>
+          </a:prstGeom>
+          <a:noFill/>
+        </p:spPr>
+        <p:txBody>
+          <a:bodyPr wrap="square" lIns="0" tIns="0" rIns="0" bIns="0" anchor="ctr"/>
+          <a:lstStyle/>
+          <a:p>
+            <a:pPr algn="l"/>
+            <a:r>
+              <a:rPr lang="en-US" sz="2000" b="1" dirty="0">
+                <a:solidFill>
+                  <a:srgbClr val="FFFFFF"/>
+                </a:solidFill>
+              </a:rPr>
+              <a:t>GLMM on proportions with year as a random effect in R</a:t>
+            </a:r>
+          </a:p>
+        </p:txBody>
+      </p:sp>
+      <p:sp>
+        <p:nvSpPr>
+          <p:cNvPr id="902" name="CodeTxt"/>
+          <p:cNvSpPr/>
+          <p:nvPr/>
+        </p:nvSpPr>
+        <p:spPr>
+          <a:xfrm>
+            <a:off x="736600" y="3835400"/>
+            <a:ext cx="10922000" cy="762000"/>
+          </a:xfrm>
+          <a:prstGeom prst="rect">
+            <a:avLst/>
+          </a:prstGeom>
+          <a:noFill/>
+        </p:spPr>
+        <p:txBody>
+          <a:bodyPr wrap="none" lIns="0" tIns="0" rIns="0" bIns="0" anchor="t"/>
+          <a:lstStyle/>
+          <a:p>
+            <a:pPr algn="l">
+              <a:lnSpc>
+                <a:spcPts val="2300"/>
+              </a:lnSpc>
+            </a:pPr>
+            <a:r>
+              <a:rPr lang="en-US" sz="1800" dirty="0">
+                <a:solidFill>
+                  <a:srgbClr val="25373C"/>
+                </a:solidFill>
+                <a:latin typeface="Consolas"/>
+                <a:cs typeface="Consolas"/>
+              </a:rPr>
+              <a:t>m &lt;- </a:t>
+            </a:r>
+            <a:r>
+              <a:rPr lang="en-US" sz="1800" dirty="0">
+                <a:solidFill>
+                  <a:srgbClr val="2B4C9E"/>
+                </a:solidFill>
+                <a:latin typeface="Consolas"/>
+                <a:cs typeface="Consolas"/>
+              </a:rPr>
+              <a:t>glmer</a:t>
+            </a:r>
+            <a:r>
+              <a:rPr lang="en-US" sz="1800" dirty="0">
+                <a:solidFill>
+                  <a:srgbClr val="25373C"/>
+                </a:solidFill>
+                <a:latin typeface="Consolas"/>
+                <a:cs typeface="Consolas"/>
+              </a:rPr>
+              <a:t>(</a:t>
+            </a:r>
+            <a:r>
+              <a:rPr lang="en-US" sz="1800" dirty="0">
+                <a:solidFill>
+                  <a:srgbClr val="2B4C9E"/>
+                </a:solidFill>
+                <a:latin typeface="Consolas"/>
+                <a:cs typeface="Consolas"/>
+              </a:rPr>
+              <a:t>cbind</a:t>
+            </a:r>
+            <a:r>
+              <a:rPr lang="en-US" sz="1800" dirty="0">
+                <a:solidFill>
+                  <a:srgbClr val="25373C"/>
+                </a:solidFill>
+                <a:latin typeface="Consolas"/>
+                <a:cs typeface="Consolas"/>
+              </a:rPr>
+              <a:t>(nbchicks,nbpairs</a:t>
+            </a:r>
+            <a:r>
+              <a:rPr lang="en-US" sz="1800" dirty="0">
+                <a:solidFill>
+                  <a:srgbClr val="C1671E"/>
+                </a:solidFill>
+                <a:latin typeface="Consolas"/>
+                <a:cs typeface="Consolas"/>
+              </a:rPr>
+              <a:t>-</a:t>
+            </a:r>
+            <a:r>
+              <a:rPr lang="en-US" sz="1800" dirty="0">
+                <a:solidFill>
+                  <a:srgbClr val="25373C"/>
+                </a:solidFill>
+                <a:latin typeface="Consolas"/>
+                <a:cs typeface="Consolas"/>
+              </a:rPr>
+              <a:t>nbchicks) </a:t>
+            </a:r>
+            <a:r>
+              <a:rPr lang="en-US" sz="1800" dirty="0">
+                <a:solidFill>
+                  <a:srgbClr val="C1671E"/>
+                </a:solidFill>
+                <a:latin typeface="Consolas"/>
+                <a:cs typeface="Consolas"/>
+              </a:rPr>
+              <a:t>~</a:t>
+            </a:r>
+            <a:r>
+              <a:rPr lang="en-US" sz="1800" dirty="0">
+                <a:solidFill>
+                  <a:srgbClr val="25373C"/>
+                </a:solidFill>
+                <a:latin typeface="Consolas"/>
+                <a:cs typeface="Consolas"/>
+              </a:rPr>
+              <a:t> temp </a:t>
+            </a:r>
+            <a:r>
+              <a:rPr lang="en-US" sz="1800" dirty="0">
+                <a:solidFill>
+                  <a:srgbClr val="C1671E"/>
+                </a:solidFill>
+                <a:latin typeface="Consolas"/>
+                <a:cs typeface="Consolas"/>
+              </a:rPr>
+              <a:t>+</a:t>
+            </a:r>
+            <a:r>
+              <a:rPr lang="en-US" sz="1800" dirty="0">
+                <a:solidFill>
+                  <a:srgbClr val="25373C"/>
+                </a:solidFill>
+                <a:latin typeface="Consolas"/>
+                <a:cs typeface="Consolas"/>
+              </a:rPr>
+              <a:t> rainfall</a:t>
+            </a:r>
+          </a:p>
+          <a:p>
+            <a:pPr algn="l">
+              <a:lnSpc>
+                <a:spcPts val="2300"/>
+              </a:lnSpc>
+            </a:pPr>
+            <a:r>
+              <a:rPr lang="en-US" sz="1800" dirty="0">
+                <a:solidFill>
+                  <a:srgbClr val="25373C"/>
+                </a:solidFill>
+                <a:latin typeface="Consolas"/>
+                <a:cs typeface="Consolas"/>
+              </a:rPr>
+              <a:t>                             </a:t>
+            </a:r>
+            <a:r>
+              <a:rPr lang="en-US" sz="1800" dirty="0">
+                <a:solidFill>
+                  <a:srgbClr val="C1671E"/>
+                </a:solidFill>
+                <a:latin typeface="Consolas"/>
+                <a:cs typeface="Consolas"/>
+              </a:rPr>
+              <a:t>+</a:t>
+            </a:r>
+            <a:r>
+              <a:rPr lang="en-US" sz="1800" dirty="0">
+                <a:solidFill>
+                  <a:srgbClr val="25373C"/>
+                </a:solidFill>
+                <a:latin typeface="Consolas"/>
+                <a:cs typeface="Consolas"/>
+              </a:rPr>
+              <a:t> (</a:t>
+            </a:r>
+            <a:r>
+              <a:rPr lang="en-US" sz="1800" dirty="0">
+                <a:solidFill>
+                  <a:srgbClr val="2B4C9E"/>
+                </a:solidFill>
+                <a:latin typeface="Consolas"/>
+                <a:cs typeface="Consolas"/>
+              </a:rPr>
+              <a:t>1</a:t>
+            </a:r>
+            <a:r>
+              <a:rPr lang="en-US" sz="1800" dirty="0">
+                <a:solidFill>
+                  <a:srgbClr val="25373C"/>
+                </a:solidFill>
+                <a:latin typeface="Consolas"/>
+                <a:cs typeface="Consolas"/>
+              </a:rPr>
+              <a:t> | year), </a:t>
+            </a:r>
+            <a:r>
+              <a:rPr lang="en-US" sz="1800" dirty="0">
+                <a:solidFill>
+                  <a:srgbClr val="2B4C9E"/>
+                </a:solidFill>
+                <a:latin typeface="Consolas"/>
+                <a:cs typeface="Consolas"/>
+              </a:rPr>
+              <a:t>family</a:t>
+            </a:r>
+            <a:r>
+              <a:rPr lang="en-US" sz="1800" dirty="0">
+                <a:solidFill>
+                  <a:srgbClr val="25373C"/>
+                </a:solidFill>
+                <a:latin typeface="Consolas"/>
+                <a:cs typeface="Consolas"/>
+              </a:rPr>
+              <a:t> = binomial)</a:t>
+            </a:r>
+          </a:p>
+        </p:txBody>
+      </p:sp>
+      <p:sp>
+        <p:nvSpPr>
+          <p:cNvPr id="904" name="PageNum"/>
+          <p:cNvSpPr/>
+          <p:nvPr/>
+        </p:nvSpPr>
+        <p:spPr>
+          <a:xfrm>
+            <a:off x="10604500" y="6324600"/>
+            <a:ext cx="1206500" cy="304800"/>
+          </a:xfrm>
+          <a:prstGeom prst="rect">
+            <a:avLst/>
+          </a:prstGeom>
+          <a:noFill/>
+        </p:spPr>
+        <p:txBody>
+          <a:bodyPr wrap="none" lIns="0" tIns="0" rIns="0" bIns="0" anchor="ctr"/>
+          <a:lstStyle/>
+          <a:p>
+            <a:pPr algn="r"/>
+            <a:r>
+              <a:rPr lang="en-US" sz="1400" dirty="0">
+                <a:solidFill>
+                  <a:srgbClr val="808080"/>
+                </a:solidFill>
+              </a:rPr>
+              <a:t>290</a:t>
+            </a:r>
+          </a:p>
+        </p:txBody>
+      </p:sp>
     </p:spTree>
     <p:extLst>
       <p:ext uri="{BB962C8B-B14F-4D97-AF65-F5344CB8AC3E}">
-        <p14:creationId xmlns:p14="http://schemas.microsoft.com/office/powerpoint/2010/main" val="3457148502"/>
+        <p14:creationId xmlns:p14="http://schemas.microsoft.com/office/powerpoint/2010/main" val="2961504914"/>
       </p:ext>
     </p:extLst>
   </p:cSld>
@@ -18505,40 +22124,362 @@
           <a:chExt cx="0" cy="0"/>
         </a:xfrm>
       </p:grpSpPr>
-      <p:pic>
-        <p:nvPicPr>
-          <p:cNvPr id="3" name="Picture 2" descr="White Stork GLMM example figure; vector graphic could not be rendered on this system for a precise description." title="White Stork GLMM example figure; vector graphic could not be rendered on this sy">
-            <a:extLst>
-              <a:ext uri="{FF2B5EF4-FFF2-40B4-BE49-F238E27FC236}">
-                <a16:creationId xmlns:a16="http://schemas.microsoft.com/office/drawing/2014/main" id="{DBF3F60F-461B-DF21-AFF1-ED7EFF2517B0}"/>
-              </a:ext>
-            </a:extLst>
-          </p:cNvPr>
-          <p:cNvPicPr>
-            <a:picLocks noChangeAspect="1"/>
-          </p:cNvPicPr>
+      <p:sp>
+        <p:nvSpPr>
+          <p:cNvPr id="900" name="HeaderBar"/>
+          <p:cNvSpPr/>
           <p:nvPr/>
-        </p:nvPicPr>
-        <p:blipFill>
-          <a:blip r:embed="rId2"/>
-          <a:stretch>
-            <a:fillRect/>
-          </a:stretch>
-        </p:blipFill>
+        </p:nvSpPr>
         <p:spPr>
           <a:xfrm>
-            <a:off x="-1" y="0"/>
-            <a:ext cx="12209929" cy="6858000"/>
+            <a:off x="0" y="0"/>
+            <a:ext cx="12192000" cy="787400"/>
           </a:xfrm>
           <a:prstGeom prst="rect">
             <a:avLst/>
           </a:prstGeom>
+          <a:solidFill>
+            <a:srgbClr val="23373B"/>
+          </a:solidFill>
+          <a:ln>
+            <a:noFill/>
+          </a:ln>
         </p:spPr>
-      </p:pic>
+        <p:txBody>
+          <a:bodyPr/>
+          <a:lstStyle/>
+          <a:p>
+            <a:endParaRPr/>
+          </a:p>
+        </p:txBody>
+      </p:sp>
+      <p:sp>
+        <p:nvSpPr>
+          <p:cNvPr id="903" name="TitleTxt"/>
+          <p:cNvSpPr/>
+          <p:nvPr/>
+        </p:nvSpPr>
+        <p:spPr>
+          <a:xfrm>
+            <a:off x="381000" y="0"/>
+            <a:ext cx="11557000" cy="787400"/>
+          </a:xfrm>
+          <a:prstGeom prst="rect">
+            <a:avLst/>
+          </a:prstGeom>
+          <a:noFill/>
+        </p:spPr>
+        <p:txBody>
+          <a:bodyPr wrap="square" lIns="0" tIns="0" rIns="0" bIns="0" anchor="ctr"/>
+          <a:lstStyle/>
+          <a:p>
+            <a:pPr algn="l"/>
+            <a:r>
+              <a:rPr lang="en-US" sz="2000" b="1" dirty="0">
+                <a:solidFill>
+                  <a:srgbClr val="FFFFFF"/>
+                </a:solidFill>
+              </a:rPr>
+              <a:t>GLMM on proportions with year as a random effect in R</a:t>
+            </a:r>
+          </a:p>
+        </p:txBody>
+      </p:sp>
+      <p:sp>
+        <p:nvSpPr>
+          <p:cNvPr id="902" name="CodeTxt"/>
+          <p:cNvSpPr/>
+          <p:nvPr/>
+        </p:nvSpPr>
+        <p:spPr>
+          <a:xfrm>
+            <a:off x="736600" y="1168400"/>
+            <a:ext cx="11176000" cy="4953000"/>
+          </a:xfrm>
+          <a:prstGeom prst="rect">
+            <a:avLst/>
+          </a:prstGeom>
+          <a:noFill/>
+        </p:spPr>
+        <p:txBody>
+          <a:bodyPr wrap="none" lIns="0" tIns="0" rIns="0" bIns="0" anchor="t"/>
+          <a:lstStyle/>
+          <a:p>
+            <a:pPr algn="l">
+              <a:lnSpc>
+                <a:spcPts val="2000"/>
+              </a:lnSpc>
+            </a:pPr>
+            <a:r>
+              <a:rPr lang="en-US" sz="1600" dirty="0">
+                <a:solidFill>
+                  <a:srgbClr val="333333"/>
+                </a:solidFill>
+                <a:latin typeface="Consolas"/>
+                <a:cs typeface="Consolas"/>
+              </a:rPr>
+              <a:t>#&gt; Generalized linear mixed model fit by maximum likelihood (Laplace</a:t>
+            </a:r>
+          </a:p>
+          <a:p>
+            <a:pPr algn="l">
+              <a:lnSpc>
+                <a:spcPts val="2000"/>
+              </a:lnSpc>
+            </a:pPr>
+            <a:r>
+              <a:rPr lang="en-US" sz="1600" dirty="0">
+                <a:solidFill>
+                  <a:srgbClr val="333333"/>
+                </a:solidFill>
+                <a:latin typeface="Consolas"/>
+                <a:cs typeface="Consolas"/>
+              </a:rPr>
+              <a:t>#&gt;   Approximation) [glmerMod]</a:t>
+            </a:r>
+          </a:p>
+          <a:p>
+            <a:pPr algn="l">
+              <a:lnSpc>
+                <a:spcPts val="2000"/>
+              </a:lnSpc>
+            </a:pPr>
+            <a:r>
+              <a:rPr lang="en-US" sz="1600" dirty="0">
+                <a:solidFill>
+                  <a:srgbClr val="333333"/>
+                </a:solidFill>
+                <a:latin typeface="Consolas"/>
+                <a:cs typeface="Consolas"/>
+              </a:rPr>
+              <a:t>#&gt;  Family: binomial  ( logit )</a:t>
+            </a:r>
+          </a:p>
+          <a:p>
+            <a:pPr algn="l">
+              <a:lnSpc>
+                <a:spcPts val="2000"/>
+              </a:lnSpc>
+            </a:pPr>
+            <a:r>
+              <a:rPr lang="en-US" sz="1600" dirty="0">
+                <a:solidFill>
+                  <a:srgbClr val="333333"/>
+                </a:solidFill>
+                <a:latin typeface="Consolas"/>
+                <a:cs typeface="Consolas"/>
+              </a:rPr>
+              <a:t>#&gt; Formula: cbind(nbchicks, nbpairs - nbchicks) ~ temp + rainfall + (1 |</a:t>
+            </a:r>
+          </a:p>
+          <a:p>
+            <a:pPr algn="l">
+              <a:lnSpc>
+                <a:spcPts val="2000"/>
+              </a:lnSpc>
+            </a:pPr>
+            <a:r>
+              <a:rPr lang="en-US" sz="1600" dirty="0">
+                <a:solidFill>
+                  <a:srgbClr val="333333"/>
+                </a:solidFill>
+                <a:latin typeface="Consolas"/>
+                <a:cs typeface="Consolas"/>
+              </a:rPr>
+              <a:t>#&gt;     year)</a:t>
+            </a:r>
+          </a:p>
+          <a:p>
+            <a:pPr algn="l">
+              <a:lnSpc>
+                <a:spcPts val="2000"/>
+              </a:lnSpc>
+            </a:pPr>
+            <a:r>
+              <a:rPr lang="en-US" sz="1600" dirty="0">
+                <a:solidFill>
+                  <a:srgbClr val="333333"/>
+                </a:solidFill>
+                <a:latin typeface="Consolas"/>
+                <a:cs typeface="Consolas"/>
+              </a:rPr>
+              <a:t>#&gt;      AIC      BIC   logLik deviance df.resid</a:t>
+            </a:r>
+          </a:p>
+          <a:p>
+            <a:pPr algn="l">
+              <a:lnSpc>
+                <a:spcPts val="2000"/>
+              </a:lnSpc>
+            </a:pPr>
+            <a:r>
+              <a:rPr lang="en-US" sz="1600" dirty="0">
+                <a:solidFill>
+                  <a:srgbClr val="333333"/>
+                </a:solidFill>
+                <a:latin typeface="Consolas"/>
+                <a:cs typeface="Consolas"/>
+              </a:rPr>
+              <a:t>#&gt; 159.7418 164.2838 -75.8709 151.7418       19</a:t>
+            </a:r>
+          </a:p>
+          <a:p>
+            <a:pPr algn="l">
+              <a:lnSpc>
+                <a:spcPts val="2000"/>
+              </a:lnSpc>
+            </a:pPr>
+            <a:r>
+              <a:rPr lang="en-US" sz="1600" dirty="0">
+                <a:solidFill>
+                  <a:srgbClr val="333333"/>
+                </a:solidFill>
+                <a:latin typeface="Consolas"/>
+                <a:cs typeface="Consolas"/>
+              </a:rPr>
+              <a:t>#&gt; Random effects:</a:t>
+            </a:r>
+          </a:p>
+          <a:p>
+            <a:pPr algn="l">
+              <a:lnSpc>
+                <a:spcPts val="2000"/>
+              </a:lnSpc>
+            </a:pPr>
+            <a:r>
+              <a:rPr lang="en-US" sz="1600" dirty="0">
+                <a:solidFill>
+                  <a:srgbClr val="333333"/>
+                </a:solidFill>
+                <a:latin typeface="Consolas"/>
+                <a:cs typeface="Consolas"/>
+              </a:rPr>
+              <a:t>#&gt;  Groups Name        Std.Dev.</a:t>
+            </a:r>
+          </a:p>
+          <a:p>
+            <a:pPr algn="l">
+              <a:lnSpc>
+                <a:spcPts val="2000"/>
+              </a:lnSpc>
+            </a:pPr>
+            <a:r>
+              <a:rPr lang="en-US" sz="1600" dirty="0">
+                <a:solidFill>
+                  <a:srgbClr val="333333"/>
+                </a:solidFill>
+                <a:latin typeface="Consolas"/>
+                <a:cs typeface="Consolas"/>
+              </a:rPr>
+              <a:t>#&gt;  year   (Intercept) 0.478</a:t>
+            </a:r>
+          </a:p>
+          <a:p>
+            <a:pPr algn="l">
+              <a:lnSpc>
+                <a:spcPts val="2000"/>
+              </a:lnSpc>
+            </a:pPr>
+            <a:r>
+              <a:rPr lang="en-US" sz="1600" dirty="0">
+                <a:solidFill>
+                  <a:srgbClr val="333333"/>
+                </a:solidFill>
+                <a:latin typeface="Consolas"/>
+                <a:cs typeface="Consolas"/>
+              </a:rPr>
+              <a:t>#&gt; Number of obs: 23, groups:  year, 23</a:t>
+            </a:r>
+          </a:p>
+          <a:p>
+            <a:pPr algn="l">
+              <a:lnSpc>
+                <a:spcPts val="2000"/>
+              </a:lnSpc>
+            </a:pPr>
+            <a:r>
+              <a:rPr lang="en-US" sz="1600" dirty="0">
+                <a:solidFill>
+                  <a:srgbClr val="333333"/>
+                </a:solidFill>
+                <a:latin typeface="Consolas"/>
+                <a:cs typeface="Consolas"/>
+              </a:rPr>
+              <a:t>#&gt; Fixed Effects:</a:t>
+            </a:r>
+          </a:p>
+          <a:p>
+            <a:pPr algn="l">
+              <a:lnSpc>
+                <a:spcPts val="2000"/>
+              </a:lnSpc>
+            </a:pPr>
+            <a:r>
+              <a:rPr lang="en-US" sz="1600" dirty="0">
+                <a:solidFill>
+                  <a:srgbClr val="333333"/>
+                </a:solidFill>
+                <a:latin typeface="Consolas"/>
+                <a:cs typeface="Consolas"/>
+              </a:rPr>
+              <a:t>#&gt; (Intercept)         temp     rainfall</a:t>
+            </a:r>
+          </a:p>
+          <a:p>
+            <a:pPr algn="l">
+              <a:lnSpc>
+                <a:spcPts val="2000"/>
+              </a:lnSpc>
+            </a:pPr>
+            <a:r>
+              <a:rPr lang="en-US" sz="1600" dirty="0">
+                <a:solidFill>
+                  <a:srgbClr val="333333"/>
+                </a:solidFill>
+                <a:latin typeface="Consolas"/>
+                <a:cs typeface="Consolas"/>
+              </a:rPr>
+              <a:t>#&gt;    2.478277    -0.026616    -0.008226</a:t>
+            </a:r>
+          </a:p>
+        </p:txBody>
+      </p:sp>
+      <p:sp>
+        <p:nvSpPr>
+          <p:cNvPr id="904" name="PageNum"/>
+          <p:cNvSpPr/>
+          <p:nvPr/>
+        </p:nvSpPr>
+        <p:spPr>
+          <a:xfrm>
+            <a:off x="10604500" y="6324600"/>
+            <a:ext cx="1206500" cy="304800"/>
+          </a:xfrm>
+          <a:prstGeom prst="rect">
+            <a:avLst/>
+          </a:prstGeom>
+          <a:noFill/>
+        </p:spPr>
+        <p:txBody>
+          <a:bodyPr wrap="none" lIns="0" tIns="0" rIns="0" bIns="0" anchor="ctr"/>
+          <a:lstStyle/>
+          <a:p>
+            <a:pPr algn="r"/>
+            <a:r>
+              <a:rPr lang="en-US" sz="1400" dirty="0">
+                <a:solidFill>
+                  <a:srgbClr val="808080"/>
+                </a:solidFill>
+              </a:rPr>
+              <a:t>291</a:t>
+            </a:r>
+          </a:p>
+        </p:txBody>
+      </p:sp>
     </p:spTree>
     <p:extLst>
       <p:ext uri="{BB962C8B-B14F-4D97-AF65-F5344CB8AC3E}">
-        <p14:creationId xmlns:p14="http://schemas.microsoft.com/office/powerpoint/2010/main" val="1841337317"/>
+        <p14:creationId xmlns:p14="http://schemas.microsoft.com/office/powerpoint/2010/main" val="735819776"/>
       </p:ext>
     </p:extLst>
   </p:cSld>
@@ -18567,7 +22508,7 @@
       </p:grpSpPr>
       <p:pic>
         <p:nvPicPr>
-          <p:cNvPr id="3" name="Picture 2" descr="White Stork GLMM example figure; vector graphic could not be rendered on this system for a precise description." title="White Stork GLMM example figure; vector graphic could not be rendered on this sy">
+          <p:cNvPr id="3" name="Picture 2" descr="Caterpillar (dot-and-line) plot of the estimated yearly random intercepts from the mixed model, from the R output labelled '$year'. The horizontal axis is the intercept deviation from the overall mean, running from about -1.0 to +1.3; each row is one year (years 1 to about 22). A blue dot marks each year's estimated random intercept and a horizontal line shows its confidence interval. Years are sorted from the highest intercept at the top (year 4, near +0.8) down to the lowest at the bottom (year 2, near -1.0). Most intervals overlap zero, showing how much the baseline response varies from year to year around the population mean.">
             <a:extLst>
               <a:ext uri="{FF2B5EF4-FFF2-40B4-BE49-F238E27FC236}">
                 <a16:creationId xmlns:a16="http://schemas.microsoft.com/office/drawing/2014/main" id="{7EC840DE-74EB-9A64-2A0C-F3E4C394A337}"/>
@@ -18818,7 +22759,7 @@
       </p:graphicFrame>
       <p:pic>
         <p:nvPicPr>
-          <p:cNvPr id="79876" name="Picture 1" descr="von Bertalanffy growth curve: Total Length in mm (y) versus Age (x, 0 to 12). Points scatter around a curve rising then leveling at asymptote L-infinity (dashed line); t0 marked at length zero." title="von Bertalanffy growth curve: Total Length in mm (y) versus Age (x, 0 to 12). Po"/>
+          <p:cNvPr id="79876" name="Picture 1" descr="von Bertalanffy growth curve: Total Length in mm (y) versus Age (x, 0 to 12). Points scatter around a curve rising then leveling at asymptote L-infinity (dashed line); t0 marked at length zero."/>
           <p:cNvPicPr>
             <a:picLocks noChangeAspect="1"/>
           </p:cNvPicPr>
@@ -20779,7 +24720,7 @@
       </p:sp>
       <p:pic>
         <p:nvPicPr>
-          <p:cNvPr id="88067" name="Picture 10" descr="Scatterplot of the length-and-age data (Total Length versus Age) for the growth model where asymptotic size L-infinity varies by individual; vector graphic could not be rendered for exact values." title="Scatterplot of the length-and-age data (Total Length versus Age) for the growth "/>
+          <p:cNvPr id="88067" name="Picture 10" descr="Scatterplot of the length-and-age data (Total Length versus Age) for the growth model where asymptotic size L-infinity varies by individual; vector graphic could not be rendered for exact values."/>
           <p:cNvPicPr>
             <a:picLocks noChangeAspect="1" noChangeArrowheads="1"/>
           </p:cNvPicPr>
@@ -21688,7 +25629,7 @@
       </p:sp>
       <p:pic>
         <p:nvPicPr>
-          <p:cNvPr id="90116" name="Picture 9" descr="Residual diagnostic plot from the standard nonlinear least-squares von Bertalanffy fit, showing model misspecification from within-animal correlation rather than heteroscedasticity; vector graphic could not be rendered for exact values." title="Residual diagnostic plot from the standard nonlinear least-squares von Bertalanf"/>
+          <p:cNvPr id="90116" name="Picture 9" descr="Residual diagnostic plot from the standard nonlinear least-squares von Bertalanffy fit, showing model misspecification from within-animal correlation rather than heteroscedasticity; vector graphic could not be rendered for exact values."/>
           <p:cNvPicPr>
             <a:picLocks noChangeAspect="1" noChangeArrowheads="1"/>
           </p:cNvPicPr>
@@ -22276,7 +26217,7 @@
       </p:sp>
       <p:pic>
         <p:nvPicPr>
-          <p:cNvPr id="92164" name="Picture 10" descr="Boxplots of residuals by Subject from the standard nonlinear fit. Residual medians shift from about -8 to +8 across subjects, showing within-animal correlation the model missed." title="Boxplots of residuals by Subject from the standard nonlinear fit. Residual media"/>
+          <p:cNvPr id="92164" name="Picture 10" descr="Boxplots of residuals by Subject from the standard nonlinear fit. Residual medians shift from about -8 to +8 across subjects, showing within-animal correlation the model missed."/>
           <p:cNvPicPr>
             <a:picLocks noChangeAspect="1" noChangeArrowheads="1"/>
           </p:cNvPicPr>
@@ -24409,7 +28350,7 @@
       </p:sp>
       <p:pic>
         <p:nvPicPr>
-          <p:cNvPr id="100357" name="Picture 11" descr="Diagnostic figure for the nonlinear mixed-effects fit (random Linf by subject; fixed Linf, Kappa, Tzero); vector graphic could not be rendered for exact values." title="Diagnostic figure for the nonlinear mixed-effects fit (random Linf by subject; f"/>
+          <p:cNvPr id="100357" name="Picture 11" descr="Diagnostic figure for the nonlinear mixed-effects fit (random Linf by subject; fixed Linf, Kappa, Tzero); vector graphic could not be rendered for exact values."/>
           <p:cNvPicPr>
             <a:picLocks noChangeAspect="1" noChangeArrowheads="1"/>
           </p:cNvPicPr>
@@ -24493,7 +28434,7 @@
       </p:grpSpPr>
       <p:pic>
         <p:nvPicPr>
-          <p:cNvPr id="28673" name="Picture 6" descr="Scatterplot of fish density against stream from the complete-pooling linear model; all points share one fitted mean, so between-stream variation is visible in the scatter but unmodeled." title="Scatterplot of fish density against stream from the complete-pooling linear mode"/>
+          <p:cNvPr id="28673" name="Picture 6" descr="Scatterplot of fish density against stream from the complete-pooling linear model; all points share one fitted mean, so between-stream variation is visible in the scatter but unmodeled."/>
           <p:cNvPicPr>
             <a:picLocks noChangeAspect="1" noChangeArrowheads="1"/>
           </p:cNvPicPr>
@@ -24592,101 +28533,6 @@
           </a:p>
         </p:txBody>
       </p:sp>
-      <p:graphicFrame>
-        <p:nvGraphicFramePr>
-          <p:cNvPr id="28675" name="Object 8"/>
-          <p:cNvGraphicFramePr>
-            <a:graphicFrameLocks noGrp="1" noChangeAspect="1"/>
-          </p:cNvGraphicFramePr>
-          <p:nvPr>
-            <p:ph idx="1"/>
-          </p:nvPr>
-        </p:nvGraphicFramePr>
-        <p:xfrm>
-          <a:off x="2146300" y="2217739"/>
-          <a:ext cx="2501900" cy="1443037"/>
-        </p:xfrm>
-        <a:graphic>
-          <a:graphicData uri="http://schemas.openxmlformats.org/presentationml/2006/ole">
-            <mc:AlternateContent xmlns:mc="http://schemas.openxmlformats.org/markup-compatibility/2006">
-              <mc:Choice xmlns:v="urn:schemas-microsoft-com:vml" Requires="v">
-                <p:oleObj name="Equation" r:id="rId4" imgW="1079032" imgH="622030" progId="Equation.DSMT4">
-                  <p:embed/>
-                </p:oleObj>
-              </mc:Choice>
-              <mc:Fallback>
-                <p:oleObj name="Equation" r:id="rId4" imgW="1079032" imgH="622030" progId="Equation.DSMT4">
-                  <p:embed/>
-                  <p:pic>
-                    <p:nvPicPr>
-                      <p:cNvPr id="0" name=""/>
-                      <p:cNvPicPr>
-                        <a:picLocks noChangeAspect="1" noChangeArrowheads="1"/>
-                      </p:cNvPicPr>
-                      <p:nvPr/>
-                    </p:nvPicPr>
-                    <p:blipFill>
-                      <a:blip r:embed="rId5">
-                        <a:extLst>
-                          <a:ext uri="{28A0092B-C50C-407E-A947-70E740481C1C}">
-                            <a14:useLocalDpi xmlns:a14="http://schemas.microsoft.com/office/drawing/2010/main" val="0"/>
-                          </a:ext>
-                        </a:extLst>
-                      </a:blip>
-                      <a:srcRect/>
-                      <a:stretch>
-                        <a:fillRect/>
-                      </a:stretch>
-                    </p:blipFill>
-                    <p:spPr bwMode="auto">
-                      <a:xfrm>
-                        <a:off x="2146300" y="2217739"/>
-                        <a:ext cx="2501900" cy="1443037"/>
-                      </a:xfrm>
-                      <a:prstGeom prst="rect">
-                        <a:avLst/>
-                      </a:prstGeom>
-                      <a:noFill/>
-                      <a:ln>
-                        <a:noFill/>
-                      </a:ln>
-                      <a:effectLst/>
-                      <a:extLst>
-                        <a:ext uri="{909E8E84-426E-40DD-AFC4-6F175D3DCCD1}">
-                          <a14:hiddenFill xmlns:a14="http://schemas.microsoft.com/office/drawing/2010/main">
-                            <a:solidFill>
-                              <a:srgbClr val="FFFFFF"/>
-                            </a:solidFill>
-                          </a14:hiddenFill>
-                        </a:ext>
-                        <a:ext uri="{91240B29-F687-4F45-9708-019B960494DF}">
-                          <a14:hiddenLine xmlns:a14="http://schemas.microsoft.com/office/drawing/2010/main" w="9525">
-                            <a:solidFill>
-                              <a:srgbClr val="000000"/>
-                            </a:solidFill>
-                            <a:miter lim="800000"/>
-                            <a:headEnd/>
-                            <a:tailEnd/>
-                          </a14:hiddenLine>
-                        </a:ext>
-                        <a:ext uri="{AF507438-7753-43E0-B8FC-AC1667EBCBE1}">
-                          <a14:hiddenEffects xmlns:a14="http://schemas.microsoft.com/office/drawing/2010/main">
-                            <a:effectLst>
-                              <a:outerShdw dist="35921" dir="2700000" algn="ctr" rotWithShape="0">
-                                <a:srgbClr val="808080"/>
-                              </a:outerShdw>
-                            </a:effectLst>
-                          </a14:hiddenEffects>
-                        </a:ext>
-                      </a:extLst>
-                    </p:spPr>
-                  </p:pic>
-                </p:oleObj>
-              </mc:Fallback>
-            </mc:AlternateContent>
-          </a:graphicData>
-        </a:graphic>
-      </p:graphicFrame>
       <p:sp>
         <p:nvSpPr>
           <p:cNvPr id="28676" name="Text Box 10"/>
@@ -24915,10 +28761,147 @@
           </a:p>
         </p:txBody>
       </p:sp>
+      <p:sp>
+        <p:nvSpPr>
+          <p:cNvPr id="9061" name="EqText6"/>
+          <p:cNvSpPr/>
+          <p:nvPr/>
+        </p:nvSpPr>
+        <p:spPr>
+          <a:xfrm>
+            <a:off x="2108200" y="2184400"/>
+            <a:ext cx="4064000" cy="1397000"/>
+          </a:xfrm>
+          <a:prstGeom prst="rect">
+            <a:avLst/>
+          </a:prstGeom>
+          <a:noFill/>
+        </p:spPr>
+        <p:txBody>
+          <a:bodyPr wrap="square" lIns="0" tIns="0" rIns="0" bIns="0" anchor="t">
+            <a:normAutofit/>
+          </a:bodyPr>
+          <a:lstStyle/>
+          <a:p>
+            <a:pPr algn="l"/>
+            <a:r>
+              <a:rPr lang="en-US" sz="1800" i="1" dirty="0">
+                <a:latin typeface="Cambria"/>
+                <a:cs typeface="Cambria"/>
+              </a:rPr>
+              <a:t>y</a:t>
+            </a:r>
+            <a:r>
+              <a:rPr lang="en-US" sz="1404" i="1" baseline="-25000" dirty="0">
+                <a:latin typeface="Cambria"/>
+                <a:cs typeface="Cambria"/>
+              </a:rPr>
+              <a:t>i,j</a:t>
+            </a:r>
+            <a:r>
+              <a:rPr lang="en-US" sz="1800" dirty="0">
+                <a:latin typeface="Cambria"/>
+                <a:cs typeface="Cambria"/>
+              </a:rPr>
+              <a:t> = </a:t>
+            </a:r>
+            <a:r>
+              <a:rPr lang="en-US" sz="1800" i="1" dirty="0">
+                <a:latin typeface="Cambria"/>
+                <a:cs typeface="Cambria"/>
+              </a:rPr>
+              <a:t>β</a:t>
+            </a:r>
+            <a:r>
+              <a:rPr lang="en-US" sz="1800" dirty="0">
+                <a:latin typeface="Cambria"/>
+                <a:cs typeface="Cambria"/>
+              </a:rPr>
+              <a:t> + </a:t>
+            </a:r>
+            <a:r>
+              <a:rPr lang="en-US" sz="1800" i="1" dirty="0">
+                <a:latin typeface="Cambria"/>
+                <a:cs typeface="Cambria"/>
+              </a:rPr>
+              <a:t>ε</a:t>
+            </a:r>
+            <a:r>
+              <a:rPr lang="en-US" sz="1404" i="1" baseline="-25000" dirty="0">
+                <a:latin typeface="Cambria"/>
+                <a:cs typeface="Cambria"/>
+              </a:rPr>
+              <a:t>i,j</a:t>
+            </a:r>
+          </a:p>
+          <a:p>
+            <a:pPr algn="l"/>
+            <a:r>
+              <a:rPr lang="en-US" sz="1800" i="1" dirty="0">
+                <a:latin typeface="Cambria"/>
+                <a:cs typeface="Cambria"/>
+              </a:rPr>
+              <a:t>i</a:t>
+            </a:r>
+            <a:r>
+              <a:rPr lang="en-US" sz="1800" dirty="0">
+                <a:latin typeface="Cambria"/>
+                <a:cs typeface="Cambria"/>
+              </a:rPr>
+              <a:t> = 1,2,..,6;  </a:t>
+            </a:r>
+            <a:r>
+              <a:rPr lang="en-US" sz="1800" i="1" dirty="0">
+                <a:latin typeface="Cambria"/>
+                <a:cs typeface="Cambria"/>
+              </a:rPr>
+              <a:t>j</a:t>
+            </a:r>
+            <a:r>
+              <a:rPr lang="en-US" sz="1800" dirty="0">
+                <a:latin typeface="Cambria"/>
+                <a:cs typeface="Cambria"/>
+              </a:rPr>
+              <a:t> = 1,2,3</a:t>
+            </a:r>
+          </a:p>
+          <a:p>
+            <a:pPr algn="l"/>
+            <a:r>
+              <a:rPr lang="en-US" sz="1800" i="1" dirty="0">
+                <a:latin typeface="Cambria"/>
+                <a:cs typeface="Cambria"/>
+              </a:rPr>
+              <a:t>β̂</a:t>
+            </a:r>
+            <a:r>
+              <a:rPr lang="en-US" sz="1800" dirty="0">
+                <a:latin typeface="Cambria"/>
+                <a:cs typeface="Cambria"/>
+              </a:rPr>
+              <a:t> = 78.63;  </a:t>
+            </a:r>
+            <a:r>
+              <a:rPr lang="en-US" sz="1800" i="1" dirty="0">
+                <a:latin typeface="Cambria"/>
+                <a:cs typeface="Cambria"/>
+              </a:rPr>
+              <a:t>σ̂</a:t>
+            </a:r>
+            <a:r>
+              <a:rPr lang="en-US" sz="1800" dirty="0">
+                <a:latin typeface="Cambria"/>
+                <a:cs typeface="Cambria"/>
+              </a:rPr>
+              <a:t> = 16.03</a:t>
+            </a:r>
+          </a:p>
+        </p:txBody>
+      </p:sp>
     </p:spTree>
     <p:extLst>
       <p:ext uri="{BB962C8B-B14F-4D97-AF65-F5344CB8AC3E}">
-        <p14:creationId xmlns:p14="http://schemas.microsoft.com/office/powerpoint/2010/main" val="381773654"/>
+        <p14:creationId xmlns:p14="http://schemas.microsoft.com/office/powerpoint/2010/main" val="691397533"/>
       </p:ext>
     </p:extLst>
   </p:cSld>
@@ -25466,7 +29449,7 @@
       </p:sp>
       <p:pic>
         <p:nvPicPr>
-          <p:cNvPr id="102404" name="Picture 10" descr="Plot of residuals by Subject from the nonlinear mixed model (plot(lm2, Subject ~ resid(.))), residuals now centered near zero across subjects; vector graphic could not be rendered for exact values." title="Plot of residuals by Subject from the nonlinear mixed model (plot(lm2, Subject ~"/>
+          <p:cNvPr id="102404" name="Picture 10" descr="Plot of residuals by Subject from the nonlinear mixed model (plot(lm2, Subject ~ resid(.))), residuals now centered near zero across subjects; vector graphic could not be rendered for exact values."/>
           <p:cNvPicPr>
             <a:picLocks noChangeAspect="1" noChangeArrowheads="1"/>
           </p:cNvPicPr>
@@ -26672,7 +30655,7 @@
       </p:sp>
       <p:pic>
         <p:nvPicPr>
-          <p:cNvPr id="106500" name="Picture 12" descr="Plot of subject-specific asymptotic size estimates (population Linf plus each subject's random effect) as points; vector graphic could not be rendered for exact values." title="Plot of subject-specific asymptotic size estimates (population Linf plus each su"/>
+          <p:cNvPr id="106500" name="Picture 12" descr="Plot of subject-specific asymptotic size estimates (population Linf plus each subject's random effect) as points; vector graphic could not be rendered for exact values."/>
           <p:cNvPicPr>
             <a:picLocks noChangeAspect="1" noChangeArrowheads="1"/>
           </p:cNvPicPr>
@@ -26726,7 +30709,7 @@
       </p:pic>
       <p:pic>
         <p:nvPicPr>
-          <p:cNvPr id="106501" name="Picture 15" descr="Faceted plot of standardized residuals versus fitted values by Subject for the nonlinear mixed model, with a zero reference line; vector graphic could not be rendered for exact values." title="Faceted plot of standardized residuals versus fitted values by Subject for the n"/>
+          <p:cNvPr id="106501" name="Picture 15" descr="Faceted plot of standardized residuals versus fitted values by Subject for the nonlinear mixed model, with a zero reference line; vector graphic could not be rendered for exact values."/>
           <p:cNvPicPr>
             <a:picLocks noChangeAspect="1" noChangeArrowheads="1"/>
           </p:cNvPicPr>
@@ -27332,7 +31315,7 @@
       </p:sp>
       <p:pic>
         <p:nvPicPr>
-          <p:cNvPr id="108548" name="Picture 10" descr="Faceted plot from augPred: observed length-at-age data with the fitted nonlinear mixed-model growth curves overlaid per subject; vector graphic could not be rendered for exact values." title="Faceted plot from augPred: observed length-at-age data with the fitted nonlinear"/>
+          <p:cNvPr id="108548" name="Picture 10" descr="Faceted plot from augPred: observed length-at-age data with the fitted nonlinear mixed-model growth curves overlaid per subject; vector graphic could not be rendered for exact values."/>
           <p:cNvPicPr>
             <a:picLocks noChangeAspect="1" noChangeArrowheads="1"/>
           </p:cNvPicPr>
@@ -27454,101 +31437,6 @@
           </a:p>
         </p:txBody>
       </p:sp>
-      <p:graphicFrame>
-        <p:nvGraphicFramePr>
-          <p:cNvPr id="30722" name="Object 5"/>
-          <p:cNvGraphicFramePr>
-            <a:graphicFrameLocks noGrp="1" noChangeAspect="1"/>
-          </p:cNvGraphicFramePr>
-          <p:nvPr>
-            <p:ph sz="half" idx="4294967295"/>
-          </p:nvPr>
-        </p:nvGraphicFramePr>
-        <p:xfrm>
-          <a:off x="2209800" y="2286000"/>
-          <a:ext cx="2362200" cy="1265238"/>
-        </p:xfrm>
-        <a:graphic>
-          <a:graphicData uri="http://schemas.openxmlformats.org/presentationml/2006/ole">
-            <mc:AlternateContent xmlns:mc="http://schemas.openxmlformats.org/markup-compatibility/2006">
-              <mc:Choice xmlns:v="urn:schemas-microsoft-com:vml" Requires="v">
-                <p:oleObj name="Equation" r:id="rId3" imgW="1066800" imgH="571500" progId="Equation.DSMT4">
-                  <p:embed/>
-                </p:oleObj>
-              </mc:Choice>
-              <mc:Fallback>
-                <p:oleObj name="Equation" r:id="rId3" imgW="1066800" imgH="571500" progId="Equation.DSMT4">
-                  <p:embed/>
-                  <p:pic>
-                    <p:nvPicPr>
-                      <p:cNvPr id="0" name=""/>
-                      <p:cNvPicPr>
-                        <a:picLocks noChangeAspect="1" noChangeArrowheads="1"/>
-                      </p:cNvPicPr>
-                      <p:nvPr/>
-                    </p:nvPicPr>
-                    <p:blipFill>
-                      <a:blip r:embed="rId4">
-                        <a:extLst>
-                          <a:ext uri="{28A0092B-C50C-407E-A947-70E740481C1C}">
-                            <a14:useLocalDpi xmlns:a14="http://schemas.microsoft.com/office/drawing/2010/main" val="0"/>
-                          </a:ext>
-                        </a:extLst>
-                      </a:blip>
-                      <a:srcRect/>
-                      <a:stretch>
-                        <a:fillRect/>
-                      </a:stretch>
-                    </p:blipFill>
-                    <p:spPr bwMode="auto">
-                      <a:xfrm>
-                        <a:off x="2209800" y="2286000"/>
-                        <a:ext cx="2362200" cy="1265238"/>
-                      </a:xfrm>
-                      <a:prstGeom prst="rect">
-                        <a:avLst/>
-                      </a:prstGeom>
-                      <a:noFill/>
-                      <a:ln>
-                        <a:noFill/>
-                      </a:ln>
-                      <a:effectLst/>
-                      <a:extLst>
-                        <a:ext uri="{909E8E84-426E-40DD-AFC4-6F175D3DCCD1}">
-                          <a14:hiddenFill xmlns:a14="http://schemas.microsoft.com/office/drawing/2010/main">
-                            <a:solidFill>
-                              <a:srgbClr val="FFFFFF"/>
-                            </a:solidFill>
-                          </a14:hiddenFill>
-                        </a:ext>
-                        <a:ext uri="{91240B29-F687-4F45-9708-019B960494DF}">
-                          <a14:hiddenLine xmlns:a14="http://schemas.microsoft.com/office/drawing/2010/main" w="9525">
-                            <a:solidFill>
-                              <a:srgbClr val="000000"/>
-                            </a:solidFill>
-                            <a:miter lim="800000"/>
-                            <a:headEnd/>
-                            <a:tailEnd/>
-                          </a14:hiddenLine>
-                        </a:ext>
-                        <a:ext uri="{AF507438-7753-43E0-B8FC-AC1667EBCBE1}">
-                          <a14:hiddenEffects xmlns:a14="http://schemas.microsoft.com/office/drawing/2010/main">
-                            <a:effectLst>
-                              <a:outerShdw dist="35921" dir="2700000" algn="ctr" rotWithShape="0">
-                                <a:srgbClr val="808080"/>
-                              </a:outerShdw>
-                            </a:effectLst>
-                          </a14:hiddenEffects>
-                        </a:ext>
-                      </a:extLst>
-                    </p:spPr>
-                  </p:pic>
-                </p:oleObj>
-              </mc:Fallback>
-            </mc:AlternateContent>
-          </a:graphicData>
-        </a:graphic>
-      </p:graphicFrame>
       <p:pic>
         <p:nvPicPr>
           <p:cNvPr id="28676" name="Picture 7"/>
@@ -27560,7 +31448,7 @@
           </p:nvPr>
         </p:nvPicPr>
         <p:blipFill>
-          <a:blip r:embed="rId5">
+          <a:blip r:embed="rId3">
             <a:extLst>
               <a:ext uri="{28A0092B-C50C-407E-A947-70E740481C1C}">
                 <a14:useLocalDpi xmlns:a14="http://schemas.microsoft.com/office/drawing/2010/main" val="0"/>
@@ -27827,10 +31715,140 @@
           </a:p>
         </p:txBody>
       </p:sp>
+      <p:sp>
+        <p:nvSpPr>
+          <p:cNvPr id="9071" name="EqText7"/>
+          <p:cNvSpPr/>
+          <p:nvPr/>
+        </p:nvSpPr>
+        <p:spPr>
+          <a:xfrm>
+            <a:off x="2159000" y="2260600"/>
+            <a:ext cx="4064000" cy="1397000"/>
+          </a:xfrm>
+          <a:prstGeom prst="rect">
+            <a:avLst/>
+          </a:prstGeom>
+          <a:noFill/>
+        </p:spPr>
+        <p:txBody>
+          <a:bodyPr wrap="square" lIns="0" tIns="0" rIns="0" bIns="0" anchor="t">
+            <a:normAutofit/>
+          </a:bodyPr>
+          <a:lstStyle/>
+          <a:p>
+            <a:pPr algn="l"/>
+            <a:r>
+              <a:rPr lang="en-US" sz="1800" i="1" dirty="0">
+                <a:latin typeface="Cambria"/>
+                <a:cs typeface="Cambria"/>
+              </a:rPr>
+              <a:t>y</a:t>
+            </a:r>
+            <a:r>
+              <a:rPr lang="en-US" sz="1404" i="1" baseline="-25000" dirty="0">
+                <a:latin typeface="Cambria"/>
+                <a:cs typeface="Cambria"/>
+              </a:rPr>
+              <a:t>i,j</a:t>
+            </a:r>
+            <a:r>
+              <a:rPr lang="en-US" sz="1800" dirty="0">
+                <a:latin typeface="Cambria"/>
+                <a:cs typeface="Cambria"/>
+              </a:rPr>
+              <a:t> = </a:t>
+            </a:r>
+            <a:r>
+              <a:rPr lang="en-US" sz="1800" i="1" dirty="0">
+                <a:latin typeface="Cambria"/>
+                <a:cs typeface="Cambria"/>
+              </a:rPr>
+              <a:t>β</a:t>
+            </a:r>
+            <a:r>
+              <a:rPr lang="en-US" sz="1404" i="1" baseline="-25000" dirty="0">
+                <a:latin typeface="Cambria"/>
+                <a:cs typeface="Cambria"/>
+              </a:rPr>
+              <a:t>i</a:t>
+            </a:r>
+            <a:r>
+              <a:rPr lang="en-US" sz="1800" dirty="0">
+                <a:latin typeface="Cambria"/>
+                <a:cs typeface="Cambria"/>
+              </a:rPr>
+              <a:t> + </a:t>
+            </a:r>
+            <a:r>
+              <a:rPr lang="en-US" sz="1800" i="1" dirty="0">
+                <a:latin typeface="Cambria"/>
+                <a:cs typeface="Cambria"/>
+              </a:rPr>
+              <a:t>ε</a:t>
+            </a:r>
+            <a:r>
+              <a:rPr lang="en-US" sz="1404" i="1" baseline="-25000" dirty="0">
+                <a:latin typeface="Cambria"/>
+                <a:cs typeface="Cambria"/>
+              </a:rPr>
+              <a:t>i,j</a:t>
+            </a:r>
+          </a:p>
+          <a:p>
+            <a:pPr algn="l"/>
+            <a:r>
+              <a:rPr lang="en-US" sz="1800" i="1" dirty="0">
+                <a:latin typeface="Cambria"/>
+                <a:cs typeface="Cambria"/>
+              </a:rPr>
+              <a:t>i</a:t>
+            </a:r>
+            <a:r>
+              <a:rPr lang="en-US" sz="1800" dirty="0">
+                <a:latin typeface="Cambria"/>
+                <a:cs typeface="Cambria"/>
+              </a:rPr>
+              <a:t> = 1,2,..,6;  </a:t>
+            </a:r>
+            <a:r>
+              <a:rPr lang="en-US" sz="1800" i="1" dirty="0">
+                <a:latin typeface="Cambria"/>
+                <a:cs typeface="Cambria"/>
+              </a:rPr>
+              <a:t>j</a:t>
+            </a:r>
+            <a:r>
+              <a:rPr lang="en-US" sz="1800" dirty="0">
+                <a:latin typeface="Cambria"/>
+                <a:cs typeface="Cambria"/>
+              </a:rPr>
+              <a:t> = 1,2,3</a:t>
+            </a:r>
+          </a:p>
+          <a:p>
+            <a:pPr algn="l"/>
+            <a:r>
+              <a:rPr lang="en-US" sz="1800" i="1" dirty="0">
+                <a:latin typeface="Cambria"/>
+                <a:cs typeface="Cambria"/>
+              </a:rPr>
+              <a:t>σ̂</a:t>
+            </a:r>
+            <a:r>
+              <a:rPr lang="en-US" sz="1800" dirty="0">
+                <a:latin typeface="Cambria"/>
+                <a:cs typeface="Cambria"/>
+              </a:rPr>
+              <a:t> = 6.1</a:t>
+            </a:r>
+          </a:p>
+        </p:txBody>
+      </p:sp>
     </p:spTree>
     <p:extLst>
       <p:ext uri="{BB962C8B-B14F-4D97-AF65-F5344CB8AC3E}">
-        <p14:creationId xmlns:p14="http://schemas.microsoft.com/office/powerpoint/2010/main" val="2124900889"/>
+        <p14:creationId xmlns:p14="http://schemas.microsoft.com/office/powerpoint/2010/main" val="913276439"/>
       </p:ext>
     </p:extLst>
   </p:cSld>
@@ -28079,307 +32097,6 @@
           </a:p>
         </p:txBody>
       </p:sp>
-      <p:graphicFrame>
-        <p:nvGraphicFramePr>
-          <p:cNvPr id="32771" name="Object 4"/>
-          <p:cNvGraphicFramePr>
-            <a:graphicFrameLocks noGrp="1" noChangeAspect="1"/>
-          </p:cNvGraphicFramePr>
-          <p:nvPr>
-            <p:ph sz="quarter" idx="2"/>
-            <p:extLst>
-              <p:ext uri="{D42A27DB-BD31-4B8C-83A1-F6EECF244321}">
-                <p14:modId xmlns:p14="http://schemas.microsoft.com/office/powerpoint/2010/main" val="1548378475"/>
-              </p:ext>
-            </p:extLst>
-          </p:nvPr>
-        </p:nvGraphicFramePr>
-        <p:xfrm>
-          <a:off x="5141914" y="1905794"/>
-          <a:ext cx="2209800" cy="508000"/>
-        </p:xfrm>
-        <a:graphic>
-          <a:graphicData uri="http://schemas.openxmlformats.org/presentationml/2006/ole">
-            <mc:AlternateContent xmlns:mc="http://schemas.openxmlformats.org/markup-compatibility/2006">
-              <mc:Choice xmlns:v="urn:schemas-microsoft-com:vml" Requires="v">
-                <p:oleObj name="Equation" r:id="rId3" imgW="939392" imgH="215806" progId="Equation.DSMT4">
-                  <p:embed/>
-                </p:oleObj>
-              </mc:Choice>
-              <mc:Fallback>
-                <p:oleObj name="Equation" r:id="rId3" imgW="939392" imgH="215806" progId="Equation.DSMT4">
-                  <p:embed/>
-                  <p:pic>
-                    <p:nvPicPr>
-                      <p:cNvPr id="0" name=""/>
-                      <p:cNvPicPr>
-                        <a:picLocks noChangeAspect="1" noChangeArrowheads="1"/>
-                      </p:cNvPicPr>
-                      <p:nvPr/>
-                    </p:nvPicPr>
-                    <p:blipFill>
-                      <a:blip r:embed="rId4">
-                        <a:extLst>
-                          <a:ext uri="{28A0092B-C50C-407E-A947-70E740481C1C}">
-                            <a14:useLocalDpi xmlns:a14="http://schemas.microsoft.com/office/drawing/2010/main" val="0"/>
-                          </a:ext>
-                        </a:extLst>
-                      </a:blip>
-                      <a:srcRect/>
-                      <a:stretch>
-                        <a:fillRect/>
-                      </a:stretch>
-                    </p:blipFill>
-                    <p:spPr bwMode="auto">
-                      <a:xfrm>
-                        <a:off x="5141914" y="1905794"/>
-                        <a:ext cx="2209800" cy="508000"/>
-                      </a:xfrm>
-                      <a:prstGeom prst="rect">
-                        <a:avLst/>
-                      </a:prstGeom>
-                      <a:noFill/>
-                      <a:ln>
-                        <a:noFill/>
-                      </a:ln>
-                      <a:effectLst/>
-                      <a:extLst>
-                        <a:ext uri="{909E8E84-426E-40DD-AFC4-6F175D3DCCD1}">
-                          <a14:hiddenFill xmlns:a14="http://schemas.microsoft.com/office/drawing/2010/main">
-                            <a:solidFill>
-                              <a:srgbClr val="FFFFFF"/>
-                            </a:solidFill>
-                          </a14:hiddenFill>
-                        </a:ext>
-                        <a:ext uri="{91240B29-F687-4F45-9708-019B960494DF}">
-                          <a14:hiddenLine xmlns:a14="http://schemas.microsoft.com/office/drawing/2010/main" w="9525">
-                            <a:solidFill>
-                              <a:srgbClr val="000000"/>
-                            </a:solidFill>
-                            <a:miter lim="800000"/>
-                            <a:headEnd/>
-                            <a:tailEnd/>
-                          </a14:hiddenLine>
-                        </a:ext>
-                        <a:ext uri="{AF507438-7753-43E0-B8FC-AC1667EBCBE1}">
-                          <a14:hiddenEffects xmlns:a14="http://schemas.microsoft.com/office/drawing/2010/main">
-                            <a:effectLst>
-                              <a:outerShdw dist="35921" dir="2700000" algn="ctr" rotWithShape="0">
-                                <a:srgbClr val="808080"/>
-                              </a:outerShdw>
-                            </a:effectLst>
-                          </a14:hiddenEffects>
-                        </a:ext>
-                      </a:extLst>
-                    </p:spPr>
-                  </p:pic>
-                </p:oleObj>
-              </mc:Fallback>
-            </mc:AlternateContent>
-          </a:graphicData>
-        </a:graphic>
-      </p:graphicFrame>
-      <p:graphicFrame>
-        <p:nvGraphicFramePr>
-          <p:cNvPr id="32772" name="Object 6"/>
-          <p:cNvGraphicFramePr>
-            <a:graphicFrameLocks noGrp="1" noChangeAspect="1"/>
-          </p:cNvGraphicFramePr>
-          <p:nvPr>
-            <p:ph sz="quarter" idx="3"/>
-            <p:extLst>
-              <p:ext uri="{D42A27DB-BD31-4B8C-83A1-F6EECF244321}">
-                <p14:modId xmlns:p14="http://schemas.microsoft.com/office/powerpoint/2010/main" val="563654127"/>
-              </p:ext>
-            </p:extLst>
-          </p:nvPr>
-        </p:nvGraphicFramePr>
-        <p:xfrm>
-          <a:off x="4891846" y="3373041"/>
-          <a:ext cx="1828800" cy="546100"/>
-        </p:xfrm>
-        <a:graphic>
-          <a:graphicData uri="http://schemas.openxmlformats.org/presentationml/2006/ole">
-            <mc:AlternateContent xmlns:mc="http://schemas.openxmlformats.org/markup-compatibility/2006">
-              <mc:Choice xmlns:v="urn:schemas-microsoft-com:vml" Requires="v">
-                <p:oleObj name="Equation" r:id="rId5" imgW="723586" imgH="215806" progId="Equation.DSMT4">
-                  <p:embed/>
-                </p:oleObj>
-              </mc:Choice>
-              <mc:Fallback>
-                <p:oleObj name="Equation" r:id="rId5" imgW="723586" imgH="215806" progId="Equation.DSMT4">
-                  <p:embed/>
-                  <p:pic>
-                    <p:nvPicPr>
-                      <p:cNvPr id="0" name=""/>
-                      <p:cNvPicPr>
-                        <a:picLocks noChangeAspect="1" noChangeArrowheads="1"/>
-                      </p:cNvPicPr>
-                      <p:nvPr/>
-                    </p:nvPicPr>
-                    <p:blipFill>
-                      <a:blip r:embed="rId6">
-                        <a:extLst>
-                          <a:ext uri="{28A0092B-C50C-407E-A947-70E740481C1C}">
-                            <a14:useLocalDpi xmlns:a14="http://schemas.microsoft.com/office/drawing/2010/main" val="0"/>
-                          </a:ext>
-                        </a:extLst>
-                      </a:blip>
-                      <a:srcRect/>
-                      <a:stretch>
-                        <a:fillRect/>
-                      </a:stretch>
-                    </p:blipFill>
-                    <p:spPr bwMode="auto">
-                      <a:xfrm>
-                        <a:off x="4891846" y="3373041"/>
-                        <a:ext cx="1828800" cy="546100"/>
-                      </a:xfrm>
-                      <a:prstGeom prst="rect">
-                        <a:avLst/>
-                      </a:prstGeom>
-                      <a:noFill/>
-                      <a:ln>
-                        <a:noFill/>
-                      </a:ln>
-                      <a:effectLst/>
-                      <a:extLst>
-                        <a:ext uri="{909E8E84-426E-40DD-AFC4-6F175D3DCCD1}">
-                          <a14:hiddenFill xmlns:a14="http://schemas.microsoft.com/office/drawing/2010/main">
-                            <a:solidFill>
-                              <a:srgbClr val="FFFFFF"/>
-                            </a:solidFill>
-                          </a14:hiddenFill>
-                        </a:ext>
-                        <a:ext uri="{91240B29-F687-4F45-9708-019B960494DF}">
-                          <a14:hiddenLine xmlns:a14="http://schemas.microsoft.com/office/drawing/2010/main" w="9525">
-                            <a:solidFill>
-                              <a:srgbClr val="000000"/>
-                            </a:solidFill>
-                            <a:miter lim="800000"/>
-                            <a:headEnd/>
-                            <a:tailEnd/>
-                          </a14:hiddenLine>
-                        </a:ext>
-                        <a:ext uri="{AF507438-7753-43E0-B8FC-AC1667EBCBE1}">
-                          <a14:hiddenEffects xmlns:a14="http://schemas.microsoft.com/office/drawing/2010/main">
-                            <a:effectLst>
-                              <a:outerShdw dist="35921" dir="2700000" algn="ctr" rotWithShape="0">
-                                <a:srgbClr val="808080"/>
-                              </a:outerShdw>
-                            </a:effectLst>
-                          </a14:hiddenEffects>
-                        </a:ext>
-                      </a:extLst>
-                    </p:spPr>
-                  </p:pic>
-                </p:oleObj>
-              </mc:Fallback>
-            </mc:AlternateContent>
-          </a:graphicData>
-        </a:graphic>
-      </p:graphicFrame>
-      <p:graphicFrame>
-        <p:nvGraphicFramePr>
-          <p:cNvPr id="32773" name="Object 8"/>
-          <p:cNvGraphicFramePr>
-            <a:graphicFrameLocks noChangeAspect="1"/>
-          </p:cNvGraphicFramePr>
-          <p:nvPr>
-            <p:extLst>
-              <p:ext uri="{D42A27DB-BD31-4B8C-83A1-F6EECF244321}">
-                <p14:modId xmlns:p14="http://schemas.microsoft.com/office/powerpoint/2010/main" val="117763815"/>
-              </p:ext>
-            </p:extLst>
-          </p:nvPr>
-        </p:nvGraphicFramePr>
-        <p:xfrm>
-          <a:off x="3622623" y="5384007"/>
-          <a:ext cx="1627187" cy="485775"/>
-        </p:xfrm>
-        <a:graphic>
-          <a:graphicData uri="http://schemas.openxmlformats.org/presentationml/2006/ole">
-            <mc:AlternateContent xmlns:mc="http://schemas.openxmlformats.org/markup-compatibility/2006">
-              <mc:Choice xmlns:v="urn:schemas-microsoft-com:vml" Requires="v">
-                <p:oleObj name="Equation" r:id="rId7" imgW="812447" imgH="241195" progId="Equation.DSMT4">
-                  <p:embed/>
-                </p:oleObj>
-              </mc:Choice>
-              <mc:Fallback>
-                <p:oleObj name="Equation" r:id="rId7" imgW="812447" imgH="241195" progId="Equation.DSMT4">
-                  <p:embed/>
-                  <p:pic>
-                    <p:nvPicPr>
-                      <p:cNvPr id="0" name=""/>
-                      <p:cNvPicPr>
-                        <a:picLocks noChangeAspect="1" noChangeArrowheads="1"/>
-                      </p:cNvPicPr>
-                      <p:nvPr/>
-                    </p:nvPicPr>
-                    <p:blipFill>
-                      <a:blip r:embed="rId8">
-                        <a:extLst>
-                          <a:ext uri="{28A0092B-C50C-407E-A947-70E740481C1C}">
-                            <a14:useLocalDpi xmlns:a14="http://schemas.microsoft.com/office/drawing/2010/main" val="0"/>
-                          </a:ext>
-                        </a:extLst>
-                      </a:blip>
-                      <a:srcRect/>
-                      <a:stretch>
-                        <a:fillRect/>
-                      </a:stretch>
-                    </p:blipFill>
-                    <p:spPr bwMode="auto">
-                      <a:xfrm>
-                        <a:off x="3622623" y="5384007"/>
-                        <a:ext cx="1627187" cy="485775"/>
-                      </a:xfrm>
-                      <a:prstGeom prst="rect">
-                        <a:avLst/>
-                      </a:prstGeom>
-                      <a:noFill/>
-                      <a:ln>
-                        <a:noFill/>
-                      </a:ln>
-                      <a:effectLst/>
-                      <a:extLst>
-                        <a:ext uri="{909E8E84-426E-40DD-AFC4-6F175D3DCCD1}">
-                          <a14:hiddenFill xmlns:a14="http://schemas.microsoft.com/office/drawing/2010/main">
-                            <a:solidFill>
-                              <a:srgbClr val="FFFFFF"/>
-                            </a:solidFill>
-                          </a14:hiddenFill>
-                        </a:ext>
-                        <a:ext uri="{91240B29-F687-4F45-9708-019B960494DF}">
-                          <a14:hiddenLine xmlns:a14="http://schemas.microsoft.com/office/drawing/2010/main" w="9525">
-                            <a:solidFill>
-                              <a:srgbClr val="000000"/>
-                            </a:solidFill>
-                            <a:miter lim="800000"/>
-                            <a:headEnd/>
-                            <a:tailEnd/>
-                          </a14:hiddenLine>
-                        </a:ext>
-                        <a:ext uri="{AF507438-7753-43E0-B8FC-AC1667EBCBE1}">
-                          <a14:hiddenEffects xmlns:a14="http://schemas.microsoft.com/office/drawing/2010/main">
-                            <a:effectLst>
-                              <a:outerShdw blurRad="63500" dist="38099" dir="2700000" algn="ctr" rotWithShape="0">
-                                <a:srgbClr val="000000">
-                                  <a:alpha val="74997"/>
-                                </a:srgbClr>
-                              </a:outerShdw>
-                            </a:effectLst>
-                          </a14:hiddenEffects>
-                        </a:ext>
-                      </a:extLst>
-                    </p:spPr>
-                  </p:pic>
-                </p:oleObj>
-              </mc:Fallback>
-            </mc:AlternateContent>
-          </a:graphicData>
-        </a:graphic>
-      </p:graphicFrame>
       <p:sp>
         <p:nvSpPr>
           <p:cNvPr id="2" name="Line Callout 2 1"/>
@@ -28851,10 +32568,277 @@
           </a:p>
         </p:txBody>
       </p:sp>
+      <p:sp>
+        <p:nvSpPr>
+          <p:cNvPr id="9081" name="EqText8a"/>
+          <p:cNvSpPr/>
+          <p:nvPr/>
+        </p:nvSpPr>
+        <p:spPr>
+          <a:xfrm>
+            <a:off x="3962400" y="1905000"/>
+            <a:ext cx="4572000" cy="508000"/>
+          </a:xfrm>
+          <a:prstGeom prst="rect">
+            <a:avLst/>
+          </a:prstGeom>
+          <a:noFill/>
+        </p:spPr>
+        <p:txBody>
+          <a:bodyPr wrap="square" lIns="0" tIns="0" rIns="0" bIns="0" anchor="ctr">
+            <a:normAutofit/>
+          </a:bodyPr>
+          <a:lstStyle/>
+          <a:p>
+            <a:pPr algn="ctr"/>
+            <a:r>
+              <a:rPr lang="en-US" sz="2000" i="1" dirty="0">
+                <a:latin typeface="Cambria"/>
+                <a:cs typeface="Cambria"/>
+              </a:rPr>
+              <a:t>y</a:t>
+            </a:r>
+            <a:r>
+              <a:rPr lang="en-US" sz="1560" i="1" baseline="-25000" dirty="0">
+                <a:latin typeface="Cambria"/>
+                <a:cs typeface="Cambria"/>
+              </a:rPr>
+              <a:t>i,j</a:t>
+            </a:r>
+            <a:r>
+              <a:rPr lang="en-US" sz="2000" dirty="0">
+                <a:latin typeface="Cambria"/>
+                <a:cs typeface="Cambria"/>
+              </a:rPr>
+              <a:t> = </a:t>
+            </a:r>
+            <a:r>
+              <a:rPr lang="en-US" sz="2000" i="1" dirty="0">
+                <a:latin typeface="Cambria"/>
+                <a:cs typeface="Cambria"/>
+              </a:rPr>
+              <a:t>β</a:t>
+            </a:r>
+            <a:r>
+              <a:rPr lang="en-US" sz="2000" dirty="0">
+                <a:latin typeface="Cambria"/>
+                <a:cs typeface="Cambria"/>
+              </a:rPr>
+              <a:t> + </a:t>
+            </a:r>
+            <a:r>
+              <a:rPr lang="en-US" sz="2000" i="1" dirty="0">
+                <a:latin typeface="Cambria"/>
+                <a:cs typeface="Cambria"/>
+              </a:rPr>
+              <a:t>b</a:t>
+            </a:r>
+            <a:r>
+              <a:rPr lang="en-US" sz="1560" i="1" baseline="-25000" dirty="0">
+                <a:latin typeface="Cambria"/>
+                <a:cs typeface="Cambria"/>
+              </a:rPr>
+              <a:t>i</a:t>
+            </a:r>
+            <a:r>
+              <a:rPr lang="en-US" sz="2000" dirty="0">
+                <a:latin typeface="Cambria"/>
+                <a:cs typeface="Cambria"/>
+              </a:rPr>
+              <a:t> + </a:t>
+            </a:r>
+            <a:r>
+              <a:rPr lang="en-US" sz="2000" i="1" dirty="0">
+                <a:latin typeface="Cambria"/>
+                <a:cs typeface="Cambria"/>
+              </a:rPr>
+              <a:t>ε</a:t>
+            </a:r>
+            <a:r>
+              <a:rPr lang="en-US" sz="1560" i="1" baseline="-25000" dirty="0">
+                <a:latin typeface="Cambria"/>
+                <a:cs typeface="Cambria"/>
+              </a:rPr>
+              <a:t>i,j</a:t>
+            </a:r>
+          </a:p>
+        </p:txBody>
+      </p:sp>
+      <p:sp>
+        <p:nvSpPr>
+          <p:cNvPr id="9082" name="EqText8b"/>
+          <p:cNvSpPr/>
+          <p:nvPr/>
+        </p:nvSpPr>
+        <p:spPr>
+          <a:xfrm>
+            <a:off x="3517900" y="3390900"/>
+            <a:ext cx="4572000" cy="508000"/>
+          </a:xfrm>
+          <a:prstGeom prst="rect">
+            <a:avLst/>
+          </a:prstGeom>
+          <a:noFill/>
+        </p:spPr>
+        <p:txBody>
+          <a:bodyPr wrap="square" lIns="0" tIns="0" rIns="0" bIns="0" anchor="ctr">
+            <a:normAutofit/>
+          </a:bodyPr>
+          <a:lstStyle/>
+          <a:p>
+            <a:pPr algn="ctr"/>
+            <a:r>
+              <a:rPr lang="en-US" sz="2000" i="1" dirty="0">
+                <a:latin typeface="Cambria"/>
+                <a:cs typeface="Cambria"/>
+              </a:rPr>
+              <a:t>b</a:t>
+            </a:r>
+            <a:r>
+              <a:rPr lang="en-US" sz="1560" i="1" baseline="-25000" dirty="0">
+                <a:latin typeface="Cambria"/>
+                <a:cs typeface="Cambria"/>
+              </a:rPr>
+              <a:t>i</a:t>
+            </a:r>
+            <a:r>
+              <a:rPr lang="en-US" sz="2000" dirty="0">
+                <a:latin typeface="Cambria"/>
+                <a:cs typeface="Cambria"/>
+              </a:rPr>
+              <a:t> ~ </a:t>
+            </a:r>
+            <a:r>
+              <a:rPr lang="en-US" sz="2000" i="1" dirty="0">
+                <a:latin typeface="Cambria"/>
+                <a:cs typeface="Cambria"/>
+              </a:rPr>
+              <a:t>N</a:t>
+            </a:r>
+            <a:r>
+              <a:rPr lang="en-US" sz="2000" dirty="0">
+                <a:latin typeface="Cambria"/>
+                <a:cs typeface="Cambria"/>
+              </a:rPr>
+              <a:t>(0; </a:t>
+            </a:r>
+            <a:r>
+              <a:rPr lang="en-US" sz="2000" i="1" dirty="0">
+                <a:latin typeface="Cambria"/>
+                <a:cs typeface="Cambria"/>
+              </a:rPr>
+              <a:t>σ</a:t>
+            </a:r>
+            <a:r>
+              <a:rPr lang="en-US" sz="1560" baseline="30000" dirty="0">
+                <a:latin typeface="Cambria"/>
+                <a:cs typeface="Cambria"/>
+              </a:rPr>
+              <a:t>2</a:t>
+            </a:r>
+            <a:r>
+              <a:rPr lang="en-US" sz="1560" i="1" baseline="-25000" dirty="0">
+                <a:latin typeface="Cambria"/>
+                <a:cs typeface="Cambria"/>
+              </a:rPr>
+              <a:t>b</a:t>
+            </a:r>
+            <a:r>
+              <a:rPr lang="en-US" sz="2000" dirty="0">
+                <a:latin typeface="Cambria"/>
+                <a:cs typeface="Cambria"/>
+              </a:rPr>
+              <a:t>)</a:t>
+            </a:r>
+          </a:p>
+        </p:txBody>
+      </p:sp>
+      <p:sp>
+        <p:nvSpPr>
+          <p:cNvPr id="9083" name="EqText8c"/>
+          <p:cNvSpPr/>
+          <p:nvPr/>
+        </p:nvSpPr>
+        <p:spPr>
+          <a:xfrm>
+            <a:off x="2146300" y="5372100"/>
+            <a:ext cx="4572000" cy="508000"/>
+          </a:xfrm>
+          <a:prstGeom prst="rect">
+            <a:avLst/>
+          </a:prstGeom>
+          <a:noFill/>
+        </p:spPr>
+        <p:txBody>
+          <a:bodyPr wrap="square" lIns="0" tIns="0" rIns="0" bIns="0" anchor="ctr">
+            <a:normAutofit/>
+          </a:bodyPr>
+          <a:lstStyle/>
+          <a:p>
+            <a:pPr algn="ctr"/>
+            <a:r>
+              <a:rPr lang="en-US" sz="2000" i="1" dirty="0">
+                <a:latin typeface="Cambria"/>
+                <a:cs typeface="Cambria"/>
+              </a:rPr>
+              <a:t>ε</a:t>
+            </a:r>
+            <a:r>
+              <a:rPr lang="en-US" sz="1560" i="1" baseline="-25000" dirty="0">
+                <a:latin typeface="Cambria"/>
+                <a:cs typeface="Cambria"/>
+              </a:rPr>
+              <a:t>i,j</a:t>
+            </a:r>
+            <a:r>
+              <a:rPr lang="en-US" sz="2000" dirty="0">
+                <a:latin typeface="Cambria"/>
+                <a:cs typeface="Cambria"/>
+              </a:rPr>
+              <a:t> ~ </a:t>
+            </a:r>
+            <a:r>
+              <a:rPr lang="en-US" sz="2000" i="1" dirty="0">
+                <a:latin typeface="Cambria"/>
+                <a:cs typeface="Cambria"/>
+              </a:rPr>
+              <a:t>N</a:t>
+            </a:r>
+            <a:r>
+              <a:rPr lang="en-US" sz="2000" dirty="0">
+                <a:latin typeface="Cambria"/>
+                <a:cs typeface="Cambria"/>
+              </a:rPr>
+              <a:t>(0; </a:t>
+            </a:r>
+            <a:r>
+              <a:rPr lang="en-US" sz="2000" i="1" dirty="0">
+                <a:latin typeface="Cambria"/>
+                <a:cs typeface="Cambria"/>
+              </a:rPr>
+              <a:t>σ</a:t>
+            </a:r>
+            <a:r>
+              <a:rPr lang="en-US" sz="1560" baseline="30000" dirty="0">
+                <a:latin typeface="Cambria"/>
+                <a:cs typeface="Cambria"/>
+              </a:rPr>
+              <a:t>2</a:t>
+            </a:r>
+            <a:r>
+              <a:rPr lang="en-US" sz="2000" dirty="0">
+                <a:latin typeface="Cambria"/>
+                <a:cs typeface="Cambria"/>
+              </a:rPr>
+              <a:t>)</a:t>
+            </a:r>
+          </a:p>
+        </p:txBody>
+      </p:sp>
     </p:spTree>
     <p:extLst>
       <p:ext uri="{BB962C8B-B14F-4D97-AF65-F5344CB8AC3E}">
-        <p14:creationId xmlns:p14="http://schemas.microsoft.com/office/powerpoint/2010/main" val="846987062"/>
+        <p14:creationId xmlns:p14="http://schemas.microsoft.com/office/powerpoint/2010/main" val="684178345"/>
       </p:ext>
     </p:extLst>
   </p:cSld>
@@ -29688,4 +33672,26 @@
     </a:ext>
   </a:extLst>
 </a:theme>
+</file>
+
+<file path=ppt/webextensions/taskpanes.xml><?xml version="1.0" encoding="utf-8"?>
+<wetp:taskpanes xmlns:wetp="http://schemas.microsoft.com/office/webextensions/taskpanes/2010/11">
+  <wetp:taskpane dockstate="right" visibility="0" width="350" row="0">
+    <wetp:webextensionref xmlns:r="http://schemas.openxmlformats.org/officeDocument/2006/relationships" r:id="rId1"/>
+  </wetp:taskpane>
+</wetp:taskpanes>
+</file>
+
+<file path=ppt/webextensions/webextension1.xml><?xml version="1.0" encoding="utf-8"?>
+<we:webextension xmlns:we="http://schemas.microsoft.com/office/webextensions/webextension/2010/11" id="{7CCDC579-0A6A-DF48-9F68-7F9E1E8F1C5F}">
+  <we:reference id="WA200010001" version="1.0.0.1" store="Omex" storeType="OMEX"/>
+  <we:alternateReferences>
+    <we:reference id="WA200010001" version="1.0.0.1" store="WA200010001" storeType="OMEX"/>
+  </we:alternateReferences>
+  <we:properties>
+    <we:property name="claude.fileId" value="&quot;5bffa6b9-a4ab-49ae-99ea-fdba4896d6bd&quot;"/>
+  </we:properties>
+  <we:bindings/>
+  <we:snapshot xmlns:r="http://schemas.openxmlformats.org/officeDocument/2006/relationships"/>
+</we:webextension>
 </file>
--- a/Day3_MixedModels_ModelSelection/FW536_Day3_Morning_mixed effects_accessible.pptx
+++ b/Day3_MixedModels_ModelSelection/FW536_Day3_Morning_mixed effects_accessible.pptx
@@ -12108,96 +12108,103 @@
           </a:p>
         </p:txBody>
       </p:sp>
-      <p:graphicFrame>
-        <p:nvGraphicFramePr>
-          <p:cNvPr id="2" name="Object 4"/>
-          <p:cNvGraphicFramePr>
-            <a:graphicFrameLocks noGrp="1" noChangeAspect="1"/>
-          </p:cNvGraphicFramePr>
-          <p:nvPr>
-            <p:ph sz="half" idx="2"/>
-            <p:extLst>
-              <p:ext uri="{D42A27DB-BD31-4B8C-83A1-F6EECF244321}">
-                <p14:modId xmlns:p14="http://schemas.microsoft.com/office/powerpoint/2010/main" val="1391779649"/>
-              </p:ext>
-            </p:extLst>
-          </p:nvPr>
-        </p:nvGraphicFramePr>
-        <p:xfrm>
-          <a:off x="3252788" y="2678114"/>
-          <a:ext cx="5815012" cy="623887"/>
-        </p:xfrm>
-        <a:graphic>
-          <a:graphicData uri="http://schemas.openxmlformats.org/presentationml/2006/ole">
-            <mc:AlternateContent xmlns:mc="http://schemas.openxmlformats.org/markup-compatibility/2006">
-              <mc:Choice xmlns:v="urn:schemas-microsoft-com:vml" Requires="v">
-                <p:oleObj name="Equation" r:id="rId3" imgW="2247900" imgH="241300" progId="Equation.DSMT4">
-                  <p:embed/>
-                </p:oleObj>
-              </mc:Choice>
-              <mc:Fallback>
-                <p:oleObj name="Equation" r:id="rId3" imgW="2247900" imgH="241300" progId="Equation.DSMT4">
-                  <p:embed/>
-                  <p:pic>
-                    <p:nvPicPr>
-                      <p:cNvPr id="0" name=""/>
-                      <p:cNvPicPr>
-                        <a:picLocks noChangeAspect="1" noChangeArrowheads="1"/>
-                      </p:cNvPicPr>
-                      <p:nvPr/>
-                    </p:nvPicPr>
-                    <p:blipFill>
-                      <a:blip r:embed="rId4">
-                        <a:extLst>
-                          <a:ext uri="{28A0092B-C50C-407E-A947-70E740481C1C}">
-                            <a14:useLocalDpi xmlns:a14="http://schemas.microsoft.com/office/drawing/2010/main" val="0"/>
-                          </a:ext>
-                        </a:extLst>
-                      </a:blip>
-                      <a:srcRect/>
-                      <a:stretch>
-                        <a:fillRect/>
-                      </a:stretch>
-                    </p:blipFill>
-                    <p:spPr bwMode="auto">
-                      <a:xfrm>
-                        <a:off x="3252788" y="2678114"/>
-                        <a:ext cx="5815012" cy="623887"/>
-                      </a:xfrm>
-                      <a:prstGeom prst="rect">
-                        <a:avLst/>
-                      </a:prstGeom>
-                      <a:noFill/>
-                      <a:ln>
-                        <a:noFill/>
-                      </a:ln>
-                      <a:extLst>
-                        <a:ext uri="{909E8E84-426E-40DD-AFC4-6F175D3DCCD1}">
-                          <a14:hiddenFill xmlns:a14="http://schemas.microsoft.com/office/drawing/2010/main">
-                            <a:solidFill>
-                              <a:schemeClr val="accent1"/>
-                            </a:solidFill>
-                          </a14:hiddenFill>
-                        </a:ext>
-                        <a:ext uri="{91240B29-F687-4F45-9708-019B960494DF}">
-                          <a14:hiddenLine xmlns:a14="http://schemas.microsoft.com/office/drawing/2010/main" w="9525">
-                            <a:solidFill>
-                              <a:schemeClr val="tx1"/>
-                            </a:solidFill>
-                            <a:miter lim="800000"/>
-                            <a:headEnd/>
-                            <a:tailEnd/>
-                          </a14:hiddenLine>
-                        </a:ext>
-                      </a:extLst>
-                    </p:spPr>
-                  </p:pic>
-                </p:oleObj>
-              </mc:Fallback>
-            </mc:AlternateContent>
-          </a:graphicData>
-        </a:graphic>
-      </p:graphicFrame>
+      <p:sp>
+        <p:nvSpPr>
+          <p:cNvPr id="53252" name="TextBox 53251"/>
+          <p:cNvSpPr txBox="1"/>
+          <p:nvPr/>
+        </p:nvSpPr>
+        <p:spPr>
+          <a:xfrm>
+            <a:off x="3252788" y="2678114"/>
+            <a:ext cx="5815012" cy="623887"/>
+          </a:xfrm>
+          <a:prstGeom prst="rect">
+            <a:avLst/>
+          </a:prstGeom>
+          <a:noFill/>
+        </p:spPr>
+        <p:txBody>
+          <a:bodyPr wrap="square" anchor="ctr" lIns="0" rIns="0" tIns="0" bIns="0">
+            <a:spAutoFit/>
+          </a:bodyPr>
+          <a:lstStyle/>
+          <a:p>
+            <a:r>
+              <a:rPr sz="1600">
+                <a:latin typeface="Cambria"/>
+              </a:rPr>
+              <a:t>W = aL</a:t>
+            </a:r>
+            <a:r>
+              <a:rPr sz="1600" baseline="30000">
+                <a:latin typeface="Cambria"/>
+              </a:rPr>
+              <a:t>b</a:t>
+            </a:r>
+            <a:r>
+              <a:rPr sz="1600">
+                <a:latin typeface="Cambria"/>
+              </a:rPr>
+              <a:t>;        ln W</a:t>
+            </a:r>
+            <a:r>
+              <a:rPr sz="1600" baseline="-25000">
+                <a:latin typeface="Cambria"/>
+              </a:rPr>
+              <a:t>i,j</a:t>
+            </a:r>
+            <a:r>
+              <a:rPr sz="1600">
+                <a:latin typeface="Cambria"/>
+              </a:rPr>
+              <a:t> = ln a</a:t>
+            </a:r>
+            <a:r>
+              <a:rPr sz="1600" baseline="-25000">
+                <a:latin typeface="Cambria"/>
+              </a:rPr>
+              <a:t>i</a:t>
+            </a:r>
+            <a:r>
+              <a:rPr sz="1600">
+                <a:latin typeface="Cambria"/>
+              </a:rPr>
+              <a:t> + b</a:t>
+            </a:r>
+            <a:r>
+              <a:rPr sz="1600" baseline="-25000">
+                <a:latin typeface="Cambria"/>
+              </a:rPr>
+              <a:t>i</a:t>
+            </a:r>
+            <a:r>
+              <a:rPr sz="1600">
+                <a:latin typeface="Cambria"/>
+              </a:rPr>
+              <a:t> ln L</a:t>
+            </a:r>
+            <a:r>
+              <a:rPr sz="1600" baseline="-25000">
+                <a:latin typeface="Cambria"/>
+              </a:rPr>
+              <a:t>i,j</a:t>
+            </a:r>
+            <a:r>
+              <a:rPr sz="1600">
+                <a:latin typeface="Cambria"/>
+              </a:rPr>
+              <a:t> + ε</a:t>
+            </a:r>
+            <a:r>
+              <a:rPr sz="1600" baseline="-25000">
+                <a:latin typeface="Cambria"/>
+              </a:rPr>
+              <a:t>i,j</a:t>
+            </a:r>
+          </a:p>
+        </p:txBody>
+      </p:sp>
     </p:spTree>
     <p:extLst>
       <p:ext uri="{BB962C8B-B14F-4D97-AF65-F5344CB8AC3E}">
@@ -22658,105 +22665,6 @@
           </a:p>
         </p:txBody>
       </p:sp>
-      <p:graphicFrame>
-        <p:nvGraphicFramePr>
-          <p:cNvPr id="79875" name="Object 10"/>
-          <p:cNvGraphicFramePr>
-            <a:graphicFrameLocks noChangeAspect="1"/>
-          </p:cNvGraphicFramePr>
-          <p:nvPr>
-            <p:extLst>
-              <p:ext uri="{D42A27DB-BD31-4B8C-83A1-F6EECF244321}">
-                <p14:modId xmlns:p14="http://schemas.microsoft.com/office/powerpoint/2010/main" val="2591857975"/>
-              </p:ext>
-            </p:extLst>
-          </p:nvPr>
-        </p:nvGraphicFramePr>
-        <p:xfrm>
-          <a:off x="4125914" y="2035624"/>
-          <a:ext cx="3940175" cy="666750"/>
-        </p:xfrm>
-        <a:graphic>
-          <a:graphicData uri="http://schemas.openxmlformats.org/presentationml/2006/ole">
-            <mc:AlternateContent xmlns:mc="http://schemas.openxmlformats.org/markup-compatibility/2006">
-              <mc:Choice xmlns:v="urn:schemas-microsoft-com:vml" Requires="v">
-                <p:oleObj name="Equation" r:id="rId3" imgW="1574117" imgH="266584" progId="Equation.DSMT4">
-                  <p:embed/>
-                </p:oleObj>
-              </mc:Choice>
-              <mc:Fallback>
-                <p:oleObj name="Equation" r:id="rId3" imgW="1574117" imgH="266584" progId="Equation.DSMT4">
-                  <p:embed/>
-                  <p:pic>
-                    <p:nvPicPr>
-                      <p:cNvPr id="0" name=""/>
-                      <p:cNvPicPr>
-                        <a:picLocks noChangeAspect="1" noChangeArrowheads="1"/>
-                      </p:cNvPicPr>
-                      <p:nvPr/>
-                    </p:nvPicPr>
-                    <p:blipFill>
-                      <a:blip r:embed="rId4">
-                        <a:extLst>
-                          <a:ext uri="{28A0092B-C50C-407E-A947-70E740481C1C}">
-                            <a14:useLocalDpi xmlns:a14="http://schemas.microsoft.com/office/drawing/2010/main" val="0"/>
-                          </a:ext>
-                        </a:extLst>
-                      </a:blip>
-                      <a:srcRect/>
-                      <a:stretch>
-                        <a:fillRect/>
-                      </a:stretch>
-                    </p:blipFill>
-                    <p:spPr bwMode="auto">
-                      <a:xfrm>
-                        <a:off x="4125914" y="2035624"/>
-                        <a:ext cx="3940175" cy="666750"/>
-                      </a:xfrm>
-                      <a:prstGeom prst="rect">
-                        <a:avLst/>
-                      </a:prstGeom>
-                      <a:noFill/>
-                      <a:ln>
-                        <a:noFill/>
-                      </a:ln>
-                      <a:effectLst/>
-                      <a:extLst>
-                        <a:ext uri="{909E8E84-426E-40DD-AFC4-6F175D3DCCD1}">
-                          <a14:hiddenFill xmlns:a14="http://schemas.microsoft.com/office/drawing/2010/main">
-                            <a:solidFill>
-                              <a:srgbClr val="FFFFFF"/>
-                            </a:solidFill>
-                          </a14:hiddenFill>
-                        </a:ext>
-                        <a:ext uri="{91240B29-F687-4F45-9708-019B960494DF}">
-                          <a14:hiddenLine xmlns:a14="http://schemas.microsoft.com/office/drawing/2010/main" w="9525">
-                            <a:solidFill>
-                              <a:srgbClr val="000000"/>
-                            </a:solidFill>
-                            <a:miter lim="800000"/>
-                            <a:headEnd/>
-                            <a:tailEnd/>
-                          </a14:hiddenLine>
-                        </a:ext>
-                        <a:ext uri="{AF507438-7753-43E0-B8FC-AC1667EBCBE1}">
-                          <a14:hiddenEffects xmlns:a14="http://schemas.microsoft.com/office/drawing/2010/main">
-                            <a:effectLst>
-                              <a:outerShdw dist="35921" dir="2700000" algn="ctr" rotWithShape="0">
-                                <a:srgbClr val="808080"/>
-                              </a:outerShdw>
-                            </a:effectLst>
-                          </a14:hiddenEffects>
-                        </a:ext>
-                      </a:extLst>
-                    </p:spPr>
-                  </p:pic>
-                </p:oleObj>
-              </mc:Fallback>
-            </mc:AlternateContent>
-          </a:graphicData>
-        </a:graphic>
-      </p:graphicFrame>
       <p:pic>
         <p:nvPicPr>
           <p:cNvPr id="79876" name="Picture 1" descr="von Bertalanffy growth curve: Total Length in mm (y) versus Age (x, 0 to 12). Points scatter around a curve rising then leveling at asymptote L-infinity (dashed line); t0 marked at length zero."/>
@@ -22811,6 +22719,91 @@
           </a:extLst>
         </p:spPr>
       </p:pic>
+      <p:sp>
+        <p:nvSpPr>
+          <p:cNvPr id="79877" name="TextBox 79876"/>
+          <p:cNvSpPr txBox="1"/>
+          <p:nvPr/>
+        </p:nvSpPr>
+        <p:spPr>
+          <a:xfrm>
+            <a:off x="4125914" y="2035624"/>
+            <a:ext cx="3940175" cy="666750"/>
+          </a:xfrm>
+          <a:prstGeom prst="rect">
+            <a:avLst/>
+          </a:prstGeom>
+          <a:noFill/>
+        </p:spPr>
+        <p:txBody>
+          <a:bodyPr wrap="square" anchor="ctr" lIns="0" rIns="0" tIns="0" bIns="0">
+            <a:spAutoFit/>
+          </a:bodyPr>
+          <a:lstStyle/>
+          <a:p>
+            <a:r>
+              <a:rPr sz="1300">
+                <a:latin typeface="Cambria"/>
+              </a:rPr>
+              <a:t>ℓ</a:t>
+            </a:r>
+            <a:r>
+              <a:rPr sz="1300" baseline="-25000">
+                <a:latin typeface="Cambria"/>
+              </a:rPr>
+              <a:t>i,j</a:t>
+            </a:r>
+            <a:r>
+              <a:rPr sz="1300">
+                <a:latin typeface="Cambria"/>
+              </a:rPr>
+              <a:t> = ℓ</a:t>
+            </a:r>
+            <a:r>
+              <a:rPr sz="1300" baseline="-25000">
+                <a:latin typeface="Cambria"/>
+              </a:rPr>
+              <a:t>∞,i</a:t>
+            </a:r>
+            <a:r>
+              <a:rPr sz="1300">
+                <a:latin typeface="Cambria"/>
+              </a:rPr>
+              <a:t>(1 − exp(−κ(a</a:t>
+            </a:r>
+            <a:r>
+              <a:rPr sz="1300" baseline="-25000">
+                <a:latin typeface="Cambria"/>
+              </a:rPr>
+              <a:t>i,j</a:t>
+            </a:r>
+            <a:r>
+              <a:rPr sz="1300">
+                <a:latin typeface="Cambria"/>
+              </a:rPr>
+              <a:t> − t</a:t>
+            </a:r>
+            <a:r>
+              <a:rPr sz="1300" baseline="-25000">
+                <a:latin typeface="Cambria"/>
+              </a:rPr>
+              <a:t>0</a:t>
+            </a:r>
+            <a:r>
+              <a:rPr sz="1300">
+                <a:latin typeface="Cambria"/>
+              </a:rPr>
+              <a:t>))) + ε</a:t>
+            </a:r>
+            <a:r>
+              <a:rPr sz="1300" baseline="-25000">
+                <a:latin typeface="Cambria"/>
+              </a:rPr>
+              <a:t>i,j</a:t>
+            </a:r>
+          </a:p>
+        </p:txBody>
+      </p:sp>
     </p:spTree>
     <p:extLst>
       <p:ext uri="{BB962C8B-B14F-4D97-AF65-F5344CB8AC3E}">
@@ -23114,10 +23107,8 @@
               <a:t> and </a:t>
             </a:r>
             <a:r>
-              <a:rPr lang="en-US" altLang="en-US" dirty="0">
-                <a:sym typeface="Symbol" charset="2"/>
-              </a:rPr>
-              <a:t> are the same for all animals in the population while the asymptotic size differs among individuals.</a:t>
+              <a:rPr lang="en-US" altLang="en-US" dirty="0"/>
+              <a:t>κ are the same for all animals in the population while the asymptotic size differs among individuals.</a:t>
             </a:r>
           </a:p>
           <a:p>
@@ -23174,105 +23165,91 @@
           </a:p>
         </p:txBody>
       </p:sp>
-      <p:graphicFrame>
-        <p:nvGraphicFramePr>
-          <p:cNvPr id="81923" name="Object 10"/>
-          <p:cNvGraphicFramePr>
-            <a:graphicFrameLocks noChangeAspect="1"/>
-          </p:cNvGraphicFramePr>
-          <p:nvPr>
-            <p:extLst>
-              <p:ext uri="{D42A27DB-BD31-4B8C-83A1-F6EECF244321}">
-                <p14:modId xmlns:p14="http://schemas.microsoft.com/office/powerpoint/2010/main" val="3786212161"/>
-              </p:ext>
-            </p:extLst>
-          </p:nvPr>
-        </p:nvGraphicFramePr>
-        <p:xfrm>
-          <a:off x="4125914" y="2246689"/>
-          <a:ext cx="3940175" cy="666750"/>
-        </p:xfrm>
-        <a:graphic>
-          <a:graphicData uri="http://schemas.openxmlformats.org/presentationml/2006/ole">
-            <mc:AlternateContent xmlns:mc="http://schemas.openxmlformats.org/markup-compatibility/2006">
-              <mc:Choice xmlns:v="urn:schemas-microsoft-com:vml" Requires="v">
-                <p:oleObj name="Equation" r:id="rId3" imgW="1574117" imgH="266584" progId="Equation.DSMT4">
-                  <p:embed/>
-                </p:oleObj>
-              </mc:Choice>
-              <mc:Fallback>
-                <p:oleObj name="Equation" r:id="rId3" imgW="1574117" imgH="266584" progId="Equation.DSMT4">
-                  <p:embed/>
-                  <p:pic>
-                    <p:nvPicPr>
-                      <p:cNvPr id="0" name=""/>
-                      <p:cNvPicPr>
-                        <a:picLocks noChangeAspect="1" noChangeArrowheads="1"/>
-                      </p:cNvPicPr>
-                      <p:nvPr/>
-                    </p:nvPicPr>
-                    <p:blipFill>
-                      <a:blip r:embed="rId4">
-                        <a:extLst>
-                          <a:ext uri="{28A0092B-C50C-407E-A947-70E740481C1C}">
-                            <a14:useLocalDpi xmlns:a14="http://schemas.microsoft.com/office/drawing/2010/main" val="0"/>
-                          </a:ext>
-                        </a:extLst>
-                      </a:blip>
-                      <a:srcRect/>
-                      <a:stretch>
-                        <a:fillRect/>
-                      </a:stretch>
-                    </p:blipFill>
-                    <p:spPr bwMode="auto">
-                      <a:xfrm>
-                        <a:off x="4125914" y="2246689"/>
-                        <a:ext cx="3940175" cy="666750"/>
-                      </a:xfrm>
-                      <a:prstGeom prst="rect">
-                        <a:avLst/>
-                      </a:prstGeom>
-                      <a:noFill/>
-                      <a:ln>
-                        <a:noFill/>
-                      </a:ln>
-                      <a:effectLst/>
-                      <a:extLst>
-                        <a:ext uri="{909E8E84-426E-40DD-AFC4-6F175D3DCCD1}">
-                          <a14:hiddenFill xmlns:a14="http://schemas.microsoft.com/office/drawing/2010/main">
-                            <a:solidFill>
-                              <a:srgbClr val="FFFFFF"/>
-                            </a:solidFill>
-                          </a14:hiddenFill>
-                        </a:ext>
-                        <a:ext uri="{91240B29-F687-4F45-9708-019B960494DF}">
-                          <a14:hiddenLine xmlns:a14="http://schemas.microsoft.com/office/drawing/2010/main" w="9525">
-                            <a:solidFill>
-                              <a:srgbClr val="000000"/>
-                            </a:solidFill>
-                            <a:miter lim="800000"/>
-                            <a:headEnd/>
-                            <a:tailEnd/>
-                          </a14:hiddenLine>
-                        </a:ext>
-                        <a:ext uri="{AF507438-7753-43E0-B8FC-AC1667EBCBE1}">
-                          <a14:hiddenEffects xmlns:a14="http://schemas.microsoft.com/office/drawing/2010/main">
-                            <a:effectLst>
-                              <a:outerShdw dist="35921" dir="2700000" algn="ctr" rotWithShape="0">
-                                <a:srgbClr val="808080"/>
-                              </a:outerShdw>
-                            </a:effectLst>
-                          </a14:hiddenEffects>
-                        </a:ext>
-                      </a:extLst>
-                    </p:spPr>
-                  </p:pic>
-                </p:oleObj>
-              </mc:Fallback>
-            </mc:AlternateContent>
-          </a:graphicData>
-        </a:graphic>
-      </p:graphicFrame>
+      <p:sp>
+        <p:nvSpPr>
+          <p:cNvPr id="22532" name="TextBox 22531"/>
+          <p:cNvSpPr txBox="1"/>
+          <p:nvPr/>
+        </p:nvSpPr>
+        <p:spPr>
+          <a:xfrm>
+            <a:off x="4125914" y="2246689"/>
+            <a:ext cx="3940175" cy="666750"/>
+          </a:xfrm>
+          <a:prstGeom prst="rect">
+            <a:avLst/>
+          </a:prstGeom>
+          <a:noFill/>
+        </p:spPr>
+        <p:txBody>
+          <a:bodyPr wrap="square" anchor="ctr" lIns="0" rIns="0" tIns="0" bIns="0">
+            <a:spAutoFit/>
+          </a:bodyPr>
+          <a:lstStyle/>
+          <a:p>
+            <a:r>
+              <a:rPr sz="1300">
+                <a:latin typeface="Cambria"/>
+              </a:rPr>
+              <a:t>ℓ</a:t>
+            </a:r>
+            <a:r>
+              <a:rPr sz="1300" baseline="-25000">
+                <a:latin typeface="Cambria"/>
+              </a:rPr>
+              <a:t>i,j</a:t>
+            </a:r>
+            <a:r>
+              <a:rPr sz="1300">
+                <a:latin typeface="Cambria"/>
+              </a:rPr>
+              <a:t> = ℓ</a:t>
+            </a:r>
+            <a:r>
+              <a:rPr sz="1300" baseline="-25000">
+                <a:latin typeface="Cambria"/>
+              </a:rPr>
+              <a:t>∞,i</a:t>
+            </a:r>
+            <a:r>
+              <a:rPr sz="1300">
+                <a:latin typeface="Cambria"/>
+              </a:rPr>
+              <a:t>(1 − exp(−κ(a</a:t>
+            </a:r>
+            <a:r>
+              <a:rPr sz="1300" baseline="-25000">
+                <a:latin typeface="Cambria"/>
+              </a:rPr>
+              <a:t>i,j</a:t>
+            </a:r>
+            <a:r>
+              <a:rPr sz="1300">
+                <a:latin typeface="Cambria"/>
+              </a:rPr>
+              <a:t> − t</a:t>
+            </a:r>
+            <a:r>
+              <a:rPr sz="1300" baseline="-25000">
+                <a:latin typeface="Cambria"/>
+              </a:rPr>
+              <a:t>0</a:t>
+            </a:r>
+            <a:r>
+              <a:rPr sz="1300">
+                <a:latin typeface="Cambria"/>
+              </a:rPr>
+              <a:t>))) + ε</a:t>
+            </a:r>
+            <a:r>
+              <a:rPr sz="1300" baseline="-25000">
+                <a:latin typeface="Cambria"/>
+              </a:rPr>
+              <a:t>i,j</a:t>
+            </a:r>
+          </a:p>
+        </p:txBody>
+      </p:sp>
     </p:spTree>
     <p:extLst>
       <p:ext uri="{BB962C8B-B14F-4D97-AF65-F5344CB8AC3E}">
@@ -23334,106 +23311,6 @@
           </a:p>
         </p:txBody>
       </p:sp>
-      <p:graphicFrame>
-        <p:nvGraphicFramePr>
-          <p:cNvPr id="83974" name="Object 10"/>
-          <p:cNvGraphicFramePr>
-            <a:graphicFrameLocks noGrp="1" noChangeAspect="1"/>
-          </p:cNvGraphicFramePr>
-          <p:nvPr>
-            <p:ph sz="quarter" idx="3"/>
-            <p:extLst>
-              <p:ext uri="{D42A27DB-BD31-4B8C-83A1-F6EECF244321}">
-                <p14:modId xmlns:p14="http://schemas.microsoft.com/office/powerpoint/2010/main" val="3534137078"/>
-              </p:ext>
-            </p:extLst>
-          </p:nvPr>
-        </p:nvGraphicFramePr>
-        <p:xfrm>
-          <a:off x="4125912" y="1888711"/>
-          <a:ext cx="3940175" cy="666750"/>
-        </p:xfrm>
-        <a:graphic>
-          <a:graphicData uri="http://schemas.openxmlformats.org/presentationml/2006/ole">
-            <mc:AlternateContent xmlns:mc="http://schemas.openxmlformats.org/markup-compatibility/2006">
-              <mc:Choice xmlns:v="urn:schemas-microsoft-com:vml" Requires="v">
-                <p:oleObj name="Equation" r:id="rId3" imgW="1574117" imgH="266584" progId="Equation.DSMT4">
-                  <p:embed/>
-                </p:oleObj>
-              </mc:Choice>
-              <mc:Fallback>
-                <p:oleObj name="Equation" r:id="rId3" imgW="1574117" imgH="266584" progId="Equation.DSMT4">
-                  <p:embed/>
-                  <p:pic>
-                    <p:nvPicPr>
-                      <p:cNvPr id="0" name=""/>
-                      <p:cNvPicPr>
-                        <a:picLocks noChangeAspect="1" noChangeArrowheads="1"/>
-                      </p:cNvPicPr>
-                      <p:nvPr/>
-                    </p:nvPicPr>
-                    <p:blipFill>
-                      <a:blip r:embed="rId4">
-                        <a:extLst>
-                          <a:ext uri="{28A0092B-C50C-407E-A947-70E740481C1C}">
-                            <a14:useLocalDpi xmlns:a14="http://schemas.microsoft.com/office/drawing/2010/main" val="0"/>
-                          </a:ext>
-                        </a:extLst>
-                      </a:blip>
-                      <a:srcRect/>
-                      <a:stretch>
-                        <a:fillRect/>
-                      </a:stretch>
-                    </p:blipFill>
-                    <p:spPr bwMode="auto">
-                      <a:xfrm>
-                        <a:off x="4125912" y="1888711"/>
-                        <a:ext cx="3940175" cy="666750"/>
-                      </a:xfrm>
-                      <a:prstGeom prst="rect">
-                        <a:avLst/>
-                      </a:prstGeom>
-                      <a:noFill/>
-                      <a:ln>
-                        <a:noFill/>
-                      </a:ln>
-                      <a:effectLst/>
-                      <a:extLst>
-                        <a:ext uri="{909E8E84-426E-40DD-AFC4-6F175D3DCCD1}">
-                          <a14:hiddenFill xmlns:a14="http://schemas.microsoft.com/office/drawing/2010/main">
-                            <a:solidFill>
-                              <a:srgbClr val="FFFFFF"/>
-                            </a:solidFill>
-                          </a14:hiddenFill>
-                        </a:ext>
-                        <a:ext uri="{91240B29-F687-4F45-9708-019B960494DF}">
-                          <a14:hiddenLine xmlns:a14="http://schemas.microsoft.com/office/drawing/2010/main" w="9525">
-                            <a:solidFill>
-                              <a:srgbClr val="000000"/>
-                            </a:solidFill>
-                            <a:miter lim="800000"/>
-                            <a:headEnd/>
-                            <a:tailEnd/>
-                          </a14:hiddenLine>
-                        </a:ext>
-                        <a:ext uri="{AF507438-7753-43E0-B8FC-AC1667EBCBE1}">
-                          <a14:hiddenEffects xmlns:a14="http://schemas.microsoft.com/office/drawing/2010/main">
-                            <a:effectLst>
-                              <a:outerShdw dist="35921" dir="2700000" algn="ctr" rotWithShape="0">
-                                <a:srgbClr val="808080"/>
-                              </a:outerShdw>
-                            </a:effectLst>
-                          </a14:hiddenEffects>
-                        </a:ext>
-                      </a:extLst>
-                    </p:spPr>
-                  </p:pic>
-                </p:oleObj>
-              </mc:Fallback>
-            </mc:AlternateContent>
-          </a:graphicData>
-        </a:graphic>
-      </p:graphicFrame>
       <p:sp>
         <p:nvSpPr>
           <p:cNvPr id="83975" name="Text Box 12"/>
@@ -24528,6 +24405,91 @@
           <a:lstStyle/>
           <a:p>
             <a:endParaRPr lang="en-US"/>
+          </a:p>
+        </p:txBody>
+      </p:sp>
+      <p:sp>
+        <p:nvSpPr>
+          <p:cNvPr id="83984" name="TextBox 83983"/>
+          <p:cNvSpPr txBox="1"/>
+          <p:nvPr/>
+        </p:nvSpPr>
+        <p:spPr>
+          <a:xfrm>
+            <a:off x="4125912" y="1888711"/>
+            <a:ext cx="3940175" cy="666750"/>
+          </a:xfrm>
+          <a:prstGeom prst="rect">
+            <a:avLst/>
+          </a:prstGeom>
+          <a:noFill/>
+        </p:spPr>
+        <p:txBody>
+          <a:bodyPr wrap="square" anchor="ctr" lIns="0" rIns="0" tIns="0" bIns="0">
+            <a:spAutoFit/>
+          </a:bodyPr>
+          <a:lstStyle/>
+          <a:p>
+            <a:r>
+              <a:rPr sz="1300">
+                <a:latin typeface="Cambria"/>
+              </a:rPr>
+              <a:t>ℓ</a:t>
+            </a:r>
+            <a:r>
+              <a:rPr sz="1300" baseline="-25000">
+                <a:latin typeface="Cambria"/>
+              </a:rPr>
+              <a:t>i,j</a:t>
+            </a:r>
+            <a:r>
+              <a:rPr sz="1300">
+                <a:latin typeface="Cambria"/>
+              </a:rPr>
+              <a:t> = ℓ</a:t>
+            </a:r>
+            <a:r>
+              <a:rPr sz="1300" baseline="-25000">
+                <a:latin typeface="Cambria"/>
+              </a:rPr>
+              <a:t>∞,i</a:t>
+            </a:r>
+            <a:r>
+              <a:rPr sz="1300">
+                <a:latin typeface="Cambria"/>
+              </a:rPr>
+              <a:t>(1 − exp(−κ(a</a:t>
+            </a:r>
+            <a:r>
+              <a:rPr sz="1300" baseline="-25000">
+                <a:latin typeface="Cambria"/>
+              </a:rPr>
+              <a:t>i,j</a:t>
+            </a:r>
+            <a:r>
+              <a:rPr sz="1300">
+                <a:latin typeface="Cambria"/>
+              </a:rPr>
+              <a:t> − t</a:t>
+            </a:r>
+            <a:r>
+              <a:rPr sz="1300" baseline="-25000">
+                <a:latin typeface="Cambria"/>
+              </a:rPr>
+              <a:t>0</a:t>
+            </a:r>
+            <a:r>
+              <a:rPr sz="1300">
+                <a:latin typeface="Cambria"/>
+              </a:rPr>
+              <a:t>))) + ε</a:t>
+            </a:r>
+            <a:r>
+              <a:rPr sz="1300" baseline="-25000">
+                <a:latin typeface="Cambria"/>
+              </a:rPr>
+              <a:t>i,j</a:t>
+            </a:r>
           </a:p>
         </p:txBody>
       </p:sp>
@@ -31964,10 +31926,8 @@
               <a:defRPr/>
             </a:pPr>
             <a:r>
-              <a:rPr lang="en-US" altLang="en-US" i="1" dirty="0">
-                <a:sym typeface="Symbol" charset="2"/>
-              </a:rPr>
-              <a:t></a:t>
+              <a:rPr lang="en-US" altLang="en-US" i="1" dirty="0"/>
+              <a:t>β</a:t>
             </a:r>
             <a:r>
               <a:rPr lang="en-US" altLang="en-US" dirty="0">
@@ -32044,10 +32004,8 @@
               <a:defRPr/>
             </a:pPr>
             <a:r>
-              <a:rPr lang="en-US" altLang="en-US" i="1" dirty="0">
-                <a:sym typeface="Symbol" charset="2"/>
-              </a:rPr>
-              <a:t></a:t>
+              <a:rPr lang="en-US" altLang="en-US" i="1" dirty="0"/>
+              <a:t>ε</a:t>
             </a:r>
             <a:r>
               <a:rPr lang="en-US" altLang="en-US" baseline="-25000" dirty="0" err="1">
@@ -33119,10 +33077,8 @@
               <a:t>The number of parameters in this model is three (</a:t>
             </a:r>
             <a:r>
-              <a:rPr lang="en-US" altLang="en-US" sz="2400" dirty="0">
-                <a:sym typeface="Symbol" charset="2"/>
-              </a:rPr>
-              <a:t>,  and </a:t>
+              <a:rPr lang="en-US" altLang="en-US" sz="2400" dirty="0"/>
+              <a:t>β, σ and σ</a:t>
             </a:r>
             <a:r>
               <a:rPr lang="en-US" altLang="en-US" sz="2400" baseline="-25000" dirty="0">

--- a/Day3_MixedModels_ModelSelection/FW536_Day3_Morning_mixed effects_accessible.pptx
+++ b/Day3_MixedModels_ModelSelection/FW536_Day3_Morning_mixed effects_accessible.pptx
@@ -5,7 +5,7 @@
     <p:sldMasterId id="2147483648" r:id="rId1"/>
   </p:sldMasterIdLst>
   <p:notesMasterIdLst>
-    <p:notesMasterId r:id="rId65"/>
+    <p:notesMasterId r:id="rId64"/>
   </p:notesMasterIdLst>
   <p:sldIdLst>
     <p:sldId id="257" r:id="rId2"/>
@@ -65,12 +65,11 @@
     <p:sldId id="299" r:id="rId56"/>
     <p:sldId id="300" r:id="rId57"/>
     <p:sldId id="301" r:id="rId58"/>
-    <p:sldId id="302" r:id="rId59"/>
-    <p:sldId id="303" r:id="rId60"/>
-    <p:sldId id="304" r:id="rId61"/>
-    <p:sldId id="305" r:id="rId62"/>
-    <p:sldId id="306" r:id="rId63"/>
-    <p:sldId id="307" r:id="rId64"/>
+    <p:sldId id="303" r:id="rId59"/>
+    <p:sldId id="304" r:id="rId60"/>
+    <p:sldId id="305" r:id="rId61"/>
+    <p:sldId id="306" r:id="rId62"/>
+    <p:sldId id="307" r:id="rId63"/>
   </p:sldIdLst>
   <p:sldSz cx="12192000" cy="6858000"/>
   <p:notesSz cx="6858000" cy="9144000"/>
@@ -259,7 +258,7 @@
           <a:p>
             <a:fld id="{D2867A0E-DA56-0A4B-83A5-F520947CDB62}" type="datetimeFigureOut">
               <a:rPr lang="en-US" smtClean="0"/>
-              <a:t>7/14/26</a:t>
+              <a:t>7/16/26</a:t>
             </a:fld>
             <a:endParaRPr lang="en-US"/>
           </a:p>
@@ -677,7 +676,7 @@
               </a14:hiddenLine>
             </a:ext>
             <a:ext uri="{FAA26D3D-D897-4be2-8F04-BA451C77F1D7}">
-              <ma14:placeholderFlag xmlns="" xmlns:ma14="http://schemas.microsoft.com/office/mac/drawingml/2011/main" val="1"/>
+              <ma14:placeholderFlag xmlns:ma14="http://schemas.microsoft.com/office/mac/drawingml/2011/main" xmlns="" val="1"/>
             </a:ext>
           </a:extLst>
         </p:spPr>
@@ -766,7 +765,7 @@
               </a14:hiddenLine>
             </a:ext>
             <a:ext uri="{FAA26D3D-D897-4be2-8F04-BA451C77F1D7}">
-              <ma14:placeholderFlag xmlns="" xmlns:ma14="http://schemas.microsoft.com/office/mac/drawingml/2011/main" val="1"/>
+              <ma14:placeholderFlag xmlns:ma14="http://schemas.microsoft.com/office/mac/drawingml/2011/main" xmlns="" val="1"/>
             </a:ext>
           </a:extLst>
         </p:spPr>
@@ -855,7 +854,7 @@
               </a14:hiddenLine>
             </a:ext>
             <a:ext uri="{FAA26D3D-D897-4be2-8F04-BA451C77F1D7}">
-              <ma14:placeholderFlag xmlns="" xmlns:ma14="http://schemas.microsoft.com/office/mac/drawingml/2011/main" val="1"/>
+              <ma14:placeholderFlag xmlns:ma14="http://schemas.microsoft.com/office/mac/drawingml/2011/main" xmlns="" val="1"/>
             </a:ext>
           </a:extLst>
         </p:spPr>
@@ -944,7 +943,7 @@
               </a14:hiddenLine>
             </a:ext>
             <a:ext uri="{FAA26D3D-D897-4be2-8F04-BA451C77F1D7}">
-              <ma14:placeholderFlag xmlns="" xmlns:ma14="http://schemas.microsoft.com/office/mac/drawingml/2011/main" val="1"/>
+              <ma14:placeholderFlag xmlns:ma14="http://schemas.microsoft.com/office/mac/drawingml/2011/main" xmlns="" val="1"/>
             </a:ext>
           </a:extLst>
         </p:spPr>
@@ -952,7 +951,7 @@
           <a:bodyPr/>
           <a:lstStyle/>
           <a:p>
-            <a:endParaRPr lang="en-US" altLang="en-US">
+            <a:endParaRPr lang="en-US" altLang="en-US" dirty="0">
               <a:latin typeface="Times New Roman" charset="0"/>
             </a:endParaRPr>
           </a:p>
@@ -1033,7 +1032,7 @@
               </a14:hiddenLine>
             </a:ext>
             <a:ext uri="{FAA26D3D-D897-4be2-8F04-BA451C77F1D7}">
-              <ma14:placeholderFlag xmlns="" xmlns:ma14="http://schemas.microsoft.com/office/mac/drawingml/2011/main" val="1"/>
+              <ma14:placeholderFlag xmlns:ma14="http://schemas.microsoft.com/office/mac/drawingml/2011/main" xmlns="" val="1"/>
             </a:ext>
           </a:extLst>
         </p:spPr>
@@ -1161,7 +1160,7 @@
               </a14:hiddenLine>
             </a:ext>
             <a:ext uri="{FAA26D3D-D897-4be2-8F04-BA451C77F1D7}">
-              <ma14:placeholderFlag xmlns="" xmlns:ma14="http://schemas.microsoft.com/office/mac/drawingml/2011/main" val="1"/>
+              <ma14:placeholderFlag xmlns:ma14="http://schemas.microsoft.com/office/mac/drawingml/2011/main" xmlns="" val="1"/>
             </a:ext>
           </a:extLst>
         </p:spPr>
@@ -1250,7 +1249,7 @@
               </a14:hiddenLine>
             </a:ext>
             <a:ext uri="{FAA26D3D-D897-4be2-8F04-BA451C77F1D7}">
-              <ma14:placeholderFlag xmlns="" xmlns:ma14="http://schemas.microsoft.com/office/mac/drawingml/2011/main" val="1"/>
+              <ma14:placeholderFlag xmlns:ma14="http://schemas.microsoft.com/office/mac/drawingml/2011/main" xmlns="" val="1"/>
             </a:ext>
           </a:extLst>
         </p:spPr>
@@ -1339,7 +1338,7 @@
               </a14:hiddenLine>
             </a:ext>
             <a:ext uri="{FAA26D3D-D897-4be2-8F04-BA451C77F1D7}">
-              <ma14:placeholderFlag xmlns="" xmlns:ma14="http://schemas.microsoft.com/office/mac/drawingml/2011/main" val="1"/>
+              <ma14:placeholderFlag xmlns:ma14="http://schemas.microsoft.com/office/mac/drawingml/2011/main" xmlns="" val="1"/>
             </a:ext>
           </a:extLst>
         </p:spPr>
@@ -1428,7 +1427,7 @@
               </a14:hiddenLine>
             </a:ext>
             <a:ext uri="{FAA26D3D-D897-4be2-8F04-BA451C77F1D7}">
-              <ma14:placeholderFlag xmlns="" xmlns:ma14="http://schemas.microsoft.com/office/mac/drawingml/2011/main" val="1"/>
+              <ma14:placeholderFlag xmlns:ma14="http://schemas.microsoft.com/office/mac/drawingml/2011/main" xmlns="" val="1"/>
             </a:ext>
           </a:extLst>
         </p:spPr>
@@ -1517,7 +1516,7 @@
               </a14:hiddenLine>
             </a:ext>
             <a:ext uri="{FAA26D3D-D897-4be2-8F04-BA451C77F1D7}">
-              <ma14:placeholderFlag xmlns="" xmlns:ma14="http://schemas.microsoft.com/office/mac/drawingml/2011/main" val="1"/>
+              <ma14:placeholderFlag xmlns:ma14="http://schemas.microsoft.com/office/mac/drawingml/2011/main" xmlns="" val="1"/>
             </a:ext>
           </a:extLst>
         </p:spPr>
@@ -1606,7 +1605,7 @@
               </a14:hiddenLine>
             </a:ext>
             <a:ext uri="{FAA26D3D-D897-4be2-8F04-BA451C77F1D7}">
-              <ma14:placeholderFlag xmlns="" xmlns:ma14="http://schemas.microsoft.com/office/mac/drawingml/2011/main" val="1"/>
+              <ma14:placeholderFlag xmlns:ma14="http://schemas.microsoft.com/office/mac/drawingml/2011/main" xmlns="" val="1"/>
             </a:ext>
           </a:extLst>
         </p:spPr>
@@ -1695,7 +1694,7 @@
               </a14:hiddenLine>
             </a:ext>
             <a:ext uri="{FAA26D3D-D897-4be2-8F04-BA451C77F1D7}">
-              <ma14:placeholderFlag xmlns="" xmlns:ma14="http://schemas.microsoft.com/office/mac/drawingml/2011/main" val="1"/>
+              <ma14:placeholderFlag xmlns:ma14="http://schemas.microsoft.com/office/mac/drawingml/2011/main" xmlns="" val="1"/>
             </a:ext>
           </a:extLst>
         </p:spPr>
@@ -1784,7 +1783,7 @@
               </a14:hiddenLine>
             </a:ext>
             <a:ext uri="{FAA26D3D-D897-4be2-8F04-BA451C77F1D7}">
-              <ma14:placeholderFlag xmlns="" xmlns:ma14="http://schemas.microsoft.com/office/mac/drawingml/2011/main" val="1"/>
+              <ma14:placeholderFlag xmlns:ma14="http://schemas.microsoft.com/office/mac/drawingml/2011/main" xmlns="" val="1"/>
             </a:ext>
           </a:extLst>
         </p:spPr>
@@ -1873,7 +1872,7 @@
               </a14:hiddenLine>
             </a:ext>
             <a:ext uri="{FAA26D3D-D897-4be2-8F04-BA451C77F1D7}">
-              <ma14:placeholderFlag xmlns="" xmlns:ma14="http://schemas.microsoft.com/office/mac/drawingml/2011/main" val="1"/>
+              <ma14:placeholderFlag xmlns:ma14="http://schemas.microsoft.com/office/mac/drawingml/2011/main" xmlns="" val="1"/>
             </a:ext>
           </a:extLst>
         </p:spPr>
@@ -2141,7 +2140,7 @@
               </a14:hiddenLine>
             </a:ext>
             <a:ext uri="{FAA26D3D-D897-4be2-8F04-BA451C77F1D7}">
-              <ma14:placeholderFlag xmlns="" xmlns:ma14="http://schemas.microsoft.com/office/mac/drawingml/2011/main" val="1"/>
+              <ma14:placeholderFlag xmlns:ma14="http://schemas.microsoft.com/office/mac/drawingml/2011/main" xmlns="" val="1"/>
             </a:ext>
           </a:extLst>
         </p:spPr>
@@ -2230,7 +2229,7 @@
               </a14:hiddenLine>
             </a:ext>
             <a:ext uri="{FAA26D3D-D897-4be2-8F04-BA451C77F1D7}">
-              <ma14:placeholderFlag xmlns="" xmlns:ma14="http://schemas.microsoft.com/office/mac/drawingml/2011/main" val="1"/>
+              <ma14:placeholderFlag xmlns:ma14="http://schemas.microsoft.com/office/mac/drawingml/2011/main" xmlns="" val="1"/>
             </a:ext>
           </a:extLst>
         </p:spPr>
@@ -2319,7 +2318,7 @@
               </a14:hiddenLine>
             </a:ext>
             <a:ext uri="{FAA26D3D-D897-4be2-8F04-BA451C77F1D7}">
-              <ma14:placeholderFlag xmlns="" xmlns:ma14="http://schemas.microsoft.com/office/mac/drawingml/2011/main" val="1"/>
+              <ma14:placeholderFlag xmlns:ma14="http://schemas.microsoft.com/office/mac/drawingml/2011/main" xmlns="" val="1"/>
             </a:ext>
           </a:extLst>
         </p:spPr>
@@ -2408,7 +2407,7 @@
               </a14:hiddenLine>
             </a:ext>
             <a:ext uri="{FAA26D3D-D897-4be2-8F04-BA451C77F1D7}">
-              <ma14:placeholderFlag xmlns="" xmlns:ma14="http://schemas.microsoft.com/office/mac/drawingml/2011/main" val="1"/>
+              <ma14:placeholderFlag xmlns:ma14="http://schemas.microsoft.com/office/mac/drawingml/2011/main" xmlns="" val="1"/>
             </a:ext>
           </a:extLst>
         </p:spPr>
@@ -2497,7 +2496,7 @@
               </a14:hiddenLine>
             </a:ext>
             <a:ext uri="{FAA26D3D-D897-4be2-8F04-BA451C77F1D7}">
-              <ma14:placeholderFlag xmlns="" xmlns:ma14="http://schemas.microsoft.com/office/mac/drawingml/2011/main" val="1"/>
+              <ma14:placeholderFlag xmlns:ma14="http://schemas.microsoft.com/office/mac/drawingml/2011/main" xmlns="" val="1"/>
             </a:ext>
           </a:extLst>
         </p:spPr>
@@ -2586,7 +2585,7 @@
               </a14:hiddenLine>
             </a:ext>
             <a:ext uri="{FAA26D3D-D897-4be2-8F04-BA451C77F1D7}">
-              <ma14:placeholderFlag xmlns="" xmlns:ma14="http://schemas.microsoft.com/office/mac/drawingml/2011/main" val="1"/>
+              <ma14:placeholderFlag xmlns:ma14="http://schemas.microsoft.com/office/mac/drawingml/2011/main" xmlns="" val="1"/>
             </a:ext>
           </a:extLst>
         </p:spPr>
@@ -2675,7 +2674,7 @@
               </a14:hiddenLine>
             </a:ext>
             <a:ext uri="{FAA26D3D-D897-4be2-8F04-BA451C77F1D7}">
-              <ma14:placeholderFlag xmlns="" xmlns:ma14="http://schemas.microsoft.com/office/mac/drawingml/2011/main" val="1"/>
+              <ma14:placeholderFlag xmlns:ma14="http://schemas.microsoft.com/office/mac/drawingml/2011/main" xmlns="" val="1"/>
             </a:ext>
           </a:extLst>
         </p:spPr>
@@ -2764,7 +2763,7 @@
               </a14:hiddenLine>
             </a:ext>
             <a:ext uri="{FAA26D3D-D897-4be2-8F04-BA451C77F1D7}">
-              <ma14:placeholderFlag xmlns="" xmlns:ma14="http://schemas.microsoft.com/office/mac/drawingml/2011/main" val="1"/>
+              <ma14:placeholderFlag xmlns:ma14="http://schemas.microsoft.com/office/mac/drawingml/2011/main" xmlns="" val="1"/>
             </a:ext>
           </a:extLst>
         </p:spPr>
@@ -2853,7 +2852,7 @@
               </a14:hiddenLine>
             </a:ext>
             <a:ext uri="{FAA26D3D-D897-4be2-8F04-BA451C77F1D7}">
-              <ma14:placeholderFlag xmlns="" xmlns:ma14="http://schemas.microsoft.com/office/mac/drawingml/2011/main" val="1"/>
+              <ma14:placeholderFlag xmlns:ma14="http://schemas.microsoft.com/office/mac/drawingml/2011/main" xmlns="" val="1"/>
             </a:ext>
           </a:extLst>
         </p:spPr>
@@ -2942,7 +2941,7 @@
               </a14:hiddenLine>
             </a:ext>
             <a:ext uri="{FAA26D3D-D897-4be2-8F04-BA451C77F1D7}">
-              <ma14:placeholderFlag xmlns="" xmlns:ma14="http://schemas.microsoft.com/office/mac/drawingml/2011/main" val="1"/>
+              <ma14:placeholderFlag xmlns:ma14="http://schemas.microsoft.com/office/mac/drawingml/2011/main" xmlns="" val="1"/>
             </a:ext>
           </a:extLst>
         </p:spPr>
@@ -3031,7 +3030,7 @@
               </a14:hiddenLine>
             </a:ext>
             <a:ext uri="{FAA26D3D-D897-4be2-8F04-BA451C77F1D7}">
-              <ma14:placeholderFlag xmlns="" xmlns:ma14="http://schemas.microsoft.com/office/mac/drawingml/2011/main" val="1"/>
+              <ma14:placeholderFlag xmlns:ma14="http://schemas.microsoft.com/office/mac/drawingml/2011/main" xmlns="" val="1"/>
             </a:ext>
           </a:extLst>
         </p:spPr>
@@ -3077,9 +3076,9 @@
       </p:grpSpPr>
       <p:sp>
         <p:nvSpPr>
-          <p:cNvPr id="60418" name="Slide Image Placeholder 1"/>
+          <p:cNvPr id="39938" name="Slide Image Placeholder 1"/>
           <p:cNvSpPr>
-            <a:spLocks noGrp="1" noRot="1" noChangeAspect="1" noChangeArrowheads="1" noTextEdit="1"/>
+            <a:spLocks noGrp="1" noRot="1" noChangeAspect="1" noTextEdit="1"/>
           </p:cNvSpPr>
           <p:nvPr>
             <p:ph type="sldImg"/>
@@ -3091,7 +3090,7 @@
       </p:sp>
       <p:sp>
         <p:nvSpPr>
-          <p:cNvPr id="99330" name="Notes Placeholder 2"/>
+          <p:cNvPr id="101378" name="Notes Placeholder 2"/>
           <p:cNvSpPr>
             <a:spLocks noGrp="1"/>
           </p:cNvSpPr>
@@ -3120,7 +3119,7 @@
               </a14:hiddenLine>
             </a:ext>
             <a:ext uri="{FAA26D3D-D897-4be2-8F04-BA451C77F1D7}">
-              <ma14:placeholderFlag xmlns="" xmlns:ma14="http://schemas.microsoft.com/office/mac/drawingml/2011/main" val="1"/>
+              <ma14:placeholderFlag xmlns:ma14="http://schemas.microsoft.com/office/mac/drawingml/2011/main" xmlns="" val="1"/>
             </a:ext>
           </a:extLst>
         </p:spPr>
@@ -3137,7 +3136,7 @@
     </p:spTree>
     <p:extLst>
       <p:ext uri="{BB962C8B-B14F-4D97-AF65-F5344CB8AC3E}">
-        <p14:creationId xmlns:p14="http://schemas.microsoft.com/office/powerpoint/2010/main" val="632755733"/>
+        <p14:creationId xmlns:p14="http://schemas.microsoft.com/office/powerpoint/2010/main" val="295483474"/>
       </p:ext>
     </p:extLst>
   </p:cSld>
@@ -3166,7 +3165,7 @@
       </p:grpSpPr>
       <p:sp>
         <p:nvSpPr>
-          <p:cNvPr id="39938" name="Slide Image Placeholder 1"/>
+          <p:cNvPr id="41986" name="Slide Image Placeholder 1"/>
           <p:cNvSpPr>
             <a:spLocks noGrp="1" noRot="1" noChangeAspect="1" noTextEdit="1"/>
           </p:cNvSpPr>
@@ -3180,7 +3179,7 @@
       </p:sp>
       <p:sp>
         <p:nvSpPr>
-          <p:cNvPr id="101378" name="Notes Placeholder 2"/>
+          <p:cNvPr id="103426" name="Notes Placeholder 2"/>
           <p:cNvSpPr>
             <a:spLocks noGrp="1"/>
           </p:cNvSpPr>
@@ -3209,7 +3208,7 @@
               </a14:hiddenLine>
             </a:ext>
             <a:ext uri="{FAA26D3D-D897-4be2-8F04-BA451C77F1D7}">
-              <ma14:placeholderFlag xmlns="" xmlns:ma14="http://schemas.microsoft.com/office/mac/drawingml/2011/main" val="1"/>
+              <ma14:placeholderFlag xmlns:ma14="http://schemas.microsoft.com/office/mac/drawingml/2011/main" xmlns="" val="1"/>
             </a:ext>
           </a:extLst>
         </p:spPr>
@@ -3226,7 +3225,7 @@
     </p:spTree>
     <p:extLst>
       <p:ext uri="{BB962C8B-B14F-4D97-AF65-F5344CB8AC3E}">
-        <p14:creationId xmlns:p14="http://schemas.microsoft.com/office/powerpoint/2010/main" val="295483474"/>
+        <p14:creationId xmlns:p14="http://schemas.microsoft.com/office/powerpoint/2010/main" val="152719972"/>
       </p:ext>
     </p:extLst>
   </p:cSld>
@@ -3255,7 +3254,7 @@
       </p:grpSpPr>
       <p:sp>
         <p:nvSpPr>
-          <p:cNvPr id="41986" name="Slide Image Placeholder 1"/>
+          <p:cNvPr id="44034" name="Slide Image Placeholder 1"/>
           <p:cNvSpPr>
             <a:spLocks noGrp="1" noRot="1" noChangeAspect="1" noTextEdit="1"/>
           </p:cNvSpPr>
@@ -3269,7 +3268,7 @@
       </p:sp>
       <p:sp>
         <p:nvSpPr>
-          <p:cNvPr id="103426" name="Notes Placeholder 2"/>
+          <p:cNvPr id="105474" name="Notes Placeholder 2"/>
           <p:cNvSpPr>
             <a:spLocks noGrp="1"/>
           </p:cNvSpPr>
@@ -3298,7 +3297,7 @@
               </a14:hiddenLine>
             </a:ext>
             <a:ext uri="{FAA26D3D-D897-4be2-8F04-BA451C77F1D7}">
-              <ma14:placeholderFlag xmlns="" xmlns:ma14="http://schemas.microsoft.com/office/mac/drawingml/2011/main" val="1"/>
+              <ma14:placeholderFlag xmlns:ma14="http://schemas.microsoft.com/office/mac/drawingml/2011/main" xmlns="" val="1"/>
             </a:ext>
           </a:extLst>
         </p:spPr>
@@ -3315,7 +3314,7 @@
     </p:spTree>
     <p:extLst>
       <p:ext uri="{BB962C8B-B14F-4D97-AF65-F5344CB8AC3E}">
-        <p14:creationId xmlns:p14="http://schemas.microsoft.com/office/powerpoint/2010/main" val="152719972"/>
+        <p14:creationId xmlns:p14="http://schemas.microsoft.com/office/powerpoint/2010/main" val="1491514610"/>
       </p:ext>
     </p:extLst>
   </p:cSld>
@@ -3344,9 +3343,9 @@
       </p:grpSpPr>
       <p:sp>
         <p:nvSpPr>
-          <p:cNvPr id="44034" name="Slide Image Placeholder 1"/>
+          <p:cNvPr id="46082" name="Slide Image Placeholder 1"/>
           <p:cNvSpPr>
-            <a:spLocks noGrp="1" noRot="1" noChangeAspect="1" noTextEdit="1"/>
+            <a:spLocks noGrp="1" noRot="1" noChangeAspect="1" noChangeArrowheads="1" noTextEdit="1"/>
           </p:cNvSpPr>
           <p:nvPr>
             <p:ph type="sldImg"/>
@@ -3358,7 +3357,7 @@
       </p:sp>
       <p:sp>
         <p:nvSpPr>
-          <p:cNvPr id="105474" name="Notes Placeholder 2"/>
+          <p:cNvPr id="107522" name="Notes Placeholder 2"/>
           <p:cNvSpPr>
             <a:spLocks noGrp="1"/>
           </p:cNvSpPr>
@@ -3387,7 +3386,7 @@
               </a14:hiddenLine>
             </a:ext>
             <a:ext uri="{FAA26D3D-D897-4be2-8F04-BA451C77F1D7}">
-              <ma14:placeholderFlag xmlns="" xmlns:ma14="http://schemas.microsoft.com/office/mac/drawingml/2011/main" val="1"/>
+              <ma14:placeholderFlag xmlns:ma14="http://schemas.microsoft.com/office/mac/drawingml/2011/main" xmlns="" val="1"/>
             </a:ext>
           </a:extLst>
         </p:spPr>
@@ -3404,7 +3403,7 @@
     </p:spTree>
     <p:extLst>
       <p:ext uri="{BB962C8B-B14F-4D97-AF65-F5344CB8AC3E}">
-        <p14:creationId xmlns:p14="http://schemas.microsoft.com/office/powerpoint/2010/main" val="1491514610"/>
+        <p14:creationId xmlns:p14="http://schemas.microsoft.com/office/powerpoint/2010/main" val="279816882"/>
       </p:ext>
     </p:extLst>
   </p:cSld>
@@ -3433,9 +3432,9 @@
       </p:grpSpPr>
       <p:sp>
         <p:nvSpPr>
-          <p:cNvPr id="46082" name="Slide Image Placeholder 1"/>
+          <p:cNvPr id="48130" name="Slide Image Placeholder 1"/>
           <p:cNvSpPr>
-            <a:spLocks noGrp="1" noRot="1" noChangeAspect="1" noChangeArrowheads="1" noTextEdit="1"/>
+            <a:spLocks noGrp="1" noRot="1" noChangeAspect="1" noTextEdit="1"/>
           </p:cNvSpPr>
           <p:nvPr>
             <p:ph type="sldImg"/>
@@ -3447,7 +3446,7 @@
       </p:sp>
       <p:sp>
         <p:nvSpPr>
-          <p:cNvPr id="107522" name="Notes Placeholder 2"/>
+          <p:cNvPr id="109570" name="Notes Placeholder 2"/>
           <p:cNvSpPr>
             <a:spLocks noGrp="1"/>
           </p:cNvSpPr>
@@ -3476,7 +3475,7 @@
               </a14:hiddenLine>
             </a:ext>
             <a:ext uri="{FAA26D3D-D897-4be2-8F04-BA451C77F1D7}">
-              <ma14:placeholderFlag xmlns="" xmlns:ma14="http://schemas.microsoft.com/office/mac/drawingml/2011/main" val="1"/>
+              <ma14:placeholderFlag xmlns:ma14="http://schemas.microsoft.com/office/mac/drawingml/2011/main" xmlns="" val="1"/>
             </a:ext>
           </a:extLst>
         </p:spPr>
@@ -3493,7 +3492,7 @@
     </p:spTree>
     <p:extLst>
       <p:ext uri="{BB962C8B-B14F-4D97-AF65-F5344CB8AC3E}">
-        <p14:creationId xmlns:p14="http://schemas.microsoft.com/office/powerpoint/2010/main" val="279816882"/>
+        <p14:creationId xmlns:p14="http://schemas.microsoft.com/office/powerpoint/2010/main" val="33064505"/>
       </p:ext>
     </p:extLst>
   </p:cSld>
@@ -3565,7 +3564,7 @@
               </a14:hiddenLine>
             </a:ext>
             <a:ext uri="{FAA26D3D-D897-4be2-8F04-BA451C77F1D7}">
-              <ma14:placeholderFlag xmlns="" xmlns:ma14="http://schemas.microsoft.com/office/mac/drawingml/2011/main" val="1"/>
+              <ma14:placeholderFlag xmlns:ma14="http://schemas.microsoft.com/office/mac/drawingml/2011/main" xmlns="" val="1"/>
             </a:ext>
           </a:extLst>
         </p:spPr>
@@ -3583,95 +3582,6 @@
     <p:extLst>
       <p:ext uri="{BB962C8B-B14F-4D97-AF65-F5344CB8AC3E}">
         <p14:creationId xmlns:p14="http://schemas.microsoft.com/office/powerpoint/2010/main" val="622826910"/>
-      </p:ext>
-    </p:extLst>
-  </p:cSld>
-  <p:clrMapOvr>
-    <a:masterClrMapping/>
-  </p:clrMapOvr>
-</p:notes>
-</file>
-
-<file path=ppt/notesSlides/notesSlide40.xml><?xml version="1.0" encoding="utf-8"?>
-<p:notes xmlns:a="http://schemas.openxmlformats.org/drawingml/2006/main" xmlns:r="http://schemas.openxmlformats.org/officeDocument/2006/relationships" xmlns:p="http://schemas.openxmlformats.org/presentationml/2006/main">
-  <p:cSld>
-    <p:spTree>
-      <p:nvGrpSpPr>
-        <p:cNvPr id="1" name=""/>
-        <p:cNvGrpSpPr/>
-        <p:nvPr/>
-      </p:nvGrpSpPr>
-      <p:grpSpPr>
-        <a:xfrm>
-          <a:off x="0" y="0"/>
-          <a:ext cx="0" cy="0"/>
-          <a:chOff x="0" y="0"/>
-          <a:chExt cx="0" cy="0"/>
-        </a:xfrm>
-      </p:grpSpPr>
-      <p:sp>
-        <p:nvSpPr>
-          <p:cNvPr id="48130" name="Slide Image Placeholder 1"/>
-          <p:cNvSpPr>
-            <a:spLocks noGrp="1" noRot="1" noChangeAspect="1" noTextEdit="1"/>
-          </p:cNvSpPr>
-          <p:nvPr>
-            <p:ph type="sldImg"/>
-          </p:nvPr>
-        </p:nvSpPr>
-        <p:spPr>
-          <a:ln/>
-        </p:spPr>
-      </p:sp>
-      <p:sp>
-        <p:nvSpPr>
-          <p:cNvPr id="109570" name="Notes Placeholder 2"/>
-          <p:cNvSpPr>
-            <a:spLocks noGrp="1"/>
-          </p:cNvSpPr>
-          <p:nvPr>
-            <p:ph type="body" idx="1"/>
-          </p:nvPr>
-        </p:nvSpPr>
-        <p:spPr>
-          <a:noFill/>
-          <a:extLst>
-            <a:ext uri="{909E8E84-426E-40DD-AFC4-6F175D3DCCD1}">
-              <a14:hiddenFill xmlns:a14="http://schemas.microsoft.com/office/drawing/2010/main">
-                <a:solidFill>
-                  <a:srgbClr val="FFFFFF"/>
-                </a:solidFill>
-              </a14:hiddenFill>
-            </a:ext>
-            <a:ext uri="{91240B29-F687-4F45-9708-019B960494DF}">
-              <a14:hiddenLine xmlns:a14="http://schemas.microsoft.com/office/drawing/2010/main" w="9525">
-                <a:solidFill>
-                  <a:srgbClr val="000000"/>
-                </a:solidFill>
-                <a:miter lim="800000"/>
-                <a:headEnd/>
-                <a:tailEnd/>
-              </a14:hiddenLine>
-            </a:ext>
-            <a:ext uri="{FAA26D3D-D897-4be2-8F04-BA451C77F1D7}">
-              <ma14:placeholderFlag xmlns="" xmlns:ma14="http://schemas.microsoft.com/office/mac/drawingml/2011/main" val="1"/>
-            </a:ext>
-          </a:extLst>
-        </p:spPr>
-        <p:txBody>
-          <a:bodyPr/>
-          <a:lstStyle/>
-          <a:p>
-            <a:endParaRPr lang="en-US" altLang="en-US">
-              <a:latin typeface="Times New Roman" charset="0"/>
-            </a:endParaRPr>
-          </a:p>
-        </p:txBody>
-      </p:sp>
-    </p:spTree>
-    <p:extLst>
-      <p:ext uri="{BB962C8B-B14F-4D97-AF65-F5344CB8AC3E}">
-        <p14:creationId xmlns:p14="http://schemas.microsoft.com/office/powerpoint/2010/main" val="33064505"/>
       </p:ext>
     </p:extLst>
   </p:cSld>
@@ -3743,7 +3653,7 @@
               </a14:hiddenLine>
             </a:ext>
             <a:ext uri="{FAA26D3D-D897-4be2-8F04-BA451C77F1D7}">
-              <ma14:placeholderFlag xmlns="" xmlns:ma14="http://schemas.microsoft.com/office/mac/drawingml/2011/main" val="1"/>
+              <ma14:placeholderFlag xmlns:ma14="http://schemas.microsoft.com/office/mac/drawingml/2011/main" xmlns="" val="1"/>
             </a:ext>
           </a:extLst>
         </p:spPr>
@@ -3832,7 +3742,7 @@
               </a14:hiddenLine>
             </a:ext>
             <a:ext uri="{FAA26D3D-D897-4be2-8F04-BA451C77F1D7}">
-              <ma14:placeholderFlag xmlns="" xmlns:ma14="http://schemas.microsoft.com/office/mac/drawingml/2011/main" val="1"/>
+              <ma14:placeholderFlag xmlns:ma14="http://schemas.microsoft.com/office/mac/drawingml/2011/main" xmlns="" val="1"/>
             </a:ext>
           </a:extLst>
         </p:spPr>
@@ -3921,7 +3831,7 @@
               </a14:hiddenLine>
             </a:ext>
             <a:ext uri="{FAA26D3D-D897-4be2-8F04-BA451C77F1D7}">
-              <ma14:placeholderFlag xmlns="" xmlns:ma14="http://schemas.microsoft.com/office/mac/drawingml/2011/main" val="1"/>
+              <ma14:placeholderFlag xmlns:ma14="http://schemas.microsoft.com/office/mac/drawingml/2011/main" xmlns="" val="1"/>
             </a:ext>
           </a:extLst>
         </p:spPr>
@@ -4010,7 +3920,7 @@
               </a14:hiddenLine>
             </a:ext>
             <a:ext uri="{FAA26D3D-D897-4be2-8F04-BA451C77F1D7}">
-              <ma14:placeholderFlag xmlns="" xmlns:ma14="http://schemas.microsoft.com/office/mac/drawingml/2011/main" val="1"/>
+              <ma14:placeholderFlag xmlns:ma14="http://schemas.microsoft.com/office/mac/drawingml/2011/main" xmlns="" val="1"/>
             </a:ext>
           </a:extLst>
         </p:spPr>
@@ -4018,7 +3928,7 @@
           <a:bodyPr/>
           <a:lstStyle/>
           <a:p>
-            <a:endParaRPr lang="en-US" altLang="en-US">
+            <a:endParaRPr lang="en-US" altLang="en-US" dirty="0">
               <a:latin typeface="Times New Roman" charset="0"/>
             </a:endParaRPr>
           </a:p>
@@ -4099,7 +4009,7 @@
               </a14:hiddenLine>
             </a:ext>
             <a:ext uri="{FAA26D3D-D897-4be2-8F04-BA451C77F1D7}">
-              <ma14:placeholderFlag xmlns="" xmlns:ma14="http://schemas.microsoft.com/office/mac/drawingml/2011/main" val="1"/>
+              <ma14:placeholderFlag xmlns:ma14="http://schemas.microsoft.com/office/mac/drawingml/2011/main" xmlns="" val="1"/>
             </a:ext>
           </a:extLst>
         </p:spPr>
@@ -4255,7 +4165,7 @@
           <a:p>
             <a:fld id="{6A7D9F0D-27CC-AF49-BE27-075EF3FD3399}" type="datetimeFigureOut">
               <a:rPr lang="en-US" smtClean="0"/>
-              <a:t>7/14/26</a:t>
+              <a:t>7/16/26</a:t>
             </a:fld>
             <a:endParaRPr lang="en-US"/>
           </a:p>
@@ -4423,7 +4333,7 @@
           <a:p>
             <a:fld id="{6A7D9F0D-27CC-AF49-BE27-075EF3FD3399}" type="datetimeFigureOut">
               <a:rPr lang="en-US" smtClean="0"/>
-              <a:t>7/14/26</a:t>
+              <a:t>7/16/26</a:t>
             </a:fld>
             <a:endParaRPr lang="en-US"/>
           </a:p>
@@ -4601,7 +4511,7 @@
           <a:p>
             <a:fld id="{6A7D9F0D-27CC-AF49-BE27-075EF3FD3399}" type="datetimeFigureOut">
               <a:rPr lang="en-US" smtClean="0"/>
-              <a:t>7/14/26</a:t>
+              <a:t>7/16/26</a:t>
             </a:fld>
             <a:endParaRPr lang="en-US"/>
           </a:p>
@@ -5672,7 +5582,7 @@
           <a:p>
             <a:fld id="{6A7D9F0D-27CC-AF49-BE27-075EF3FD3399}" type="datetimeFigureOut">
               <a:rPr lang="en-US" smtClean="0"/>
-              <a:t>7/14/26</a:t>
+              <a:t>7/16/26</a:t>
             </a:fld>
             <a:endParaRPr lang="en-US"/>
           </a:p>
@@ -5917,7 +5827,7 @@
           <a:p>
             <a:fld id="{6A7D9F0D-27CC-AF49-BE27-075EF3FD3399}" type="datetimeFigureOut">
               <a:rPr lang="en-US" smtClean="0"/>
-              <a:t>7/14/26</a:t>
+              <a:t>7/16/26</a:t>
             </a:fld>
             <a:endParaRPr lang="en-US"/>
           </a:p>
@@ -6146,7 +6056,7 @@
           <a:p>
             <a:fld id="{6A7D9F0D-27CC-AF49-BE27-075EF3FD3399}" type="datetimeFigureOut">
               <a:rPr lang="en-US" smtClean="0"/>
-              <a:t>7/14/26</a:t>
+              <a:t>7/16/26</a:t>
             </a:fld>
             <a:endParaRPr lang="en-US"/>
           </a:p>
@@ -6510,7 +6420,7 @@
           <a:p>
             <a:fld id="{6A7D9F0D-27CC-AF49-BE27-075EF3FD3399}" type="datetimeFigureOut">
               <a:rPr lang="en-US" smtClean="0"/>
-              <a:t>7/14/26</a:t>
+              <a:t>7/16/26</a:t>
             </a:fld>
             <a:endParaRPr lang="en-US"/>
           </a:p>
@@ -6627,7 +6537,7 @@
           <a:p>
             <a:fld id="{6A7D9F0D-27CC-AF49-BE27-075EF3FD3399}" type="datetimeFigureOut">
               <a:rPr lang="en-US" smtClean="0"/>
-              <a:t>7/14/26</a:t>
+              <a:t>7/16/26</a:t>
             </a:fld>
             <a:endParaRPr lang="en-US"/>
           </a:p>
@@ -6722,7 +6632,7 @@
           <a:p>
             <a:fld id="{6A7D9F0D-27CC-AF49-BE27-075EF3FD3399}" type="datetimeFigureOut">
               <a:rPr lang="en-US" smtClean="0"/>
-              <a:t>7/14/26</a:t>
+              <a:t>7/16/26</a:t>
             </a:fld>
             <a:endParaRPr lang="en-US"/>
           </a:p>
@@ -6997,7 +6907,7 @@
           <a:p>
             <a:fld id="{6A7D9F0D-27CC-AF49-BE27-075EF3FD3399}" type="datetimeFigureOut">
               <a:rPr lang="en-US" smtClean="0"/>
-              <a:t>7/14/26</a:t>
+              <a:t>7/16/26</a:t>
             </a:fld>
             <a:endParaRPr lang="en-US"/>
           </a:p>
@@ -7249,7 +7159,7 @@
           <a:p>
             <a:fld id="{6A7D9F0D-27CC-AF49-BE27-075EF3FD3399}" type="datetimeFigureOut">
               <a:rPr lang="en-US" smtClean="0"/>
-              <a:t>7/14/26</a:t>
+              <a:t>7/16/26</a:t>
             </a:fld>
             <a:endParaRPr lang="en-US"/>
           </a:p>
@@ -7460,7 +7370,7 @@
           <a:p>
             <a:fld id="{6A7D9F0D-27CC-AF49-BE27-075EF3FD3399}" type="datetimeFigureOut">
               <a:rPr lang="en-US" smtClean="0"/>
-              <a:t>7/14/26</a:t>
+              <a:t>7/16/26</a:t>
             </a:fld>
             <a:endParaRPr lang="en-US"/>
           </a:p>
@@ -8515,49 +8425,49 @@
           <a:p>
             <a:pPr algn="ctr"/>
             <a:r>
-              <a:rPr lang="en-US" sz="2000" i="1" dirty="0">
+              <a:rPr lang="en-US" sz="2400" i="1" dirty="0">
                 <a:latin typeface="Cambria"/>
                 <a:cs typeface="Cambria"/>
               </a:rPr>
               <a:t>β</a:t>
             </a:r>
             <a:r>
-              <a:rPr lang="en-US" sz="2000" dirty="0">
+              <a:rPr lang="en-US" sz="2400" dirty="0">
                 <a:latin typeface="Cambria"/>
                 <a:cs typeface="Cambria"/>
               </a:rPr>
               <a:t> = 78.63;  </a:t>
             </a:r>
             <a:r>
-              <a:rPr lang="en-US" sz="2000" i="1" dirty="0">
+              <a:rPr lang="en-US" sz="2400" i="1" dirty="0">
                 <a:latin typeface="Cambria"/>
                 <a:cs typeface="Cambria"/>
               </a:rPr>
               <a:t>σ</a:t>
             </a:r>
             <a:r>
-              <a:rPr lang="en-US" sz="1560" i="1" baseline="-25000" dirty="0">
+              <a:rPr lang="en-US" sz="2400" i="1" baseline="-25000" dirty="0">
                 <a:latin typeface="Cambria"/>
                 <a:cs typeface="Cambria"/>
               </a:rPr>
               <a:t>b</a:t>
             </a:r>
             <a:r>
-              <a:rPr lang="en-US" sz="2000" dirty="0">
+              <a:rPr lang="en-US" sz="2400" dirty="0">
                 <a:latin typeface="Cambria"/>
                 <a:cs typeface="Cambria"/>
               </a:rPr>
               <a:t> = 15.79;  </a:t>
             </a:r>
             <a:r>
-              <a:rPr lang="en-US" sz="2000" i="1" dirty="0">
+              <a:rPr lang="en-US" sz="2400" i="1" dirty="0">
                 <a:latin typeface="Cambria"/>
                 <a:cs typeface="Cambria"/>
               </a:rPr>
               <a:t>σ</a:t>
             </a:r>
             <a:r>
-              <a:rPr lang="en-US" sz="2000" dirty="0">
+              <a:rPr lang="en-US" sz="2400" dirty="0">
                 <a:latin typeface="Cambria"/>
                 <a:cs typeface="Cambria"/>
               </a:rPr>
@@ -9525,12 +9435,14 @@
         </p:nvSpPr>
         <p:spPr>
           <a:xfrm>
-            <a:off x="2286000" y="1600200"/>
-            <a:ext cx="8021638" cy="4840288"/>
+            <a:off x="212035" y="1189383"/>
+            <a:ext cx="11979965" cy="4840288"/>
           </a:xfrm>
         </p:spPr>
         <p:txBody>
-          <a:bodyPr/>
+          <a:bodyPr>
+            <a:noAutofit/>
+          </a:bodyPr>
           <a:lstStyle/>
           <a:p>
             <a:pPr eaLnBrk="1" hangingPunct="1">
@@ -9540,7 +9452,7 @@
               <a:defRPr/>
             </a:pPr>
             <a:r>
-              <a:rPr lang="en-US" altLang="en-US" sz="2000" dirty="0"/>
+              <a:rPr lang="en-US" altLang="en-US" sz="2400" dirty="0"/>
               <a:t>The full call is:</a:t>
             </a:r>
           </a:p>
@@ -9553,7 +9465,7 @@
               <a:buNone/>
               <a:defRPr/>
             </a:pPr>
-            <a:endParaRPr lang="en-US" altLang="en-US" sz="1200" dirty="0"/>
+            <a:endParaRPr lang="en-US" altLang="en-US" sz="2400" dirty="0"/>
           </a:p>
           <a:p>
             <a:pPr eaLnBrk="1" hangingPunct="1">
@@ -9565,23 +9477,23 @@
               <a:defRPr/>
             </a:pPr>
             <a:r>
-              <a:rPr lang="en-US" altLang="en-US" sz="1200" dirty="0"/>
+              <a:rPr lang="en-US" altLang="en-US" sz="2400" dirty="0"/>
               <a:t>	</a:t>
             </a:r>
             <a:r>
-              <a:rPr lang="en-US" altLang="en-US" sz="1200" b="1" dirty="0" err="1"/>
+              <a:rPr lang="en-US" altLang="en-US" sz="2400" b="1" dirty="0" err="1"/>
               <a:t>lme</a:t>
             </a:r>
             <a:r>
-              <a:rPr lang="en-US" altLang="en-US" sz="1200" b="1" dirty="0"/>
+              <a:rPr lang="en-US" altLang="en-US" sz="2400" b="1" dirty="0"/>
               <a:t>(fixed, data, random, correlation, weights, subset, method, </a:t>
             </a:r>
             <a:r>
-              <a:rPr lang="en-US" altLang="en-US" sz="1200" b="1" dirty="0" err="1"/>
+              <a:rPr lang="en-US" altLang="en-US" sz="2400" b="1" dirty="0" err="1"/>
               <a:t>na.action</a:t>
             </a:r>
             <a:r>
-              <a:rPr lang="en-US" altLang="en-US" sz="1200" b="1" dirty="0"/>
+              <a:rPr lang="en-US" altLang="en-US" sz="2400" b="1" dirty="0"/>
               <a:t>, control) </a:t>
             </a:r>
           </a:p>
@@ -9594,7 +9506,7 @@
               <a:buNone/>
               <a:defRPr/>
             </a:pPr>
-            <a:endParaRPr lang="en-US" altLang="en-US" sz="1200" b="1" dirty="0"/>
+            <a:endParaRPr lang="en-US" altLang="en-US" sz="2400" b="1" dirty="0"/>
           </a:p>
           <a:p>
             <a:pPr eaLnBrk="1" hangingPunct="1">
@@ -9604,7 +9516,7 @@
               <a:defRPr/>
             </a:pPr>
             <a:r>
-              <a:rPr lang="en-US" altLang="en-US" sz="2000" dirty="0"/>
+              <a:rPr lang="en-US" altLang="en-US" sz="2400" dirty="0"/>
               <a:t>fixed – formula for the fixed effects;</a:t>
             </a:r>
           </a:p>
@@ -9616,7 +9528,7 @@
               <a:defRPr/>
             </a:pPr>
             <a:r>
-              <a:rPr lang="en-US" altLang="en-US" sz="2000" dirty="0"/>
+              <a:rPr lang="en-US" altLang="en-US" sz="2400" dirty="0"/>
               <a:t>data – must be a data frame;</a:t>
             </a:r>
           </a:p>
@@ -9628,7 +9540,7 @@
               <a:defRPr/>
             </a:pPr>
             <a:r>
-              <a:rPr lang="en-US" altLang="en-US" sz="2000" dirty="0"/>
+              <a:rPr lang="en-US" altLang="en-US" sz="2400" dirty="0"/>
               <a:t>random – the random effects (random effects can be nested);</a:t>
             </a:r>
           </a:p>
@@ -9640,7 +9552,7 @@
               <a:defRPr/>
             </a:pPr>
             <a:r>
-              <a:rPr lang="en-US" altLang="en-US" sz="2000" dirty="0"/>
+              <a:rPr lang="en-US" altLang="en-US" sz="2400" dirty="0"/>
               <a:t>correlation – correlation structure of the residuals (optional);</a:t>
             </a:r>
           </a:p>
@@ -9652,14 +9564,14 @@
               <a:defRPr/>
             </a:pPr>
             <a:r>
-              <a:rPr lang="en-US" altLang="en-US" sz="1600" dirty="0"/>
+              <a:rPr lang="en-US" altLang="en-US" dirty="0"/>
               <a:t>For example “</a:t>
             </a:r>
             <a:r>
-              <a:rPr lang="en-US" sz="1600" dirty="0"/>
+              <a:rPr lang="en-US" dirty="0"/>
               <a:t>correlation=corAR1()” for autoregressive term</a:t>
             </a:r>
-            <a:endParaRPr lang="en-US" altLang="en-US" sz="1600" dirty="0"/>
+            <a:endParaRPr lang="en-US" altLang="en-US" dirty="0"/>
           </a:p>
           <a:p>
             <a:pPr eaLnBrk="1" hangingPunct="1">
@@ -9669,8 +9581,8 @@
               <a:defRPr/>
             </a:pPr>
             <a:r>
-              <a:rPr lang="en-US" altLang="en-US" sz="2000" dirty="0"/>
-              <a:t>weights – variance structure of the residuals (optional);</a:t>
+              <a:rPr lang="en-US" altLang="en-US" sz="2400" dirty="0"/>
+              <a:t>weights – variance structure of the residuals (optional to account for unequal variance);</a:t>
             </a:r>
           </a:p>
           <a:p>
@@ -9681,15 +9593,15 @@
               <a:defRPr/>
             </a:pPr>
             <a:r>
-              <a:rPr lang="en-US" altLang="en-US" sz="2000" dirty="0"/>
+              <a:rPr lang="en-US" altLang="en-US" sz="2400" dirty="0"/>
               <a:t>subset – which rows of the data set to include (vector of </a:t>
             </a:r>
             <a:r>
-              <a:rPr lang="en-US" altLang="en-US" sz="2000" dirty="0" err="1"/>
+              <a:rPr lang="en-US" altLang="en-US" sz="2400" dirty="0" err="1"/>
               <a:t>boolean</a:t>
             </a:r>
             <a:r>
-              <a:rPr lang="en-US" altLang="en-US" sz="2000" dirty="0"/>
+              <a:rPr lang="en-US" altLang="en-US" sz="2400" dirty="0"/>
               <a:t>)</a:t>
             </a:r>
           </a:p>
@@ -9701,7 +9613,7 @@
               <a:defRPr/>
             </a:pPr>
             <a:r>
-              <a:rPr lang="en-US" altLang="en-US" sz="2000" b="1" dirty="0"/>
+              <a:rPr lang="en-US" altLang="en-US" sz="2400" b="1" dirty="0"/>
               <a:t>method – ML or REML</a:t>
             </a:r>
           </a:p>
@@ -9713,7 +9625,7 @@
               <a:defRPr/>
             </a:pPr>
             <a:r>
-              <a:rPr lang="en-US" altLang="en-US" sz="2000" dirty="0"/>
+              <a:rPr lang="en-US" altLang="en-US" sz="2400" dirty="0"/>
               <a:t>control – optional control specifications (some of these are pretty useful).</a:t>
             </a:r>
           </a:p>
@@ -9726,7 +9638,7 @@
               <a:buNone/>
               <a:defRPr/>
             </a:pPr>
-            <a:endParaRPr lang="en-US" altLang="en-US" sz="2000" dirty="0"/>
+            <a:endParaRPr lang="en-US" altLang="en-US" sz="2400" dirty="0"/>
           </a:p>
         </p:txBody>
       </p:sp>
@@ -9802,12 +9714,14 @@
         </p:nvSpPr>
         <p:spPr>
           <a:xfrm>
-            <a:off x="1752600" y="1400176"/>
-            <a:ext cx="8534400" cy="4391025"/>
+            <a:off x="1590261" y="1400176"/>
+            <a:ext cx="8878956" cy="4391025"/>
           </a:xfrm>
         </p:spPr>
         <p:txBody>
-          <a:bodyPr/>
+          <a:bodyPr>
+            <a:normAutofit lnSpcReduction="10000"/>
+          </a:bodyPr>
           <a:lstStyle/>
           <a:p>
             <a:pPr eaLnBrk="1" hangingPunct="1">
@@ -9860,7 +9774,35 @@
             </a:pPr>
             <a:r>
               <a:rPr lang="en-US" altLang="en-US" sz="2400" dirty="0"/>
-              <a:t>The distinction is due to the fact that the MLE for the variance is biased (it has 1/n rather than 1/n-1)</a:t>
+              <a:t>The distinction is due to the fact that the MLE for the variance parameter is biased (it has 1/n rather than 1/n-1)</a:t>
+            </a:r>
+          </a:p>
+          <a:p>
+            <a:pPr lvl="1">
+              <a:lnSpc>
+                <a:spcPct val="80000"/>
+              </a:lnSpc>
+              <a:defRPr/>
+            </a:pPr>
+            <a:r>
+              <a:rPr lang="en-US" altLang="en-US" sz="2000" dirty="0"/>
+              <a:t>This is only relevant for Normal distribution (</a:t>
+            </a:r>
+            <a:r>
+              <a:rPr lang="en-US" altLang="en-US" sz="2000" dirty="0" err="1"/>
+              <a:t>lmm</a:t>
+            </a:r>
+            <a:r>
+              <a:rPr lang="en-US" altLang="en-US" sz="2000" dirty="0"/>
+              <a:t> not </a:t>
+            </a:r>
+            <a:r>
+              <a:rPr lang="en-US" altLang="en-US" sz="2000" dirty="0" err="1"/>
+              <a:t>glmm</a:t>
+            </a:r>
+            <a:r>
+              <a:rPr lang="en-US" altLang="en-US" sz="2000" dirty="0"/>
+              <a:t>)</a:t>
             </a:r>
           </a:p>
           <a:p>
@@ -9938,7 +9880,12 @@
             <p:ph type="title"/>
           </p:nvPr>
         </p:nvSpPr>
-        <p:spPr/>
+        <p:spPr>
+          <a:xfrm>
+            <a:off x="838200" y="-14569"/>
+            <a:ext cx="10515600" cy="1325563"/>
+          </a:xfrm>
+        </p:spPr>
         <p:txBody>
           <a:bodyPr/>
           <a:lstStyle/>
@@ -9947,14 +9894,14 @@
               <a:defRPr/>
             </a:pPr>
             <a:r>
-              <a:rPr lang="en-US" altLang="en-US" sz="4000"/>
+              <a:rPr lang="en-US" altLang="en-US" sz="4000" dirty="0"/>
               <a:t>Linear Mixed Models </a:t>
             </a:r>
             <a:br>
-              <a:rPr lang="en-US" altLang="en-US" sz="4000"/>
+              <a:rPr lang="en-US" altLang="en-US" sz="4000" dirty="0"/>
             </a:br>
             <a:r>
-              <a:rPr lang="en-US" altLang="en-US" sz="4000"/>
+              <a:rPr lang="en-US" altLang="en-US" sz="4000" dirty="0"/>
               <a:t>(Understanding the output)</a:t>
             </a:r>
           </a:p>
@@ -9972,13 +9919,13 @@
         </p:nvSpPr>
         <p:spPr>
           <a:xfrm>
-            <a:off x="2743200" y="1981200"/>
+            <a:off x="1524000" y="1371600"/>
             <a:ext cx="7772400" cy="4114800"/>
           </a:xfrm>
         </p:spPr>
         <p:txBody>
           <a:bodyPr>
-            <a:normAutofit fontScale="55000" lnSpcReduction="20000"/>
+            <a:noAutofit/>
           </a:bodyPr>
           <a:lstStyle/>
           <a:p>
@@ -9991,7 +9938,7 @@
               <a:defRPr/>
             </a:pPr>
             <a:r>
-              <a:rPr lang="en-US" altLang="en-US" sz="1400" dirty="0"/>
+              <a:rPr lang="en-US" altLang="en-US" sz="1200" dirty="0"/>
               <a:t>Linear mixed-effects model fit by REML</a:t>
             </a:r>
           </a:p>
@@ -10005,7 +9952,7 @@
               <a:defRPr/>
             </a:pPr>
             <a:r>
-              <a:rPr lang="en-US" altLang="en-US" sz="1400" dirty="0"/>
+              <a:rPr lang="en-US" altLang="en-US" sz="1200" dirty="0"/>
               <a:t> Data: Streams </a:t>
             </a:r>
           </a:p>
@@ -10019,15 +9966,15 @@
               <a:defRPr/>
             </a:pPr>
             <a:r>
-              <a:rPr lang="en-US" altLang="en-US" sz="1400" dirty="0"/>
+              <a:rPr lang="en-US" altLang="en-US" sz="1200" dirty="0"/>
               <a:t>       AIC      BIC    </a:t>
             </a:r>
             <a:r>
-              <a:rPr lang="en-US" altLang="en-US" sz="1400" dirty="0" err="1"/>
+              <a:rPr lang="en-US" altLang="en-US" sz="1200" dirty="0" err="1"/>
               <a:t>logLik</a:t>
             </a:r>
             <a:r>
-              <a:rPr lang="en-US" altLang="en-US" sz="1400" dirty="0"/>
+              <a:rPr lang="en-US" altLang="en-US" sz="1200" dirty="0"/>
               <a:t> </a:t>
             </a:r>
           </a:p>
@@ -10041,7 +9988,7 @@
               <a:defRPr/>
             </a:pPr>
             <a:r>
-              <a:rPr lang="en-US" altLang="en-US" sz="1400" dirty="0"/>
+              <a:rPr lang="en-US" altLang="en-US" sz="1200" dirty="0"/>
               <a:t>  133.7973 136.2969 -63.89865</a:t>
             </a:r>
           </a:p>
@@ -10054,7 +10001,7 @@
               <a:buNone/>
               <a:defRPr/>
             </a:pPr>
-            <a:endParaRPr lang="en-US" altLang="en-US" sz="1400" dirty="0"/>
+            <a:endParaRPr lang="en-US" altLang="en-US" sz="1200" dirty="0"/>
           </a:p>
           <a:p>
             <a:pPr eaLnBrk="1" hangingPunct="1">
@@ -10066,7 +10013,7 @@
               <a:defRPr/>
             </a:pPr>
             <a:r>
-              <a:rPr lang="en-US" altLang="en-US" sz="1400" dirty="0"/>
+              <a:rPr lang="en-US" altLang="en-US" sz="1200" dirty="0"/>
               <a:t>Random effects:</a:t>
             </a:r>
           </a:p>
@@ -10080,7 +10027,7 @@
               <a:defRPr/>
             </a:pPr>
             <a:r>
-              <a:rPr lang="en-US" altLang="en-US" sz="1400" dirty="0"/>
+              <a:rPr lang="en-US" altLang="en-US" sz="1200" dirty="0"/>
               <a:t> Formula:  ~ 1 | Stream</a:t>
             </a:r>
           </a:p>
@@ -10094,7 +10041,7 @@
               <a:defRPr/>
             </a:pPr>
             <a:r>
-              <a:rPr lang="en-US" altLang="en-US" sz="1400" dirty="0"/>
+              <a:rPr lang="en-US" altLang="en-US" sz="1200" dirty="0"/>
               <a:t>        (Intercept) Residual </a:t>
             </a:r>
           </a:p>
@@ -10108,11 +10055,11 @@
               <a:defRPr/>
             </a:pPr>
             <a:r>
-              <a:rPr lang="en-US" altLang="en-US" sz="1400" dirty="0" err="1"/>
+              <a:rPr lang="en-US" altLang="en-US" sz="1200" dirty="0" err="1"/>
               <a:t>StdDev</a:t>
             </a:r>
             <a:r>
-              <a:rPr lang="en-US" altLang="en-US" sz="1400" dirty="0"/>
+              <a:rPr lang="en-US" altLang="en-US" sz="1200" dirty="0"/>
               <a:t>:    15.78877 6.083881</a:t>
             </a:r>
           </a:p>
@@ -10125,7 +10072,7 @@
               <a:buNone/>
               <a:defRPr/>
             </a:pPr>
-            <a:endParaRPr lang="en-US" altLang="en-US" sz="1400" dirty="0"/>
+            <a:endParaRPr lang="en-US" altLang="en-US" sz="1200" dirty="0"/>
           </a:p>
           <a:p>
             <a:pPr eaLnBrk="1" hangingPunct="1">
@@ -10137,7 +10084,7 @@
               <a:defRPr/>
             </a:pPr>
             <a:r>
-              <a:rPr lang="en-US" altLang="en-US" sz="1400" dirty="0"/>
+              <a:rPr lang="en-US" altLang="en-US" sz="1200" dirty="0"/>
               <a:t>Fixed effects: Density ~ 1 </a:t>
             </a:r>
           </a:p>
@@ -10151,15 +10098,15 @@
               <a:defRPr/>
             </a:pPr>
             <a:r>
-              <a:rPr lang="en-US" altLang="en-US" sz="1400" dirty="0"/>
+              <a:rPr lang="en-US" altLang="en-US" sz="1200" dirty="0"/>
               <a:t>               Value </a:t>
             </a:r>
             <a:r>
-              <a:rPr lang="en-US" altLang="en-US" sz="1400" dirty="0" err="1"/>
+              <a:rPr lang="en-US" altLang="en-US" sz="1200" dirty="0" err="1"/>
               <a:t>Std.Error</a:t>
             </a:r>
             <a:r>
-              <a:rPr lang="en-US" altLang="en-US" sz="1400" dirty="0"/>
+              <a:rPr lang="en-US" altLang="en-US" sz="1200" dirty="0"/>
               <a:t> DF  t-value p-value </a:t>
             </a:r>
           </a:p>
@@ -10173,7 +10120,7 @@
               <a:defRPr/>
             </a:pPr>
             <a:r>
-              <a:rPr lang="en-US" altLang="en-US" sz="1400" dirty="0"/>
+              <a:rPr lang="en-US" altLang="en-US" sz="1200" dirty="0"/>
               <a:t>(Intercept) 78.62872   6.60332 12 11.90745  0</a:t>
             </a:r>
           </a:p>
@@ -10186,7 +10133,7 @@
               <a:buNone/>
               <a:defRPr/>
             </a:pPr>
-            <a:endParaRPr lang="en-US" altLang="en-US" sz="1400" dirty="0"/>
+            <a:endParaRPr lang="en-US" altLang="en-US" sz="1200" dirty="0"/>
           </a:p>
           <a:p>
             <a:pPr eaLnBrk="1" hangingPunct="1">
@@ -10198,7 +10145,7 @@
               <a:defRPr/>
             </a:pPr>
             <a:r>
-              <a:rPr lang="en-US" altLang="en-US" sz="1400" dirty="0"/>
+              <a:rPr lang="en-US" altLang="en-US" sz="1200" dirty="0"/>
               <a:t>Standardized Within-Group Residuals:</a:t>
             </a:r>
           </a:p>
@@ -10212,7 +10159,7 @@
               <a:defRPr/>
             </a:pPr>
             <a:r>
-              <a:rPr lang="en-US" altLang="en-US" sz="1400" dirty="0"/>
+              <a:rPr lang="en-US" altLang="en-US" sz="1200" dirty="0"/>
               <a:t>       Min         Q1       Med        Q3      Max </a:t>
             </a:r>
           </a:p>
@@ -10226,7 +10173,7 @@
               <a:defRPr/>
             </a:pPr>
             <a:r>
-              <a:rPr lang="en-US" altLang="en-US" sz="1400" dirty="0"/>
+              <a:rPr lang="en-US" altLang="en-US" sz="1200" dirty="0"/>
               <a:t> -1.670431 -0.8239512 0.1256738 0.5295573 1.298799</a:t>
             </a:r>
           </a:p>
@@ -10239,7 +10186,7 @@
               <a:buNone/>
               <a:defRPr/>
             </a:pPr>
-            <a:endParaRPr lang="en-US" altLang="en-US" sz="1400" dirty="0"/>
+            <a:endParaRPr lang="en-US" altLang="en-US" sz="1200" dirty="0"/>
           </a:p>
           <a:p>
             <a:pPr eaLnBrk="1" hangingPunct="1">
@@ -10251,7 +10198,7 @@
               <a:defRPr/>
             </a:pPr>
             <a:r>
-              <a:rPr lang="en-US" altLang="en-US" sz="1400" dirty="0"/>
+              <a:rPr lang="en-US" altLang="en-US" sz="1200" dirty="0"/>
               <a:t>Number of Observations: 18</a:t>
             </a:r>
           </a:p>
@@ -10265,7 +10212,7 @@
               <a:defRPr/>
             </a:pPr>
             <a:r>
-              <a:rPr lang="en-US" altLang="en-US" sz="1400" dirty="0"/>
+              <a:rPr lang="en-US" altLang="en-US" sz="1200" dirty="0"/>
               <a:t>Number of Groups: 6 </a:t>
             </a:r>
           </a:p>
@@ -10276,7 +10223,7 @@
               </a:lnSpc>
               <a:defRPr/>
             </a:pPr>
-            <a:endParaRPr lang="en-US" altLang="en-US" sz="1400" dirty="0"/>
+            <a:endParaRPr lang="en-US" altLang="en-US" sz="1200" dirty="0"/>
           </a:p>
         </p:txBody>
       </p:sp>
@@ -10290,7 +10237,7 @@
         </p:nvSpPr>
         <p:spPr bwMode="auto">
           <a:xfrm>
-            <a:off x="6915151" y="1905001"/>
+            <a:off x="6399902" y="1485631"/>
             <a:ext cx="2778125" cy="860425"/>
           </a:xfrm>
           <a:prstGeom prst="rect">
@@ -10528,7 +10475,7 @@
         </p:nvSpPr>
         <p:spPr bwMode="auto">
           <a:xfrm>
-            <a:off x="5874706" y="2888900"/>
+            <a:off x="5870866" y="2760353"/>
             <a:ext cx="3241977" cy="461665"/>
           </a:xfrm>
           <a:prstGeom prst="rect">
@@ -11197,8 +11144,8 @@
         </p:nvSpPr>
         <p:spPr bwMode="auto">
           <a:xfrm flipH="1">
-            <a:off x="5410200" y="2286000"/>
-            <a:ext cx="1447800" cy="457200"/>
+            <a:off x="3886200" y="1882157"/>
+            <a:ext cx="2395329" cy="200280"/>
           </a:xfrm>
           <a:prstGeom prst="line">
             <a:avLst/>
@@ -11238,8 +11185,8 @@
         </p:nvSpPr>
         <p:spPr bwMode="auto">
           <a:xfrm flipH="1">
-            <a:off x="3515831" y="3117499"/>
-            <a:ext cx="2286000" cy="457200"/>
+            <a:off x="2690191" y="2962356"/>
+            <a:ext cx="3092029" cy="616808"/>
           </a:xfrm>
           <a:prstGeom prst="line">
             <a:avLst/>
@@ -11279,8 +11226,8 @@
         </p:nvSpPr>
         <p:spPr bwMode="auto">
           <a:xfrm flipH="1" flipV="1">
-            <a:off x="4105820" y="3733798"/>
-            <a:ext cx="1676400" cy="304800"/>
+            <a:off x="3631096" y="3733798"/>
+            <a:ext cx="2151124" cy="304799"/>
           </a:xfrm>
           <a:prstGeom prst="line">
             <a:avLst/>
@@ -11320,8 +11267,8 @@
         </p:nvSpPr>
         <p:spPr bwMode="auto">
           <a:xfrm flipH="1" flipV="1">
-            <a:off x="4799203" y="4609761"/>
-            <a:ext cx="1981200" cy="762000"/>
+            <a:off x="4629280" y="4812773"/>
+            <a:ext cx="2151123" cy="558987"/>
           </a:xfrm>
           <a:prstGeom prst="line">
             <a:avLst/>
@@ -11423,8 +11370,8 @@
         </p:nvSpPr>
         <p:spPr>
           <a:xfrm>
-            <a:off x="1524000" y="1752600"/>
-            <a:ext cx="9532776" cy="4114800"/>
+            <a:off x="1444487" y="1752600"/>
+            <a:ext cx="9612289" cy="4114800"/>
           </a:xfrm>
         </p:spPr>
         <p:txBody>
@@ -11436,7 +11383,7 @@
             </a:pPr>
             <a:r>
               <a:rPr lang="en-US" altLang="en-US" dirty="0"/>
-              <a:t>Typically we will have cases in which there are some known sources of variability (the random effects) and some factors that may have different impacts. </a:t>
+              <a:t>Typically we will have cases in which there are some known sources of variability (the random effects) and some variables that may have different impacts. </a:t>
             </a:r>
           </a:p>
           <a:p>
@@ -12063,35 +12010,35 @@
               <a:defRPr/>
             </a:pPr>
             <a:r>
-              <a:rPr lang="en-US" altLang="en-US" sz="1600" dirty="0" err="1"/>
+              <a:rPr lang="en-US" altLang="en-US" sz="2000" dirty="0" err="1"/>
               <a:t>lme</a:t>
             </a:r>
             <a:r>
-              <a:rPr lang="en-US" altLang="en-US" sz="1600" dirty="0"/>
+              <a:rPr lang="en-US" altLang="en-US" sz="2000" dirty="0"/>
               <a:t>(</a:t>
             </a:r>
             <a:r>
-              <a:rPr lang="en-US" altLang="en-US" sz="1600" dirty="0" err="1"/>
+              <a:rPr lang="en-US" altLang="en-US" sz="2000" dirty="0" err="1"/>
               <a:t>Weight~Length,data</a:t>
             </a:r>
             <a:r>
-              <a:rPr lang="en-US" altLang="en-US" sz="1600" dirty="0"/>
+              <a:rPr lang="en-US" altLang="en-US" sz="2000" dirty="0"/>
               <a:t>=</a:t>
             </a:r>
             <a:r>
-              <a:rPr lang="en-US" altLang="en-US" sz="1600" dirty="0" err="1"/>
+              <a:rPr lang="en-US" altLang="en-US" sz="2000" dirty="0" err="1"/>
               <a:t>LenW,random</a:t>
             </a:r>
             <a:r>
-              <a:rPr lang="en-US" altLang="en-US" sz="1600" dirty="0"/>
+              <a:rPr lang="en-US" altLang="en-US" sz="2000" dirty="0"/>
               <a:t> = ~1 |</a:t>
             </a:r>
             <a:r>
-              <a:rPr lang="en-US" altLang="en-US" sz="1600" dirty="0" err="1"/>
+              <a:rPr lang="en-US" altLang="en-US" sz="2000" dirty="0" err="1"/>
               <a:t>Subject,method</a:t>
             </a:r>
             <a:r>
-              <a:rPr lang="en-US" altLang="en-US" sz="1600" dirty="0"/>
+              <a:rPr lang="en-US" altLang="en-US" sz="2000" dirty="0"/>
               <a:t>="REML") </a:t>
             </a:r>
           </a:p>
@@ -12116,8 +12063,8 @@
         </p:nvSpPr>
         <p:spPr>
           <a:xfrm>
-            <a:off x="3252788" y="2678114"/>
-            <a:ext cx="5815012" cy="623887"/>
+            <a:off x="3252788" y="2836169"/>
+            <a:ext cx="5815012" cy="307777"/>
           </a:xfrm>
           <a:prstGeom prst="rect">
             <a:avLst/>
@@ -12125,82 +12072,144 @@
           <a:noFill/>
         </p:spPr>
         <p:txBody>
-          <a:bodyPr wrap="square" anchor="ctr" lIns="0" rIns="0" tIns="0" bIns="0">
+          <a:bodyPr wrap="square" lIns="0" tIns="0" rIns="0" bIns="0" anchor="ctr">
             <a:spAutoFit/>
           </a:bodyPr>
           <a:lstStyle/>
           <a:p>
             <a:r>
-              <a:rPr sz="1600">
+              <a:rPr sz="2000" dirty="0">
                 <a:latin typeface="Cambria"/>
               </a:rPr>
-              <a:t>W = aL</a:t>
-            </a:r>
-            <a:r>
-              <a:rPr sz="1600" baseline="30000">
+              <a:t>W = </a:t>
+            </a:r>
+            <a:r>
+              <a:rPr sz="2000" dirty="0" err="1">
                 <a:latin typeface="Cambria"/>
               </a:rPr>
+              <a:t>aL</a:t>
+            </a:r>
+            <a:r>
+              <a:rPr sz="2000" baseline="30000" dirty="0" err="1">
+                <a:latin typeface="Cambria"/>
+              </a:rPr>
               <a:t>b</a:t>
             </a:r>
             <a:r>
-              <a:rPr sz="1600">
+              <a:rPr sz="2000" dirty="0">
                 <a:latin typeface="Cambria"/>
               </a:rPr>
-              <a:t>;        ln W</a:t>
-            </a:r>
-            <a:r>
-              <a:rPr sz="1600" baseline="-25000">
+              <a:t>;        ln </a:t>
+            </a:r>
+            <a:r>
+              <a:rPr sz="2000" dirty="0" err="1">
                 <a:latin typeface="Cambria"/>
               </a:rPr>
+              <a:t>W</a:t>
+            </a:r>
+            <a:r>
+              <a:rPr sz="2000" baseline="-25000" dirty="0" err="1">
+                <a:latin typeface="Cambria"/>
+              </a:rPr>
               <a:t>i,j</a:t>
             </a:r>
             <a:r>
-              <a:rPr sz="1600">
+              <a:rPr sz="2000" dirty="0">
                 <a:latin typeface="Cambria"/>
               </a:rPr>
               <a:t> = ln a</a:t>
             </a:r>
             <a:r>
-              <a:rPr sz="1600" baseline="-25000">
+              <a:rPr sz="2000" baseline="-25000" dirty="0">
                 <a:latin typeface="Cambria"/>
               </a:rPr>
               <a:t>i</a:t>
             </a:r>
             <a:r>
-              <a:rPr sz="1600">
+              <a:rPr sz="2000" dirty="0">
                 <a:latin typeface="Cambria"/>
               </a:rPr>
               <a:t> + b</a:t>
             </a:r>
             <a:r>
-              <a:rPr sz="1600" baseline="-25000">
+              <a:rPr sz="2000" baseline="-25000" dirty="0">
                 <a:latin typeface="Cambria"/>
               </a:rPr>
               <a:t>i</a:t>
             </a:r>
             <a:r>
-              <a:rPr sz="1600">
+              <a:rPr sz="2000" dirty="0">
                 <a:latin typeface="Cambria"/>
               </a:rPr>
-              <a:t> ln L</a:t>
-            </a:r>
-            <a:r>
-              <a:rPr sz="1600" baseline="-25000">
+              <a:t> ln </a:t>
+            </a:r>
+            <a:r>
+              <a:rPr sz="2000" dirty="0" err="1">
                 <a:latin typeface="Cambria"/>
               </a:rPr>
+              <a:t>L</a:t>
+            </a:r>
+            <a:r>
+              <a:rPr sz="2000" baseline="-25000" dirty="0" err="1">
+                <a:latin typeface="Cambria"/>
+              </a:rPr>
               <a:t>i,j</a:t>
             </a:r>
             <a:r>
-              <a:rPr sz="1600">
+              <a:rPr sz="2000" dirty="0">
                 <a:latin typeface="Cambria"/>
               </a:rPr>
-              <a:t> + ε</a:t>
-            </a:r>
-            <a:r>
-              <a:rPr sz="1600" baseline="-25000">
+              <a:t> + </a:t>
+            </a:r>
+            <a:r>
+              <a:rPr sz="2000" dirty="0" err="1">
                 <a:latin typeface="Cambria"/>
               </a:rPr>
+              <a:t>ε</a:t>
+            </a:r>
+            <a:r>
+              <a:rPr sz="2000" baseline="-25000" dirty="0" err="1">
+                <a:latin typeface="Cambria"/>
+              </a:rPr>
               <a:t>i,j</a:t>
+            </a:r>
+            <a:endParaRPr sz="2000" baseline="-25000" dirty="0">
+              <a:latin typeface="Cambria"/>
+            </a:endParaRPr>
+          </a:p>
+        </p:txBody>
+      </p:sp>
+      <p:sp>
+        <p:nvSpPr>
+          <p:cNvPr id="2" name="TextBox 1">
+            <a:extLst>
+              <a:ext uri="{FF2B5EF4-FFF2-40B4-BE49-F238E27FC236}">
+                <a16:creationId xmlns:a16="http://schemas.microsoft.com/office/drawing/2014/main" id="{38F2922C-9AA0-17DA-94FA-D165927299C0}"/>
+              </a:ext>
+            </a:extLst>
+          </p:cNvPr>
+          <p:cNvSpPr txBox="1"/>
+          <p:nvPr/>
+        </p:nvSpPr>
+        <p:spPr>
+          <a:xfrm>
+            <a:off x="816141" y="6124545"/>
+            <a:ext cx="10794943" cy="400110"/>
+          </a:xfrm>
+          <a:prstGeom prst="rect">
+            <a:avLst/>
+          </a:prstGeom>
+          <a:noFill/>
+        </p:spPr>
+        <p:txBody>
+          <a:bodyPr wrap="none" rtlCol="0">
+            <a:spAutoFit/>
+          </a:bodyPr>
+          <a:lstStyle/>
+          <a:p>
+            <a:r>
+              <a:rPr lang="en-US" sz="2000" dirty="0"/>
+              <a:t>Note that weight and length have been log transformed in the data to make this power function linear</a:t>
             </a:r>
           </a:p>
         </p:txBody>
@@ -12910,7 +12919,12 @@
             <p:ph type="title"/>
           </p:nvPr>
         </p:nvSpPr>
-        <p:spPr/>
+        <p:spPr>
+          <a:xfrm>
+            <a:off x="838200" y="-59421"/>
+            <a:ext cx="10515600" cy="1325563"/>
+          </a:xfrm>
+        </p:spPr>
         <p:txBody>
           <a:bodyPr/>
           <a:lstStyle/>
@@ -12942,10 +12956,15 @@
             <p:ph type="body" idx="1"/>
           </p:nvPr>
         </p:nvSpPr>
-        <p:spPr/>
+        <p:spPr>
+          <a:xfrm>
+            <a:off x="838200" y="1401079"/>
+            <a:ext cx="10515600" cy="4351338"/>
+          </a:xfrm>
+        </p:spPr>
         <p:txBody>
           <a:bodyPr>
-            <a:normAutofit fontScale="55000" lnSpcReduction="20000"/>
+            <a:noAutofit/>
           </a:bodyPr>
           <a:lstStyle/>
           <a:p>
@@ -12958,7 +12977,7 @@
               <a:defRPr/>
             </a:pPr>
             <a:r>
-              <a:rPr lang="en-US" altLang="en-US" sz="1400" dirty="0"/>
+              <a:rPr lang="en-US" altLang="en-US" sz="1100" dirty="0"/>
               <a:t>Linear mixed-effects model fit by REML</a:t>
             </a:r>
           </a:p>
@@ -12972,15 +12991,15 @@
               <a:defRPr/>
             </a:pPr>
             <a:r>
-              <a:rPr lang="en-US" altLang="en-US" sz="1400" dirty="0"/>
+              <a:rPr lang="en-US" altLang="en-US" sz="1100" dirty="0"/>
               <a:t> Data: </a:t>
             </a:r>
             <a:r>
-              <a:rPr lang="en-US" altLang="en-US" sz="1400" dirty="0" err="1"/>
+              <a:rPr lang="en-US" altLang="en-US" sz="1100" dirty="0" err="1"/>
               <a:t>LenW</a:t>
             </a:r>
             <a:r>
-              <a:rPr lang="en-US" altLang="en-US" sz="1400" dirty="0"/>
+              <a:rPr lang="en-US" altLang="en-US" sz="1100" dirty="0"/>
               <a:t> </a:t>
             </a:r>
           </a:p>
@@ -12994,15 +13013,15 @@
               <a:defRPr/>
             </a:pPr>
             <a:r>
-              <a:rPr lang="en-US" altLang="en-US" sz="1400" dirty="0"/>
+              <a:rPr lang="en-US" altLang="en-US" sz="1100" dirty="0"/>
               <a:t>      AIC      BIC  </a:t>
             </a:r>
             <a:r>
-              <a:rPr lang="en-US" altLang="en-US" sz="1400" dirty="0" err="1"/>
+              <a:rPr lang="en-US" altLang="en-US" sz="1100" dirty="0" err="1"/>
               <a:t>logLik</a:t>
             </a:r>
             <a:r>
-              <a:rPr lang="en-US" altLang="en-US" sz="1400" dirty="0"/>
+              <a:rPr lang="en-US" altLang="en-US" sz="1100" dirty="0"/>
               <a:t> </a:t>
             </a:r>
           </a:p>
@@ -13016,7 +13035,7 @@
               <a:defRPr/>
             </a:pPr>
             <a:r>
-              <a:rPr lang="en-US" altLang="en-US" sz="1400" dirty="0"/>
+              <a:rPr lang="en-US" altLang="en-US" sz="1100" dirty="0"/>
               <a:t>  6.72662 17.06649 0.63669</a:t>
             </a:r>
           </a:p>
@@ -13029,7 +13048,7 @@
               <a:buNone/>
               <a:defRPr/>
             </a:pPr>
-            <a:endParaRPr lang="en-US" altLang="en-US" sz="1400" dirty="0"/>
+            <a:endParaRPr lang="en-US" altLang="en-US" sz="1100" dirty="0"/>
           </a:p>
           <a:p>
             <a:pPr eaLnBrk="1" hangingPunct="1">
@@ -13041,7 +13060,7 @@
               <a:defRPr/>
             </a:pPr>
             <a:r>
-              <a:rPr lang="en-US" altLang="en-US" sz="1400" dirty="0"/>
+              <a:rPr lang="en-US" altLang="en-US" sz="1100" dirty="0"/>
               <a:t>Random effects:</a:t>
             </a:r>
           </a:p>
@@ -13055,7 +13074,7 @@
               <a:defRPr/>
             </a:pPr>
             <a:r>
-              <a:rPr lang="en-US" altLang="en-US" sz="1400" dirty="0"/>
+              <a:rPr lang="en-US" altLang="en-US" sz="1100" dirty="0"/>
               <a:t> Formula:  ~ 1 | Subject</a:t>
             </a:r>
           </a:p>
@@ -13069,7 +13088,7 @@
               <a:defRPr/>
             </a:pPr>
             <a:r>
-              <a:rPr lang="en-US" altLang="en-US" sz="1400" dirty="0"/>
+              <a:rPr lang="en-US" altLang="en-US" sz="1100" dirty="0"/>
               <a:t>        (Intercept) Residual </a:t>
             </a:r>
           </a:p>
@@ -13083,11 +13102,11 @@
               <a:defRPr/>
             </a:pPr>
             <a:r>
-              <a:rPr lang="en-US" altLang="en-US" sz="1400" dirty="0" err="1"/>
+              <a:rPr lang="en-US" altLang="en-US" sz="1100" dirty="0" err="1"/>
               <a:t>StdDev</a:t>
             </a:r>
             <a:r>
-              <a:rPr lang="en-US" altLang="en-US" sz="1400" dirty="0"/>
+              <a:rPr lang="en-US" altLang="en-US" sz="1100" dirty="0"/>
               <a:t>:   0.2113517 0.205754</a:t>
             </a:r>
           </a:p>
@@ -13100,7 +13119,7 @@
               <a:buNone/>
               <a:defRPr/>
             </a:pPr>
-            <a:endParaRPr lang="en-US" altLang="en-US" sz="1400" dirty="0"/>
+            <a:endParaRPr lang="en-US" altLang="en-US" sz="1100" dirty="0"/>
           </a:p>
           <a:p>
             <a:pPr eaLnBrk="1" hangingPunct="1">
@@ -13112,7 +13131,7 @@
               <a:defRPr/>
             </a:pPr>
             <a:r>
-              <a:rPr lang="en-US" altLang="en-US" sz="1400" dirty="0"/>
+              <a:rPr lang="en-US" altLang="en-US" sz="1100" dirty="0"/>
               <a:t>Fixed effects: Weight ~ Length </a:t>
             </a:r>
           </a:p>
@@ -13126,15 +13145,15 @@
               <a:defRPr/>
             </a:pPr>
             <a:r>
-              <a:rPr lang="en-US" altLang="en-US" sz="1400" dirty="0"/>
+              <a:rPr lang="en-US" altLang="en-US" sz="1100" dirty="0"/>
               <a:t>                Value  </a:t>
             </a:r>
             <a:r>
-              <a:rPr lang="en-US" altLang="en-US" sz="1400" dirty="0" err="1"/>
+              <a:rPr lang="en-US" altLang="en-US" sz="1100" dirty="0" err="1"/>
               <a:t>Std.Error</a:t>
             </a:r>
             <a:r>
-              <a:rPr lang="en-US" altLang="en-US" sz="1400" dirty="0"/>
+              <a:rPr lang="en-US" altLang="en-US" sz="1100" dirty="0"/>
               <a:t> DF   t-value p-value </a:t>
             </a:r>
           </a:p>
@@ -13148,7 +13167,7 @@
               <a:defRPr/>
             </a:pPr>
             <a:r>
-              <a:rPr lang="en-US" altLang="en-US" sz="1400" dirty="0"/>
+              <a:rPr lang="en-US" altLang="en-US" sz="1100" dirty="0"/>
               <a:t>(Intercept) -0.026674 0.09560888 89   -0.2790  0.7809</a:t>
             </a:r>
           </a:p>
@@ -13162,7 +13181,7 @@
               <a:defRPr/>
             </a:pPr>
             <a:r>
-              <a:rPr lang="en-US" altLang="en-US" sz="1400" dirty="0"/>
+              <a:rPr lang="en-US" altLang="en-US" sz="1100" dirty="0"/>
               <a:t>     Length  3.017151 0.02958709 89  101.9753  &lt;.0001</a:t>
             </a:r>
           </a:p>
@@ -13175,7 +13194,7 @@
               <a:buNone/>
               <a:defRPr/>
             </a:pPr>
-            <a:endParaRPr lang="en-US" altLang="en-US" sz="1400" dirty="0"/>
+            <a:endParaRPr lang="en-US" altLang="en-US" sz="1100" dirty="0"/>
           </a:p>
           <a:p>
             <a:pPr eaLnBrk="1" hangingPunct="1">
@@ -13187,7 +13206,7 @@
               <a:defRPr/>
             </a:pPr>
             <a:r>
-              <a:rPr lang="en-US" altLang="en-US" sz="1400" dirty="0"/>
+              <a:rPr lang="en-US" altLang="en-US" sz="1100" dirty="0"/>
               <a:t>Standardized Within-Group Residuals:</a:t>
             </a:r>
           </a:p>
@@ -13201,7 +13220,7 @@
               <a:defRPr/>
             </a:pPr>
             <a:r>
-              <a:rPr lang="en-US" altLang="en-US" sz="1400" dirty="0"/>
+              <a:rPr lang="en-US" altLang="en-US" sz="1100" dirty="0"/>
               <a:t>       Min         Q1         Med        Q3      Max </a:t>
             </a:r>
           </a:p>
@@ -13215,7 +13234,7 @@
               <a:defRPr/>
             </a:pPr>
             <a:r>
-              <a:rPr lang="en-US" altLang="en-US" sz="1400" dirty="0"/>
+              <a:rPr lang="en-US" altLang="en-US" sz="1100" dirty="0"/>
               <a:t> -2.419116 -0.5799786 -0.05204277 0.5719096 2.320844</a:t>
             </a:r>
           </a:p>
@@ -13228,7 +13247,7 @@
               <a:buNone/>
               <a:defRPr/>
             </a:pPr>
-            <a:endParaRPr lang="en-US" altLang="en-US" sz="1400" dirty="0"/>
+            <a:endParaRPr lang="en-US" altLang="en-US" sz="1100" dirty="0"/>
           </a:p>
           <a:p>
             <a:pPr eaLnBrk="1" hangingPunct="1">
@@ -13240,7 +13259,7 @@
               <a:defRPr/>
             </a:pPr>
             <a:r>
-              <a:rPr lang="en-US" altLang="en-US" sz="1400" dirty="0"/>
+              <a:rPr lang="en-US" altLang="en-US" sz="1100" dirty="0"/>
               <a:t>Number of Observations: 100</a:t>
             </a:r>
           </a:p>
@@ -13254,7 +13273,7 @@
               <a:defRPr/>
             </a:pPr>
             <a:r>
-              <a:rPr lang="en-US" altLang="en-US" sz="1400" dirty="0"/>
+              <a:rPr lang="en-US" altLang="en-US" sz="1100" dirty="0"/>
               <a:t>Number of Groups: 10 </a:t>
             </a:r>
           </a:p>
@@ -13265,7 +13284,7 @@
               </a:lnSpc>
               <a:defRPr/>
             </a:pPr>
-            <a:endParaRPr lang="en-US" altLang="en-US" sz="1400" dirty="0"/>
+            <a:endParaRPr lang="en-US" altLang="en-US" sz="1100" dirty="0"/>
           </a:p>
         </p:txBody>
       </p:sp>
@@ -13354,15 +13373,6 @@
             </a:pPr>
             <a:r>
               <a:rPr lang="en-US" altLang="en-US" dirty="0"/>
-              <a:t>If you use REML estimation, you can only compare models with the same fixed-effects structure.</a:t>
-            </a:r>
-          </a:p>
-          <a:p>
-            <a:pPr eaLnBrk="1" hangingPunct="1">
-              <a:defRPr/>
-            </a:pPr>
-            <a:r>
-              <a:rPr lang="en-US" altLang="en-US" dirty="0"/>
               <a:t>The standard output does not provide:</a:t>
             </a:r>
           </a:p>
@@ -13505,7 +13515,7 @@
         <p:spPr>
           <a:xfrm>
             <a:off x="1905000" y="1524000"/>
-            <a:ext cx="8574088" cy="4800600"/>
+            <a:ext cx="8574088" cy="1578429"/>
           </a:xfrm>
         </p:spPr>
         <p:txBody>
@@ -13517,41 +13527,11 @@
             </a:pPr>
             <a:r>
               <a:rPr lang="en-US" altLang="en-US" dirty="0"/>
-              <a:t>LOTS OF UNANSWERED QUESTIONS! ESPECIALLY FOR NON-NORMAL RESIDUALS, NONLINEAR MODELS, AND MODEL SELECTION!</a:t>
-            </a:r>
-          </a:p>
-          <a:p>
-            <a:pPr eaLnBrk="1" hangingPunct="1">
-              <a:defRPr/>
-            </a:pPr>
-            <a:r>
-              <a:rPr lang="en-US" altLang="en-US" dirty="0"/>
-              <a:t>Let’s let Ben </a:t>
-            </a:r>
-            <a:r>
-              <a:rPr lang="en-US" altLang="en-US" dirty="0" err="1"/>
-              <a:t>Bolker</a:t>
-            </a:r>
-            <a:r>
-              <a:rPr lang="en-US" altLang="en-US" dirty="0"/>
-              <a:t> help us:</a:t>
-            </a:r>
-          </a:p>
-          <a:p>
-            <a:pPr eaLnBrk="1" hangingPunct="1">
-              <a:defRPr/>
-            </a:pPr>
-            <a:endParaRPr lang="en-US" altLang="en-US" dirty="0"/>
-          </a:p>
-          <a:p>
-            <a:pPr eaLnBrk="1" hangingPunct="1">
-              <a:defRPr/>
-            </a:pPr>
-            <a:endParaRPr lang="en-US" altLang="en-US" dirty="0"/>
-          </a:p>
-          <a:p>
-            <a:pPr eaLnBrk="1" hangingPunct="1">
-              <a:buFont typeface="Wingdings" charset="2"/>
+              <a:t>Ben Bolker’s FAQ on GLMMs can help us:</a:t>
+            </a:r>
+          </a:p>
+          <a:p>
+            <a:pPr marL="0" indent="0" eaLnBrk="1" hangingPunct="1">
               <a:buNone/>
               <a:defRPr/>
             </a:pPr>
@@ -13569,7 +13549,7 @@
         </p:nvSpPr>
         <p:spPr bwMode="auto">
           <a:xfrm>
-            <a:off x="1900239" y="4419601"/>
+            <a:off x="1712912" y="2871447"/>
             <a:ext cx="8174037" cy="461963"/>
           </a:xfrm>
           <a:prstGeom prst="rect">
@@ -14100,7 +14080,7 @@
             </a:pPr>
             <a:r>
               <a:rPr lang="en-US" sz="2000" dirty="0"/>
-              <a:t>We’re also not scientifically interested in variation among lakes.</a:t>
+              <a:t>We’re also not scientifically interested in the lakes.</a:t>
             </a:r>
           </a:p>
           <a:p>
@@ -14156,7 +14136,7 @@
             </a:r>
             <a:r>
               <a:rPr lang="en-US" sz="2000" dirty="0"/>
-              <a:t> or species variation</a:t>
+              <a:t> or interspecies variation</a:t>
             </a:r>
             <a:br>
               <a:rPr lang="en-US" sz="2000" dirty="0"/>
@@ -15190,7 +15170,7 @@
           <a:p>
             <a:r>
               <a:rPr lang="en-US" dirty="0"/>
-              <a:t>Biased standard errors and confidence intervals (typically underestimated).</a:t>
+              <a:t>Biased standard errors and confidence intervals (underestimated).</a:t>
             </a:r>
           </a:p>
           <a:p>
@@ -15227,7 +15207,7 @@
         </p:nvSpPr>
         <p:spPr>
           <a:xfrm>
-            <a:off x="311426" y="5853797"/>
+            <a:off x="311426" y="5204441"/>
             <a:ext cx="11569148" cy="830997"/>
           </a:xfrm>
           <a:prstGeom prst="rect">
@@ -15660,7 +15640,7 @@
             </a:pPr>
             <a:r>
               <a:rPr lang="en-US" dirty="0"/>
-              <a:t>What’s the difference?</a:t>
+              <a:t>What’s the difference? Which actually makes more sense here?</a:t>
             </a:r>
           </a:p>
         </p:txBody>
@@ -16305,8 +16285,8 @@
         </p:nvSpPr>
         <p:spPr>
           <a:xfrm>
-            <a:off x="524435" y="1038411"/>
-            <a:ext cx="11080377" cy="4114800"/>
+            <a:off x="341730" y="1017493"/>
+            <a:ext cx="11508539" cy="4114800"/>
           </a:xfrm>
         </p:spPr>
         <p:txBody>
@@ -16345,7 +16325,7 @@
             </a:pPr>
             <a:r>
               <a:rPr lang="en-US" dirty="0"/>
-              <a:t>Inappropriate use of random effects with unbalanced designs + shrinkage can lead to incorrect conclusions. </a:t>
+              <a:t>use of random effects with unbalanced designs + shrinkage can lead to incorrect conclusions if, say, rare species are different from common species. </a:t>
             </a:r>
           </a:p>
         </p:txBody>
@@ -22674,7 +22654,7 @@
           <p:nvPr/>
         </p:nvPicPr>
         <p:blipFill>
-          <a:blip r:embed="rId5">
+          <a:blip r:embed="rId3">
             <a:extLst>
               <a:ext uri="{28A0092B-C50C-407E-A947-70E740481C1C}">
                 <a14:useLocalDpi xmlns:a14="http://schemas.microsoft.com/office/drawing/2010/main" val="0"/>
@@ -22727,8 +22707,8 @@
         </p:nvSpPr>
         <p:spPr>
           <a:xfrm>
-            <a:off x="4125914" y="2035624"/>
-            <a:ext cx="3940175" cy="666750"/>
+            <a:off x="3445565" y="2144577"/>
+            <a:ext cx="4991585" cy="369332"/>
           </a:xfrm>
           <a:prstGeom prst="rect">
             <a:avLst/>
@@ -22736,71 +22716,104 @@
           <a:noFill/>
         </p:spPr>
         <p:txBody>
-          <a:bodyPr wrap="square" anchor="ctr" lIns="0" rIns="0" tIns="0" bIns="0">
+          <a:bodyPr wrap="square" lIns="0" tIns="0" rIns="0" bIns="0" anchor="ctr">
             <a:spAutoFit/>
           </a:bodyPr>
           <a:lstStyle/>
           <a:p>
             <a:r>
-              <a:rPr sz="1300">
+              <a:rPr sz="2400" dirty="0">
                 <a:latin typeface="Cambria"/>
               </a:rPr>
               <a:t>ℓ</a:t>
             </a:r>
             <a:r>
-              <a:rPr sz="1300" baseline="-25000">
+              <a:rPr sz="2400" baseline="-25000" dirty="0" err="1">
                 <a:latin typeface="Cambria"/>
               </a:rPr>
               <a:t>i,j</a:t>
             </a:r>
             <a:r>
-              <a:rPr sz="1300">
+              <a:rPr sz="2400" dirty="0">
                 <a:latin typeface="Cambria"/>
               </a:rPr>
               <a:t> = ℓ</a:t>
             </a:r>
             <a:r>
-              <a:rPr sz="1300" baseline="-25000">
+              <a:rPr sz="2400" baseline="-25000" dirty="0">
                 <a:latin typeface="Cambria"/>
               </a:rPr>
-              <a:t>∞,i</a:t>
-            </a:r>
-            <a:r>
-              <a:rPr sz="1300">
+              <a:t>∞,</a:t>
+            </a:r>
+            <a:r>
+              <a:rPr sz="2400" baseline="-25000" dirty="0" err="1">
                 <a:latin typeface="Cambria"/>
               </a:rPr>
-              <a:t>(1 − exp(−κ(a</a:t>
-            </a:r>
-            <a:r>
-              <a:rPr sz="1300" baseline="-25000">
+              <a:t>i</a:t>
+            </a:r>
+            <a:r>
+              <a:rPr sz="2400" dirty="0">
                 <a:latin typeface="Cambria"/>
               </a:rPr>
+              <a:t>(1 − exp(−</a:t>
+            </a:r>
+            <a:r>
+              <a:rPr sz="2400" dirty="0" err="1">
+                <a:latin typeface="Cambria"/>
+              </a:rPr>
+              <a:t>κ</a:t>
+            </a:r>
+            <a:r>
+              <a:rPr sz="2400" dirty="0">
+                <a:latin typeface="Cambria"/>
+              </a:rPr>
+              <a:t>(</a:t>
+            </a:r>
+            <a:r>
+              <a:rPr sz="2400" dirty="0" err="1">
+                <a:latin typeface="Cambria"/>
+              </a:rPr>
+              <a:t>a</a:t>
+            </a:r>
+            <a:r>
+              <a:rPr sz="2400" baseline="-25000" dirty="0" err="1">
+                <a:latin typeface="Cambria"/>
+              </a:rPr>
               <a:t>i,j</a:t>
             </a:r>
             <a:r>
-              <a:rPr sz="1300">
+              <a:rPr sz="2400" dirty="0">
                 <a:latin typeface="Cambria"/>
               </a:rPr>
               <a:t> − t</a:t>
             </a:r>
             <a:r>
-              <a:rPr sz="1300" baseline="-25000">
+              <a:rPr sz="2400" baseline="-25000" dirty="0">
                 <a:latin typeface="Cambria"/>
               </a:rPr>
               <a:t>0</a:t>
             </a:r>
             <a:r>
-              <a:rPr sz="1300">
+              <a:rPr sz="2400" dirty="0">
                 <a:latin typeface="Cambria"/>
               </a:rPr>
-              <a:t>))) + ε</a:t>
-            </a:r>
-            <a:r>
-              <a:rPr sz="1300" baseline="-25000">
+              <a:t>))) + </a:t>
+            </a:r>
+            <a:r>
+              <a:rPr sz="2400" dirty="0" err="1">
                 <a:latin typeface="Cambria"/>
               </a:rPr>
+              <a:t>ε</a:t>
+            </a:r>
+            <a:r>
+              <a:rPr sz="2400" baseline="-25000" dirty="0" err="1">
+                <a:latin typeface="Cambria"/>
+              </a:rPr>
               <a:t>i,j</a:t>
             </a:r>
+            <a:endParaRPr sz="2400" baseline="-25000" dirty="0">
+              <a:latin typeface="Cambria"/>
+            </a:endParaRPr>
           </a:p>
         </p:txBody>
       </p:sp>
@@ -23046,7 +23059,7 @@
         <p:spPr>
           <a:xfrm>
             <a:off x="1524000" y="1262270"/>
-            <a:ext cx="9144000" cy="4953000"/>
+            <a:ext cx="9634330" cy="4953000"/>
           </a:xfrm>
         </p:spPr>
         <p:txBody>
@@ -23104,11 +23117,7 @@
             </a:r>
             <a:r>
               <a:rPr lang="en-US" altLang="en-US" dirty="0"/>
-              <a:t> and </a:t>
-            </a:r>
-            <a:r>
-              <a:rPr lang="en-US" altLang="en-US" dirty="0"/>
-              <a:t>κ are the same for all animals in the population while the asymptotic size differs among individuals.</a:t>
+              <a:t> and κ are the same for all animals in the population while the asymptotic size differs among individuals.</a:t>
             </a:r>
           </a:p>
           <a:p>
@@ -23127,7 +23136,7 @@
               <a:rPr lang="en-US" altLang="en-US" dirty="0">
                 <a:sym typeface="Symbol" charset="2"/>
               </a:rPr>
-              <a:t>There is normally distributed measurement error.</a:t>
+              <a:t>There is normally distributed error.</a:t>
             </a:r>
           </a:p>
           <a:p>
@@ -23173,8 +23182,8 @@
         </p:nvSpPr>
         <p:spPr>
           <a:xfrm>
-            <a:off x="4125914" y="2246689"/>
-            <a:ext cx="3940175" cy="666750"/>
+            <a:off x="3604592" y="2342390"/>
+            <a:ext cx="4461498" cy="369332"/>
           </a:xfrm>
           <a:prstGeom prst="rect">
             <a:avLst/>
@@ -23182,71 +23191,104 @@
           <a:noFill/>
         </p:spPr>
         <p:txBody>
-          <a:bodyPr wrap="square" anchor="ctr" lIns="0" rIns="0" tIns="0" bIns="0">
+          <a:bodyPr wrap="square" lIns="0" tIns="0" rIns="0" bIns="0" anchor="ctr">
             <a:spAutoFit/>
           </a:bodyPr>
           <a:lstStyle/>
           <a:p>
             <a:r>
-              <a:rPr sz="1300">
+              <a:rPr sz="2400" dirty="0">
                 <a:latin typeface="Cambria"/>
               </a:rPr>
               <a:t>ℓ</a:t>
             </a:r>
             <a:r>
-              <a:rPr sz="1300" baseline="-25000">
+              <a:rPr sz="2400" baseline="-25000" dirty="0" err="1">
                 <a:latin typeface="Cambria"/>
               </a:rPr>
               <a:t>i,j</a:t>
             </a:r>
             <a:r>
-              <a:rPr sz="1300">
+              <a:rPr sz="2400" dirty="0">
                 <a:latin typeface="Cambria"/>
               </a:rPr>
               <a:t> = ℓ</a:t>
             </a:r>
             <a:r>
-              <a:rPr sz="1300" baseline="-25000">
+              <a:rPr sz="2400" baseline="-25000" dirty="0">
                 <a:latin typeface="Cambria"/>
               </a:rPr>
-              <a:t>∞,i</a:t>
-            </a:r>
-            <a:r>
-              <a:rPr sz="1300">
+              <a:t>∞,</a:t>
+            </a:r>
+            <a:r>
+              <a:rPr sz="2400" baseline="-25000" dirty="0" err="1">
                 <a:latin typeface="Cambria"/>
               </a:rPr>
-              <a:t>(1 − exp(−κ(a</a:t>
-            </a:r>
-            <a:r>
-              <a:rPr sz="1300" baseline="-25000">
+              <a:t>i</a:t>
+            </a:r>
+            <a:r>
+              <a:rPr sz="2400" dirty="0">
                 <a:latin typeface="Cambria"/>
               </a:rPr>
+              <a:t>(1 − exp(−</a:t>
+            </a:r>
+            <a:r>
+              <a:rPr sz="2400" dirty="0" err="1">
+                <a:latin typeface="Cambria"/>
+              </a:rPr>
+              <a:t>κ</a:t>
+            </a:r>
+            <a:r>
+              <a:rPr sz="2400" dirty="0">
+                <a:latin typeface="Cambria"/>
+              </a:rPr>
+              <a:t>(</a:t>
+            </a:r>
+            <a:r>
+              <a:rPr sz="2400" dirty="0" err="1">
+                <a:latin typeface="Cambria"/>
+              </a:rPr>
+              <a:t>a</a:t>
+            </a:r>
+            <a:r>
+              <a:rPr sz="2400" baseline="-25000" dirty="0" err="1">
+                <a:latin typeface="Cambria"/>
+              </a:rPr>
               <a:t>i,j</a:t>
             </a:r>
             <a:r>
-              <a:rPr sz="1300">
+              <a:rPr sz="2400" dirty="0">
                 <a:latin typeface="Cambria"/>
               </a:rPr>
               <a:t> − t</a:t>
             </a:r>
             <a:r>
-              <a:rPr sz="1300" baseline="-25000">
+              <a:rPr sz="2400" baseline="-25000" dirty="0">
                 <a:latin typeface="Cambria"/>
               </a:rPr>
               <a:t>0</a:t>
             </a:r>
             <a:r>
-              <a:rPr sz="1300">
+              <a:rPr sz="2400" dirty="0">
                 <a:latin typeface="Cambria"/>
               </a:rPr>
-              <a:t>))) + ε</a:t>
-            </a:r>
-            <a:r>
-              <a:rPr sz="1300" baseline="-25000">
+              <a:t>))) + </a:t>
+            </a:r>
+            <a:r>
+              <a:rPr sz="2400" dirty="0" err="1">
                 <a:latin typeface="Cambria"/>
               </a:rPr>
+              <a:t>ε</a:t>
+            </a:r>
+            <a:r>
+              <a:rPr sz="2400" baseline="-25000" dirty="0" err="1">
+                <a:latin typeface="Cambria"/>
+              </a:rPr>
               <a:t>i,j</a:t>
             </a:r>
+            <a:endParaRPr sz="2400" baseline="-25000" dirty="0">
+              <a:latin typeface="Cambria"/>
+            </a:endParaRPr>
           </a:p>
         </p:txBody>
       </p:sp>
@@ -23321,7 +23363,7 @@
         </p:nvSpPr>
         <p:spPr bwMode="auto">
           <a:xfrm>
-            <a:off x="1619196" y="2803112"/>
+            <a:off x="595187" y="2879642"/>
             <a:ext cx="3162404" cy="461665"/>
           </a:xfrm>
           <a:prstGeom prst="rect">
@@ -23544,7 +23586,7 @@
         </p:nvSpPr>
         <p:spPr bwMode="auto">
           <a:xfrm>
-            <a:off x="2765910" y="3641312"/>
+            <a:off x="2918427" y="3758501"/>
             <a:ext cx="2683491" cy="461665"/>
           </a:xfrm>
           <a:prstGeom prst="rect">
@@ -23767,7 +23809,7 @@
         </p:nvSpPr>
         <p:spPr bwMode="auto">
           <a:xfrm>
-            <a:off x="7262141" y="2803112"/>
+            <a:off x="7262141" y="3032000"/>
             <a:ext cx="2436564" cy="461665"/>
           </a:xfrm>
           <a:prstGeom prst="rect">
@@ -23990,7 +24032,7 @@
         </p:nvSpPr>
         <p:spPr bwMode="auto">
           <a:xfrm flipV="1">
-            <a:off x="3211511" y="2345911"/>
+            <a:off x="2301933" y="2452532"/>
             <a:ext cx="990600" cy="381000"/>
           </a:xfrm>
           <a:prstGeom prst="line">
@@ -24031,7 +24073,7 @@
         </p:nvSpPr>
         <p:spPr bwMode="auto">
           <a:xfrm flipV="1">
-            <a:off x="5040311" y="2422111"/>
+            <a:off x="4290991" y="2498311"/>
             <a:ext cx="152400" cy="1219200"/>
           </a:xfrm>
           <a:prstGeom prst="line">
@@ -24072,7 +24114,7 @@
         </p:nvSpPr>
         <p:spPr bwMode="auto">
           <a:xfrm flipH="1" flipV="1">
-            <a:off x="6335711" y="2193511"/>
+            <a:off x="6096000" y="2420425"/>
             <a:ext cx="1676400" cy="609600"/>
           </a:xfrm>
           <a:prstGeom prst="line">
@@ -24113,7 +24155,7 @@
         </p:nvSpPr>
         <p:spPr bwMode="auto">
           <a:xfrm>
-            <a:off x="6760446" y="3666026"/>
+            <a:off x="6252570" y="4062385"/>
             <a:ext cx="2019142" cy="461665"/>
           </a:xfrm>
           <a:prstGeom prst="rect">
@@ -24336,7 +24378,7 @@
         </p:nvSpPr>
         <p:spPr bwMode="auto">
           <a:xfrm flipH="1" flipV="1">
-            <a:off x="6574610" y="2218225"/>
+            <a:off x="6433778" y="2573458"/>
             <a:ext cx="457200" cy="1447800"/>
           </a:xfrm>
           <a:prstGeom prst="line">
@@ -24377,7 +24419,7 @@
         </p:nvSpPr>
         <p:spPr bwMode="auto">
           <a:xfrm flipH="1" flipV="1">
-            <a:off x="7021511" y="2193511"/>
+            <a:off x="7075488" y="2406752"/>
             <a:ext cx="990600" cy="609600"/>
           </a:xfrm>
           <a:prstGeom prst="line">
@@ -24416,8 +24458,8 @@
         </p:nvSpPr>
         <p:spPr>
           <a:xfrm>
-            <a:off x="4125912" y="1888711"/>
-            <a:ext cx="3940175" cy="666750"/>
+            <a:off x="3578088" y="2037420"/>
+            <a:ext cx="4488000" cy="369332"/>
           </a:xfrm>
           <a:prstGeom prst="rect">
             <a:avLst/>
@@ -24425,71 +24467,347 @@
           <a:noFill/>
         </p:spPr>
         <p:txBody>
-          <a:bodyPr wrap="square" anchor="ctr" lIns="0" rIns="0" tIns="0" bIns="0">
+          <a:bodyPr wrap="square" lIns="0" tIns="0" rIns="0" bIns="0" anchor="ctr">
             <a:spAutoFit/>
           </a:bodyPr>
           <a:lstStyle/>
           <a:p>
             <a:r>
-              <a:rPr sz="1300">
+              <a:rPr sz="2400">
                 <a:latin typeface="Cambria"/>
               </a:rPr>
               <a:t>ℓ</a:t>
             </a:r>
             <a:r>
-              <a:rPr sz="1300" baseline="-25000">
+              <a:rPr sz="2400" baseline="-25000">
                 <a:latin typeface="Cambria"/>
               </a:rPr>
               <a:t>i,j</a:t>
             </a:r>
             <a:r>
-              <a:rPr sz="1300">
+              <a:rPr sz="2400">
                 <a:latin typeface="Cambria"/>
               </a:rPr>
               <a:t> = ℓ</a:t>
             </a:r>
             <a:r>
-              <a:rPr sz="1300" baseline="-25000">
+              <a:rPr sz="2400" baseline="-25000">
                 <a:latin typeface="Cambria"/>
               </a:rPr>
               <a:t>∞,i</a:t>
             </a:r>
             <a:r>
-              <a:rPr sz="1300">
+              <a:rPr sz="2400">
                 <a:latin typeface="Cambria"/>
               </a:rPr>
               <a:t>(1 − exp(−κ(a</a:t>
             </a:r>
             <a:r>
-              <a:rPr sz="1300" baseline="-25000">
+              <a:rPr sz="2400" baseline="-25000">
                 <a:latin typeface="Cambria"/>
               </a:rPr>
               <a:t>i,j</a:t>
             </a:r>
             <a:r>
-              <a:rPr sz="1300">
+              <a:rPr sz="2400">
                 <a:latin typeface="Cambria"/>
               </a:rPr>
               <a:t> − t</a:t>
             </a:r>
             <a:r>
-              <a:rPr sz="1300" baseline="-25000">
+              <a:rPr sz="2400" baseline="-25000">
                 <a:latin typeface="Cambria"/>
               </a:rPr>
               <a:t>0</a:t>
             </a:r>
             <a:r>
-              <a:rPr sz="1300">
+              <a:rPr sz="2400">
                 <a:latin typeface="Cambria"/>
               </a:rPr>
               <a:t>))) + ε</a:t>
             </a:r>
             <a:r>
-              <a:rPr sz="1300" baseline="-25000">
+              <a:rPr sz="2400" baseline="-25000">
                 <a:latin typeface="Cambria"/>
               </a:rPr>
               <a:t>i,j</a:t>
             </a:r>
+          </a:p>
+        </p:txBody>
+      </p:sp>
+      <p:sp>
+        <p:nvSpPr>
+          <p:cNvPr id="2" name="Text Box 13">
+            <a:extLst>
+              <a:ext uri="{FF2B5EF4-FFF2-40B4-BE49-F238E27FC236}">
+                <a16:creationId xmlns:a16="http://schemas.microsoft.com/office/drawing/2014/main" id="{6735AA1C-782D-6A34-CE70-C335F277F513}"/>
+              </a:ext>
+            </a:extLst>
+          </p:cNvPr>
+          <p:cNvSpPr txBox="1">
+            <a:spLocks noChangeArrowheads="1"/>
+          </p:cNvSpPr>
+          <p:nvPr/>
+        </p:nvSpPr>
+        <p:spPr bwMode="auto">
+          <a:xfrm>
+            <a:off x="9173453" y="1098061"/>
+            <a:ext cx="2683491" cy="461665"/>
+          </a:xfrm>
+          <a:prstGeom prst="rect">
+            <a:avLst/>
+          </a:prstGeom>
+          <a:noFill/>
+          <a:ln w="38100">
+            <a:solidFill>
+              <a:schemeClr val="accent2"/>
+            </a:solidFill>
+            <a:miter lim="800000"/>
+            <a:headEnd/>
+            <a:tailEnd/>
+          </a:ln>
+          <a:extLst>
+            <a:ext uri="{909E8E84-426E-40DD-AFC4-6F175D3DCCD1}">
+              <a14:hiddenFill xmlns:a14="http://schemas.microsoft.com/office/drawing/2010/main">
+                <a:solidFill>
+                  <a:srgbClr val="FFFFFF"/>
+                </a:solidFill>
+              </a14:hiddenFill>
+            </a:ext>
+          </a:extLst>
+        </p:spPr>
+        <p:txBody>
+          <a:bodyPr wrap="square">
+            <a:spAutoFit/>
+          </a:bodyPr>
+          <a:lstStyle>
+            <a:lvl1pPr>
+              <a:spcBef>
+                <a:spcPct val="20000"/>
+              </a:spcBef>
+              <a:buClr>
+                <a:schemeClr val="folHlink"/>
+              </a:buClr>
+              <a:buSzPct val="60000"/>
+              <a:buFont typeface="Wingdings" charset="2"/>
+              <a:buChar char="n"/>
+              <a:defRPr sz="3200">
+                <a:solidFill>
+                  <a:schemeClr val="tx1"/>
+                </a:solidFill>
+                <a:latin typeface="Tahoma" charset="0"/>
+              </a:defRPr>
+            </a:lvl1pPr>
+            <a:lvl2pPr marL="742950" indent="-285750">
+              <a:spcBef>
+                <a:spcPct val="20000"/>
+              </a:spcBef>
+              <a:buClr>
+                <a:schemeClr val="hlink"/>
+              </a:buClr>
+              <a:buSzPct val="55000"/>
+              <a:buFont typeface="Wingdings" charset="2"/>
+              <a:buChar char="n"/>
+              <a:defRPr sz="2800">
+                <a:solidFill>
+                  <a:schemeClr val="tx1"/>
+                </a:solidFill>
+                <a:latin typeface="Tahoma" charset="0"/>
+              </a:defRPr>
+            </a:lvl2pPr>
+            <a:lvl3pPr marL="1143000" indent="-228600">
+              <a:spcBef>
+                <a:spcPct val="20000"/>
+              </a:spcBef>
+              <a:buClr>
+                <a:schemeClr val="folHlink"/>
+              </a:buClr>
+              <a:buSzPct val="50000"/>
+              <a:buFont typeface="Wingdings" charset="2"/>
+              <a:buChar char="n"/>
+              <a:defRPr sz="2400">
+                <a:solidFill>
+                  <a:schemeClr val="tx1"/>
+                </a:solidFill>
+                <a:latin typeface="Tahoma" charset="0"/>
+              </a:defRPr>
+            </a:lvl3pPr>
+            <a:lvl4pPr marL="1600200" indent="-228600">
+              <a:spcBef>
+                <a:spcPct val="20000"/>
+              </a:spcBef>
+              <a:buClr>
+                <a:schemeClr val="accent2"/>
+              </a:buClr>
+              <a:buSzPct val="55000"/>
+              <a:buFont typeface="Wingdings" charset="2"/>
+              <a:buChar char="n"/>
+              <a:defRPr sz="2000">
+                <a:solidFill>
+                  <a:schemeClr val="tx1"/>
+                </a:solidFill>
+                <a:latin typeface="Tahoma" charset="0"/>
+              </a:defRPr>
+            </a:lvl4pPr>
+            <a:lvl5pPr marL="2057400" indent="-228600">
+              <a:spcBef>
+                <a:spcPct val="20000"/>
+              </a:spcBef>
+              <a:buClr>
+                <a:schemeClr val="accent1"/>
+              </a:buClr>
+              <a:buSzPct val="50000"/>
+              <a:buFont typeface="Wingdings" charset="2"/>
+              <a:buChar char="n"/>
+              <a:defRPr sz="2000">
+                <a:solidFill>
+                  <a:schemeClr val="tx1"/>
+                </a:solidFill>
+                <a:latin typeface="Tahoma" charset="0"/>
+              </a:defRPr>
+            </a:lvl5pPr>
+            <a:lvl6pPr marL="2514600" indent="-228600" eaLnBrk="0" fontAlgn="base" hangingPunct="0">
+              <a:spcBef>
+                <a:spcPct val="20000"/>
+              </a:spcBef>
+              <a:spcAft>
+                <a:spcPct val="0"/>
+              </a:spcAft>
+              <a:buClr>
+                <a:schemeClr val="accent1"/>
+              </a:buClr>
+              <a:buSzPct val="50000"/>
+              <a:buFont typeface="Wingdings" charset="2"/>
+              <a:buChar char="n"/>
+              <a:defRPr sz="2000">
+                <a:solidFill>
+                  <a:schemeClr val="tx1"/>
+                </a:solidFill>
+                <a:latin typeface="Tahoma" charset="0"/>
+              </a:defRPr>
+            </a:lvl6pPr>
+            <a:lvl7pPr marL="2971800" indent="-228600" eaLnBrk="0" fontAlgn="base" hangingPunct="0">
+              <a:spcBef>
+                <a:spcPct val="20000"/>
+              </a:spcBef>
+              <a:spcAft>
+                <a:spcPct val="0"/>
+              </a:spcAft>
+              <a:buClr>
+                <a:schemeClr val="accent1"/>
+              </a:buClr>
+              <a:buSzPct val="50000"/>
+              <a:buFont typeface="Wingdings" charset="2"/>
+              <a:buChar char="n"/>
+              <a:defRPr sz="2000">
+                <a:solidFill>
+                  <a:schemeClr val="tx1"/>
+                </a:solidFill>
+                <a:latin typeface="Tahoma" charset="0"/>
+              </a:defRPr>
+            </a:lvl7pPr>
+            <a:lvl8pPr marL="3429000" indent="-228600" eaLnBrk="0" fontAlgn="base" hangingPunct="0">
+              <a:spcBef>
+                <a:spcPct val="20000"/>
+              </a:spcBef>
+              <a:spcAft>
+                <a:spcPct val="0"/>
+              </a:spcAft>
+              <a:buClr>
+                <a:schemeClr val="accent1"/>
+              </a:buClr>
+              <a:buSzPct val="50000"/>
+              <a:buFont typeface="Wingdings" charset="2"/>
+              <a:buChar char="n"/>
+              <a:defRPr sz="2000">
+                <a:solidFill>
+                  <a:schemeClr val="tx1"/>
+                </a:solidFill>
+                <a:latin typeface="Tahoma" charset="0"/>
+              </a:defRPr>
+            </a:lvl8pPr>
+            <a:lvl9pPr marL="3886200" indent="-228600" eaLnBrk="0" fontAlgn="base" hangingPunct="0">
+              <a:spcBef>
+                <a:spcPct val="20000"/>
+              </a:spcBef>
+              <a:spcAft>
+                <a:spcPct val="0"/>
+              </a:spcAft>
+              <a:buClr>
+                <a:schemeClr val="accent1"/>
+              </a:buClr>
+              <a:buSzPct val="50000"/>
+              <a:buFont typeface="Wingdings" charset="2"/>
+              <a:buChar char="n"/>
+              <a:defRPr sz="2000">
+                <a:solidFill>
+                  <a:schemeClr val="tx1"/>
+                </a:solidFill>
+                <a:latin typeface="Tahoma" charset="0"/>
+              </a:defRPr>
+            </a:lvl9pPr>
+          </a:lstStyle>
+          <a:p>
+            <a:pPr algn="ctr" eaLnBrk="1" hangingPunct="1">
+              <a:spcBef>
+                <a:spcPct val="0"/>
+              </a:spcBef>
+              <a:buClrTx/>
+              <a:buSzTx/>
+              <a:buFontTx/>
+              <a:buNone/>
+            </a:pPr>
+            <a:r>
+              <a:rPr lang="en-US" altLang="en-US" sz="2400" dirty="0"/>
+              <a:t>Residual variation</a:t>
+            </a:r>
+          </a:p>
+        </p:txBody>
+      </p:sp>
+      <p:sp>
+        <p:nvSpPr>
+          <p:cNvPr id="3" name="Line 16">
+            <a:extLst>
+              <a:ext uri="{FF2B5EF4-FFF2-40B4-BE49-F238E27FC236}">
+                <a16:creationId xmlns:a16="http://schemas.microsoft.com/office/drawing/2014/main" id="{72E21257-D116-9370-BA07-414556AEF6C2}"/>
+              </a:ext>
+            </a:extLst>
+          </p:cNvPr>
+          <p:cNvSpPr>
+            <a:spLocks noChangeShapeType="1"/>
+          </p:cNvSpPr>
+          <p:nvPr/>
+        </p:nvSpPr>
+        <p:spPr bwMode="auto">
+          <a:xfrm flipH="1">
+            <a:off x="7885114" y="1548722"/>
+            <a:ext cx="2683493" cy="488697"/>
+          </a:xfrm>
+          <a:prstGeom prst="line">
+            <a:avLst/>
+          </a:prstGeom>
+          <a:noFill/>
+          <a:ln w="38100">
+            <a:solidFill>
+              <a:schemeClr val="tx1"/>
+            </a:solidFill>
+            <a:round/>
+            <a:headEnd/>
+            <a:tailEnd type="triangle" w="med" len="med"/>
+          </a:ln>
+          <a:extLst>
+            <a:ext uri="{909E8E84-426E-40DD-AFC4-6F175D3DCCD1}">
+              <a14:hiddenFill xmlns:a14="http://schemas.microsoft.com/office/drawing/2010/main">
+                <a:noFill/>
+              </a14:hiddenFill>
+            </a:ext>
+          </a:extLst>
+        </p:spPr>
+        <p:txBody>
+          <a:bodyPr wrap="none"/>
+          <a:lstStyle/>
+          <a:p>
+            <a:endParaRPr lang="en-US"/>
           </a:p>
         </p:txBody>
       </p:sp>
@@ -25277,8 +25595,8 @@
         </p:nvSpPr>
         <p:spPr bwMode="auto">
           <a:xfrm>
-            <a:off x="1828800" y="3449096"/>
-            <a:ext cx="4012060" cy="2677656"/>
+            <a:off x="1875388" y="3449096"/>
+            <a:ext cx="3965472" cy="2677656"/>
           </a:xfrm>
           <a:prstGeom prst="rect">
             <a:avLst/>
@@ -25308,7 +25626,7 @@
           </a:extLst>
         </p:spPr>
         <p:txBody>
-          <a:bodyPr wrap="none">
+          <a:bodyPr wrap="square">
             <a:spAutoFit/>
           </a:bodyPr>
           <a:lstStyle>
@@ -26271,7 +26589,12 @@
             <p:ph type="title"/>
           </p:nvPr>
         </p:nvSpPr>
-        <p:spPr/>
+        <p:spPr>
+          <a:xfrm>
+            <a:off x="838200" y="60668"/>
+            <a:ext cx="10515600" cy="1325563"/>
+          </a:xfrm>
+        </p:spPr>
         <p:txBody>
           <a:bodyPr/>
           <a:lstStyle/>
@@ -26280,7 +26603,7 @@
               <a:defRPr/>
             </a:pPr>
             <a:r>
-              <a:rPr lang="en-US" altLang="en-US"/>
+              <a:rPr lang="en-US" altLang="en-US" dirty="0"/>
               <a:t>The NLME Function-I</a:t>
             </a:r>
           </a:p>
@@ -26296,7 +26619,12 @@
             <p:ph type="body" idx="1"/>
           </p:nvPr>
         </p:nvSpPr>
-        <p:spPr/>
+        <p:spPr>
+          <a:xfrm>
+            <a:off x="149087" y="1524000"/>
+            <a:ext cx="12042913" cy="4518026"/>
+          </a:xfrm>
+        </p:spPr>
         <p:txBody>
           <a:bodyPr/>
           <a:lstStyle/>
@@ -26324,27 +26652,27 @@
               <a:defRPr/>
             </a:pPr>
             <a:r>
-              <a:rPr lang="en-US" altLang="en-US" sz="1600" b="1" dirty="0" err="1"/>
+              <a:rPr lang="en-US" altLang="en-US" sz="1800" b="1" dirty="0" err="1"/>
               <a:t>nlme</a:t>
             </a:r>
             <a:r>
-              <a:rPr lang="en-US" altLang="en-US" sz="1600" b="1" dirty="0"/>
+              <a:rPr lang="en-US" altLang="en-US" sz="1800" b="1" dirty="0"/>
               <a:t>(model, data, fixed, random, groups, start, correlation, weights, subset, </a:t>
             </a:r>
             <a:r>
-              <a:rPr lang="en-US" altLang="en-US" sz="1600" b="1" dirty="0" err="1"/>
+              <a:rPr lang="en-US" altLang="en-US" sz="1800" b="1" dirty="0" err="1"/>
               <a:t>method,na.action,naPattern</a:t>
             </a:r>
             <a:r>
-              <a:rPr lang="en-US" altLang="en-US" sz="1600" b="1" dirty="0"/>
+              <a:rPr lang="en-US" altLang="en-US" sz="1800" b="1" dirty="0"/>
               <a:t>, </a:t>
             </a:r>
             <a:r>
-              <a:rPr lang="en-US" altLang="en-US" sz="1600" b="1" dirty="0" err="1"/>
+              <a:rPr lang="en-US" altLang="en-US" sz="1800" b="1" dirty="0" err="1"/>
               <a:t>control,verbose</a:t>
             </a:r>
             <a:r>
-              <a:rPr lang="en-US" altLang="en-US" sz="1600" b="1" dirty="0"/>
+              <a:rPr lang="en-US" altLang="en-US" sz="1800" b="1" dirty="0"/>
               <a:t>) </a:t>
             </a:r>
           </a:p>
@@ -26422,6 +26750,267 @@
               <a:defRPr/>
             </a:pPr>
             <a:endParaRPr lang="en-US" altLang="en-US" sz="2400" dirty="0"/>
+          </a:p>
+        </p:txBody>
+      </p:sp>
+      <p:sp>
+        <p:nvSpPr>
+          <p:cNvPr id="2" name="Rectangle 3">
+            <a:extLst>
+              <a:ext uri="{FF2B5EF4-FFF2-40B4-BE49-F238E27FC236}">
+                <a16:creationId xmlns:a16="http://schemas.microsoft.com/office/drawing/2014/main" id="{1865D661-838B-E398-EE2C-BEF2E70C9DC8}"/>
+              </a:ext>
+            </a:extLst>
+          </p:cNvPr>
+          <p:cNvSpPr txBox="1">
+            <a:spLocks noChangeArrowheads="1"/>
+          </p:cNvSpPr>
+          <p:nvPr/>
+        </p:nvSpPr>
+        <p:spPr>
+          <a:xfrm>
+            <a:off x="149086" y="4121427"/>
+            <a:ext cx="12042913" cy="2808325"/>
+          </a:xfrm>
+          <a:prstGeom prst="rect">
+            <a:avLst/>
+          </a:prstGeom>
+        </p:spPr>
+        <p:txBody>
+          <a:bodyPr vert="horz" lIns="91440" tIns="45720" rIns="91440" bIns="45720" rtlCol="0">
+            <a:normAutofit/>
+          </a:bodyPr>
+          <a:lstStyle>
+            <a:lvl1pPr marL="228600" indent="-228600" algn="l" defTabSz="914400" rtl="0" eaLnBrk="1" latinLnBrk="0" hangingPunct="1">
+              <a:lnSpc>
+                <a:spcPct val="90000"/>
+              </a:lnSpc>
+              <a:spcBef>
+                <a:spcPts val="1000"/>
+              </a:spcBef>
+              <a:buFont typeface="Arial"/>
+              <a:buChar char="•"/>
+              <a:defRPr sz="2800" kern="1200">
+                <a:solidFill>
+                  <a:schemeClr val="tx1"/>
+                </a:solidFill>
+                <a:latin typeface="+mn-lt"/>
+                <a:ea typeface="+mn-ea"/>
+                <a:cs typeface="+mn-cs"/>
+              </a:defRPr>
+            </a:lvl1pPr>
+            <a:lvl2pPr marL="685800" indent="-228600" algn="l" defTabSz="914400" rtl="0" eaLnBrk="1" latinLnBrk="0" hangingPunct="1">
+              <a:lnSpc>
+                <a:spcPct val="90000"/>
+              </a:lnSpc>
+              <a:spcBef>
+                <a:spcPts val="500"/>
+              </a:spcBef>
+              <a:buFont typeface="Arial"/>
+              <a:buChar char="•"/>
+              <a:defRPr sz="2400" kern="1200">
+                <a:solidFill>
+                  <a:schemeClr val="tx1"/>
+                </a:solidFill>
+                <a:latin typeface="+mn-lt"/>
+                <a:ea typeface="+mn-ea"/>
+                <a:cs typeface="+mn-cs"/>
+              </a:defRPr>
+            </a:lvl2pPr>
+            <a:lvl3pPr marL="1143000" indent="-228600" algn="l" defTabSz="914400" rtl="0" eaLnBrk="1" latinLnBrk="0" hangingPunct="1">
+              <a:lnSpc>
+                <a:spcPct val="90000"/>
+              </a:lnSpc>
+              <a:spcBef>
+                <a:spcPts val="500"/>
+              </a:spcBef>
+              <a:buFont typeface="Arial"/>
+              <a:buChar char="•"/>
+              <a:defRPr sz="2000" kern="1200">
+                <a:solidFill>
+                  <a:schemeClr val="tx1"/>
+                </a:solidFill>
+                <a:latin typeface="+mn-lt"/>
+                <a:ea typeface="+mn-ea"/>
+                <a:cs typeface="+mn-cs"/>
+              </a:defRPr>
+            </a:lvl3pPr>
+            <a:lvl4pPr marL="1600200" indent="-228600" algn="l" defTabSz="914400" rtl="0" eaLnBrk="1" latinLnBrk="0" hangingPunct="1">
+              <a:lnSpc>
+                <a:spcPct val="90000"/>
+              </a:lnSpc>
+              <a:spcBef>
+                <a:spcPts val="500"/>
+              </a:spcBef>
+              <a:buFont typeface="Arial"/>
+              <a:buChar char="•"/>
+              <a:defRPr sz="1800" kern="1200">
+                <a:solidFill>
+                  <a:schemeClr val="tx1"/>
+                </a:solidFill>
+                <a:latin typeface="+mn-lt"/>
+                <a:ea typeface="+mn-ea"/>
+                <a:cs typeface="+mn-cs"/>
+              </a:defRPr>
+            </a:lvl4pPr>
+            <a:lvl5pPr marL="2057400" indent="-228600" algn="l" defTabSz="914400" rtl="0" eaLnBrk="1" latinLnBrk="0" hangingPunct="1">
+              <a:lnSpc>
+                <a:spcPct val="90000"/>
+              </a:lnSpc>
+              <a:spcBef>
+                <a:spcPts val="500"/>
+              </a:spcBef>
+              <a:buFont typeface="Arial"/>
+              <a:buChar char="•"/>
+              <a:defRPr sz="1800" kern="1200">
+                <a:solidFill>
+                  <a:schemeClr val="tx1"/>
+                </a:solidFill>
+                <a:latin typeface="+mn-lt"/>
+                <a:ea typeface="+mn-ea"/>
+                <a:cs typeface="+mn-cs"/>
+              </a:defRPr>
+            </a:lvl5pPr>
+            <a:lvl6pPr marL="2514600" indent="-228600" algn="l" defTabSz="914400" rtl="0" eaLnBrk="1" latinLnBrk="0" hangingPunct="1">
+              <a:lnSpc>
+                <a:spcPct val="90000"/>
+              </a:lnSpc>
+              <a:spcBef>
+                <a:spcPts val="500"/>
+              </a:spcBef>
+              <a:buFont typeface="Arial"/>
+              <a:buChar char="•"/>
+              <a:defRPr sz="1800" kern="1200">
+                <a:solidFill>
+                  <a:schemeClr val="tx1"/>
+                </a:solidFill>
+                <a:latin typeface="+mn-lt"/>
+                <a:ea typeface="+mn-ea"/>
+                <a:cs typeface="+mn-cs"/>
+              </a:defRPr>
+            </a:lvl6pPr>
+            <a:lvl7pPr marL="2971800" indent="-228600" algn="l" defTabSz="914400" rtl="0" eaLnBrk="1" latinLnBrk="0" hangingPunct="1">
+              <a:lnSpc>
+                <a:spcPct val="90000"/>
+              </a:lnSpc>
+              <a:spcBef>
+                <a:spcPts val="500"/>
+              </a:spcBef>
+              <a:buFont typeface="Arial"/>
+              <a:buChar char="•"/>
+              <a:defRPr sz="1800" kern="1200">
+                <a:solidFill>
+                  <a:schemeClr val="tx1"/>
+                </a:solidFill>
+                <a:latin typeface="+mn-lt"/>
+                <a:ea typeface="+mn-ea"/>
+                <a:cs typeface="+mn-cs"/>
+              </a:defRPr>
+            </a:lvl7pPr>
+            <a:lvl8pPr marL="3429000" indent="-228600" algn="l" defTabSz="914400" rtl="0" eaLnBrk="1" latinLnBrk="0" hangingPunct="1">
+              <a:lnSpc>
+                <a:spcPct val="90000"/>
+              </a:lnSpc>
+              <a:spcBef>
+                <a:spcPts val="500"/>
+              </a:spcBef>
+              <a:buFont typeface="Arial"/>
+              <a:buChar char="•"/>
+              <a:defRPr sz="1800" kern="1200">
+                <a:solidFill>
+                  <a:schemeClr val="tx1"/>
+                </a:solidFill>
+                <a:latin typeface="+mn-lt"/>
+                <a:ea typeface="+mn-ea"/>
+                <a:cs typeface="+mn-cs"/>
+              </a:defRPr>
+            </a:lvl8pPr>
+            <a:lvl9pPr marL="3886200" indent="-228600" algn="l" defTabSz="914400" rtl="0" eaLnBrk="1" latinLnBrk="0" hangingPunct="1">
+              <a:lnSpc>
+                <a:spcPct val="90000"/>
+              </a:lnSpc>
+              <a:spcBef>
+                <a:spcPts val="500"/>
+              </a:spcBef>
+              <a:buFont typeface="Arial"/>
+              <a:buChar char="•"/>
+              <a:defRPr sz="1800" kern="1200">
+                <a:solidFill>
+                  <a:schemeClr val="tx1"/>
+                </a:solidFill>
+                <a:latin typeface="+mn-lt"/>
+                <a:ea typeface="+mn-ea"/>
+                <a:cs typeface="+mn-cs"/>
+              </a:defRPr>
+            </a:lvl9pPr>
+          </a:lstStyle>
+          <a:p>
+            <a:pPr>
+              <a:defRPr/>
+            </a:pPr>
+            <a:endParaRPr lang="en-US" altLang="en-US" sz="2400" dirty="0">
+              <a:solidFill>
+                <a:schemeClr val="hlink"/>
+              </a:solidFill>
+            </a:endParaRPr>
+          </a:p>
+          <a:p>
+            <a:pPr>
+              <a:defRPr/>
+            </a:pPr>
+            <a:endParaRPr lang="en-US" altLang="en-US" sz="2400" dirty="0">
+              <a:solidFill>
+                <a:schemeClr val="hlink"/>
+              </a:solidFill>
+            </a:endParaRPr>
+          </a:p>
+          <a:p>
+            <a:pPr>
+              <a:defRPr/>
+            </a:pPr>
+            <a:r>
+              <a:rPr lang="en-US" altLang="en-US" sz="2400" dirty="0">
+                <a:solidFill>
+                  <a:schemeClr val="hlink"/>
+                </a:solidFill>
+              </a:rPr>
+              <a:t>random</a:t>
+            </a:r>
+            <a:r>
+              <a:rPr lang="en-US" altLang="en-US" sz="2400" dirty="0"/>
+              <a:t>: “random=c(rnd1 ~ var1, rnd1 ~ 1)”. Leaving out a “random” specification implies all fixed effects have an associated random effect.</a:t>
+            </a:r>
+          </a:p>
+          <a:p>
+            <a:pPr>
+              <a:defRPr/>
+            </a:pPr>
+            <a:r>
+              <a:rPr lang="en-US" altLang="en-US" sz="2400" dirty="0">
+                <a:solidFill>
+                  <a:schemeClr val="hlink"/>
+                </a:solidFill>
+              </a:rPr>
+              <a:t>start</a:t>
+            </a:r>
+            <a:r>
+              <a:rPr lang="en-US" altLang="en-US" sz="2400" dirty="0"/>
+              <a:t>: “start = c(fix1=x1,fix2=x2,..)” – the initial values for the fixed parameters of the model.</a:t>
+            </a:r>
+          </a:p>
+          <a:p>
+            <a:pPr marL="0" indent="0">
+              <a:buFont typeface="Arial"/>
+              <a:buNone/>
+              <a:defRPr/>
+            </a:pPr>
+            <a:endParaRPr lang="en-US" altLang="en-US" sz="2400" dirty="0"/>
+          </a:p>
+          <a:p>
+            <a:pPr>
+              <a:defRPr/>
+            </a:pPr>
+            <a:endParaRPr lang="en-US" altLang="en-US" sz="3600" dirty="0"/>
           </a:p>
         </p:txBody>
       </p:sp>
@@ -26490,7 +27079,12 @@
             <p:ph type="body" idx="1"/>
           </p:nvPr>
         </p:nvSpPr>
-        <p:spPr/>
+        <p:spPr>
+          <a:xfrm>
+            <a:off x="838200" y="2024405"/>
+            <a:ext cx="10515600" cy="4351338"/>
+          </a:xfrm>
+        </p:spPr>
         <p:txBody>
           <a:bodyPr/>
           <a:lstStyle/>
@@ -26498,7 +27092,7 @@
             <a:pPr eaLnBrk="1" hangingPunct="1">
               <a:defRPr/>
             </a:pPr>
-            <a:endParaRPr lang="en-US" altLang="en-US" sz="2400">
+            <a:endParaRPr lang="en-US" altLang="en-US" sz="2400" dirty="0">
               <a:solidFill>
                 <a:schemeClr val="hlink"/>
               </a:solidFill>
@@ -26508,7 +27102,7 @@
             <a:pPr eaLnBrk="1" hangingPunct="1">
               <a:defRPr/>
             </a:pPr>
-            <a:endParaRPr lang="en-US" altLang="en-US" sz="2400">
+            <a:endParaRPr lang="en-US" altLang="en-US" sz="2400" dirty="0">
               <a:solidFill>
                 <a:schemeClr val="hlink"/>
               </a:solidFill>
@@ -26519,7 +27113,7 @@
               <a:defRPr/>
             </a:pPr>
             <a:r>
-              <a:rPr lang="en-US" altLang="en-US" sz="2400">
+              <a:rPr lang="en-US" altLang="en-US" sz="2400" dirty="0">
                 <a:solidFill>
                   <a:schemeClr val="hlink"/>
                 </a:solidFill>
@@ -26527,7 +27121,7 @@
               <a:t>random</a:t>
             </a:r>
             <a:r>
-              <a:rPr lang="en-US" altLang="en-US" sz="2400"/>
+              <a:rPr lang="en-US" altLang="en-US" sz="2400" dirty="0"/>
               <a:t>: “random=c(rnd1 ~ var1, rnd1 ~ 1)”. Leaving out a “random” specification implies all fixed effects have an associated random effect.</a:t>
             </a:r>
           </a:p>
@@ -26536,7 +27130,7 @@
               <a:defRPr/>
             </a:pPr>
             <a:r>
-              <a:rPr lang="en-US" altLang="en-US" sz="2400">
+              <a:rPr lang="en-US" altLang="en-US" sz="2400" dirty="0">
                 <a:solidFill>
                   <a:schemeClr val="hlink"/>
                 </a:solidFill>
@@ -26544,36 +27138,22 @@
               <a:t>start</a:t>
             </a:r>
             <a:r>
-              <a:rPr lang="en-US" altLang="en-US" sz="2400"/>
+              <a:rPr lang="en-US" altLang="en-US" sz="2400" dirty="0"/>
               <a:t>: “start = c(fix1=x1,fix2=x2,..)” – the initial values for the fixed parameters of the model.</a:t>
             </a:r>
+          </a:p>
+          <a:p>
+            <a:pPr marL="0" indent="0" eaLnBrk="1" hangingPunct="1">
+              <a:buNone/>
+              <a:defRPr/>
+            </a:pPr>
+            <a:endParaRPr lang="en-US" altLang="en-US" sz="2400" dirty="0"/>
           </a:p>
           <a:p>
             <a:pPr eaLnBrk="1" hangingPunct="1">
               <a:defRPr/>
             </a:pPr>
-            <a:endParaRPr lang="en-US" altLang="en-US" sz="2400"/>
-          </a:p>
-          <a:p>
-            <a:pPr eaLnBrk="1" hangingPunct="1">
-              <a:defRPr/>
-            </a:pPr>
-            <a:r>
-              <a:rPr lang="en-US" altLang="en-US" sz="2400"/>
-              <a:t>Be wary of using NLME to make predictions when some of the parameters are non-linear.</a:t>
-            </a:r>
-          </a:p>
-          <a:p>
-            <a:pPr eaLnBrk="1" hangingPunct="1">
-              <a:defRPr/>
-            </a:pPr>
-            <a:endParaRPr lang="en-US" altLang="en-US" sz="2400"/>
-          </a:p>
-          <a:p>
-            <a:pPr eaLnBrk="1" hangingPunct="1">
-              <a:defRPr/>
-            </a:pPr>
-            <a:endParaRPr lang="en-US" altLang="en-US" sz="3600"/>
+            <a:endParaRPr lang="en-US" altLang="en-US" sz="3600" dirty="0"/>
           </a:p>
         </p:txBody>
       </p:sp>
@@ -26834,602 +27414,6 @@
 </file>
 
 <file path=ppt/slides/slide58.xml><?xml version="1.0" encoding="utf-8"?>
-<p:sld xmlns:a="http://schemas.openxmlformats.org/drawingml/2006/main" xmlns:r="http://schemas.openxmlformats.org/officeDocument/2006/relationships" xmlns:p="http://schemas.openxmlformats.org/presentationml/2006/main">
-  <p:cSld>
-    <p:spTree>
-      <p:nvGrpSpPr>
-        <p:cNvPr id="1" name=""/>
-        <p:cNvGrpSpPr/>
-        <p:nvPr/>
-      </p:nvGrpSpPr>
-      <p:grpSpPr>
-        <a:xfrm>
-          <a:off x="0" y="0"/>
-          <a:ext cx="0" cy="0"/>
-          <a:chOff x="0" y="0"/>
-          <a:chExt cx="0" cy="0"/>
-        </a:xfrm>
-      </p:grpSpPr>
-      <p:sp>
-        <p:nvSpPr>
-          <p:cNvPr id="59394" name="Rectangle 2"/>
-          <p:cNvSpPr>
-            <a:spLocks noGrp="1" noChangeArrowheads="1"/>
-          </p:cNvSpPr>
-          <p:nvPr>
-            <p:ph type="title"/>
-          </p:nvPr>
-        </p:nvSpPr>
-        <p:spPr/>
-        <p:txBody>
-          <a:bodyPr/>
-          <a:lstStyle/>
-          <a:p>
-            <a:pPr algn="ctr" eaLnBrk="1" hangingPunct="1">
-              <a:defRPr/>
-            </a:pPr>
-            <a:r>
-              <a:rPr lang="en-US" altLang="en-US"/>
-              <a:t>The NLME Function-III</a:t>
-            </a:r>
-            <a:endParaRPr lang="en-AU" altLang="en-US"/>
-          </a:p>
-        </p:txBody>
-      </p:sp>
-      <p:sp>
-        <p:nvSpPr>
-          <p:cNvPr id="59395" name="Rectangle 3"/>
-          <p:cNvSpPr>
-            <a:spLocks noGrp="1" noChangeArrowheads="1"/>
-          </p:cNvSpPr>
-          <p:nvPr>
-            <p:ph type="body" idx="1"/>
-          </p:nvPr>
-        </p:nvSpPr>
-        <p:spPr>
-          <a:xfrm>
-            <a:off x="2743200" y="3657601"/>
-            <a:ext cx="3124200" cy="2474913"/>
-          </a:xfrm>
-        </p:spPr>
-        <p:txBody>
-          <a:bodyPr/>
-          <a:lstStyle/>
-          <a:p>
-            <a:pPr eaLnBrk="1" hangingPunct="1">
-              <a:defRPr/>
-            </a:pPr>
-            <a:r>
-              <a:rPr lang="en-AU" altLang="en-US"/>
-              <a:t>update</a:t>
-            </a:r>
-          </a:p>
-          <a:p>
-            <a:pPr eaLnBrk="1" hangingPunct="1">
-              <a:defRPr/>
-            </a:pPr>
-            <a:r>
-              <a:rPr lang="en-AU" altLang="en-US"/>
-              <a:t>logLik</a:t>
-            </a:r>
-          </a:p>
-          <a:p>
-            <a:pPr eaLnBrk="1" hangingPunct="1">
-              <a:defRPr/>
-            </a:pPr>
-            <a:r>
-              <a:rPr lang="en-AU" altLang="en-US"/>
-              <a:t>plot</a:t>
-            </a:r>
-          </a:p>
-          <a:p>
-            <a:pPr eaLnBrk="1" hangingPunct="1">
-              <a:defRPr/>
-            </a:pPr>
-            <a:r>
-              <a:rPr lang="en-AU" altLang="en-US"/>
-              <a:t>predict</a:t>
-            </a:r>
-          </a:p>
-          <a:p>
-            <a:pPr eaLnBrk="1" hangingPunct="1">
-              <a:defRPr/>
-            </a:pPr>
-            <a:endParaRPr lang="en-AU" altLang="en-US"/>
-          </a:p>
-        </p:txBody>
-      </p:sp>
-      <p:sp>
-        <p:nvSpPr>
-          <p:cNvPr id="98307" name="Rectangle 4"/>
-          <p:cNvSpPr>
-            <a:spLocks noChangeArrowheads="1"/>
-          </p:cNvSpPr>
-          <p:nvPr/>
-        </p:nvSpPr>
-        <p:spPr bwMode="auto">
-          <a:xfrm>
-            <a:off x="2057401" y="2209801"/>
-            <a:ext cx="8352799" cy="904863"/>
-          </a:xfrm>
-          <a:prstGeom prst="rect">
-            <a:avLst/>
-          </a:prstGeom>
-          <a:noFill/>
-          <a:ln>
-            <a:noFill/>
-          </a:ln>
-          <a:extLst>
-            <a:ext uri="{909E8E84-426E-40DD-AFC4-6F175D3DCCD1}">
-              <a14:hiddenFill xmlns:a14="http://schemas.microsoft.com/office/drawing/2010/main">
-                <a:solidFill>
-                  <a:srgbClr val="FFFFFF"/>
-                </a:solidFill>
-              </a14:hiddenFill>
-            </a:ext>
-            <a:ext uri="{91240B29-F687-4F45-9708-019B960494DF}">
-              <a14:hiddenLine xmlns:a14="http://schemas.microsoft.com/office/drawing/2010/main" w="9525">
-                <a:solidFill>
-                  <a:srgbClr val="000000"/>
-                </a:solidFill>
-                <a:miter lim="800000"/>
-                <a:headEnd/>
-                <a:tailEnd/>
-              </a14:hiddenLine>
-            </a:ext>
-          </a:extLst>
-        </p:spPr>
-        <p:txBody>
-          <a:bodyPr wrap="none">
-            <a:spAutoFit/>
-          </a:bodyPr>
-          <a:lstStyle>
-            <a:lvl1pPr>
-              <a:spcBef>
-                <a:spcPct val="20000"/>
-              </a:spcBef>
-              <a:buClr>
-                <a:schemeClr val="folHlink"/>
-              </a:buClr>
-              <a:buSzPct val="60000"/>
-              <a:buFont typeface="Wingdings" charset="2"/>
-              <a:buChar char="n"/>
-              <a:defRPr sz="3200">
-                <a:solidFill>
-                  <a:schemeClr val="tx1"/>
-                </a:solidFill>
-                <a:latin typeface="Tahoma" charset="0"/>
-              </a:defRPr>
-            </a:lvl1pPr>
-            <a:lvl2pPr marL="742950" indent="-285750">
-              <a:spcBef>
-                <a:spcPct val="20000"/>
-              </a:spcBef>
-              <a:buClr>
-                <a:schemeClr val="hlink"/>
-              </a:buClr>
-              <a:buSzPct val="55000"/>
-              <a:buFont typeface="Wingdings" charset="2"/>
-              <a:buChar char="n"/>
-              <a:defRPr sz="2800">
-                <a:solidFill>
-                  <a:schemeClr val="tx1"/>
-                </a:solidFill>
-                <a:latin typeface="Tahoma" charset="0"/>
-              </a:defRPr>
-            </a:lvl2pPr>
-            <a:lvl3pPr marL="1143000" indent="-228600">
-              <a:spcBef>
-                <a:spcPct val="20000"/>
-              </a:spcBef>
-              <a:buClr>
-                <a:schemeClr val="folHlink"/>
-              </a:buClr>
-              <a:buSzPct val="50000"/>
-              <a:buFont typeface="Wingdings" charset="2"/>
-              <a:buChar char="n"/>
-              <a:defRPr sz="2400">
-                <a:solidFill>
-                  <a:schemeClr val="tx1"/>
-                </a:solidFill>
-                <a:latin typeface="Tahoma" charset="0"/>
-              </a:defRPr>
-            </a:lvl3pPr>
-            <a:lvl4pPr marL="1600200" indent="-228600">
-              <a:spcBef>
-                <a:spcPct val="20000"/>
-              </a:spcBef>
-              <a:buClr>
-                <a:schemeClr val="accent2"/>
-              </a:buClr>
-              <a:buSzPct val="55000"/>
-              <a:buFont typeface="Wingdings" charset="2"/>
-              <a:buChar char="n"/>
-              <a:defRPr sz="2000">
-                <a:solidFill>
-                  <a:schemeClr val="tx1"/>
-                </a:solidFill>
-                <a:latin typeface="Tahoma" charset="0"/>
-              </a:defRPr>
-            </a:lvl4pPr>
-            <a:lvl5pPr marL="2057400" indent="-228600">
-              <a:spcBef>
-                <a:spcPct val="20000"/>
-              </a:spcBef>
-              <a:buClr>
-                <a:schemeClr val="accent1"/>
-              </a:buClr>
-              <a:buSzPct val="50000"/>
-              <a:buFont typeface="Wingdings" charset="2"/>
-              <a:buChar char="n"/>
-              <a:defRPr sz="2000">
-                <a:solidFill>
-                  <a:schemeClr val="tx1"/>
-                </a:solidFill>
-                <a:latin typeface="Tahoma" charset="0"/>
-              </a:defRPr>
-            </a:lvl5pPr>
-            <a:lvl6pPr marL="2514600" indent="-228600" eaLnBrk="0" fontAlgn="base" hangingPunct="0">
-              <a:spcBef>
-                <a:spcPct val="20000"/>
-              </a:spcBef>
-              <a:spcAft>
-                <a:spcPct val="0"/>
-              </a:spcAft>
-              <a:buClr>
-                <a:schemeClr val="accent1"/>
-              </a:buClr>
-              <a:buSzPct val="50000"/>
-              <a:buFont typeface="Wingdings" charset="2"/>
-              <a:buChar char="n"/>
-              <a:defRPr sz="2000">
-                <a:solidFill>
-                  <a:schemeClr val="tx1"/>
-                </a:solidFill>
-                <a:latin typeface="Tahoma" charset="0"/>
-              </a:defRPr>
-            </a:lvl6pPr>
-            <a:lvl7pPr marL="2971800" indent="-228600" eaLnBrk="0" fontAlgn="base" hangingPunct="0">
-              <a:spcBef>
-                <a:spcPct val="20000"/>
-              </a:spcBef>
-              <a:spcAft>
-                <a:spcPct val="0"/>
-              </a:spcAft>
-              <a:buClr>
-                <a:schemeClr val="accent1"/>
-              </a:buClr>
-              <a:buSzPct val="50000"/>
-              <a:buFont typeface="Wingdings" charset="2"/>
-              <a:buChar char="n"/>
-              <a:defRPr sz="2000">
-                <a:solidFill>
-                  <a:schemeClr val="tx1"/>
-                </a:solidFill>
-                <a:latin typeface="Tahoma" charset="0"/>
-              </a:defRPr>
-            </a:lvl7pPr>
-            <a:lvl8pPr marL="3429000" indent="-228600" eaLnBrk="0" fontAlgn="base" hangingPunct="0">
-              <a:spcBef>
-                <a:spcPct val="20000"/>
-              </a:spcBef>
-              <a:spcAft>
-                <a:spcPct val="0"/>
-              </a:spcAft>
-              <a:buClr>
-                <a:schemeClr val="accent1"/>
-              </a:buClr>
-              <a:buSzPct val="50000"/>
-              <a:buFont typeface="Wingdings" charset="2"/>
-              <a:buChar char="n"/>
-              <a:defRPr sz="2000">
-                <a:solidFill>
-                  <a:schemeClr val="tx1"/>
-                </a:solidFill>
-                <a:latin typeface="Tahoma" charset="0"/>
-              </a:defRPr>
-            </a:lvl8pPr>
-            <a:lvl9pPr marL="3886200" indent="-228600" eaLnBrk="0" fontAlgn="base" hangingPunct="0">
-              <a:spcBef>
-                <a:spcPct val="20000"/>
-              </a:spcBef>
-              <a:spcAft>
-                <a:spcPct val="0"/>
-              </a:spcAft>
-              <a:buClr>
-                <a:schemeClr val="accent1"/>
-              </a:buClr>
-              <a:buSzPct val="50000"/>
-              <a:buFont typeface="Wingdings" charset="2"/>
-              <a:buChar char="n"/>
-              <a:defRPr sz="2000">
-                <a:solidFill>
-                  <a:schemeClr val="tx1"/>
-                </a:solidFill>
-                <a:latin typeface="Tahoma" charset="0"/>
-              </a:defRPr>
-            </a:lvl9pPr>
-          </a:lstStyle>
-          <a:p>
-            <a:pPr eaLnBrk="1" hangingPunct="1">
-              <a:buFont typeface="Wingdings" charset="2"/>
-              <a:buNone/>
-            </a:pPr>
-            <a:r>
-              <a:rPr lang="en-AU" altLang="en-US" sz="2400"/>
-              <a:t>You can use many of the functions defined for linear models</a:t>
-            </a:r>
-          </a:p>
-          <a:p>
-            <a:pPr eaLnBrk="1" hangingPunct="1">
-              <a:buFont typeface="Wingdings" charset="2"/>
-              <a:buNone/>
-            </a:pPr>
-            <a:r>
-              <a:rPr lang="en-AU" altLang="en-US" sz="2400"/>
-              <a:t> with nlme, e.g.:</a:t>
-            </a:r>
-          </a:p>
-        </p:txBody>
-      </p:sp>
-      <p:sp>
-        <p:nvSpPr>
-          <p:cNvPr id="98308" name="Rectangle 5"/>
-          <p:cNvSpPr>
-            <a:spLocks noChangeArrowheads="1"/>
-          </p:cNvSpPr>
-          <p:nvPr/>
-        </p:nvSpPr>
-        <p:spPr bwMode="auto">
-          <a:xfrm>
-            <a:off x="6629400" y="3657601"/>
-            <a:ext cx="3124200" cy="2474913"/>
-          </a:xfrm>
-          <a:prstGeom prst="rect">
-            <a:avLst/>
-          </a:prstGeom>
-          <a:noFill/>
-          <a:ln>
-            <a:noFill/>
-          </a:ln>
-          <a:extLst>
-            <a:ext uri="{909E8E84-426E-40DD-AFC4-6F175D3DCCD1}">
-              <a14:hiddenFill xmlns:a14="http://schemas.microsoft.com/office/drawing/2010/main">
-                <a:solidFill>
-                  <a:srgbClr val="FFFFFF"/>
-                </a:solidFill>
-              </a14:hiddenFill>
-            </a:ext>
-            <a:ext uri="{91240B29-F687-4F45-9708-019B960494DF}">
-              <a14:hiddenLine xmlns:a14="http://schemas.microsoft.com/office/drawing/2010/main" w="9525">
-                <a:solidFill>
-                  <a:srgbClr val="000000"/>
-                </a:solidFill>
-                <a:miter lim="800000"/>
-                <a:headEnd/>
-                <a:tailEnd/>
-              </a14:hiddenLine>
-            </a:ext>
-          </a:extLst>
-        </p:spPr>
-        <p:txBody>
-          <a:bodyPr/>
-          <a:lstStyle>
-            <a:lvl1pPr marL="342900" indent="-342900">
-              <a:spcBef>
-                <a:spcPct val="20000"/>
-              </a:spcBef>
-              <a:buClr>
-                <a:schemeClr val="folHlink"/>
-              </a:buClr>
-              <a:buSzPct val="60000"/>
-              <a:buFont typeface="Wingdings" charset="2"/>
-              <a:buChar char="n"/>
-              <a:defRPr sz="3200">
-                <a:solidFill>
-                  <a:schemeClr val="tx1"/>
-                </a:solidFill>
-                <a:latin typeface="Tahoma" charset="0"/>
-              </a:defRPr>
-            </a:lvl1pPr>
-            <a:lvl2pPr marL="742950" indent="-285750">
-              <a:spcBef>
-                <a:spcPct val="20000"/>
-              </a:spcBef>
-              <a:buClr>
-                <a:schemeClr val="hlink"/>
-              </a:buClr>
-              <a:buSzPct val="55000"/>
-              <a:buFont typeface="Wingdings" charset="2"/>
-              <a:buChar char="n"/>
-              <a:defRPr sz="2800">
-                <a:solidFill>
-                  <a:schemeClr val="tx1"/>
-                </a:solidFill>
-                <a:latin typeface="Tahoma" charset="0"/>
-              </a:defRPr>
-            </a:lvl2pPr>
-            <a:lvl3pPr marL="1143000" indent="-228600">
-              <a:spcBef>
-                <a:spcPct val="20000"/>
-              </a:spcBef>
-              <a:buClr>
-                <a:schemeClr val="folHlink"/>
-              </a:buClr>
-              <a:buSzPct val="50000"/>
-              <a:buFont typeface="Wingdings" charset="2"/>
-              <a:buChar char="n"/>
-              <a:defRPr sz="2400">
-                <a:solidFill>
-                  <a:schemeClr val="tx1"/>
-                </a:solidFill>
-                <a:latin typeface="Tahoma" charset="0"/>
-              </a:defRPr>
-            </a:lvl3pPr>
-            <a:lvl4pPr marL="1600200" indent="-228600">
-              <a:spcBef>
-                <a:spcPct val="20000"/>
-              </a:spcBef>
-              <a:buClr>
-                <a:schemeClr val="accent2"/>
-              </a:buClr>
-              <a:buSzPct val="55000"/>
-              <a:buFont typeface="Wingdings" charset="2"/>
-              <a:buChar char="n"/>
-              <a:defRPr sz="2000">
-                <a:solidFill>
-                  <a:schemeClr val="tx1"/>
-                </a:solidFill>
-                <a:latin typeface="Tahoma" charset="0"/>
-              </a:defRPr>
-            </a:lvl4pPr>
-            <a:lvl5pPr marL="2057400" indent="-228600">
-              <a:spcBef>
-                <a:spcPct val="20000"/>
-              </a:spcBef>
-              <a:buClr>
-                <a:schemeClr val="accent1"/>
-              </a:buClr>
-              <a:buSzPct val="50000"/>
-              <a:buFont typeface="Wingdings" charset="2"/>
-              <a:buChar char="n"/>
-              <a:defRPr sz="2000">
-                <a:solidFill>
-                  <a:schemeClr val="tx1"/>
-                </a:solidFill>
-                <a:latin typeface="Tahoma" charset="0"/>
-              </a:defRPr>
-            </a:lvl5pPr>
-            <a:lvl6pPr marL="2514600" indent="-228600" eaLnBrk="0" fontAlgn="base" hangingPunct="0">
-              <a:spcBef>
-                <a:spcPct val="20000"/>
-              </a:spcBef>
-              <a:spcAft>
-                <a:spcPct val="0"/>
-              </a:spcAft>
-              <a:buClr>
-                <a:schemeClr val="accent1"/>
-              </a:buClr>
-              <a:buSzPct val="50000"/>
-              <a:buFont typeface="Wingdings" charset="2"/>
-              <a:buChar char="n"/>
-              <a:defRPr sz="2000">
-                <a:solidFill>
-                  <a:schemeClr val="tx1"/>
-                </a:solidFill>
-                <a:latin typeface="Tahoma" charset="0"/>
-              </a:defRPr>
-            </a:lvl6pPr>
-            <a:lvl7pPr marL="2971800" indent="-228600" eaLnBrk="0" fontAlgn="base" hangingPunct="0">
-              <a:spcBef>
-                <a:spcPct val="20000"/>
-              </a:spcBef>
-              <a:spcAft>
-                <a:spcPct val="0"/>
-              </a:spcAft>
-              <a:buClr>
-                <a:schemeClr val="accent1"/>
-              </a:buClr>
-              <a:buSzPct val="50000"/>
-              <a:buFont typeface="Wingdings" charset="2"/>
-              <a:buChar char="n"/>
-              <a:defRPr sz="2000">
-                <a:solidFill>
-                  <a:schemeClr val="tx1"/>
-                </a:solidFill>
-                <a:latin typeface="Tahoma" charset="0"/>
-              </a:defRPr>
-            </a:lvl7pPr>
-            <a:lvl8pPr marL="3429000" indent="-228600" eaLnBrk="0" fontAlgn="base" hangingPunct="0">
-              <a:spcBef>
-                <a:spcPct val="20000"/>
-              </a:spcBef>
-              <a:spcAft>
-                <a:spcPct val="0"/>
-              </a:spcAft>
-              <a:buClr>
-                <a:schemeClr val="accent1"/>
-              </a:buClr>
-              <a:buSzPct val="50000"/>
-              <a:buFont typeface="Wingdings" charset="2"/>
-              <a:buChar char="n"/>
-              <a:defRPr sz="2000">
-                <a:solidFill>
-                  <a:schemeClr val="tx1"/>
-                </a:solidFill>
-                <a:latin typeface="Tahoma" charset="0"/>
-              </a:defRPr>
-            </a:lvl8pPr>
-            <a:lvl9pPr marL="3886200" indent="-228600" eaLnBrk="0" fontAlgn="base" hangingPunct="0">
-              <a:spcBef>
-                <a:spcPct val="20000"/>
-              </a:spcBef>
-              <a:spcAft>
-                <a:spcPct val="0"/>
-              </a:spcAft>
-              <a:buClr>
-                <a:schemeClr val="accent1"/>
-              </a:buClr>
-              <a:buSzPct val="50000"/>
-              <a:buFont typeface="Wingdings" charset="2"/>
-              <a:buChar char="n"/>
-              <a:defRPr sz="2000">
-                <a:solidFill>
-                  <a:schemeClr val="tx1"/>
-                </a:solidFill>
-                <a:latin typeface="Tahoma" charset="0"/>
-              </a:defRPr>
-            </a:lvl9pPr>
-          </a:lstStyle>
-          <a:p>
-            <a:pPr eaLnBrk="1" hangingPunct="1">
-              <a:lnSpc>
-                <a:spcPct val="90000"/>
-              </a:lnSpc>
-            </a:pPr>
-            <a:r>
-              <a:rPr lang="en-AU" altLang="en-US" sz="2800"/>
-              <a:t>intervals</a:t>
-            </a:r>
-          </a:p>
-          <a:p>
-            <a:pPr eaLnBrk="1" hangingPunct="1">
-              <a:lnSpc>
-                <a:spcPct val="90000"/>
-              </a:lnSpc>
-            </a:pPr>
-            <a:r>
-              <a:rPr lang="en-AU" altLang="en-US" sz="2800"/>
-              <a:t>anova</a:t>
-            </a:r>
-          </a:p>
-          <a:p>
-            <a:pPr eaLnBrk="1" hangingPunct="1">
-              <a:lnSpc>
-                <a:spcPct val="90000"/>
-              </a:lnSpc>
-            </a:pPr>
-            <a:r>
-              <a:rPr lang="en-AU" altLang="en-US" sz="2800"/>
-              <a:t>residuals</a:t>
-            </a:r>
-          </a:p>
-        </p:txBody>
-      </p:sp>
-    </p:spTree>
-    <p:extLst>
-      <p:ext uri="{BB962C8B-B14F-4D97-AF65-F5344CB8AC3E}">
-        <p14:creationId xmlns:p14="http://schemas.microsoft.com/office/powerpoint/2010/main" val="2013231695"/>
-      </p:ext>
-    </p:extLst>
-  </p:cSld>
-  <p:clrMapOvr>
-    <a:masterClrMapping/>
-  </p:clrMapOvr>
-</p:sld>
-</file>
-
-<file path=ppt/slides/slide59.xml><?xml version="1.0" encoding="utf-8"?>
 <p:sld xmlns:a="http://schemas.openxmlformats.org/drawingml/2006/main" xmlns:r="http://schemas.openxmlformats.org/officeDocument/2006/relationships" xmlns:p="http://schemas.openxmlformats.org/presentationml/2006/main">
   <p:cSld>
     <p:spTree>
@@ -28368,6 +28352,609 @@
     <p:extLst>
       <p:ext uri="{BB962C8B-B14F-4D97-AF65-F5344CB8AC3E}">
         <p14:creationId xmlns:p14="http://schemas.microsoft.com/office/powerpoint/2010/main" val="833737507"/>
+      </p:ext>
+    </p:extLst>
+  </p:cSld>
+  <p:clrMapOvr>
+    <a:masterClrMapping/>
+  </p:clrMapOvr>
+</p:sld>
+</file>
+
+<file path=ppt/slides/slide59.xml><?xml version="1.0" encoding="utf-8"?>
+<p:sld xmlns:a="http://schemas.openxmlformats.org/drawingml/2006/main" xmlns:r="http://schemas.openxmlformats.org/officeDocument/2006/relationships" xmlns:p="http://schemas.openxmlformats.org/presentationml/2006/main">
+  <p:cSld>
+    <p:spTree>
+      <p:nvGrpSpPr>
+        <p:cNvPr id="1" name=""/>
+        <p:cNvGrpSpPr/>
+        <p:nvPr/>
+      </p:nvGrpSpPr>
+      <p:grpSpPr>
+        <a:xfrm>
+          <a:off x="0" y="0"/>
+          <a:ext cx="0" cy="0"/>
+          <a:chOff x="0" y="0"/>
+          <a:chExt cx="0" cy="0"/>
+        </a:xfrm>
+      </p:grpSpPr>
+      <p:sp>
+        <p:nvSpPr>
+          <p:cNvPr id="40962" name="Rectangle 2"/>
+          <p:cNvSpPr>
+            <a:spLocks noGrp="1" noChangeArrowheads="1"/>
+          </p:cNvSpPr>
+          <p:nvPr>
+            <p:ph type="title"/>
+          </p:nvPr>
+        </p:nvSpPr>
+        <p:spPr/>
+        <p:txBody>
+          <a:bodyPr/>
+          <a:lstStyle/>
+          <a:p>
+            <a:pPr algn="ctr" eaLnBrk="1" hangingPunct="1">
+              <a:defRPr/>
+            </a:pPr>
+            <a:r>
+              <a:rPr lang="en-US" altLang="en-US" sz="4000"/>
+              <a:t>Fitting Length and Age Data</a:t>
+            </a:r>
+            <a:br>
+              <a:rPr lang="en-US" altLang="en-US" sz="4000"/>
+            </a:br>
+            <a:r>
+              <a:rPr lang="en-US" altLang="en-US" sz="4000"/>
+              <a:t>(Non-linear mixed model-II)</a:t>
+            </a:r>
+          </a:p>
+        </p:txBody>
+      </p:sp>
+      <p:sp>
+        <p:nvSpPr>
+          <p:cNvPr id="102402" name="Rectangle 6"/>
+          <p:cNvSpPr>
+            <a:spLocks noChangeArrowheads="1"/>
+          </p:cNvSpPr>
+          <p:nvPr/>
+        </p:nvSpPr>
+        <p:spPr bwMode="auto">
+          <a:xfrm>
+            <a:off x="1905000" y="2030412"/>
+            <a:ext cx="4960938" cy="396875"/>
+          </a:xfrm>
+          <a:prstGeom prst="rect">
+            <a:avLst/>
+          </a:prstGeom>
+          <a:noFill/>
+          <a:ln>
+            <a:noFill/>
+          </a:ln>
+          <a:extLst>
+            <a:ext uri="{909E8E84-426E-40DD-AFC4-6F175D3DCCD1}">
+              <a14:hiddenFill xmlns:a14="http://schemas.microsoft.com/office/drawing/2010/main">
+                <a:solidFill>
+                  <a:srgbClr val="FFFFFF"/>
+                </a:solidFill>
+              </a14:hiddenFill>
+            </a:ext>
+            <a:ext uri="{91240B29-F687-4F45-9708-019B960494DF}">
+              <a14:hiddenLine xmlns:a14="http://schemas.microsoft.com/office/drawing/2010/main" w="9525">
+                <a:solidFill>
+                  <a:srgbClr val="000000"/>
+                </a:solidFill>
+                <a:miter lim="800000"/>
+                <a:headEnd/>
+                <a:tailEnd/>
+              </a14:hiddenLine>
+            </a:ext>
+          </a:extLst>
+        </p:spPr>
+        <p:txBody>
+          <a:bodyPr wrap="none">
+            <a:spAutoFit/>
+          </a:bodyPr>
+          <a:lstStyle>
+            <a:lvl1pPr>
+              <a:spcBef>
+                <a:spcPct val="20000"/>
+              </a:spcBef>
+              <a:buClr>
+                <a:schemeClr val="folHlink"/>
+              </a:buClr>
+              <a:buSzPct val="60000"/>
+              <a:buFont typeface="Wingdings" charset="2"/>
+              <a:buChar char="n"/>
+              <a:defRPr sz="3200">
+                <a:solidFill>
+                  <a:schemeClr val="tx1"/>
+                </a:solidFill>
+                <a:latin typeface="Tahoma" charset="0"/>
+              </a:defRPr>
+            </a:lvl1pPr>
+            <a:lvl2pPr marL="742950" indent="-285750">
+              <a:spcBef>
+                <a:spcPct val="20000"/>
+              </a:spcBef>
+              <a:buClr>
+                <a:schemeClr val="hlink"/>
+              </a:buClr>
+              <a:buSzPct val="55000"/>
+              <a:buFont typeface="Wingdings" charset="2"/>
+              <a:buChar char="n"/>
+              <a:defRPr sz="2800">
+                <a:solidFill>
+                  <a:schemeClr val="tx1"/>
+                </a:solidFill>
+                <a:latin typeface="Tahoma" charset="0"/>
+              </a:defRPr>
+            </a:lvl2pPr>
+            <a:lvl3pPr marL="1143000" indent="-228600">
+              <a:spcBef>
+                <a:spcPct val="20000"/>
+              </a:spcBef>
+              <a:buClr>
+                <a:schemeClr val="folHlink"/>
+              </a:buClr>
+              <a:buSzPct val="50000"/>
+              <a:buFont typeface="Wingdings" charset="2"/>
+              <a:buChar char="n"/>
+              <a:defRPr sz="2400">
+                <a:solidFill>
+                  <a:schemeClr val="tx1"/>
+                </a:solidFill>
+                <a:latin typeface="Tahoma" charset="0"/>
+              </a:defRPr>
+            </a:lvl3pPr>
+            <a:lvl4pPr marL="1600200" indent="-228600">
+              <a:spcBef>
+                <a:spcPct val="20000"/>
+              </a:spcBef>
+              <a:buClr>
+                <a:schemeClr val="accent2"/>
+              </a:buClr>
+              <a:buSzPct val="55000"/>
+              <a:buFont typeface="Wingdings" charset="2"/>
+              <a:buChar char="n"/>
+              <a:defRPr sz="2000">
+                <a:solidFill>
+                  <a:schemeClr val="tx1"/>
+                </a:solidFill>
+                <a:latin typeface="Tahoma" charset="0"/>
+              </a:defRPr>
+            </a:lvl4pPr>
+            <a:lvl5pPr marL="2057400" indent="-228600">
+              <a:spcBef>
+                <a:spcPct val="20000"/>
+              </a:spcBef>
+              <a:buClr>
+                <a:schemeClr val="accent1"/>
+              </a:buClr>
+              <a:buSzPct val="50000"/>
+              <a:buFont typeface="Wingdings" charset="2"/>
+              <a:buChar char="n"/>
+              <a:defRPr sz="2000">
+                <a:solidFill>
+                  <a:schemeClr val="tx1"/>
+                </a:solidFill>
+                <a:latin typeface="Tahoma" charset="0"/>
+              </a:defRPr>
+            </a:lvl5pPr>
+            <a:lvl6pPr marL="2514600" indent="-228600" eaLnBrk="0" fontAlgn="base" hangingPunct="0">
+              <a:spcBef>
+                <a:spcPct val="20000"/>
+              </a:spcBef>
+              <a:spcAft>
+                <a:spcPct val="0"/>
+              </a:spcAft>
+              <a:buClr>
+                <a:schemeClr val="accent1"/>
+              </a:buClr>
+              <a:buSzPct val="50000"/>
+              <a:buFont typeface="Wingdings" charset="2"/>
+              <a:buChar char="n"/>
+              <a:defRPr sz="2000">
+                <a:solidFill>
+                  <a:schemeClr val="tx1"/>
+                </a:solidFill>
+                <a:latin typeface="Tahoma" charset="0"/>
+              </a:defRPr>
+            </a:lvl6pPr>
+            <a:lvl7pPr marL="2971800" indent="-228600" eaLnBrk="0" fontAlgn="base" hangingPunct="0">
+              <a:spcBef>
+                <a:spcPct val="20000"/>
+              </a:spcBef>
+              <a:spcAft>
+                <a:spcPct val="0"/>
+              </a:spcAft>
+              <a:buClr>
+                <a:schemeClr val="accent1"/>
+              </a:buClr>
+              <a:buSzPct val="50000"/>
+              <a:buFont typeface="Wingdings" charset="2"/>
+              <a:buChar char="n"/>
+              <a:defRPr sz="2000">
+                <a:solidFill>
+                  <a:schemeClr val="tx1"/>
+                </a:solidFill>
+                <a:latin typeface="Tahoma" charset="0"/>
+              </a:defRPr>
+            </a:lvl7pPr>
+            <a:lvl8pPr marL="3429000" indent="-228600" eaLnBrk="0" fontAlgn="base" hangingPunct="0">
+              <a:spcBef>
+                <a:spcPct val="20000"/>
+              </a:spcBef>
+              <a:spcAft>
+                <a:spcPct val="0"/>
+              </a:spcAft>
+              <a:buClr>
+                <a:schemeClr val="accent1"/>
+              </a:buClr>
+              <a:buSzPct val="50000"/>
+              <a:buFont typeface="Wingdings" charset="2"/>
+              <a:buChar char="n"/>
+              <a:defRPr sz="2000">
+                <a:solidFill>
+                  <a:schemeClr val="tx1"/>
+                </a:solidFill>
+                <a:latin typeface="Tahoma" charset="0"/>
+              </a:defRPr>
+            </a:lvl8pPr>
+            <a:lvl9pPr marL="3886200" indent="-228600" eaLnBrk="0" fontAlgn="base" hangingPunct="0">
+              <a:spcBef>
+                <a:spcPct val="20000"/>
+              </a:spcBef>
+              <a:spcAft>
+                <a:spcPct val="0"/>
+              </a:spcAft>
+              <a:buClr>
+                <a:schemeClr val="accent1"/>
+              </a:buClr>
+              <a:buSzPct val="50000"/>
+              <a:buFont typeface="Wingdings" charset="2"/>
+              <a:buChar char="n"/>
+              <a:defRPr sz="2000">
+                <a:solidFill>
+                  <a:schemeClr val="tx1"/>
+                </a:solidFill>
+                <a:latin typeface="Tahoma" charset="0"/>
+              </a:defRPr>
+            </a:lvl9pPr>
+          </a:lstStyle>
+          <a:p>
+            <a:pPr algn="ctr" eaLnBrk="1" hangingPunct="1">
+              <a:spcBef>
+                <a:spcPct val="0"/>
+              </a:spcBef>
+              <a:buClrTx/>
+              <a:buSzTx/>
+              <a:buFontTx/>
+              <a:buNone/>
+            </a:pPr>
+            <a:r>
+              <a:rPr lang="en-US" altLang="en-US" sz="2000" b="1"/>
+              <a:t>plot(lm2,Subject ~ </a:t>
+            </a:r>
+            <a:r>
+              <a:rPr lang="en-US" altLang="en-US" sz="2000" b="1" dirty="0" err="1"/>
+              <a:t>resid</a:t>
+            </a:r>
+            <a:r>
+              <a:rPr lang="en-US" altLang="en-US" sz="2000" b="1" dirty="0"/>
+              <a:t>(.),</a:t>
+            </a:r>
+            <a:r>
+              <a:rPr lang="en-US" altLang="en-US" sz="2000" b="1" dirty="0" err="1"/>
+              <a:t>abline</a:t>
+            </a:r>
+            <a:r>
+              <a:rPr lang="en-US" altLang="en-US" sz="2000" b="1" dirty="0"/>
+              <a:t>=0)</a:t>
+            </a:r>
+          </a:p>
+        </p:txBody>
+      </p:sp>
+      <p:sp>
+        <p:nvSpPr>
+          <p:cNvPr id="102403" name="Text Box 7"/>
+          <p:cNvSpPr txBox="1">
+            <a:spLocks noChangeArrowheads="1"/>
+          </p:cNvSpPr>
+          <p:nvPr/>
+        </p:nvSpPr>
+        <p:spPr bwMode="auto">
+          <a:xfrm>
+            <a:off x="1676401" y="3352801"/>
+            <a:ext cx="3300413" cy="701675"/>
+          </a:xfrm>
+          <a:prstGeom prst="rect">
+            <a:avLst/>
+          </a:prstGeom>
+          <a:noFill/>
+          <a:ln>
+            <a:noFill/>
+          </a:ln>
+          <a:extLst>
+            <a:ext uri="{909E8E84-426E-40DD-AFC4-6F175D3DCCD1}">
+              <a14:hiddenFill xmlns:a14="http://schemas.microsoft.com/office/drawing/2010/main">
+                <a:solidFill>
+                  <a:srgbClr val="FFFFFF"/>
+                </a:solidFill>
+              </a14:hiddenFill>
+            </a:ext>
+            <a:ext uri="{91240B29-F687-4F45-9708-019B960494DF}">
+              <a14:hiddenLine xmlns:a14="http://schemas.microsoft.com/office/drawing/2010/main" w="9525">
+                <a:solidFill>
+                  <a:srgbClr val="000000"/>
+                </a:solidFill>
+                <a:miter lim="800000"/>
+                <a:headEnd/>
+                <a:tailEnd/>
+              </a14:hiddenLine>
+            </a:ext>
+          </a:extLst>
+        </p:spPr>
+        <p:txBody>
+          <a:bodyPr wrap="none">
+            <a:spAutoFit/>
+          </a:bodyPr>
+          <a:lstStyle>
+            <a:lvl1pPr>
+              <a:spcBef>
+                <a:spcPct val="20000"/>
+              </a:spcBef>
+              <a:buClr>
+                <a:schemeClr val="folHlink"/>
+              </a:buClr>
+              <a:buSzPct val="60000"/>
+              <a:buFont typeface="Wingdings" charset="2"/>
+              <a:buChar char="n"/>
+              <a:defRPr sz="3200">
+                <a:solidFill>
+                  <a:schemeClr val="tx1"/>
+                </a:solidFill>
+                <a:latin typeface="Tahoma" charset="0"/>
+              </a:defRPr>
+            </a:lvl1pPr>
+            <a:lvl2pPr marL="742950" indent="-285750">
+              <a:spcBef>
+                <a:spcPct val="20000"/>
+              </a:spcBef>
+              <a:buClr>
+                <a:schemeClr val="hlink"/>
+              </a:buClr>
+              <a:buSzPct val="55000"/>
+              <a:buFont typeface="Wingdings" charset="2"/>
+              <a:buChar char="n"/>
+              <a:defRPr sz="2800">
+                <a:solidFill>
+                  <a:schemeClr val="tx1"/>
+                </a:solidFill>
+                <a:latin typeface="Tahoma" charset="0"/>
+              </a:defRPr>
+            </a:lvl2pPr>
+            <a:lvl3pPr marL="1143000" indent="-228600">
+              <a:spcBef>
+                <a:spcPct val="20000"/>
+              </a:spcBef>
+              <a:buClr>
+                <a:schemeClr val="folHlink"/>
+              </a:buClr>
+              <a:buSzPct val="50000"/>
+              <a:buFont typeface="Wingdings" charset="2"/>
+              <a:buChar char="n"/>
+              <a:defRPr sz="2400">
+                <a:solidFill>
+                  <a:schemeClr val="tx1"/>
+                </a:solidFill>
+                <a:latin typeface="Tahoma" charset="0"/>
+              </a:defRPr>
+            </a:lvl3pPr>
+            <a:lvl4pPr marL="1600200" indent="-228600">
+              <a:spcBef>
+                <a:spcPct val="20000"/>
+              </a:spcBef>
+              <a:buClr>
+                <a:schemeClr val="accent2"/>
+              </a:buClr>
+              <a:buSzPct val="55000"/>
+              <a:buFont typeface="Wingdings" charset="2"/>
+              <a:buChar char="n"/>
+              <a:defRPr sz="2000">
+                <a:solidFill>
+                  <a:schemeClr val="tx1"/>
+                </a:solidFill>
+                <a:latin typeface="Tahoma" charset="0"/>
+              </a:defRPr>
+            </a:lvl4pPr>
+            <a:lvl5pPr marL="2057400" indent="-228600">
+              <a:spcBef>
+                <a:spcPct val="20000"/>
+              </a:spcBef>
+              <a:buClr>
+                <a:schemeClr val="accent1"/>
+              </a:buClr>
+              <a:buSzPct val="50000"/>
+              <a:buFont typeface="Wingdings" charset="2"/>
+              <a:buChar char="n"/>
+              <a:defRPr sz="2000">
+                <a:solidFill>
+                  <a:schemeClr val="tx1"/>
+                </a:solidFill>
+                <a:latin typeface="Tahoma" charset="0"/>
+              </a:defRPr>
+            </a:lvl5pPr>
+            <a:lvl6pPr marL="2514600" indent="-228600" eaLnBrk="0" fontAlgn="base" hangingPunct="0">
+              <a:spcBef>
+                <a:spcPct val="20000"/>
+              </a:spcBef>
+              <a:spcAft>
+                <a:spcPct val="0"/>
+              </a:spcAft>
+              <a:buClr>
+                <a:schemeClr val="accent1"/>
+              </a:buClr>
+              <a:buSzPct val="50000"/>
+              <a:buFont typeface="Wingdings" charset="2"/>
+              <a:buChar char="n"/>
+              <a:defRPr sz="2000">
+                <a:solidFill>
+                  <a:schemeClr val="tx1"/>
+                </a:solidFill>
+                <a:latin typeface="Tahoma" charset="0"/>
+              </a:defRPr>
+            </a:lvl6pPr>
+            <a:lvl7pPr marL="2971800" indent="-228600" eaLnBrk="0" fontAlgn="base" hangingPunct="0">
+              <a:spcBef>
+                <a:spcPct val="20000"/>
+              </a:spcBef>
+              <a:spcAft>
+                <a:spcPct val="0"/>
+              </a:spcAft>
+              <a:buClr>
+                <a:schemeClr val="accent1"/>
+              </a:buClr>
+              <a:buSzPct val="50000"/>
+              <a:buFont typeface="Wingdings" charset="2"/>
+              <a:buChar char="n"/>
+              <a:defRPr sz="2000">
+                <a:solidFill>
+                  <a:schemeClr val="tx1"/>
+                </a:solidFill>
+                <a:latin typeface="Tahoma" charset="0"/>
+              </a:defRPr>
+            </a:lvl7pPr>
+            <a:lvl8pPr marL="3429000" indent="-228600" eaLnBrk="0" fontAlgn="base" hangingPunct="0">
+              <a:spcBef>
+                <a:spcPct val="20000"/>
+              </a:spcBef>
+              <a:spcAft>
+                <a:spcPct val="0"/>
+              </a:spcAft>
+              <a:buClr>
+                <a:schemeClr val="accent1"/>
+              </a:buClr>
+              <a:buSzPct val="50000"/>
+              <a:buFont typeface="Wingdings" charset="2"/>
+              <a:buChar char="n"/>
+              <a:defRPr sz="2000">
+                <a:solidFill>
+                  <a:schemeClr val="tx1"/>
+                </a:solidFill>
+                <a:latin typeface="Tahoma" charset="0"/>
+              </a:defRPr>
+            </a:lvl8pPr>
+            <a:lvl9pPr marL="3886200" indent="-228600" eaLnBrk="0" fontAlgn="base" hangingPunct="0">
+              <a:spcBef>
+                <a:spcPct val="20000"/>
+              </a:spcBef>
+              <a:spcAft>
+                <a:spcPct val="0"/>
+              </a:spcAft>
+              <a:buClr>
+                <a:schemeClr val="accent1"/>
+              </a:buClr>
+              <a:buSzPct val="50000"/>
+              <a:buFont typeface="Wingdings" charset="2"/>
+              <a:buChar char="n"/>
+              <a:defRPr sz="2000">
+                <a:solidFill>
+                  <a:schemeClr val="tx1"/>
+                </a:solidFill>
+                <a:latin typeface="Tahoma" charset="0"/>
+              </a:defRPr>
+            </a:lvl9pPr>
+          </a:lstStyle>
+          <a:p>
+            <a:pPr algn="ctr" eaLnBrk="1" hangingPunct="1">
+              <a:spcBef>
+                <a:spcPct val="0"/>
+              </a:spcBef>
+              <a:buClrTx/>
+              <a:buSzTx/>
+              <a:buFontTx/>
+              <a:buNone/>
+            </a:pPr>
+            <a:r>
+              <a:rPr lang="en-US" altLang="en-US" sz="2000"/>
+              <a:t>Try “intervals (lm2)” to see </a:t>
+            </a:r>
+          </a:p>
+          <a:p>
+            <a:pPr algn="ctr" eaLnBrk="1" hangingPunct="1">
+              <a:spcBef>
+                <a:spcPct val="0"/>
+              </a:spcBef>
+              <a:buClrTx/>
+              <a:buSzTx/>
+              <a:buFontTx/>
+              <a:buNone/>
+            </a:pPr>
+            <a:r>
+              <a:rPr lang="en-US" altLang="en-US" sz="2000"/>
+              <a:t>the confidence intervals</a:t>
+            </a:r>
+          </a:p>
+        </p:txBody>
+      </p:sp>
+      <p:pic>
+        <p:nvPicPr>
+          <p:cNvPr id="102404" name="Picture 10" descr="Plot of residuals by Subject from the nonlinear mixed model (plot(lm2, Subject ~ resid(.))), residuals now centered near zero across subjects; vector graphic could not be rendered for exact values."/>
+          <p:cNvPicPr>
+            <a:picLocks noChangeAspect="1" noChangeArrowheads="1"/>
+          </p:cNvPicPr>
+          <p:nvPr/>
+        </p:nvPicPr>
+        <p:blipFill>
+          <a:blip r:embed="rId3">
+            <a:extLst>
+              <a:ext uri="{28A0092B-C50C-407E-A947-70E740481C1C}">
+                <a14:useLocalDpi xmlns:a14="http://schemas.microsoft.com/office/drawing/2010/main" val="0"/>
+              </a:ext>
+            </a:extLst>
+          </a:blip>
+          <a:srcRect/>
+          <a:stretch>
+            <a:fillRect/>
+          </a:stretch>
+        </p:blipFill>
+        <p:spPr bwMode="auto">
+          <a:xfrm>
+            <a:off x="6030914" y="2228850"/>
+            <a:ext cx="4637087" cy="4629150"/>
+          </a:xfrm>
+          <a:prstGeom prst="rect">
+            <a:avLst/>
+          </a:prstGeom>
+          <a:noFill/>
+          <a:ln>
+            <a:noFill/>
+          </a:ln>
+          <a:extLst>
+            <a:ext uri="{909E8E84-426E-40DD-AFC4-6F175D3DCCD1}">
+              <a14:hiddenFill xmlns:a14="http://schemas.microsoft.com/office/drawing/2010/main">
+                <a:solidFill>
+                  <a:srgbClr val="FFFFFF"/>
+                </a:solidFill>
+              </a14:hiddenFill>
+            </a:ext>
+            <a:ext uri="{91240B29-F687-4F45-9708-019B960494DF}">
+              <a14:hiddenLine xmlns:a14="http://schemas.microsoft.com/office/drawing/2010/main" w="9525">
+                <a:solidFill>
+                  <a:srgbClr val="000000"/>
+                </a:solidFill>
+                <a:miter lim="800000"/>
+                <a:headEnd/>
+                <a:tailEnd/>
+              </a14:hiddenLine>
+            </a:ext>
+          </a:extLst>
+        </p:spPr>
+      </p:pic>
+    </p:spTree>
+    <p:extLst>
+      <p:ext uri="{BB962C8B-B14F-4D97-AF65-F5344CB8AC3E}">
+        <p14:creationId xmlns:p14="http://schemas.microsoft.com/office/powerpoint/2010/main" val="306920238"/>
       </p:ext>
     </p:extLst>
   </p:cSld>
@@ -28417,7 +29004,7 @@
         </p:blipFill>
         <p:spPr bwMode="auto">
           <a:xfrm>
-            <a:off x="5029200" y="1447800"/>
+            <a:off x="5029200" y="1262271"/>
             <a:ext cx="5410200" cy="4179888"/>
           </a:xfrm>
           <a:prstGeom prst="rect">
@@ -28505,8 +29092,8 @@
         </p:nvSpPr>
         <p:spPr bwMode="auto">
           <a:xfrm>
-            <a:off x="1752600" y="5486401"/>
-            <a:ext cx="8915400" cy="1200329"/>
+            <a:off x="0" y="5288340"/>
+            <a:ext cx="11993216" cy="1569660"/>
           </a:xfrm>
           <a:prstGeom prst="rect">
             <a:avLst/>
@@ -28536,7 +29123,7 @@
           </a:extLst>
         </p:spPr>
         <p:txBody>
-          <a:bodyPr>
+          <a:bodyPr wrap="square">
             <a:spAutoFit/>
           </a:bodyPr>
           <a:lstStyle>
@@ -28717,8 +29304,8 @@
               <a:buNone/>
             </a:pPr>
             <a:r>
-              <a:rPr lang="en-US" altLang="en-US" sz="2400"/>
-              <a:t>This analysis attributed all the error to within-stream variation. However, it is clear that there is between-stream variation in density but we have no way to comment on it. </a:t>
+              <a:rPr lang="en-US" altLang="en-US" sz="2400" dirty="0"/>
+              <a:t>This analysis attributed all the error to within-stream variation. There is between-stream variation in density but (1) we have no way to comment on it, and (2) independence violated (are 1000 measurements from 2 streams just as informative about fish density in typical stream as 10 measurements from 200 streams)</a:t>
             </a:r>
           </a:p>
         </p:txBody>
@@ -28731,7 +29318,7 @@
         </p:nvSpPr>
         <p:spPr>
           <a:xfrm>
-            <a:off x="2108200" y="2184400"/>
+            <a:off x="1752600" y="2475948"/>
             <a:ext cx="4064000" cy="1397000"/>
           </a:xfrm>
           <a:prstGeom prst="rect">
@@ -28747,49 +29334,49 @@
           <a:p>
             <a:pPr algn="l"/>
             <a:r>
-              <a:rPr lang="en-US" sz="1800" i="1" dirty="0">
+              <a:rPr lang="en-US" sz="2400" i="1" dirty="0">
                 <a:latin typeface="Cambria"/>
                 <a:cs typeface="Cambria"/>
               </a:rPr>
               <a:t>y</a:t>
             </a:r>
             <a:r>
-              <a:rPr lang="en-US" sz="1404" i="1" baseline="-25000" dirty="0">
+              <a:rPr lang="en-US" sz="2400" i="1" baseline="-25000" dirty="0">
                 <a:latin typeface="Cambria"/>
                 <a:cs typeface="Cambria"/>
               </a:rPr>
               <a:t>i,j</a:t>
             </a:r>
             <a:r>
-              <a:rPr lang="en-US" sz="1800" dirty="0">
+              <a:rPr lang="en-US" sz="2400" dirty="0">
                 <a:latin typeface="Cambria"/>
                 <a:cs typeface="Cambria"/>
               </a:rPr>
               <a:t> = </a:t>
             </a:r>
             <a:r>
-              <a:rPr lang="en-US" sz="1800" i="1" dirty="0">
+              <a:rPr lang="en-US" sz="2400" i="1" dirty="0">
                 <a:latin typeface="Cambria"/>
                 <a:cs typeface="Cambria"/>
               </a:rPr>
               <a:t>β</a:t>
             </a:r>
             <a:r>
-              <a:rPr lang="en-US" sz="1800" dirty="0">
+              <a:rPr lang="en-US" sz="2400" dirty="0">
                 <a:latin typeface="Cambria"/>
                 <a:cs typeface="Cambria"/>
               </a:rPr>
               <a:t> + </a:t>
             </a:r>
             <a:r>
-              <a:rPr lang="en-US" sz="1800" i="1" dirty="0">
+              <a:rPr lang="en-US" sz="2400" i="1" dirty="0">
                 <a:latin typeface="Cambria"/>
                 <a:cs typeface="Cambria"/>
               </a:rPr>
               <a:t>ε</a:t>
             </a:r>
             <a:r>
-              <a:rPr lang="en-US" sz="1404" i="1" baseline="-25000" dirty="0">
+              <a:rPr lang="en-US" sz="2400" i="1" baseline="-25000" dirty="0">
                 <a:latin typeface="Cambria"/>
                 <a:cs typeface="Cambria"/>
               </a:rPr>
@@ -28799,28 +29386,28 @@
           <a:p>
             <a:pPr algn="l"/>
             <a:r>
-              <a:rPr lang="en-US" sz="1800" i="1" dirty="0">
+              <a:rPr lang="en-US" sz="2400" i="1" dirty="0">
                 <a:latin typeface="Cambria"/>
                 <a:cs typeface="Cambria"/>
               </a:rPr>
               <a:t>i</a:t>
             </a:r>
             <a:r>
-              <a:rPr lang="en-US" sz="1800" dirty="0">
+              <a:rPr lang="en-US" sz="2400" dirty="0">
                 <a:latin typeface="Cambria"/>
                 <a:cs typeface="Cambria"/>
               </a:rPr>
               <a:t> = 1,2,..,6;  </a:t>
             </a:r>
             <a:r>
-              <a:rPr lang="en-US" sz="1800" i="1" dirty="0">
+              <a:rPr lang="en-US" sz="2400" i="1" dirty="0">
                 <a:latin typeface="Cambria"/>
                 <a:cs typeface="Cambria"/>
               </a:rPr>
               <a:t>j</a:t>
             </a:r>
             <a:r>
-              <a:rPr lang="en-US" sz="1800" dirty="0">
+              <a:rPr lang="en-US" sz="2400" dirty="0">
                 <a:latin typeface="Cambria"/>
                 <a:cs typeface="Cambria"/>
               </a:rPr>
@@ -28830,28 +29417,28 @@
           <a:p>
             <a:pPr algn="l"/>
             <a:r>
-              <a:rPr lang="en-US" sz="1800" i="1" dirty="0">
+              <a:rPr lang="en-US" sz="2400" i="1" dirty="0">
                 <a:latin typeface="Cambria"/>
                 <a:cs typeface="Cambria"/>
               </a:rPr>
               <a:t>β̂</a:t>
             </a:r>
             <a:r>
-              <a:rPr lang="en-US" sz="1800" dirty="0">
+              <a:rPr lang="en-US" sz="2400" dirty="0">
                 <a:latin typeface="Cambria"/>
                 <a:cs typeface="Cambria"/>
               </a:rPr>
               <a:t> = 78.63;  </a:t>
             </a:r>
             <a:r>
-              <a:rPr lang="en-US" sz="1800" i="1" dirty="0">
+              <a:rPr lang="en-US" sz="2400" i="1" dirty="0">
                 <a:latin typeface="Cambria"/>
                 <a:cs typeface="Cambria"/>
               </a:rPr>
               <a:t>σ̂</a:t>
             </a:r>
             <a:r>
-              <a:rPr lang="en-US" sz="1800" dirty="0">
+              <a:rPr lang="en-US" sz="2400" dirty="0">
                 <a:latin typeface="Cambria"/>
                 <a:cs typeface="Cambria"/>
               </a:rPr>
@@ -28892,609 +29479,6 @@
       </p:grpSpPr>
       <p:sp>
         <p:nvSpPr>
-          <p:cNvPr id="40962" name="Rectangle 2"/>
-          <p:cNvSpPr>
-            <a:spLocks noGrp="1" noChangeArrowheads="1"/>
-          </p:cNvSpPr>
-          <p:nvPr>
-            <p:ph type="title"/>
-          </p:nvPr>
-        </p:nvSpPr>
-        <p:spPr/>
-        <p:txBody>
-          <a:bodyPr/>
-          <a:lstStyle/>
-          <a:p>
-            <a:pPr algn="ctr" eaLnBrk="1" hangingPunct="1">
-              <a:defRPr/>
-            </a:pPr>
-            <a:r>
-              <a:rPr lang="en-US" altLang="en-US" sz="4000"/>
-              <a:t>Fitting Length and Age Data</a:t>
-            </a:r>
-            <a:br>
-              <a:rPr lang="en-US" altLang="en-US" sz="4000"/>
-            </a:br>
-            <a:r>
-              <a:rPr lang="en-US" altLang="en-US" sz="4000"/>
-              <a:t>(Non-linear mixed model-II)</a:t>
-            </a:r>
-          </a:p>
-        </p:txBody>
-      </p:sp>
-      <p:sp>
-        <p:nvSpPr>
-          <p:cNvPr id="102402" name="Rectangle 6"/>
-          <p:cNvSpPr>
-            <a:spLocks noChangeArrowheads="1"/>
-          </p:cNvSpPr>
-          <p:nvPr/>
-        </p:nvSpPr>
-        <p:spPr bwMode="auto">
-          <a:xfrm>
-            <a:off x="1905000" y="2030412"/>
-            <a:ext cx="4960938" cy="396875"/>
-          </a:xfrm>
-          <a:prstGeom prst="rect">
-            <a:avLst/>
-          </a:prstGeom>
-          <a:noFill/>
-          <a:ln>
-            <a:noFill/>
-          </a:ln>
-          <a:extLst>
-            <a:ext uri="{909E8E84-426E-40DD-AFC4-6F175D3DCCD1}">
-              <a14:hiddenFill xmlns:a14="http://schemas.microsoft.com/office/drawing/2010/main">
-                <a:solidFill>
-                  <a:srgbClr val="FFFFFF"/>
-                </a:solidFill>
-              </a14:hiddenFill>
-            </a:ext>
-            <a:ext uri="{91240B29-F687-4F45-9708-019B960494DF}">
-              <a14:hiddenLine xmlns:a14="http://schemas.microsoft.com/office/drawing/2010/main" w="9525">
-                <a:solidFill>
-                  <a:srgbClr val="000000"/>
-                </a:solidFill>
-                <a:miter lim="800000"/>
-                <a:headEnd/>
-                <a:tailEnd/>
-              </a14:hiddenLine>
-            </a:ext>
-          </a:extLst>
-        </p:spPr>
-        <p:txBody>
-          <a:bodyPr wrap="none">
-            <a:spAutoFit/>
-          </a:bodyPr>
-          <a:lstStyle>
-            <a:lvl1pPr>
-              <a:spcBef>
-                <a:spcPct val="20000"/>
-              </a:spcBef>
-              <a:buClr>
-                <a:schemeClr val="folHlink"/>
-              </a:buClr>
-              <a:buSzPct val="60000"/>
-              <a:buFont typeface="Wingdings" charset="2"/>
-              <a:buChar char="n"/>
-              <a:defRPr sz="3200">
-                <a:solidFill>
-                  <a:schemeClr val="tx1"/>
-                </a:solidFill>
-                <a:latin typeface="Tahoma" charset="0"/>
-              </a:defRPr>
-            </a:lvl1pPr>
-            <a:lvl2pPr marL="742950" indent="-285750">
-              <a:spcBef>
-                <a:spcPct val="20000"/>
-              </a:spcBef>
-              <a:buClr>
-                <a:schemeClr val="hlink"/>
-              </a:buClr>
-              <a:buSzPct val="55000"/>
-              <a:buFont typeface="Wingdings" charset="2"/>
-              <a:buChar char="n"/>
-              <a:defRPr sz="2800">
-                <a:solidFill>
-                  <a:schemeClr val="tx1"/>
-                </a:solidFill>
-                <a:latin typeface="Tahoma" charset="0"/>
-              </a:defRPr>
-            </a:lvl2pPr>
-            <a:lvl3pPr marL="1143000" indent="-228600">
-              <a:spcBef>
-                <a:spcPct val="20000"/>
-              </a:spcBef>
-              <a:buClr>
-                <a:schemeClr val="folHlink"/>
-              </a:buClr>
-              <a:buSzPct val="50000"/>
-              <a:buFont typeface="Wingdings" charset="2"/>
-              <a:buChar char="n"/>
-              <a:defRPr sz="2400">
-                <a:solidFill>
-                  <a:schemeClr val="tx1"/>
-                </a:solidFill>
-                <a:latin typeface="Tahoma" charset="0"/>
-              </a:defRPr>
-            </a:lvl3pPr>
-            <a:lvl4pPr marL="1600200" indent="-228600">
-              <a:spcBef>
-                <a:spcPct val="20000"/>
-              </a:spcBef>
-              <a:buClr>
-                <a:schemeClr val="accent2"/>
-              </a:buClr>
-              <a:buSzPct val="55000"/>
-              <a:buFont typeface="Wingdings" charset="2"/>
-              <a:buChar char="n"/>
-              <a:defRPr sz="2000">
-                <a:solidFill>
-                  <a:schemeClr val="tx1"/>
-                </a:solidFill>
-                <a:latin typeface="Tahoma" charset="0"/>
-              </a:defRPr>
-            </a:lvl4pPr>
-            <a:lvl5pPr marL="2057400" indent="-228600">
-              <a:spcBef>
-                <a:spcPct val="20000"/>
-              </a:spcBef>
-              <a:buClr>
-                <a:schemeClr val="accent1"/>
-              </a:buClr>
-              <a:buSzPct val="50000"/>
-              <a:buFont typeface="Wingdings" charset="2"/>
-              <a:buChar char="n"/>
-              <a:defRPr sz="2000">
-                <a:solidFill>
-                  <a:schemeClr val="tx1"/>
-                </a:solidFill>
-                <a:latin typeface="Tahoma" charset="0"/>
-              </a:defRPr>
-            </a:lvl5pPr>
-            <a:lvl6pPr marL="2514600" indent="-228600" eaLnBrk="0" fontAlgn="base" hangingPunct="0">
-              <a:spcBef>
-                <a:spcPct val="20000"/>
-              </a:spcBef>
-              <a:spcAft>
-                <a:spcPct val="0"/>
-              </a:spcAft>
-              <a:buClr>
-                <a:schemeClr val="accent1"/>
-              </a:buClr>
-              <a:buSzPct val="50000"/>
-              <a:buFont typeface="Wingdings" charset="2"/>
-              <a:buChar char="n"/>
-              <a:defRPr sz="2000">
-                <a:solidFill>
-                  <a:schemeClr val="tx1"/>
-                </a:solidFill>
-                <a:latin typeface="Tahoma" charset="0"/>
-              </a:defRPr>
-            </a:lvl6pPr>
-            <a:lvl7pPr marL="2971800" indent="-228600" eaLnBrk="0" fontAlgn="base" hangingPunct="0">
-              <a:spcBef>
-                <a:spcPct val="20000"/>
-              </a:spcBef>
-              <a:spcAft>
-                <a:spcPct val="0"/>
-              </a:spcAft>
-              <a:buClr>
-                <a:schemeClr val="accent1"/>
-              </a:buClr>
-              <a:buSzPct val="50000"/>
-              <a:buFont typeface="Wingdings" charset="2"/>
-              <a:buChar char="n"/>
-              <a:defRPr sz="2000">
-                <a:solidFill>
-                  <a:schemeClr val="tx1"/>
-                </a:solidFill>
-                <a:latin typeface="Tahoma" charset="0"/>
-              </a:defRPr>
-            </a:lvl7pPr>
-            <a:lvl8pPr marL="3429000" indent="-228600" eaLnBrk="0" fontAlgn="base" hangingPunct="0">
-              <a:spcBef>
-                <a:spcPct val="20000"/>
-              </a:spcBef>
-              <a:spcAft>
-                <a:spcPct val="0"/>
-              </a:spcAft>
-              <a:buClr>
-                <a:schemeClr val="accent1"/>
-              </a:buClr>
-              <a:buSzPct val="50000"/>
-              <a:buFont typeface="Wingdings" charset="2"/>
-              <a:buChar char="n"/>
-              <a:defRPr sz="2000">
-                <a:solidFill>
-                  <a:schemeClr val="tx1"/>
-                </a:solidFill>
-                <a:latin typeface="Tahoma" charset="0"/>
-              </a:defRPr>
-            </a:lvl8pPr>
-            <a:lvl9pPr marL="3886200" indent="-228600" eaLnBrk="0" fontAlgn="base" hangingPunct="0">
-              <a:spcBef>
-                <a:spcPct val="20000"/>
-              </a:spcBef>
-              <a:spcAft>
-                <a:spcPct val="0"/>
-              </a:spcAft>
-              <a:buClr>
-                <a:schemeClr val="accent1"/>
-              </a:buClr>
-              <a:buSzPct val="50000"/>
-              <a:buFont typeface="Wingdings" charset="2"/>
-              <a:buChar char="n"/>
-              <a:defRPr sz="2000">
-                <a:solidFill>
-                  <a:schemeClr val="tx1"/>
-                </a:solidFill>
-                <a:latin typeface="Tahoma" charset="0"/>
-              </a:defRPr>
-            </a:lvl9pPr>
-          </a:lstStyle>
-          <a:p>
-            <a:pPr algn="ctr" eaLnBrk="1" hangingPunct="1">
-              <a:spcBef>
-                <a:spcPct val="0"/>
-              </a:spcBef>
-              <a:buClrTx/>
-              <a:buSzTx/>
-              <a:buFontTx/>
-              <a:buNone/>
-            </a:pPr>
-            <a:r>
-              <a:rPr lang="en-US" altLang="en-US" sz="2000" b="1"/>
-              <a:t>plot(lm2,Subject ~ </a:t>
-            </a:r>
-            <a:r>
-              <a:rPr lang="en-US" altLang="en-US" sz="2000" b="1" dirty="0" err="1"/>
-              <a:t>resid</a:t>
-            </a:r>
-            <a:r>
-              <a:rPr lang="en-US" altLang="en-US" sz="2000" b="1" dirty="0"/>
-              <a:t>(.),</a:t>
-            </a:r>
-            <a:r>
-              <a:rPr lang="en-US" altLang="en-US" sz="2000" b="1" dirty="0" err="1"/>
-              <a:t>abline</a:t>
-            </a:r>
-            <a:r>
-              <a:rPr lang="en-US" altLang="en-US" sz="2000" b="1" dirty="0"/>
-              <a:t>=0)</a:t>
-            </a:r>
-          </a:p>
-        </p:txBody>
-      </p:sp>
-      <p:sp>
-        <p:nvSpPr>
-          <p:cNvPr id="102403" name="Text Box 7"/>
-          <p:cNvSpPr txBox="1">
-            <a:spLocks noChangeArrowheads="1"/>
-          </p:cNvSpPr>
-          <p:nvPr/>
-        </p:nvSpPr>
-        <p:spPr bwMode="auto">
-          <a:xfrm>
-            <a:off x="1676401" y="3352801"/>
-            <a:ext cx="3300413" cy="701675"/>
-          </a:xfrm>
-          <a:prstGeom prst="rect">
-            <a:avLst/>
-          </a:prstGeom>
-          <a:noFill/>
-          <a:ln>
-            <a:noFill/>
-          </a:ln>
-          <a:extLst>
-            <a:ext uri="{909E8E84-426E-40DD-AFC4-6F175D3DCCD1}">
-              <a14:hiddenFill xmlns:a14="http://schemas.microsoft.com/office/drawing/2010/main">
-                <a:solidFill>
-                  <a:srgbClr val="FFFFFF"/>
-                </a:solidFill>
-              </a14:hiddenFill>
-            </a:ext>
-            <a:ext uri="{91240B29-F687-4F45-9708-019B960494DF}">
-              <a14:hiddenLine xmlns:a14="http://schemas.microsoft.com/office/drawing/2010/main" w="9525">
-                <a:solidFill>
-                  <a:srgbClr val="000000"/>
-                </a:solidFill>
-                <a:miter lim="800000"/>
-                <a:headEnd/>
-                <a:tailEnd/>
-              </a14:hiddenLine>
-            </a:ext>
-          </a:extLst>
-        </p:spPr>
-        <p:txBody>
-          <a:bodyPr wrap="none">
-            <a:spAutoFit/>
-          </a:bodyPr>
-          <a:lstStyle>
-            <a:lvl1pPr>
-              <a:spcBef>
-                <a:spcPct val="20000"/>
-              </a:spcBef>
-              <a:buClr>
-                <a:schemeClr val="folHlink"/>
-              </a:buClr>
-              <a:buSzPct val="60000"/>
-              <a:buFont typeface="Wingdings" charset="2"/>
-              <a:buChar char="n"/>
-              <a:defRPr sz="3200">
-                <a:solidFill>
-                  <a:schemeClr val="tx1"/>
-                </a:solidFill>
-                <a:latin typeface="Tahoma" charset="0"/>
-              </a:defRPr>
-            </a:lvl1pPr>
-            <a:lvl2pPr marL="742950" indent="-285750">
-              <a:spcBef>
-                <a:spcPct val="20000"/>
-              </a:spcBef>
-              <a:buClr>
-                <a:schemeClr val="hlink"/>
-              </a:buClr>
-              <a:buSzPct val="55000"/>
-              <a:buFont typeface="Wingdings" charset="2"/>
-              <a:buChar char="n"/>
-              <a:defRPr sz="2800">
-                <a:solidFill>
-                  <a:schemeClr val="tx1"/>
-                </a:solidFill>
-                <a:latin typeface="Tahoma" charset="0"/>
-              </a:defRPr>
-            </a:lvl2pPr>
-            <a:lvl3pPr marL="1143000" indent="-228600">
-              <a:spcBef>
-                <a:spcPct val="20000"/>
-              </a:spcBef>
-              <a:buClr>
-                <a:schemeClr val="folHlink"/>
-              </a:buClr>
-              <a:buSzPct val="50000"/>
-              <a:buFont typeface="Wingdings" charset="2"/>
-              <a:buChar char="n"/>
-              <a:defRPr sz="2400">
-                <a:solidFill>
-                  <a:schemeClr val="tx1"/>
-                </a:solidFill>
-                <a:latin typeface="Tahoma" charset="0"/>
-              </a:defRPr>
-            </a:lvl3pPr>
-            <a:lvl4pPr marL="1600200" indent="-228600">
-              <a:spcBef>
-                <a:spcPct val="20000"/>
-              </a:spcBef>
-              <a:buClr>
-                <a:schemeClr val="accent2"/>
-              </a:buClr>
-              <a:buSzPct val="55000"/>
-              <a:buFont typeface="Wingdings" charset="2"/>
-              <a:buChar char="n"/>
-              <a:defRPr sz="2000">
-                <a:solidFill>
-                  <a:schemeClr val="tx1"/>
-                </a:solidFill>
-                <a:latin typeface="Tahoma" charset="0"/>
-              </a:defRPr>
-            </a:lvl4pPr>
-            <a:lvl5pPr marL="2057400" indent="-228600">
-              <a:spcBef>
-                <a:spcPct val="20000"/>
-              </a:spcBef>
-              <a:buClr>
-                <a:schemeClr val="accent1"/>
-              </a:buClr>
-              <a:buSzPct val="50000"/>
-              <a:buFont typeface="Wingdings" charset="2"/>
-              <a:buChar char="n"/>
-              <a:defRPr sz="2000">
-                <a:solidFill>
-                  <a:schemeClr val="tx1"/>
-                </a:solidFill>
-                <a:latin typeface="Tahoma" charset="0"/>
-              </a:defRPr>
-            </a:lvl5pPr>
-            <a:lvl6pPr marL="2514600" indent="-228600" eaLnBrk="0" fontAlgn="base" hangingPunct="0">
-              <a:spcBef>
-                <a:spcPct val="20000"/>
-              </a:spcBef>
-              <a:spcAft>
-                <a:spcPct val="0"/>
-              </a:spcAft>
-              <a:buClr>
-                <a:schemeClr val="accent1"/>
-              </a:buClr>
-              <a:buSzPct val="50000"/>
-              <a:buFont typeface="Wingdings" charset="2"/>
-              <a:buChar char="n"/>
-              <a:defRPr sz="2000">
-                <a:solidFill>
-                  <a:schemeClr val="tx1"/>
-                </a:solidFill>
-                <a:latin typeface="Tahoma" charset="0"/>
-              </a:defRPr>
-            </a:lvl6pPr>
-            <a:lvl7pPr marL="2971800" indent="-228600" eaLnBrk="0" fontAlgn="base" hangingPunct="0">
-              <a:spcBef>
-                <a:spcPct val="20000"/>
-              </a:spcBef>
-              <a:spcAft>
-                <a:spcPct val="0"/>
-              </a:spcAft>
-              <a:buClr>
-                <a:schemeClr val="accent1"/>
-              </a:buClr>
-              <a:buSzPct val="50000"/>
-              <a:buFont typeface="Wingdings" charset="2"/>
-              <a:buChar char="n"/>
-              <a:defRPr sz="2000">
-                <a:solidFill>
-                  <a:schemeClr val="tx1"/>
-                </a:solidFill>
-                <a:latin typeface="Tahoma" charset="0"/>
-              </a:defRPr>
-            </a:lvl7pPr>
-            <a:lvl8pPr marL="3429000" indent="-228600" eaLnBrk="0" fontAlgn="base" hangingPunct="0">
-              <a:spcBef>
-                <a:spcPct val="20000"/>
-              </a:spcBef>
-              <a:spcAft>
-                <a:spcPct val="0"/>
-              </a:spcAft>
-              <a:buClr>
-                <a:schemeClr val="accent1"/>
-              </a:buClr>
-              <a:buSzPct val="50000"/>
-              <a:buFont typeface="Wingdings" charset="2"/>
-              <a:buChar char="n"/>
-              <a:defRPr sz="2000">
-                <a:solidFill>
-                  <a:schemeClr val="tx1"/>
-                </a:solidFill>
-                <a:latin typeface="Tahoma" charset="0"/>
-              </a:defRPr>
-            </a:lvl8pPr>
-            <a:lvl9pPr marL="3886200" indent="-228600" eaLnBrk="0" fontAlgn="base" hangingPunct="0">
-              <a:spcBef>
-                <a:spcPct val="20000"/>
-              </a:spcBef>
-              <a:spcAft>
-                <a:spcPct val="0"/>
-              </a:spcAft>
-              <a:buClr>
-                <a:schemeClr val="accent1"/>
-              </a:buClr>
-              <a:buSzPct val="50000"/>
-              <a:buFont typeface="Wingdings" charset="2"/>
-              <a:buChar char="n"/>
-              <a:defRPr sz="2000">
-                <a:solidFill>
-                  <a:schemeClr val="tx1"/>
-                </a:solidFill>
-                <a:latin typeface="Tahoma" charset="0"/>
-              </a:defRPr>
-            </a:lvl9pPr>
-          </a:lstStyle>
-          <a:p>
-            <a:pPr algn="ctr" eaLnBrk="1" hangingPunct="1">
-              <a:spcBef>
-                <a:spcPct val="0"/>
-              </a:spcBef>
-              <a:buClrTx/>
-              <a:buSzTx/>
-              <a:buFontTx/>
-              <a:buNone/>
-            </a:pPr>
-            <a:r>
-              <a:rPr lang="en-US" altLang="en-US" sz="2000"/>
-              <a:t>Try “intervals (lm2)” to see </a:t>
-            </a:r>
-          </a:p>
-          <a:p>
-            <a:pPr algn="ctr" eaLnBrk="1" hangingPunct="1">
-              <a:spcBef>
-                <a:spcPct val="0"/>
-              </a:spcBef>
-              <a:buClrTx/>
-              <a:buSzTx/>
-              <a:buFontTx/>
-              <a:buNone/>
-            </a:pPr>
-            <a:r>
-              <a:rPr lang="en-US" altLang="en-US" sz="2000"/>
-              <a:t>the confidence intervals</a:t>
-            </a:r>
-          </a:p>
-        </p:txBody>
-      </p:sp>
-      <p:pic>
-        <p:nvPicPr>
-          <p:cNvPr id="102404" name="Picture 10" descr="Plot of residuals by Subject from the nonlinear mixed model (plot(lm2, Subject ~ resid(.))), residuals now centered near zero across subjects; vector graphic could not be rendered for exact values."/>
-          <p:cNvPicPr>
-            <a:picLocks noChangeAspect="1" noChangeArrowheads="1"/>
-          </p:cNvPicPr>
-          <p:nvPr/>
-        </p:nvPicPr>
-        <p:blipFill>
-          <a:blip r:embed="rId3">
-            <a:extLst>
-              <a:ext uri="{28A0092B-C50C-407E-A947-70E740481C1C}">
-                <a14:useLocalDpi xmlns:a14="http://schemas.microsoft.com/office/drawing/2010/main" val="0"/>
-              </a:ext>
-            </a:extLst>
-          </a:blip>
-          <a:srcRect/>
-          <a:stretch>
-            <a:fillRect/>
-          </a:stretch>
-        </p:blipFill>
-        <p:spPr bwMode="auto">
-          <a:xfrm>
-            <a:off x="6030914" y="2228850"/>
-            <a:ext cx="4637087" cy="4629150"/>
-          </a:xfrm>
-          <a:prstGeom prst="rect">
-            <a:avLst/>
-          </a:prstGeom>
-          <a:noFill/>
-          <a:ln>
-            <a:noFill/>
-          </a:ln>
-          <a:extLst>
-            <a:ext uri="{909E8E84-426E-40DD-AFC4-6F175D3DCCD1}">
-              <a14:hiddenFill xmlns:a14="http://schemas.microsoft.com/office/drawing/2010/main">
-                <a:solidFill>
-                  <a:srgbClr val="FFFFFF"/>
-                </a:solidFill>
-              </a14:hiddenFill>
-            </a:ext>
-            <a:ext uri="{91240B29-F687-4F45-9708-019B960494DF}">
-              <a14:hiddenLine xmlns:a14="http://schemas.microsoft.com/office/drawing/2010/main" w="9525">
-                <a:solidFill>
-                  <a:srgbClr val="000000"/>
-                </a:solidFill>
-                <a:miter lim="800000"/>
-                <a:headEnd/>
-                <a:tailEnd/>
-              </a14:hiddenLine>
-            </a:ext>
-          </a:extLst>
-        </p:spPr>
-      </p:pic>
-    </p:spTree>
-    <p:extLst>
-      <p:ext uri="{BB962C8B-B14F-4D97-AF65-F5344CB8AC3E}">
-        <p14:creationId xmlns:p14="http://schemas.microsoft.com/office/powerpoint/2010/main" val="306920238"/>
-      </p:ext>
-    </p:extLst>
-  </p:cSld>
-  <p:clrMapOvr>
-    <a:masterClrMapping/>
-  </p:clrMapOvr>
-</p:sld>
-</file>
-
-<file path=ppt/slides/slide61.xml><?xml version="1.0" encoding="utf-8"?>
-<p:sld xmlns:a="http://schemas.openxmlformats.org/drawingml/2006/main" xmlns:r="http://schemas.openxmlformats.org/officeDocument/2006/relationships" xmlns:p="http://schemas.openxmlformats.org/presentationml/2006/main">
-  <p:cSld>
-    <p:spTree>
-      <p:nvGrpSpPr>
-        <p:cNvPr id="1" name=""/>
-        <p:cNvGrpSpPr/>
-        <p:nvPr/>
-      </p:nvGrpSpPr>
-      <p:grpSpPr>
-        <a:xfrm>
-          <a:off x="0" y="0"/>
-          <a:ext cx="0" cy="0"/>
-          <a:chOff x="0" y="0"/>
-          <a:chExt cx="0" cy="0"/>
-        </a:xfrm>
-      </p:grpSpPr>
-      <p:sp>
-        <p:nvSpPr>
           <p:cNvPr id="43010" name="Rectangle 2"/>
           <p:cNvSpPr>
             <a:spLocks noGrp="1" noChangeArrowheads="1"/>
@@ -30057,7 +30041,7 @@
 </p:sld>
 </file>
 
-<file path=ppt/slides/slide62.xml><?xml version="1.0" encoding="utf-8"?>
+<file path=ppt/slides/slide61.xml><?xml version="1.0" encoding="utf-8"?>
 <p:sld xmlns:a="http://schemas.openxmlformats.org/drawingml/2006/main" xmlns:r="http://schemas.openxmlformats.org/officeDocument/2006/relationships" xmlns:p="http://schemas.openxmlformats.org/presentationml/2006/main">
   <p:cSld>
     <p:spTree>
@@ -30736,7 +30720,7 @@
 </p:sld>
 </file>
 
-<file path=ppt/slides/slide63.xml><?xml version="1.0" encoding="utf-8"?>
+<file path=ppt/slides/slide62.xml><?xml version="1.0" encoding="utf-8"?>
 <p:sld xmlns:a="http://schemas.openxmlformats.org/drawingml/2006/main" xmlns:r="http://schemas.openxmlformats.org/officeDocument/2006/relationships" xmlns:p="http://schemas.openxmlformats.org/presentationml/2006/main">
   <p:cSld>
     <p:spTree>
@@ -31685,7 +31669,7 @@
         </p:nvSpPr>
         <p:spPr>
           <a:xfrm>
-            <a:off x="2159000" y="2260600"/>
+            <a:off x="1867452" y="2514600"/>
             <a:ext cx="4064000" cy="1397000"/>
           </a:xfrm>
           <a:prstGeom prst="rect">
@@ -31701,56 +31685,56 @@
           <a:p>
             <a:pPr algn="l"/>
             <a:r>
-              <a:rPr lang="en-US" sz="1800" i="1" dirty="0">
+              <a:rPr lang="en-US" sz="2400" i="1" dirty="0">
                 <a:latin typeface="Cambria"/>
                 <a:cs typeface="Cambria"/>
               </a:rPr>
               <a:t>y</a:t>
             </a:r>
             <a:r>
-              <a:rPr lang="en-US" sz="1404" i="1" baseline="-25000" dirty="0">
+              <a:rPr lang="en-US" sz="2400" i="1" baseline="-25000" dirty="0">
                 <a:latin typeface="Cambria"/>
                 <a:cs typeface="Cambria"/>
               </a:rPr>
               <a:t>i,j</a:t>
             </a:r>
             <a:r>
-              <a:rPr lang="en-US" sz="1800" dirty="0">
+              <a:rPr lang="en-US" sz="2400" dirty="0">
                 <a:latin typeface="Cambria"/>
                 <a:cs typeface="Cambria"/>
               </a:rPr>
               <a:t> = </a:t>
             </a:r>
             <a:r>
-              <a:rPr lang="en-US" sz="1800" i="1" dirty="0">
+              <a:rPr lang="en-US" sz="2400" i="1" dirty="0">
                 <a:latin typeface="Cambria"/>
                 <a:cs typeface="Cambria"/>
               </a:rPr>
               <a:t>β</a:t>
             </a:r>
             <a:r>
-              <a:rPr lang="en-US" sz="1404" i="1" baseline="-25000" dirty="0">
+              <a:rPr lang="en-US" sz="2400" i="1" baseline="-25000" dirty="0">
                 <a:latin typeface="Cambria"/>
                 <a:cs typeface="Cambria"/>
               </a:rPr>
               <a:t>i</a:t>
             </a:r>
             <a:r>
-              <a:rPr lang="en-US" sz="1800" dirty="0">
+              <a:rPr lang="en-US" sz="2400" dirty="0">
                 <a:latin typeface="Cambria"/>
                 <a:cs typeface="Cambria"/>
               </a:rPr>
               <a:t> + </a:t>
             </a:r>
             <a:r>
-              <a:rPr lang="en-US" sz="1800" i="1" dirty="0">
+              <a:rPr lang="en-US" sz="2400" i="1" dirty="0">
                 <a:latin typeface="Cambria"/>
                 <a:cs typeface="Cambria"/>
               </a:rPr>
               <a:t>ε</a:t>
             </a:r>
             <a:r>
-              <a:rPr lang="en-US" sz="1404" i="1" baseline="-25000" dirty="0">
+              <a:rPr lang="en-US" sz="2400" i="1" baseline="-25000" dirty="0">
                 <a:latin typeface="Cambria"/>
                 <a:cs typeface="Cambria"/>
               </a:rPr>
@@ -31760,28 +31744,28 @@
           <a:p>
             <a:pPr algn="l"/>
             <a:r>
-              <a:rPr lang="en-US" sz="1800" i="1" dirty="0">
+              <a:rPr lang="en-US" sz="2400" i="1" dirty="0">
                 <a:latin typeface="Cambria"/>
                 <a:cs typeface="Cambria"/>
               </a:rPr>
               <a:t>i</a:t>
             </a:r>
             <a:r>
-              <a:rPr lang="en-US" sz="1800" dirty="0">
+              <a:rPr lang="en-US" sz="2400" dirty="0">
                 <a:latin typeface="Cambria"/>
                 <a:cs typeface="Cambria"/>
               </a:rPr>
               <a:t> = 1,2,..,6;  </a:t>
             </a:r>
             <a:r>
-              <a:rPr lang="en-US" sz="1800" i="1" dirty="0">
+              <a:rPr lang="en-US" sz="2400" i="1" dirty="0">
                 <a:latin typeface="Cambria"/>
                 <a:cs typeface="Cambria"/>
               </a:rPr>
               <a:t>j</a:t>
             </a:r>
             <a:r>
-              <a:rPr lang="en-US" sz="1800" dirty="0">
+              <a:rPr lang="en-US" sz="2400" dirty="0">
                 <a:latin typeface="Cambria"/>
                 <a:cs typeface="Cambria"/>
               </a:rPr>
@@ -31791,14 +31775,14 @@
           <a:p>
             <a:pPr algn="l"/>
             <a:r>
-              <a:rPr lang="en-US" sz="1800" i="1" dirty="0">
+              <a:rPr lang="en-US" sz="2400" i="1" dirty="0">
                 <a:latin typeface="Cambria"/>
                 <a:cs typeface="Cambria"/>
               </a:rPr>
               <a:t>σ̂</a:t>
             </a:r>
             <a:r>
-              <a:rPr lang="en-US" sz="1800" dirty="0">
+              <a:rPr lang="en-US" sz="2400" dirty="0">
                 <a:latin typeface="Cambria"/>
                 <a:cs typeface="Cambria"/>
               </a:rPr>
@@ -31849,13 +31833,13 @@
         </p:nvSpPr>
         <p:spPr>
           <a:xfrm>
-            <a:off x="2077278" y="-127945"/>
-            <a:ext cx="8392285" cy="1143000"/>
+            <a:off x="580938" y="0"/>
+            <a:ext cx="11065565" cy="1143000"/>
           </a:xfrm>
         </p:spPr>
         <p:txBody>
           <a:bodyPr>
-            <a:normAutofit fontScale="90000"/>
+            <a:normAutofit/>
           </a:bodyPr>
           <a:lstStyle/>
           <a:p>
@@ -31874,7 +31858,13 @@
               <a:rPr lang="en-US" altLang="en-US" dirty="0"/>
               <a:t>: A Mixed Effects Model</a:t>
             </a:r>
-            <a:endParaRPr lang="en-US" altLang="en-US" sz="2700" dirty="0"/>
+            <a:br>
+              <a:rPr lang="en-US" altLang="en-US" dirty="0"/>
+            </a:br>
+            <a:r>
+              <a:rPr lang="en-US" altLang="en-US" sz="3100" dirty="0"/>
+              <a:t>or really random effect model in this simplified case</a:t>
+            </a:r>
           </a:p>
         </p:txBody>
       </p:sp>
@@ -32065,7 +32055,7 @@
         </p:nvSpPr>
         <p:spPr bwMode="auto">
           <a:xfrm>
-            <a:off x="5312736" y="6277372"/>
+            <a:off x="5485016" y="6317128"/>
             <a:ext cx="6592887" cy="442913"/>
           </a:xfrm>
           <a:prstGeom prst="borderCallout2">
@@ -32298,7 +32288,7 @@
         </p:nvSpPr>
         <p:spPr bwMode="auto">
           <a:xfrm flipH="1">
-            <a:off x="1847223" y="4025504"/>
+            <a:off x="2152023" y="4012252"/>
             <a:ext cx="3465513" cy="457200"/>
           </a:xfrm>
           <a:prstGeom prst="borderCallout2">
@@ -32999,11 +32989,13 @@
         <p:spPr>
           <a:xfrm>
             <a:off x="1676399" y="1552575"/>
-            <a:ext cx="8934893" cy="4114800"/>
+            <a:ext cx="9733723" cy="4114800"/>
           </a:xfrm>
         </p:spPr>
         <p:txBody>
-          <a:bodyPr/>
+          <a:bodyPr>
+            <a:noAutofit/>
+          </a:bodyPr>
           <a:lstStyle/>
           <a:p>
             <a:pPr eaLnBrk="1" hangingPunct="1">
@@ -33013,7 +33005,7 @@
               <a:defRPr/>
             </a:pPr>
             <a:r>
-              <a:rPr lang="en-US" altLang="en-US" sz="2400" dirty="0"/>
+              <a:rPr lang="en-US" altLang="en-US" dirty="0"/>
               <a:t>The residuals are assumed to be independent, normally distributed random variables with constant variance.</a:t>
             </a:r>
           </a:p>
@@ -33024,7 +33016,7 @@
               </a:lnSpc>
               <a:defRPr/>
             </a:pPr>
-            <a:endParaRPr lang="en-US" altLang="en-US" sz="2400" dirty="0"/>
+            <a:endParaRPr lang="en-US" altLang="en-US" dirty="0"/>
           </a:p>
           <a:p>
             <a:pPr eaLnBrk="1" hangingPunct="1">
@@ -33033,7 +33025,7 @@
               </a:lnSpc>
               <a:defRPr/>
             </a:pPr>
-            <a:endParaRPr lang="en-US" altLang="en-US" sz="2400" dirty="0"/>
+            <a:endParaRPr lang="en-US" altLang="en-US" dirty="0"/>
           </a:p>
           <a:p>
             <a:pPr eaLnBrk="1" hangingPunct="1">
@@ -33043,7 +33035,7 @@
               <a:defRPr/>
             </a:pPr>
             <a:r>
-              <a:rPr lang="en-US" altLang="en-US" sz="2400" dirty="0"/>
+              <a:rPr lang="en-US" altLang="en-US" dirty="0"/>
               <a:t>The random effects are assumed to be normally distributed.</a:t>
             </a:r>
           </a:p>
@@ -33054,7 +33046,7 @@
               </a:lnSpc>
               <a:defRPr/>
             </a:pPr>
-            <a:endParaRPr lang="en-US" altLang="en-US" sz="2400" dirty="0"/>
+            <a:endParaRPr lang="en-US" altLang="en-US" dirty="0"/>
           </a:p>
           <a:p>
             <a:pPr eaLnBrk="1" hangingPunct="1">
@@ -33063,7 +33055,7 @@
               </a:lnSpc>
               <a:defRPr/>
             </a:pPr>
-            <a:endParaRPr lang="en-US" altLang="en-US" sz="2400" dirty="0"/>
+            <a:endParaRPr lang="en-US" altLang="en-US" dirty="0"/>
           </a:p>
           <a:p>
             <a:pPr eaLnBrk="1" hangingPunct="1">
@@ -33073,21 +33065,17 @@
               <a:defRPr/>
             </a:pPr>
             <a:r>
-              <a:rPr lang="en-US" altLang="en-US" sz="2400" dirty="0"/>
-              <a:t>The number of parameters in this model is three (</a:t>
-            </a:r>
-            <a:r>
-              <a:rPr lang="en-US" altLang="en-US" sz="2400" dirty="0"/>
-              <a:t>β, σ and σ</a:t>
-            </a:r>
-            <a:r>
-              <a:rPr lang="en-US" altLang="en-US" sz="2400" baseline="-25000" dirty="0">
+              <a:rPr lang="en-US" altLang="en-US" dirty="0"/>
+              <a:t>The number of parameters in this model is three (β, σ and σ</a:t>
+            </a:r>
+            <a:r>
+              <a:rPr lang="en-US" altLang="en-US" baseline="-25000" dirty="0">
                 <a:sym typeface="Symbol" charset="2"/>
               </a:rPr>
               <a:t>b</a:t>
             </a:r>
             <a:r>
-              <a:rPr lang="en-US" altLang="en-US" sz="2400" dirty="0">
+              <a:rPr lang="en-US" altLang="en-US" dirty="0">
                 <a:sym typeface="Symbol" charset="2"/>
               </a:rPr>
               <a:t>) because stream is just another level of random variation (with fixed effects model, each stream gets a parameter).</a:t>

--- a/Day3_MixedModels_ModelSelection/FW536_Day3_Morning_mixed effects_accessible.pptx
+++ b/Day3_MixedModels_ModelSelection/FW536_Day3_Morning_mixed effects_accessible.pptx
@@ -27765,7 +27765,7 @@
             </a:pPr>
             <a:r>
               <a:rPr lang="en-US" altLang="en-US" sz="1400" b="1" dirty="0"/>
-              <a:t>Print(lm1$modelStruct)</a:t>
+              <a:t>print(lm2$modelStruct)</a:t>
             </a:r>
           </a:p>
         </p:txBody>

--- a/Day3_MixedModels_ModelSelection/FW536_Day3_Morning_mixed effects_accessible.pptx
+++ b/Day3_MixedModels_ModelSelection/FW536_Day3_Morning_mixed effects_accessible.pptx
@@ -258,7 +258,7 @@
           <a:p>
             <a:fld id="{D2867A0E-DA56-0A4B-83A5-F520947CDB62}" type="datetimeFigureOut">
               <a:rPr lang="en-US" smtClean="0"/>
-              <a:t>7/16/26</a:t>
+              <a:t>9/1/26</a:t>
             </a:fld>
             <a:endParaRPr lang="en-US"/>
           </a:p>
@@ -676,7 +676,7 @@
               </a14:hiddenLine>
             </a:ext>
             <a:ext uri="{FAA26D3D-D897-4be2-8F04-BA451C77F1D7}">
-              <ma14:placeholderFlag xmlns:ma14="http://schemas.microsoft.com/office/mac/drawingml/2011/main" xmlns="" val="1"/>
+              <ma14:placeholderFlag xmlns="" xmlns:ma14="http://schemas.microsoft.com/office/mac/drawingml/2011/main" val="1"/>
             </a:ext>
           </a:extLst>
         </p:spPr>
@@ -765,7 +765,7 @@
               </a14:hiddenLine>
             </a:ext>
             <a:ext uri="{FAA26D3D-D897-4be2-8F04-BA451C77F1D7}">
-              <ma14:placeholderFlag xmlns:ma14="http://schemas.microsoft.com/office/mac/drawingml/2011/main" xmlns="" val="1"/>
+              <ma14:placeholderFlag xmlns="" xmlns:ma14="http://schemas.microsoft.com/office/mac/drawingml/2011/main" val="1"/>
             </a:ext>
           </a:extLst>
         </p:spPr>
@@ -854,7 +854,7 @@
               </a14:hiddenLine>
             </a:ext>
             <a:ext uri="{FAA26D3D-D897-4be2-8F04-BA451C77F1D7}">
-              <ma14:placeholderFlag xmlns:ma14="http://schemas.microsoft.com/office/mac/drawingml/2011/main" xmlns="" val="1"/>
+              <ma14:placeholderFlag xmlns="" xmlns:ma14="http://schemas.microsoft.com/office/mac/drawingml/2011/main" val="1"/>
             </a:ext>
           </a:extLst>
         </p:spPr>
@@ -943,7 +943,7 @@
               </a14:hiddenLine>
             </a:ext>
             <a:ext uri="{FAA26D3D-D897-4be2-8F04-BA451C77F1D7}">
-              <ma14:placeholderFlag xmlns:ma14="http://schemas.microsoft.com/office/mac/drawingml/2011/main" xmlns="" val="1"/>
+              <ma14:placeholderFlag xmlns="" xmlns:ma14="http://schemas.microsoft.com/office/mac/drawingml/2011/main" val="1"/>
             </a:ext>
           </a:extLst>
         </p:spPr>
@@ -1032,7 +1032,7 @@
               </a14:hiddenLine>
             </a:ext>
             <a:ext uri="{FAA26D3D-D897-4be2-8F04-BA451C77F1D7}">
-              <ma14:placeholderFlag xmlns:ma14="http://schemas.microsoft.com/office/mac/drawingml/2011/main" xmlns="" val="1"/>
+              <ma14:placeholderFlag xmlns="" xmlns:ma14="http://schemas.microsoft.com/office/mac/drawingml/2011/main" val="1"/>
             </a:ext>
           </a:extLst>
         </p:spPr>
@@ -1160,7 +1160,7 @@
               </a14:hiddenLine>
             </a:ext>
             <a:ext uri="{FAA26D3D-D897-4be2-8F04-BA451C77F1D7}">
-              <ma14:placeholderFlag xmlns:ma14="http://schemas.microsoft.com/office/mac/drawingml/2011/main" xmlns="" val="1"/>
+              <ma14:placeholderFlag xmlns="" xmlns:ma14="http://schemas.microsoft.com/office/mac/drawingml/2011/main" val="1"/>
             </a:ext>
           </a:extLst>
         </p:spPr>
@@ -1249,7 +1249,7 @@
               </a14:hiddenLine>
             </a:ext>
             <a:ext uri="{FAA26D3D-D897-4be2-8F04-BA451C77F1D7}">
-              <ma14:placeholderFlag xmlns:ma14="http://schemas.microsoft.com/office/mac/drawingml/2011/main" xmlns="" val="1"/>
+              <ma14:placeholderFlag xmlns="" xmlns:ma14="http://schemas.microsoft.com/office/mac/drawingml/2011/main" val="1"/>
             </a:ext>
           </a:extLst>
         </p:spPr>
@@ -1338,7 +1338,7 @@
               </a14:hiddenLine>
             </a:ext>
             <a:ext uri="{FAA26D3D-D897-4be2-8F04-BA451C77F1D7}">
-              <ma14:placeholderFlag xmlns:ma14="http://schemas.microsoft.com/office/mac/drawingml/2011/main" xmlns="" val="1"/>
+              <ma14:placeholderFlag xmlns="" xmlns:ma14="http://schemas.microsoft.com/office/mac/drawingml/2011/main" val="1"/>
             </a:ext>
           </a:extLst>
         </p:spPr>
@@ -1427,7 +1427,7 @@
               </a14:hiddenLine>
             </a:ext>
             <a:ext uri="{FAA26D3D-D897-4be2-8F04-BA451C77F1D7}">
-              <ma14:placeholderFlag xmlns:ma14="http://schemas.microsoft.com/office/mac/drawingml/2011/main" xmlns="" val="1"/>
+              <ma14:placeholderFlag xmlns="" xmlns:ma14="http://schemas.microsoft.com/office/mac/drawingml/2011/main" val="1"/>
             </a:ext>
           </a:extLst>
         </p:spPr>
@@ -1516,7 +1516,7 @@
               </a14:hiddenLine>
             </a:ext>
             <a:ext uri="{FAA26D3D-D897-4be2-8F04-BA451C77F1D7}">
-              <ma14:placeholderFlag xmlns:ma14="http://schemas.microsoft.com/office/mac/drawingml/2011/main" xmlns="" val="1"/>
+              <ma14:placeholderFlag xmlns="" xmlns:ma14="http://schemas.microsoft.com/office/mac/drawingml/2011/main" val="1"/>
             </a:ext>
           </a:extLst>
         </p:spPr>
@@ -1605,7 +1605,7 @@
               </a14:hiddenLine>
             </a:ext>
             <a:ext uri="{FAA26D3D-D897-4be2-8F04-BA451C77F1D7}">
-              <ma14:placeholderFlag xmlns:ma14="http://schemas.microsoft.com/office/mac/drawingml/2011/main" xmlns="" val="1"/>
+              <ma14:placeholderFlag xmlns="" xmlns:ma14="http://schemas.microsoft.com/office/mac/drawingml/2011/main" val="1"/>
             </a:ext>
           </a:extLst>
         </p:spPr>
@@ -1694,7 +1694,7 @@
               </a14:hiddenLine>
             </a:ext>
             <a:ext uri="{FAA26D3D-D897-4be2-8F04-BA451C77F1D7}">
-              <ma14:placeholderFlag xmlns:ma14="http://schemas.microsoft.com/office/mac/drawingml/2011/main" xmlns="" val="1"/>
+              <ma14:placeholderFlag xmlns="" xmlns:ma14="http://schemas.microsoft.com/office/mac/drawingml/2011/main" val="1"/>
             </a:ext>
           </a:extLst>
         </p:spPr>
@@ -1783,7 +1783,7 @@
               </a14:hiddenLine>
             </a:ext>
             <a:ext uri="{FAA26D3D-D897-4be2-8F04-BA451C77F1D7}">
-              <ma14:placeholderFlag xmlns:ma14="http://schemas.microsoft.com/office/mac/drawingml/2011/main" xmlns="" val="1"/>
+              <ma14:placeholderFlag xmlns="" xmlns:ma14="http://schemas.microsoft.com/office/mac/drawingml/2011/main" val="1"/>
             </a:ext>
           </a:extLst>
         </p:spPr>
@@ -1872,7 +1872,7 @@
               </a14:hiddenLine>
             </a:ext>
             <a:ext uri="{FAA26D3D-D897-4be2-8F04-BA451C77F1D7}">
-              <ma14:placeholderFlag xmlns:ma14="http://schemas.microsoft.com/office/mac/drawingml/2011/main" xmlns="" val="1"/>
+              <ma14:placeholderFlag xmlns="" xmlns:ma14="http://schemas.microsoft.com/office/mac/drawingml/2011/main" val="1"/>
             </a:ext>
           </a:extLst>
         </p:spPr>
@@ -2140,7 +2140,7 @@
               </a14:hiddenLine>
             </a:ext>
             <a:ext uri="{FAA26D3D-D897-4be2-8F04-BA451C77F1D7}">
-              <ma14:placeholderFlag xmlns:ma14="http://schemas.microsoft.com/office/mac/drawingml/2011/main" xmlns="" val="1"/>
+              <ma14:placeholderFlag xmlns="" xmlns:ma14="http://schemas.microsoft.com/office/mac/drawingml/2011/main" val="1"/>
             </a:ext>
           </a:extLst>
         </p:spPr>
@@ -2229,7 +2229,7 @@
               </a14:hiddenLine>
             </a:ext>
             <a:ext uri="{FAA26D3D-D897-4be2-8F04-BA451C77F1D7}">
-              <ma14:placeholderFlag xmlns:ma14="http://schemas.microsoft.com/office/mac/drawingml/2011/main" xmlns="" val="1"/>
+              <ma14:placeholderFlag xmlns="" xmlns:ma14="http://schemas.microsoft.com/office/mac/drawingml/2011/main" val="1"/>
             </a:ext>
           </a:extLst>
         </p:spPr>
@@ -2318,7 +2318,7 @@
               </a14:hiddenLine>
             </a:ext>
             <a:ext uri="{FAA26D3D-D897-4be2-8F04-BA451C77F1D7}">
-              <ma14:placeholderFlag xmlns:ma14="http://schemas.microsoft.com/office/mac/drawingml/2011/main" xmlns="" val="1"/>
+              <ma14:placeholderFlag xmlns="" xmlns:ma14="http://schemas.microsoft.com/office/mac/drawingml/2011/main" val="1"/>
             </a:ext>
           </a:extLst>
         </p:spPr>
@@ -2407,7 +2407,7 @@
               </a14:hiddenLine>
             </a:ext>
             <a:ext uri="{FAA26D3D-D897-4be2-8F04-BA451C77F1D7}">
-              <ma14:placeholderFlag xmlns:ma14="http://schemas.microsoft.com/office/mac/drawingml/2011/main" xmlns="" val="1"/>
+              <ma14:placeholderFlag xmlns="" xmlns:ma14="http://schemas.microsoft.com/office/mac/drawingml/2011/main" val="1"/>
             </a:ext>
           </a:extLst>
         </p:spPr>
@@ -2496,7 +2496,7 @@
               </a14:hiddenLine>
             </a:ext>
             <a:ext uri="{FAA26D3D-D897-4be2-8F04-BA451C77F1D7}">
-              <ma14:placeholderFlag xmlns:ma14="http://schemas.microsoft.com/office/mac/drawingml/2011/main" xmlns="" val="1"/>
+              <ma14:placeholderFlag xmlns="" xmlns:ma14="http://schemas.microsoft.com/office/mac/drawingml/2011/main" val="1"/>
             </a:ext>
           </a:extLst>
         </p:spPr>
@@ -2585,7 +2585,7 @@
               </a14:hiddenLine>
             </a:ext>
             <a:ext uri="{FAA26D3D-D897-4be2-8F04-BA451C77F1D7}">
-              <ma14:placeholderFlag xmlns:ma14="http://schemas.microsoft.com/office/mac/drawingml/2011/main" xmlns="" val="1"/>
+              <ma14:placeholderFlag xmlns="" xmlns:ma14="http://schemas.microsoft.com/office/mac/drawingml/2011/main" val="1"/>
             </a:ext>
           </a:extLst>
         </p:spPr>
@@ -2674,7 +2674,7 @@
               </a14:hiddenLine>
             </a:ext>
             <a:ext uri="{FAA26D3D-D897-4be2-8F04-BA451C77F1D7}">
-              <ma14:placeholderFlag xmlns:ma14="http://schemas.microsoft.com/office/mac/drawingml/2011/main" xmlns="" val="1"/>
+              <ma14:placeholderFlag xmlns="" xmlns:ma14="http://schemas.microsoft.com/office/mac/drawingml/2011/main" val="1"/>
             </a:ext>
           </a:extLst>
         </p:spPr>
@@ -2763,7 +2763,7 @@
               </a14:hiddenLine>
             </a:ext>
             <a:ext uri="{FAA26D3D-D897-4be2-8F04-BA451C77F1D7}">
-              <ma14:placeholderFlag xmlns:ma14="http://schemas.microsoft.com/office/mac/drawingml/2011/main" xmlns="" val="1"/>
+              <ma14:placeholderFlag xmlns="" xmlns:ma14="http://schemas.microsoft.com/office/mac/drawingml/2011/main" val="1"/>
             </a:ext>
           </a:extLst>
         </p:spPr>
@@ -2852,7 +2852,7 @@
               </a14:hiddenLine>
             </a:ext>
             <a:ext uri="{FAA26D3D-D897-4be2-8F04-BA451C77F1D7}">
-              <ma14:placeholderFlag xmlns:ma14="http://schemas.microsoft.com/office/mac/drawingml/2011/main" xmlns="" val="1"/>
+              <ma14:placeholderFlag xmlns="" xmlns:ma14="http://schemas.microsoft.com/office/mac/drawingml/2011/main" val="1"/>
             </a:ext>
           </a:extLst>
         </p:spPr>
@@ -2941,7 +2941,7 @@
               </a14:hiddenLine>
             </a:ext>
             <a:ext uri="{FAA26D3D-D897-4be2-8F04-BA451C77F1D7}">
-              <ma14:placeholderFlag xmlns:ma14="http://schemas.microsoft.com/office/mac/drawingml/2011/main" xmlns="" val="1"/>
+              <ma14:placeholderFlag xmlns="" xmlns:ma14="http://schemas.microsoft.com/office/mac/drawingml/2011/main" val="1"/>
             </a:ext>
           </a:extLst>
         </p:spPr>
@@ -3030,7 +3030,7 @@
               </a14:hiddenLine>
             </a:ext>
             <a:ext uri="{FAA26D3D-D897-4be2-8F04-BA451C77F1D7}">
-              <ma14:placeholderFlag xmlns:ma14="http://schemas.microsoft.com/office/mac/drawingml/2011/main" xmlns="" val="1"/>
+              <ma14:placeholderFlag xmlns="" xmlns:ma14="http://schemas.microsoft.com/office/mac/drawingml/2011/main" val="1"/>
             </a:ext>
           </a:extLst>
         </p:spPr>
@@ -3119,7 +3119,7 @@
               </a14:hiddenLine>
             </a:ext>
             <a:ext uri="{FAA26D3D-D897-4be2-8F04-BA451C77F1D7}">
-              <ma14:placeholderFlag xmlns:ma14="http://schemas.microsoft.com/office/mac/drawingml/2011/main" xmlns="" val="1"/>
+              <ma14:placeholderFlag xmlns="" xmlns:ma14="http://schemas.microsoft.com/office/mac/drawingml/2011/main" val="1"/>
             </a:ext>
           </a:extLst>
         </p:spPr>
@@ -3208,7 +3208,7 @@
               </a14:hiddenLine>
             </a:ext>
             <a:ext uri="{FAA26D3D-D897-4be2-8F04-BA451C77F1D7}">
-              <ma14:placeholderFlag xmlns:ma14="http://schemas.microsoft.com/office/mac/drawingml/2011/main" xmlns="" val="1"/>
+              <ma14:placeholderFlag xmlns="" xmlns:ma14="http://schemas.microsoft.com/office/mac/drawingml/2011/main" val="1"/>
             </a:ext>
           </a:extLst>
         </p:spPr>
@@ -3297,7 +3297,7 @@
               </a14:hiddenLine>
             </a:ext>
             <a:ext uri="{FAA26D3D-D897-4be2-8F04-BA451C77F1D7}">
-              <ma14:placeholderFlag xmlns:ma14="http://schemas.microsoft.com/office/mac/drawingml/2011/main" xmlns="" val="1"/>
+              <ma14:placeholderFlag xmlns="" xmlns:ma14="http://schemas.microsoft.com/office/mac/drawingml/2011/main" val="1"/>
             </a:ext>
           </a:extLst>
         </p:spPr>
@@ -3386,7 +3386,7 @@
               </a14:hiddenLine>
             </a:ext>
             <a:ext uri="{FAA26D3D-D897-4be2-8F04-BA451C77F1D7}">
-              <ma14:placeholderFlag xmlns:ma14="http://schemas.microsoft.com/office/mac/drawingml/2011/main" xmlns="" val="1"/>
+              <ma14:placeholderFlag xmlns="" xmlns:ma14="http://schemas.microsoft.com/office/mac/drawingml/2011/main" val="1"/>
             </a:ext>
           </a:extLst>
         </p:spPr>
@@ -3475,7 +3475,7 @@
               </a14:hiddenLine>
             </a:ext>
             <a:ext uri="{FAA26D3D-D897-4be2-8F04-BA451C77F1D7}">
-              <ma14:placeholderFlag xmlns:ma14="http://schemas.microsoft.com/office/mac/drawingml/2011/main" xmlns="" val="1"/>
+              <ma14:placeholderFlag xmlns="" xmlns:ma14="http://schemas.microsoft.com/office/mac/drawingml/2011/main" val="1"/>
             </a:ext>
           </a:extLst>
         </p:spPr>
@@ -3564,7 +3564,7 @@
               </a14:hiddenLine>
             </a:ext>
             <a:ext uri="{FAA26D3D-D897-4be2-8F04-BA451C77F1D7}">
-              <ma14:placeholderFlag xmlns:ma14="http://schemas.microsoft.com/office/mac/drawingml/2011/main" xmlns="" val="1"/>
+              <ma14:placeholderFlag xmlns="" xmlns:ma14="http://schemas.microsoft.com/office/mac/drawingml/2011/main" val="1"/>
             </a:ext>
           </a:extLst>
         </p:spPr>
@@ -3653,7 +3653,7 @@
               </a14:hiddenLine>
             </a:ext>
             <a:ext uri="{FAA26D3D-D897-4be2-8F04-BA451C77F1D7}">
-              <ma14:placeholderFlag xmlns:ma14="http://schemas.microsoft.com/office/mac/drawingml/2011/main" xmlns="" val="1"/>
+              <ma14:placeholderFlag xmlns="" xmlns:ma14="http://schemas.microsoft.com/office/mac/drawingml/2011/main" val="1"/>
             </a:ext>
           </a:extLst>
         </p:spPr>
@@ -3742,7 +3742,7 @@
               </a14:hiddenLine>
             </a:ext>
             <a:ext uri="{FAA26D3D-D897-4be2-8F04-BA451C77F1D7}">
-              <ma14:placeholderFlag xmlns:ma14="http://schemas.microsoft.com/office/mac/drawingml/2011/main" xmlns="" val="1"/>
+              <ma14:placeholderFlag xmlns="" xmlns:ma14="http://schemas.microsoft.com/office/mac/drawingml/2011/main" val="1"/>
             </a:ext>
           </a:extLst>
         </p:spPr>
@@ -3831,7 +3831,7 @@
               </a14:hiddenLine>
             </a:ext>
             <a:ext uri="{FAA26D3D-D897-4be2-8F04-BA451C77F1D7}">
-              <ma14:placeholderFlag xmlns:ma14="http://schemas.microsoft.com/office/mac/drawingml/2011/main" xmlns="" val="1"/>
+              <ma14:placeholderFlag xmlns="" xmlns:ma14="http://schemas.microsoft.com/office/mac/drawingml/2011/main" val="1"/>
             </a:ext>
           </a:extLst>
         </p:spPr>
@@ -3920,7 +3920,7 @@
               </a14:hiddenLine>
             </a:ext>
             <a:ext uri="{FAA26D3D-D897-4be2-8F04-BA451C77F1D7}">
-              <ma14:placeholderFlag xmlns:ma14="http://schemas.microsoft.com/office/mac/drawingml/2011/main" xmlns="" val="1"/>
+              <ma14:placeholderFlag xmlns="" xmlns:ma14="http://schemas.microsoft.com/office/mac/drawingml/2011/main" val="1"/>
             </a:ext>
           </a:extLst>
         </p:spPr>
@@ -4009,7 +4009,7 @@
               </a14:hiddenLine>
             </a:ext>
             <a:ext uri="{FAA26D3D-D897-4be2-8F04-BA451C77F1D7}">
-              <ma14:placeholderFlag xmlns:ma14="http://schemas.microsoft.com/office/mac/drawingml/2011/main" xmlns="" val="1"/>
+              <ma14:placeholderFlag xmlns="" xmlns:ma14="http://schemas.microsoft.com/office/mac/drawingml/2011/main" val="1"/>
             </a:ext>
           </a:extLst>
         </p:spPr>
@@ -4165,7 +4165,7 @@
           <a:p>
             <a:fld id="{6A7D9F0D-27CC-AF49-BE27-075EF3FD3399}" type="datetimeFigureOut">
               <a:rPr lang="en-US" smtClean="0"/>
-              <a:t>7/16/26</a:t>
+              <a:t>9/1/26</a:t>
             </a:fld>
             <a:endParaRPr lang="en-US"/>
           </a:p>
@@ -4333,7 +4333,7 @@
           <a:p>
             <a:fld id="{6A7D9F0D-27CC-AF49-BE27-075EF3FD3399}" type="datetimeFigureOut">
               <a:rPr lang="en-US" smtClean="0"/>
-              <a:t>7/16/26</a:t>
+              <a:t>9/1/26</a:t>
             </a:fld>
             <a:endParaRPr lang="en-US"/>
           </a:p>
@@ -4511,7 +4511,7 @@
           <a:p>
             <a:fld id="{6A7D9F0D-27CC-AF49-BE27-075EF3FD3399}" type="datetimeFigureOut">
               <a:rPr lang="en-US" smtClean="0"/>
-              <a:t>7/16/26</a:t>
+              <a:t>9/1/26</a:t>
             </a:fld>
             <a:endParaRPr lang="en-US"/>
           </a:p>
@@ -5582,7 +5582,7 @@
           <a:p>
             <a:fld id="{6A7D9F0D-27CC-AF49-BE27-075EF3FD3399}" type="datetimeFigureOut">
               <a:rPr lang="en-US" smtClean="0"/>
-              <a:t>7/16/26</a:t>
+              <a:t>9/1/26</a:t>
             </a:fld>
             <a:endParaRPr lang="en-US"/>
           </a:p>
@@ -5827,7 +5827,7 @@
           <a:p>
             <a:fld id="{6A7D9F0D-27CC-AF49-BE27-075EF3FD3399}" type="datetimeFigureOut">
               <a:rPr lang="en-US" smtClean="0"/>
-              <a:t>7/16/26</a:t>
+              <a:t>9/1/26</a:t>
             </a:fld>
             <a:endParaRPr lang="en-US"/>
           </a:p>
@@ -6056,7 +6056,7 @@
           <a:p>
             <a:fld id="{6A7D9F0D-27CC-AF49-BE27-075EF3FD3399}" type="datetimeFigureOut">
               <a:rPr lang="en-US" smtClean="0"/>
-              <a:t>7/16/26</a:t>
+              <a:t>9/1/26</a:t>
             </a:fld>
             <a:endParaRPr lang="en-US"/>
           </a:p>
@@ -6420,7 +6420,7 @@
           <a:p>
             <a:fld id="{6A7D9F0D-27CC-AF49-BE27-075EF3FD3399}" type="datetimeFigureOut">
               <a:rPr lang="en-US" smtClean="0"/>
-              <a:t>7/16/26</a:t>
+              <a:t>9/1/26</a:t>
             </a:fld>
             <a:endParaRPr lang="en-US"/>
           </a:p>
@@ -6537,7 +6537,7 @@
           <a:p>
             <a:fld id="{6A7D9F0D-27CC-AF49-BE27-075EF3FD3399}" type="datetimeFigureOut">
               <a:rPr lang="en-US" smtClean="0"/>
-              <a:t>7/16/26</a:t>
+              <a:t>9/1/26</a:t>
             </a:fld>
             <a:endParaRPr lang="en-US"/>
           </a:p>
@@ -6632,7 +6632,7 @@
           <a:p>
             <a:fld id="{6A7D9F0D-27CC-AF49-BE27-075EF3FD3399}" type="datetimeFigureOut">
               <a:rPr lang="en-US" smtClean="0"/>
-              <a:t>7/16/26</a:t>
+              <a:t>9/1/26</a:t>
             </a:fld>
             <a:endParaRPr lang="en-US"/>
           </a:p>
@@ -6907,7 +6907,7 @@
           <a:p>
             <a:fld id="{6A7D9F0D-27CC-AF49-BE27-075EF3FD3399}" type="datetimeFigureOut">
               <a:rPr lang="en-US" smtClean="0"/>
-              <a:t>7/16/26</a:t>
+              <a:t>9/1/26</a:t>
             </a:fld>
             <a:endParaRPr lang="en-US"/>
           </a:p>
@@ -7159,7 +7159,7 @@
           <a:p>
             <a:fld id="{6A7D9F0D-27CC-AF49-BE27-075EF3FD3399}" type="datetimeFigureOut">
               <a:rPr lang="en-US" smtClean="0"/>
-              <a:t>7/16/26</a:t>
+              <a:t>9/1/26</a:t>
             </a:fld>
             <a:endParaRPr lang="en-US"/>
           </a:p>
@@ -7370,7 +7370,7 @@
           <a:p>
             <a:fld id="{6A7D9F0D-27CC-AF49-BE27-075EF3FD3399}" type="datetimeFigureOut">
               <a:rPr lang="en-US" smtClean="0"/>
-              <a:t>7/16/26</a:t>
+              <a:t>9/1/26</a:t>
             </a:fld>
             <a:endParaRPr lang="en-US"/>
           </a:p>
@@ -15943,8 +15943,13 @@
             </a:pPr>
             <a:r>
               <a:rPr lang="en-US" dirty="0"/>
-              <a:t>Can also do both species and length</a:t>
-            </a:r>
+              <a:t>Can also do both species </a:t>
+            </a:r>
+            <a:r>
+              <a:rPr lang="en-US"/>
+              <a:t>and lake</a:t>
+            </a:r>
+            <a:endParaRPr lang="en-US" dirty="0"/>
           </a:p>
           <a:p>
             <a:pPr lvl="1">
